--- a/files/owner_assist.pptx
+++ b/files/owner_assist.pptx
@@ -5492,35 +5492,6 @@
       </mc:AlternateContent>
       <p:sp>
         <p:nvSpPr>
-          <p:cNvPr id="3" name="Footer Placeholder 2">
-            <a:extLst>
-              <a:ext uri="{FF2B5EF4-FFF2-40B4-BE49-F238E27FC236}">
-                <a16:creationId xmlns:a16="http://schemas.microsoft.com/office/drawing/2014/main" id="{60014AA1-DAC1-BA3D-368D-2CED34E46E15}"/>
-              </a:ext>
-            </a:extLst>
-          </p:cNvPr>
-          <p:cNvSpPr>
-            <a:spLocks noGrp="1"/>
-          </p:cNvSpPr>
-          <p:nvPr>
-            <p:ph type="ftr" sz="quarter" idx="11"/>
-          </p:nvPr>
-        </p:nvSpPr>
-        <p:spPr/>
-        <p:txBody>
-          <a:bodyPr/>
-          <a:lstStyle/>
-          <a:p>
-            <a:r>
-              <a:rPr kumimoji="1" lang="en-US" altLang="zh-CN"/>
-              <a:t>Institute of Interdisciplinary Information Sciences (IIIS), Tsinghua University Wharton Statistics and Data Science Department, University of Pennsylvania</a:t>
-            </a:r>
-            <a:endParaRPr kumimoji="1" lang="zh-CN" altLang="en-US" dirty="0"/>
-          </a:p>
-        </p:txBody>
-      </p:sp>
-      <p:sp>
-        <p:nvSpPr>
           <p:cNvPr id="6" name="Slide Number Placeholder 5">
             <a:extLst>
               <a:ext uri="{FF2B5EF4-FFF2-40B4-BE49-F238E27FC236}">
@@ -5643,35 +5614,6 @@
               <a:t>Q&amp;A</a:t>
             </a:r>
             <a:endParaRPr lang="zh-CN" altLang="en-US" dirty="0"/>
-          </a:p>
-        </p:txBody>
-      </p:sp>
-      <p:sp>
-        <p:nvSpPr>
-          <p:cNvPr id="4" name="Footer Placeholder 3">
-            <a:extLst>
-              <a:ext uri="{FF2B5EF4-FFF2-40B4-BE49-F238E27FC236}">
-                <a16:creationId xmlns:a16="http://schemas.microsoft.com/office/drawing/2014/main" id="{5F64EAA4-2F9F-0D17-F2AC-83A9FE8A42FF}"/>
-              </a:ext>
-            </a:extLst>
-          </p:cNvPr>
-          <p:cNvSpPr>
-            <a:spLocks noGrp="1"/>
-          </p:cNvSpPr>
-          <p:nvPr>
-            <p:ph type="ftr" sz="quarter" idx="11"/>
-          </p:nvPr>
-        </p:nvSpPr>
-        <p:spPr/>
-        <p:txBody>
-          <a:bodyPr/>
-          <a:lstStyle/>
-          <a:p>
-            <a:r>
-              <a:rPr kumimoji="1" lang="en-US" altLang="zh-CN"/>
-              <a:t>Institute of Interdisciplinary Information Sciences (IIIS), Tsinghua University Wharton Statistics and Data Science Department, University of Pennsylvania</a:t>
-            </a:r>
-            <a:endParaRPr kumimoji="1" lang="zh-CN" altLang="en-US" dirty="0"/>
           </a:p>
         </p:txBody>
       </p:sp>
@@ -5861,35 +5803,6 @@
               <a:t>Contents</a:t>
             </a:r>
             <a:endParaRPr lang="zh-CN" altLang="en-US" dirty="0"/>
-          </a:p>
-        </p:txBody>
-      </p:sp>
-      <p:sp>
-        <p:nvSpPr>
-          <p:cNvPr id="4" name="Footer Placeholder 3">
-            <a:extLst>
-              <a:ext uri="{FF2B5EF4-FFF2-40B4-BE49-F238E27FC236}">
-                <a16:creationId xmlns:a16="http://schemas.microsoft.com/office/drawing/2014/main" id="{5060C06A-CB13-5E1D-70B4-B6B6D9FE8FAF}"/>
-              </a:ext>
-            </a:extLst>
-          </p:cNvPr>
-          <p:cNvSpPr>
-            <a:spLocks noGrp="1"/>
-          </p:cNvSpPr>
-          <p:nvPr>
-            <p:ph type="ftr" sz="quarter" idx="11"/>
-          </p:nvPr>
-        </p:nvSpPr>
-        <p:spPr/>
-        <p:txBody>
-          <a:bodyPr/>
-          <a:lstStyle/>
-          <a:p>
-            <a:r>
-              <a:rPr kumimoji="1" lang="en-US" altLang="zh-CN"/>
-              <a:t>Institute of Interdisciplinary Information Sciences (IIIS), Tsinghua University Wharton Statistics and Data Science Department, University of Pennsylvania</a:t>
-            </a:r>
-            <a:endParaRPr kumimoji="1" lang="zh-CN" altLang="en-US" dirty="0"/>
           </a:p>
         </p:txBody>
       </p:sp>
@@ -6090,8 +6003,8 @@
         </p:nvSpPr>
         <p:spPr>
           <a:xfrm>
-            <a:off x="2037522" y="5707058"/>
-            <a:ext cx="8116956" cy="461665"/>
+            <a:off x="1900030" y="5686843"/>
+            <a:ext cx="8391939" cy="461665"/>
           </a:xfrm>
           <a:prstGeom prst="rect">
             <a:avLst/>
@@ -6107,7 +6020,7 @@
             <a:pPr algn="ctr"/>
             <a:r>
               <a:rPr lang="en-US" altLang="zh-CN" sz="2400" dirty="0"/>
-              <a:t>Soliciting information from owners to improve value estimation!</a:t>
+              <a:t>Soliciting information from owners to improve value evaluation!</a:t>
             </a:r>
             <a:endParaRPr lang="zh-CN" altLang="en-US" sz="2400" dirty="0"/>
           </a:p>
@@ -6240,40 +6153,6 @@
                 <a:schemeClr val="accent1"/>
               </a:solidFill>
             </a:endParaRPr>
-          </a:p>
-        </p:txBody>
-      </p:sp>
-      <p:sp>
-        <p:nvSpPr>
-          <p:cNvPr id="10" name="Footer Placeholder 9">
-            <a:extLst>
-              <a:ext uri="{FF2B5EF4-FFF2-40B4-BE49-F238E27FC236}">
-                <a16:creationId xmlns:a16="http://schemas.microsoft.com/office/drawing/2014/main" id="{779CC267-8301-307F-DA51-730A56ABF05C}"/>
-              </a:ext>
-            </a:extLst>
-          </p:cNvPr>
-          <p:cNvSpPr>
-            <a:spLocks noGrp="1"/>
-          </p:cNvSpPr>
-          <p:nvPr>
-            <p:ph type="ftr" sz="quarter" idx="11"/>
-          </p:nvPr>
-        </p:nvSpPr>
-        <p:spPr>
-          <a:xfrm>
-            <a:off x="833377" y="6251903"/>
-            <a:ext cx="6585500" cy="365125"/>
-          </a:xfrm>
-        </p:spPr>
-        <p:txBody>
-          <a:bodyPr/>
-          <a:lstStyle/>
-          <a:p>
-            <a:r>
-              <a:rPr kumimoji="1" lang="en-US" altLang="zh-CN"/>
-              <a:t>Institute of Interdisciplinary Information Sciences (IIIS), Tsinghua University Wharton Statistics and Data Science Department, University of Pennsylvania</a:t>
-            </a:r>
-            <a:endParaRPr kumimoji="1" lang="zh-CN" altLang="en-US" i="1" dirty="0"/>
           </a:p>
         </p:txBody>
       </p:sp>
@@ -6593,35 +6472,6 @@
               <a:t>Contents</a:t>
             </a:r>
             <a:endParaRPr lang="zh-CN" altLang="en-US" dirty="0"/>
-          </a:p>
-        </p:txBody>
-      </p:sp>
-      <p:sp>
-        <p:nvSpPr>
-          <p:cNvPr id="4" name="Footer Placeholder 3">
-            <a:extLst>
-              <a:ext uri="{FF2B5EF4-FFF2-40B4-BE49-F238E27FC236}">
-                <a16:creationId xmlns:a16="http://schemas.microsoft.com/office/drawing/2014/main" id="{4BE89A03-0E50-5A0C-EFCC-A3EF63358106}"/>
-              </a:ext>
-            </a:extLst>
-          </p:cNvPr>
-          <p:cNvSpPr>
-            <a:spLocks noGrp="1"/>
-          </p:cNvSpPr>
-          <p:nvPr>
-            <p:ph type="ftr" sz="quarter" idx="11"/>
-          </p:nvPr>
-        </p:nvSpPr>
-        <p:spPr/>
-        <p:txBody>
-          <a:bodyPr/>
-          <a:lstStyle/>
-          <a:p>
-            <a:r>
-              <a:rPr kumimoji="1" lang="en-US" altLang="zh-CN"/>
-              <a:t>Institute of Interdisciplinary Information Sciences (IIIS), Tsinghua University Wharton Statistics and Data Science Department, University of Pennsylvania</a:t>
-            </a:r>
-            <a:endParaRPr kumimoji="1" lang="zh-CN" altLang="en-US" dirty="0"/>
           </a:p>
         </p:txBody>
       </p:sp>
@@ -11273,35 +11123,6 @@
       </mc:AlternateContent>
       <p:sp>
         <p:nvSpPr>
-          <p:cNvPr id="2" name="Footer Placeholder 1">
-            <a:extLst>
-              <a:ext uri="{FF2B5EF4-FFF2-40B4-BE49-F238E27FC236}">
-                <a16:creationId xmlns:a16="http://schemas.microsoft.com/office/drawing/2014/main" id="{F065C133-9A18-0E77-0F5E-0928FCA173EF}"/>
-              </a:ext>
-            </a:extLst>
-          </p:cNvPr>
-          <p:cNvSpPr>
-            <a:spLocks noGrp="1"/>
-          </p:cNvSpPr>
-          <p:nvPr>
-            <p:ph type="ftr" sz="quarter" idx="11"/>
-          </p:nvPr>
-        </p:nvSpPr>
-        <p:spPr/>
-        <p:txBody>
-          <a:bodyPr/>
-          <a:lstStyle/>
-          <a:p>
-            <a:r>
-              <a:rPr kumimoji="1" lang="en-US" altLang="zh-CN"/>
-              <a:t>Institute of Interdisciplinary Information Sciences (IIIS), Tsinghua University Wharton Statistics and Data Science Department, University of Pennsylvania</a:t>
-            </a:r>
-            <a:endParaRPr kumimoji="1" lang="zh-CN" altLang="en-US" dirty="0"/>
-          </a:p>
-        </p:txBody>
-      </p:sp>
-      <p:sp>
-        <p:nvSpPr>
           <p:cNvPr id="4" name="Slide Number Placeholder 3">
             <a:extLst>
               <a:ext uri="{FF2B5EF4-FFF2-40B4-BE49-F238E27FC236}">
@@ -12198,35 +12019,6 @@
               <a:t>Contents</a:t>
             </a:r>
             <a:endParaRPr lang="zh-CN" altLang="en-US" dirty="0"/>
-          </a:p>
-        </p:txBody>
-      </p:sp>
-      <p:sp>
-        <p:nvSpPr>
-          <p:cNvPr id="4" name="Footer Placeholder 3">
-            <a:extLst>
-              <a:ext uri="{FF2B5EF4-FFF2-40B4-BE49-F238E27FC236}">
-                <a16:creationId xmlns:a16="http://schemas.microsoft.com/office/drawing/2014/main" id="{94DE160D-D535-888E-9815-CF252E9C74E3}"/>
-              </a:ext>
-            </a:extLst>
-          </p:cNvPr>
-          <p:cNvSpPr>
-            <a:spLocks noGrp="1"/>
-          </p:cNvSpPr>
-          <p:nvPr>
-            <p:ph type="ftr" sz="quarter" idx="11"/>
-          </p:nvPr>
-        </p:nvSpPr>
-        <p:spPr/>
-        <p:txBody>
-          <a:bodyPr/>
-          <a:lstStyle/>
-          <a:p>
-            <a:r>
-              <a:rPr kumimoji="1" lang="en-US" altLang="zh-CN"/>
-              <a:t>Institute of Interdisciplinary Information Sciences (IIIS), Tsinghua University Wharton Statistics and Data Science Department, University of Pennsylvania</a:t>
-            </a:r>
-            <a:endParaRPr kumimoji="1" lang="zh-CN" altLang="en-US" dirty="0"/>
           </a:p>
         </p:txBody>
       </p:sp>
@@ -14694,35 +14486,6 @@
           </p:sp>
         </mc:Fallback>
       </mc:AlternateContent>
-      <p:sp>
-        <p:nvSpPr>
-          <p:cNvPr id="5" name="Footer Placeholder 4">
-            <a:extLst>
-              <a:ext uri="{FF2B5EF4-FFF2-40B4-BE49-F238E27FC236}">
-                <a16:creationId xmlns:a16="http://schemas.microsoft.com/office/drawing/2014/main" id="{472F843F-8781-5124-C5B4-AB24F95A4F85}"/>
-              </a:ext>
-            </a:extLst>
-          </p:cNvPr>
-          <p:cNvSpPr>
-            <a:spLocks noGrp="1"/>
-          </p:cNvSpPr>
-          <p:nvPr>
-            <p:ph type="ftr" sz="quarter" idx="11"/>
-          </p:nvPr>
-        </p:nvSpPr>
-        <p:spPr/>
-        <p:txBody>
-          <a:bodyPr/>
-          <a:lstStyle/>
-          <a:p>
-            <a:r>
-              <a:rPr kumimoji="1" lang="en-US" altLang="zh-CN"/>
-              <a:t>Institute of Interdisciplinary Information Sciences (IIIS), Tsinghua University Wharton Statistics and Data Science Department, University of Pennsylvania</a:t>
-            </a:r>
-            <a:endParaRPr kumimoji="1" lang="zh-CN" altLang="en-US" dirty="0"/>
-          </a:p>
-        </p:txBody>
-      </p:sp>
       <p:sp>
         <p:nvSpPr>
           <p:cNvPr id="6" name="Slide Number Placeholder 5">
@@ -18022,35 +17785,6 @@
       </mc:AlternateContent>
       <p:sp>
         <p:nvSpPr>
-          <p:cNvPr id="4" name="Footer Placeholder 3">
-            <a:extLst>
-              <a:ext uri="{FF2B5EF4-FFF2-40B4-BE49-F238E27FC236}">
-                <a16:creationId xmlns:a16="http://schemas.microsoft.com/office/drawing/2014/main" id="{9195A6E2-4EC2-2FE4-9DA9-66D5BC68BE4D}"/>
-              </a:ext>
-            </a:extLst>
-          </p:cNvPr>
-          <p:cNvSpPr>
-            <a:spLocks noGrp="1"/>
-          </p:cNvSpPr>
-          <p:nvPr>
-            <p:ph type="ftr" sz="quarter" idx="11"/>
-          </p:nvPr>
-        </p:nvSpPr>
-        <p:spPr/>
-        <p:txBody>
-          <a:bodyPr/>
-          <a:lstStyle/>
-          <a:p>
-            <a:r>
-              <a:rPr kumimoji="1" lang="en-US" altLang="zh-CN"/>
-              <a:t>Institute of Interdisciplinary Information Sciences (IIIS), Tsinghua University Wharton Statistics and Data Science Department, University of Pennsylvania</a:t>
-            </a:r>
-            <a:endParaRPr kumimoji="1" lang="zh-CN" altLang="en-US" dirty="0"/>
-          </a:p>
-        </p:txBody>
-      </p:sp>
-      <p:sp>
-        <p:nvSpPr>
           <p:cNvPr id="5" name="Slide Number Placeholder 4">
             <a:extLst>
               <a:ext uri="{FF2B5EF4-FFF2-40B4-BE49-F238E27FC236}">
@@ -18239,35 +17973,6 @@
               <a:t>Contents</a:t>
             </a:r>
             <a:endParaRPr lang="zh-CN" altLang="en-US" dirty="0"/>
-          </a:p>
-        </p:txBody>
-      </p:sp>
-      <p:sp>
-        <p:nvSpPr>
-          <p:cNvPr id="4" name="Footer Placeholder 3">
-            <a:extLst>
-              <a:ext uri="{FF2B5EF4-FFF2-40B4-BE49-F238E27FC236}">
-                <a16:creationId xmlns:a16="http://schemas.microsoft.com/office/drawing/2014/main" id="{DA01B56D-E51F-0339-B57F-EE31B7B6C901}"/>
-              </a:ext>
-            </a:extLst>
-          </p:cNvPr>
-          <p:cNvSpPr>
-            <a:spLocks noGrp="1"/>
-          </p:cNvSpPr>
-          <p:nvPr>
-            <p:ph type="ftr" sz="quarter" idx="11"/>
-          </p:nvPr>
-        </p:nvSpPr>
-        <p:spPr/>
-        <p:txBody>
-          <a:bodyPr/>
-          <a:lstStyle/>
-          <a:p>
-            <a:r>
-              <a:rPr kumimoji="1" lang="en-US" altLang="zh-CN"/>
-              <a:t>Institute of Interdisciplinary Information Sciences (IIIS), Tsinghua University Wharton Statistics and Data Science Department, University of Pennsylvania</a:t>
-            </a:r>
-            <a:endParaRPr kumimoji="1" lang="zh-CN" altLang="en-US" dirty="0"/>
           </a:p>
         </p:txBody>
       </p:sp>

--- a/files/owner_assist.pptx
+++ b/files/owner_assist.pptx
@@ -207,7 +207,7 @@
           <a:p>
             <a:fld id="{BDA51940-DB52-3B48-AABB-9C7938529E4E}" type="datetimeFigureOut">
               <a:rPr kumimoji="1" lang="zh-CN" altLang="en-US" smtClean="0"/>
-              <a:t>2022/12/17</a:t>
+              <a:t>2022/12/25</a:t>
             </a:fld>
             <a:endParaRPr kumimoji="1" lang="zh-CN" altLang="en-US"/>
           </a:p>
@@ -766,7 +766,7 @@
           <a:p>
             <a:fld id="{34E6C107-BECA-49A0-88A3-CBFCF5885D2D}" type="datetime1">
               <a:rPr kumimoji="1" lang="zh-CN" altLang="en-US" smtClean="0"/>
-              <a:t>2022/12/17</a:t>
+              <a:t>2022/12/25</a:t>
             </a:fld>
             <a:endParaRPr kumimoji="1" lang="zh-CN" altLang="en-US"/>
           </a:p>
@@ -1091,7 +1091,7 @@
           <a:p>
             <a:fld id="{6CCC8DF2-E8D8-4101-BAF8-A4A920E574BA}" type="datetime1">
               <a:rPr kumimoji="1" lang="zh-CN" altLang="en-US" smtClean="0"/>
-              <a:t>2022/12/17</a:t>
+              <a:t>2022/12/25</a:t>
             </a:fld>
             <a:endParaRPr kumimoji="1" lang="zh-CN" altLang="en-US"/>
           </a:p>
@@ -1258,7 +1258,7 @@
           <a:p>
             <a:fld id="{2B951B20-7CD5-4BD2-85DA-BB4B9E96A07B}" type="datetime1">
               <a:rPr kumimoji="1" lang="zh-CN" altLang="en-US" smtClean="0"/>
-              <a:t>2022/12/17</a:t>
+              <a:t>2022/12/25</a:t>
             </a:fld>
             <a:endParaRPr kumimoji="1" lang="zh-CN" altLang="en-US"/>
           </a:p>
@@ -1536,7 +1536,7 @@
           <a:p>
             <a:fld id="{83D7EECA-A2C6-4B2A-8A1D-891A7C1B473F}" type="datetime1">
               <a:rPr kumimoji="1" lang="zh-CN" altLang="en-US" smtClean="0"/>
-              <a:t>2022/12/17</a:t>
+              <a:t>2022/12/25</a:t>
             </a:fld>
             <a:endParaRPr kumimoji="1" lang="zh-CN" altLang="en-US"/>
           </a:p>
@@ -1738,7 +1738,7 @@
           <a:p>
             <a:fld id="{B6435C1D-6A3A-4BC8-A5FA-63DDDDF6CED5}" type="datetime1">
               <a:rPr kumimoji="1" lang="zh-CN" altLang="en-US" smtClean="0"/>
-              <a:t>2022/12/17</a:t>
+              <a:t>2022/12/25</a:t>
             </a:fld>
             <a:endParaRPr kumimoji="1" lang="zh-CN" altLang="en-US"/>
           </a:p>
@@ -1941,7 +1941,7 @@
           <a:p>
             <a:fld id="{09BF96EC-4D07-411A-B8F0-539A521A6E3D}" type="datetime1">
               <a:rPr kumimoji="1" lang="zh-CN" altLang="en-US" smtClean="0"/>
-              <a:t>2022/12/17</a:t>
+              <a:t>2022/12/25</a:t>
             </a:fld>
             <a:endParaRPr kumimoji="1" lang="zh-CN" altLang="en-US"/>
           </a:p>
@@ -2337,7 +2337,7 @@
           <a:p>
             <a:fld id="{FCC3DF88-F808-4C39-8F95-9C14E59DDEE1}" type="datetime1">
               <a:rPr kumimoji="1" lang="zh-CN" altLang="en-US" smtClean="0"/>
-              <a:t>2022/12/17</a:t>
+              <a:t>2022/12/25</a:t>
             </a:fld>
             <a:endParaRPr kumimoji="1" lang="zh-CN" altLang="en-US"/>
           </a:p>
@@ -2740,7 +2740,7 @@
           <a:p>
             <a:fld id="{163DBC63-BB84-4AE7-9581-49AB0E8D01CD}" type="datetime1">
               <a:rPr kumimoji="1" lang="zh-CN" altLang="en-US" smtClean="0"/>
-              <a:t>2022/12/17</a:t>
+              <a:t>2022/12/25</a:t>
             </a:fld>
             <a:endParaRPr kumimoji="1" lang="zh-CN" altLang="en-US"/>
           </a:p>
@@ -3127,7 +3127,7 @@
           <a:p>
             <a:fld id="{D550E475-A1AD-46B2-959F-0BC49E161317}" type="datetime1">
               <a:rPr kumimoji="1" lang="zh-CN" altLang="en-US" smtClean="0"/>
-              <a:t>2022/12/17</a:t>
+              <a:t>2022/12/25</a:t>
             </a:fld>
             <a:endParaRPr kumimoji="1" lang="zh-CN" altLang="en-US"/>
           </a:p>
@@ -3254,7 +3254,7 @@
           <a:p>
             <a:fld id="{79B65CF1-9FF6-44B2-965A-84F13C9AB36C}" type="datetime1">
               <a:rPr kumimoji="1" lang="zh-CN" altLang="en-US" smtClean="0"/>
-              <a:t>2022/12/17</a:t>
+              <a:t>2022/12/25</a:t>
             </a:fld>
             <a:endParaRPr kumimoji="1" lang="zh-CN" altLang="en-US"/>
           </a:p>
@@ -3381,7 +3381,7 @@
           <a:p>
             <a:fld id="{589EED1C-FD81-4459-9A25-DAF302DAE66A}" type="datetime1">
               <a:rPr kumimoji="1" lang="zh-CN" altLang="en-US" smtClean="0"/>
-              <a:t>2022/12/17</a:t>
+              <a:t>2022/12/25</a:t>
             </a:fld>
             <a:endParaRPr kumimoji="1" lang="zh-CN" altLang="en-US"/>
           </a:p>
@@ -3771,7 +3771,7 @@
           <a:p>
             <a:fld id="{566A81CA-1CDB-4041-829C-18091F008B7C}" type="datetime1">
               <a:rPr kumimoji="1" lang="zh-CN" altLang="en-US" smtClean="0"/>
-              <a:t>2022/12/17</a:t>
+              <a:t>2022/12/25</a:t>
             </a:fld>
             <a:endParaRPr kumimoji="1" lang="zh-CN" altLang="en-US"/>
           </a:p>
@@ -4062,7 +4062,7 @@
           <a:p>
             <a:fld id="{1842A012-D673-47C8-A975-BF6A11D148BB}" type="datetime1">
               <a:rPr kumimoji="1" lang="zh-CN" altLang="en-US" smtClean="0"/>
-              <a:t>2022/12/17</a:t>
+              <a:t>2022/12/25</a:t>
             </a:fld>
             <a:endParaRPr kumimoji="1" lang="zh-CN" altLang="en-US"/>
           </a:p>
@@ -9097,1625 +9097,6 @@
           </p:sp>
         </mc:Fallback>
       </mc:AlternateContent>
-      <mc:AlternateContent xmlns:mc="http://schemas.openxmlformats.org/markup-compatibility/2006" xmlns:a14="http://schemas.microsoft.com/office/drawing/2010/main">
-        <mc:Choice Requires="a14">
-          <p:graphicFrame>
-            <p:nvGraphicFramePr>
-              <p:cNvPr id="1029" name="Table 1028">
-                <a:extLst>
-                  <a:ext uri="{FF2B5EF4-FFF2-40B4-BE49-F238E27FC236}">
-                    <a16:creationId xmlns:a16="http://schemas.microsoft.com/office/drawing/2014/main" id="{80BF865E-A479-D632-4F8C-EE88761F9BC1}"/>
-                  </a:ext>
-                </a:extLst>
-              </p:cNvPr>
-              <p:cNvGraphicFramePr>
-                <a:graphicFrameLocks noGrp="1"/>
-              </p:cNvGraphicFramePr>
-              <p:nvPr>
-                <p:extLst>
-                  <p:ext uri="{D42A27DB-BD31-4B8C-83A1-F6EECF244321}">
-                    <p14:modId xmlns:p14="http://schemas.microsoft.com/office/powerpoint/2010/main" val="1556896636"/>
-                  </p:ext>
-                </p:extLst>
-              </p:nvPr>
-            </p:nvGraphicFramePr>
-            <p:xfrm>
-              <a:off x="7771395" y="1718174"/>
-              <a:ext cx="3710609" cy="1059880"/>
-            </p:xfrm>
-            <a:graphic>
-              <a:graphicData uri="http://schemas.openxmlformats.org/drawingml/2006/table">
-                <a:tbl>
-                  <a:tblPr firstRow="1" firstCol="1" bandRow="1">
-                    <a:tableStyleId>{5C22544A-7EE6-4342-B048-85BDC9FD1C3A}</a:tableStyleId>
-                  </a:tblPr>
-                  <a:tblGrid>
-                    <a:gridCol w="708991">
-                      <a:extLst>
-                        <a:ext uri="{9D8B030D-6E8A-4147-A177-3AD203B41FA5}">
-                          <a16:colId xmlns:a16="http://schemas.microsoft.com/office/drawing/2014/main" val="46969292"/>
-                        </a:ext>
-                      </a:extLst>
-                    </a:gridCol>
-                    <a:gridCol w="1371600">
-                      <a:extLst>
-                        <a:ext uri="{9D8B030D-6E8A-4147-A177-3AD203B41FA5}">
-                          <a16:colId xmlns:a16="http://schemas.microsoft.com/office/drawing/2014/main" val="1574546063"/>
-                        </a:ext>
-                      </a:extLst>
-                    </a:gridCol>
-                    <a:gridCol w="1630018">
-                      <a:extLst>
-                        <a:ext uri="{9D8B030D-6E8A-4147-A177-3AD203B41FA5}">
-                          <a16:colId xmlns:a16="http://schemas.microsoft.com/office/drawing/2014/main" val="636675628"/>
-                        </a:ext>
-                      </a:extLst>
-                    </a:gridCol>
-                  </a:tblGrid>
-                  <a:tr h="0">
-                    <a:tc>
-                      <a:txBody>
-                        <a:bodyPr/>
-                        <a:lstStyle/>
-                        <a:p>
-                          <a:pPr algn="ctr"/>
-                          <a14:m>
-                            <m:oMath xmlns:m="http://schemas.openxmlformats.org/officeDocument/2006/math">
-                              <m:d>
-                                <m:dPr>
-                                  <m:ctrlPr>
-                                    <a:rPr lang="zh-CN" sz="1050" i="1" kern="100">
-                                      <a:effectLst/>
-                                      <a:latin typeface="Cambria Math" panose="02040503050406030204" pitchFamily="18" charset="0"/>
-                                    </a:rPr>
-                                  </m:ctrlPr>
-                                </m:dPr>
-                                <m:e>
-                                  <m:sSub>
-                                    <m:sSubPr>
-                                      <m:ctrlPr>
-                                        <a:rPr lang="zh-CN" sz="1050" i="1" kern="100">
-                                          <a:effectLst/>
-                                          <a:latin typeface="Cambria Math" panose="02040503050406030204" pitchFamily="18" charset="0"/>
-                                        </a:rPr>
-                                      </m:ctrlPr>
-                                    </m:sSubPr>
-                                    <m:e>
-                                      <m:acc>
-                                        <m:accPr>
-                                          <m:chr m:val="̂"/>
-                                          <m:ctrlPr>
-                                            <a:rPr lang="zh-CN" sz="1050" i="1" kern="100">
-                                              <a:effectLst/>
-                                              <a:latin typeface="Cambria Math" panose="02040503050406030204" pitchFamily="18" charset="0"/>
-                                            </a:rPr>
-                                          </m:ctrlPr>
-                                        </m:accPr>
-                                        <m:e>
-                                          <m:r>
-                                            <a:rPr lang="en-US" sz="1050" kern="100">
-                                              <a:effectLst/>
-                                              <a:latin typeface="Cambria Math" panose="02040503050406030204" pitchFamily="18" charset="0"/>
-                                            </a:rPr>
-                                            <m:t>𝑌</m:t>
-                                          </m:r>
-                                        </m:e>
-                                      </m:acc>
-                                    </m:e>
-                                    <m:sub>
-                                      <m:r>
-                                        <a:rPr lang="en-US" sz="1050" kern="100">
-                                          <a:effectLst/>
-                                          <a:latin typeface="Cambria Math" panose="02040503050406030204" pitchFamily="18" charset="0"/>
-                                        </a:rPr>
-                                        <m:t>1</m:t>
-                                      </m:r>
-                                    </m:sub>
-                                  </m:sSub>
-                                  <m:r>
-                                    <a:rPr lang="en-US" sz="1050" kern="100">
-                                      <a:effectLst/>
-                                      <a:latin typeface="Cambria Math" panose="02040503050406030204" pitchFamily="18" charset="0"/>
-                                    </a:rPr>
-                                    <m:t>,</m:t>
-                                  </m:r>
-                                  <m:sSub>
-                                    <m:sSubPr>
-                                      <m:ctrlPr>
-                                        <a:rPr lang="zh-CN" sz="1050" i="1" kern="100">
-                                          <a:effectLst/>
-                                          <a:latin typeface="Cambria Math" panose="02040503050406030204" pitchFamily="18" charset="0"/>
-                                        </a:rPr>
-                                      </m:ctrlPr>
-                                    </m:sSubPr>
-                                    <m:e>
-                                      <m:acc>
-                                        <m:accPr>
-                                          <m:chr m:val="̂"/>
-                                          <m:ctrlPr>
-                                            <a:rPr lang="zh-CN" sz="1050" i="1" kern="100">
-                                              <a:effectLst/>
-                                              <a:latin typeface="Cambria Math" panose="02040503050406030204" pitchFamily="18" charset="0"/>
-                                            </a:rPr>
-                                          </m:ctrlPr>
-                                        </m:accPr>
-                                        <m:e>
-                                          <m:r>
-                                            <a:rPr lang="en-US" sz="1050" kern="100">
-                                              <a:effectLst/>
-                                              <a:latin typeface="Cambria Math" panose="02040503050406030204" pitchFamily="18" charset="0"/>
-                                            </a:rPr>
-                                            <m:t>𝑌</m:t>
-                                          </m:r>
-                                        </m:e>
-                                      </m:acc>
-                                    </m:e>
-                                    <m:sub>
-                                      <m:r>
-                                        <a:rPr lang="en-US" sz="1050" kern="100">
-                                          <a:effectLst/>
-                                          <a:latin typeface="Cambria Math" panose="02040503050406030204" pitchFamily="18" charset="0"/>
-                                        </a:rPr>
-                                        <m:t>2</m:t>
-                                      </m:r>
-                                    </m:sub>
-                                  </m:sSub>
-                                </m:e>
-                              </m:d>
-                            </m:oMath>
-                          </a14:m>
-                          <a:r>
-                            <a:rPr lang="en-US" sz="1050" kern="100">
-                              <a:effectLst/>
-                            </a:rPr>
-                            <a:t> Table</a:t>
-                          </a:r>
-                          <a:endParaRPr lang="zh-CN" sz="1050" kern="100">
-                            <a:effectLst/>
-                            <a:latin typeface="DengXian" panose="02010600030101010101" pitchFamily="2" charset="-122"/>
-                            <a:ea typeface="DengXian" panose="02010600030101010101" pitchFamily="2" charset="-122"/>
-                            <a:cs typeface="Times New Roman" panose="02020603050405020304" pitchFamily="18" charset="0"/>
-                          </a:endParaRPr>
-                        </a:p>
-                      </a:txBody>
-                      <a:tcPr marL="68580" marR="68580" marT="0" marB="0"/>
-                    </a:tc>
-                    <a:tc>
-                      <a:txBody>
-                        <a:bodyPr/>
-                        <a:lstStyle/>
-                        <a:p>
-                          <a:pPr algn="just"/>
-                          <a14:m>
-                            <m:oMathPara xmlns:m="http://schemas.openxmlformats.org/officeDocument/2006/math">
-                              <m:oMathParaPr>
-                                <m:jc m:val="centerGroup"/>
-                              </m:oMathParaPr>
-                              <m:oMath xmlns:m="http://schemas.openxmlformats.org/officeDocument/2006/math">
-                                <m:sSub>
-                                  <m:sSubPr>
-                                    <m:ctrlPr>
-                                      <a:rPr lang="zh-CN" sz="1050" i="1" kern="100">
-                                        <a:effectLst/>
-                                        <a:latin typeface="Cambria Math" panose="02040503050406030204" pitchFamily="18" charset="0"/>
-                                      </a:rPr>
-                                    </m:ctrlPr>
-                                  </m:sSubPr>
-                                  <m:e>
-                                    <m:r>
-                                      <a:rPr lang="en-US" sz="1050" kern="100">
-                                        <a:effectLst/>
-                                        <a:latin typeface="Cambria Math" panose="02040503050406030204" pitchFamily="18" charset="0"/>
-                                      </a:rPr>
-                                      <m:t>𝑌</m:t>
-                                    </m:r>
-                                  </m:e>
-                                  <m:sub>
-                                    <m:r>
-                                      <a:rPr lang="en-US" sz="1050" kern="100">
-                                        <a:effectLst/>
-                                        <a:latin typeface="Cambria Math" panose="02040503050406030204" pitchFamily="18" charset="0"/>
-                                      </a:rPr>
-                                      <m:t>1</m:t>
-                                    </m:r>
-                                  </m:sub>
-                                </m:sSub>
-                                <m:sSub>
-                                  <m:sSubPr>
-                                    <m:ctrlPr>
-                                      <a:rPr lang="zh-CN" sz="1050" i="1" kern="100">
-                                        <a:effectLst/>
-                                        <a:latin typeface="Cambria Math" panose="02040503050406030204" pitchFamily="18" charset="0"/>
-                                      </a:rPr>
-                                    </m:ctrlPr>
-                                  </m:sSubPr>
-                                  <m:e>
-                                    <m:r>
-                                      <a:rPr lang="zh-CN" sz="1050" kern="100">
-                                        <a:effectLst/>
-                                        <a:latin typeface="Cambria Math" panose="02040503050406030204" pitchFamily="18" charset="0"/>
-                                      </a:rPr>
-                                      <m:t>⊕</m:t>
-                                    </m:r>
-                                  </m:e>
-                                  <m:sub>
-                                    <m:r>
-                                      <a:rPr lang="en-US" sz="1050" kern="100">
-                                        <a:effectLst/>
-                                        <a:latin typeface="Cambria Math" panose="02040503050406030204" pitchFamily="18" charset="0"/>
-                                      </a:rPr>
-                                      <m:t>1</m:t>
-                                    </m:r>
-                                  </m:sub>
-                                </m:sSub>
-                                <m:sSub>
-                                  <m:sSubPr>
-                                    <m:ctrlPr>
-                                      <a:rPr lang="zh-CN" sz="1050" i="1" kern="100">
-                                        <a:effectLst/>
-                                        <a:latin typeface="Cambria Math" panose="02040503050406030204" pitchFamily="18" charset="0"/>
-                                      </a:rPr>
-                                    </m:ctrlPr>
-                                  </m:sSubPr>
-                                  <m:e>
-                                    <m:r>
-                                      <a:rPr lang="en-US" sz="1050" kern="100">
-                                        <a:effectLst/>
-                                        <a:latin typeface="Cambria Math" panose="02040503050406030204" pitchFamily="18" charset="0"/>
-                                      </a:rPr>
-                                      <m:t>𝑌</m:t>
-                                    </m:r>
-                                  </m:e>
-                                  <m:sub>
-                                    <m:r>
-                                      <a:rPr lang="en-US" sz="1050" kern="100">
-                                        <a:effectLst/>
-                                        <a:latin typeface="Cambria Math" panose="02040503050406030204" pitchFamily="18" charset="0"/>
-                                      </a:rPr>
-                                      <m:t>2</m:t>
-                                    </m:r>
-                                  </m:sub>
-                                </m:sSub>
-                              </m:oMath>
-                            </m:oMathPara>
-                          </a14:m>
-                          <a:endParaRPr lang="zh-CN" sz="1050" kern="100" dirty="0">
-                            <a:effectLst/>
-                            <a:latin typeface="DengXian" panose="02010600030101010101" pitchFamily="2" charset="-122"/>
-                            <a:ea typeface="DengXian" panose="02010600030101010101" pitchFamily="2" charset="-122"/>
-                            <a:cs typeface="Times New Roman" panose="02020603050405020304" pitchFamily="18" charset="0"/>
-                          </a:endParaRPr>
-                        </a:p>
-                      </a:txBody>
-                      <a:tcPr marL="68580" marR="68580" marT="0" marB="0"/>
-                    </a:tc>
-                    <a:tc>
-                      <a:txBody>
-                        <a:bodyPr/>
-                        <a:lstStyle/>
-                        <a:p>
-                          <a:pPr algn="just"/>
-                          <a14:m>
-                            <m:oMathPara xmlns:m="http://schemas.openxmlformats.org/officeDocument/2006/math">
-                              <m:oMathParaPr>
-                                <m:jc m:val="centerGroup"/>
-                              </m:oMathParaPr>
-                              <m:oMath xmlns:m="http://schemas.openxmlformats.org/officeDocument/2006/math">
-                                <m:r>
-                                  <a:rPr lang="en-US" sz="1050" kern="100">
-                                    <a:effectLst/>
-                                    <a:latin typeface="Cambria Math" panose="02040503050406030204" pitchFamily="18" charset="0"/>
-                                  </a:rPr>
-                                  <m:t>¬</m:t>
-                                </m:r>
-                                <m:d>
-                                  <m:dPr>
-                                    <m:ctrlPr>
-                                      <a:rPr lang="zh-CN" sz="1050" i="1" kern="100">
-                                        <a:effectLst/>
-                                        <a:latin typeface="Cambria Math" panose="02040503050406030204" pitchFamily="18" charset="0"/>
-                                      </a:rPr>
-                                    </m:ctrlPr>
-                                  </m:dPr>
-                                  <m:e>
-                                    <m:sSub>
-                                      <m:sSubPr>
-                                        <m:ctrlPr>
-                                          <a:rPr lang="zh-CN" sz="1050" i="1" kern="100">
-                                            <a:effectLst/>
-                                            <a:latin typeface="Cambria Math" panose="02040503050406030204" pitchFamily="18" charset="0"/>
-                                          </a:rPr>
-                                        </m:ctrlPr>
-                                      </m:sSubPr>
-                                      <m:e>
-                                        <m:r>
-                                          <a:rPr lang="en-US" sz="1050" kern="100">
-                                            <a:effectLst/>
-                                            <a:latin typeface="Cambria Math" panose="02040503050406030204" pitchFamily="18" charset="0"/>
-                                          </a:rPr>
-                                          <m:t>𝑌</m:t>
-                                        </m:r>
-                                      </m:e>
-                                      <m:sub>
-                                        <m:r>
-                                          <a:rPr lang="en-US" sz="1050" kern="100">
-                                            <a:effectLst/>
-                                            <a:latin typeface="Cambria Math" panose="02040503050406030204" pitchFamily="18" charset="0"/>
-                                          </a:rPr>
-                                          <m:t>1</m:t>
-                                        </m:r>
-                                      </m:sub>
-                                    </m:sSub>
-                                    <m:sSub>
-                                      <m:sSubPr>
-                                        <m:ctrlPr>
-                                          <a:rPr lang="zh-CN" sz="1050" i="1" kern="100">
-                                            <a:effectLst/>
-                                            <a:latin typeface="Cambria Math" panose="02040503050406030204" pitchFamily="18" charset="0"/>
-                                          </a:rPr>
-                                        </m:ctrlPr>
-                                      </m:sSubPr>
-                                      <m:e>
-                                        <m:r>
-                                          <a:rPr lang="zh-CN" sz="1050" kern="100">
-                                            <a:effectLst/>
-                                            <a:latin typeface="Cambria Math" panose="02040503050406030204" pitchFamily="18" charset="0"/>
-                                          </a:rPr>
-                                          <m:t>⊕</m:t>
-                                        </m:r>
-                                      </m:e>
-                                      <m:sub>
-                                        <m:r>
-                                          <a:rPr lang="en-US" sz="1050" kern="100">
-                                            <a:effectLst/>
-                                            <a:latin typeface="Cambria Math" panose="02040503050406030204" pitchFamily="18" charset="0"/>
-                                          </a:rPr>
-                                          <m:t>1</m:t>
-                                        </m:r>
-                                      </m:sub>
-                                    </m:sSub>
-                                    <m:sSub>
-                                      <m:sSubPr>
-                                        <m:ctrlPr>
-                                          <a:rPr lang="zh-CN" sz="1050" i="1" kern="100">
-                                            <a:effectLst/>
-                                            <a:latin typeface="Cambria Math" panose="02040503050406030204" pitchFamily="18" charset="0"/>
-                                          </a:rPr>
-                                        </m:ctrlPr>
-                                      </m:sSubPr>
-                                      <m:e>
-                                        <m:r>
-                                          <a:rPr lang="en-US" sz="1050" kern="100">
-                                            <a:effectLst/>
-                                            <a:latin typeface="Cambria Math" panose="02040503050406030204" pitchFamily="18" charset="0"/>
-                                          </a:rPr>
-                                          <m:t>𝑌</m:t>
-                                        </m:r>
-                                      </m:e>
-                                      <m:sub>
-                                        <m:r>
-                                          <a:rPr lang="en-US" sz="1050" kern="100">
-                                            <a:effectLst/>
-                                            <a:latin typeface="Cambria Math" panose="02040503050406030204" pitchFamily="18" charset="0"/>
-                                          </a:rPr>
-                                          <m:t>2</m:t>
-                                        </m:r>
-                                      </m:sub>
-                                    </m:sSub>
-                                  </m:e>
-                                </m:d>
-                              </m:oMath>
-                            </m:oMathPara>
-                          </a14:m>
-                          <a:endParaRPr lang="zh-CN" sz="1050" kern="100" dirty="0">
-                            <a:effectLst/>
-                            <a:latin typeface="DengXian" panose="02010600030101010101" pitchFamily="2" charset="-122"/>
-                            <a:ea typeface="DengXian" panose="02010600030101010101" pitchFamily="2" charset="-122"/>
-                            <a:cs typeface="Times New Roman" panose="02020603050405020304" pitchFamily="18" charset="0"/>
-                          </a:endParaRPr>
-                        </a:p>
-                      </a:txBody>
-                      <a:tcPr marL="68580" marR="68580" marT="0" marB="0"/>
-                    </a:tc>
-                    <a:extLst>
-                      <a:ext uri="{0D108BD9-81ED-4DB2-BD59-A6C34878D82A}">
-                        <a16:rowId xmlns:a16="http://schemas.microsoft.com/office/drawing/2014/main" val="850543838"/>
-                      </a:ext>
-                    </a:extLst>
-                  </a:tr>
-                  <a:tr h="0">
-                    <a:tc>
-                      <a:txBody>
-                        <a:bodyPr/>
-                        <a:lstStyle/>
-                        <a:p>
-                          <a:pPr algn="just"/>
-                          <a14:m>
-                            <m:oMathPara xmlns:m="http://schemas.openxmlformats.org/officeDocument/2006/math">
-                              <m:oMathParaPr>
-                                <m:jc m:val="centerGroup"/>
-                              </m:oMathParaPr>
-                              <m:oMath xmlns:m="http://schemas.openxmlformats.org/officeDocument/2006/math">
-                                <m:sSub>
-                                  <m:sSubPr>
-                                    <m:ctrlPr>
-                                      <a:rPr lang="zh-CN" sz="1050" i="1" kern="100">
-                                        <a:effectLst/>
-                                        <a:latin typeface="Cambria Math" panose="02040503050406030204" pitchFamily="18" charset="0"/>
-                                      </a:rPr>
-                                    </m:ctrlPr>
-                                  </m:sSubPr>
-                                  <m:e>
-                                    <m:r>
-                                      <a:rPr lang="zh-CN" sz="1050" kern="100">
-                                        <a:effectLst/>
-                                        <a:latin typeface="Cambria Math" panose="02040503050406030204" pitchFamily="18" charset="0"/>
-                                      </a:rPr>
-                                      <m:t>⊕</m:t>
-                                    </m:r>
-                                  </m:e>
-                                  <m:sub>
-                                    <m:r>
-                                      <a:rPr lang="en-US" sz="1050" kern="100">
-                                        <a:effectLst/>
-                                        <a:latin typeface="Cambria Math" panose="02040503050406030204" pitchFamily="18" charset="0"/>
-                                      </a:rPr>
-                                      <m:t>1</m:t>
-                                    </m:r>
-                                  </m:sub>
-                                </m:sSub>
-                                <m:r>
-                                  <a:rPr lang="zh-CN" sz="1050" kern="100">
-                                    <a:effectLst/>
-                                    <a:latin typeface="Cambria Math" panose="02040503050406030204" pitchFamily="18" charset="0"/>
-                                  </a:rPr>
-                                  <m:t>≠</m:t>
-                                </m:r>
-                                <m:sSub>
-                                  <m:sSubPr>
-                                    <m:ctrlPr>
-                                      <a:rPr lang="zh-CN" sz="1050" i="1" kern="100">
-                                        <a:effectLst/>
-                                        <a:latin typeface="Cambria Math" panose="02040503050406030204" pitchFamily="18" charset="0"/>
-                                      </a:rPr>
-                                    </m:ctrlPr>
-                                  </m:sSubPr>
-                                  <m:e>
-                                    <m:r>
-                                      <a:rPr lang="zh-CN" sz="1050" kern="100">
-                                        <a:effectLst/>
-                                        <a:latin typeface="Cambria Math" panose="02040503050406030204" pitchFamily="18" charset="0"/>
-                                      </a:rPr>
-                                      <m:t>⊕</m:t>
-                                    </m:r>
-                                  </m:e>
-                                  <m:sub>
-                                    <m:r>
-                                      <a:rPr lang="en-US" sz="1050" kern="100">
-                                        <a:effectLst/>
-                                        <a:latin typeface="Cambria Math" panose="02040503050406030204" pitchFamily="18" charset="0"/>
-                                      </a:rPr>
-                                      <m:t>2</m:t>
-                                    </m:r>
-                                  </m:sub>
-                                </m:sSub>
-                              </m:oMath>
-                            </m:oMathPara>
-                          </a14:m>
-                          <a:endParaRPr lang="zh-CN" sz="1050" kern="100">
-                            <a:effectLst/>
-                            <a:latin typeface="DengXian" panose="02010600030101010101" pitchFamily="2" charset="-122"/>
-                            <a:ea typeface="DengXian" panose="02010600030101010101" pitchFamily="2" charset="-122"/>
-                            <a:cs typeface="Times New Roman" panose="02020603050405020304" pitchFamily="18" charset="0"/>
-                          </a:endParaRPr>
-                        </a:p>
-                      </a:txBody>
-                      <a:tcPr marL="68580" marR="68580" marT="0" marB="0"/>
-                    </a:tc>
-                    <a:tc>
-                      <a:txBody>
-                        <a:bodyPr/>
-                        <a:lstStyle/>
-                        <a:p>
-                          <a:pPr algn="just"/>
-                          <a14:m>
-                            <m:oMathPara xmlns:m="http://schemas.openxmlformats.org/officeDocument/2006/math">
-                              <m:oMathParaPr>
-                                <m:jc m:val="centerGroup"/>
-                              </m:oMathParaPr>
-                              <m:oMath xmlns:m="http://schemas.openxmlformats.org/officeDocument/2006/math">
-                                <m:d>
-                                  <m:dPr>
-                                    <m:ctrlPr>
-                                      <a:rPr lang="zh-CN" sz="1050" i="1" kern="100">
-                                        <a:effectLst/>
-                                        <a:latin typeface="Cambria Math" panose="02040503050406030204" pitchFamily="18" charset="0"/>
-                                      </a:rPr>
-                                    </m:ctrlPr>
-                                  </m:dPr>
-                                  <m:e>
-                                    <m:sSub>
-                                      <m:sSubPr>
-                                        <m:ctrlPr>
-                                          <a:rPr lang="zh-CN" sz="1050" i="1" kern="100">
-                                            <a:effectLst/>
-                                            <a:latin typeface="Cambria Math" panose="02040503050406030204" pitchFamily="18" charset="0"/>
-                                          </a:rPr>
-                                        </m:ctrlPr>
-                                      </m:sSubPr>
-                                      <m:e>
-                                        <m:r>
-                                          <a:rPr lang="en-US" sz="1050" kern="100">
-                                            <a:effectLst/>
-                                            <a:latin typeface="Cambria Math" panose="02040503050406030204" pitchFamily="18" charset="0"/>
-                                          </a:rPr>
-                                          <m:t>𝑌</m:t>
-                                        </m:r>
-                                      </m:e>
-                                      <m:sub>
-                                        <m:r>
-                                          <a:rPr lang="en-US" sz="1050" kern="100">
-                                            <a:effectLst/>
-                                            <a:latin typeface="Cambria Math" panose="02040503050406030204" pitchFamily="18" charset="0"/>
-                                          </a:rPr>
-                                          <m:t>1</m:t>
-                                        </m:r>
-                                      </m:sub>
-                                    </m:sSub>
-                                    <m:r>
-                                      <a:rPr lang="en-US" sz="1050" kern="100">
-                                        <a:effectLst/>
-                                        <a:latin typeface="Cambria Math" panose="02040503050406030204" pitchFamily="18" charset="0"/>
-                                      </a:rPr>
-                                      <m:t>,</m:t>
-                                    </m:r>
-                                    <m:sSub>
-                                      <m:sSubPr>
-                                        <m:ctrlPr>
-                                          <a:rPr lang="zh-CN" sz="1050" i="1" kern="100">
-                                            <a:effectLst/>
-                                            <a:latin typeface="Cambria Math" panose="02040503050406030204" pitchFamily="18" charset="0"/>
-                                          </a:rPr>
-                                        </m:ctrlPr>
-                                      </m:sSubPr>
-                                      <m:e>
-                                        <m:r>
-                                          <a:rPr lang="en-US" sz="1050" kern="100">
-                                            <a:effectLst/>
-                                            <a:latin typeface="Cambria Math" panose="02040503050406030204" pitchFamily="18" charset="0"/>
-                                          </a:rPr>
-                                          <m:t>𝑌</m:t>
-                                        </m:r>
-                                      </m:e>
-                                      <m:sub>
-                                        <m:r>
-                                          <a:rPr lang="en-US" sz="1050" kern="100">
-                                            <a:effectLst/>
-                                            <a:latin typeface="Cambria Math" panose="02040503050406030204" pitchFamily="18" charset="0"/>
-                                          </a:rPr>
-                                          <m:t>2</m:t>
-                                        </m:r>
-                                      </m:sub>
-                                    </m:sSub>
-                                  </m:e>
-                                </m:d>
-                              </m:oMath>
-                            </m:oMathPara>
-                          </a14:m>
-                          <a:endParaRPr lang="zh-CN" sz="1050" kern="100">
-                            <a:effectLst/>
-                            <a:latin typeface="DengXian" panose="02010600030101010101" pitchFamily="2" charset="-122"/>
-                            <a:ea typeface="DengXian" panose="02010600030101010101" pitchFamily="2" charset="-122"/>
-                            <a:cs typeface="Times New Roman" panose="02020603050405020304" pitchFamily="18" charset="0"/>
-                          </a:endParaRPr>
-                        </a:p>
-                      </a:txBody>
-                      <a:tcPr marL="68580" marR="68580" marT="0" marB="0" anchor="ctr"/>
-                    </a:tc>
-                    <a:tc>
-                      <a:txBody>
-                        <a:bodyPr/>
-                        <a:lstStyle/>
-                        <a:p>
-                          <a:pPr algn="just"/>
-                          <a14:m>
-                            <m:oMathPara xmlns:m="http://schemas.openxmlformats.org/officeDocument/2006/math">
-                              <m:oMathParaPr>
-                                <m:jc m:val="centerGroup"/>
-                              </m:oMathParaPr>
-                              <m:oMath xmlns:m="http://schemas.openxmlformats.org/officeDocument/2006/math">
-                                <m:d>
-                                  <m:dPr>
-                                    <m:ctrlPr>
-                                      <a:rPr lang="zh-CN" sz="1050" i="1" kern="100">
-                                        <a:effectLst/>
-                                        <a:latin typeface="Cambria Math" panose="02040503050406030204" pitchFamily="18" charset="0"/>
-                                      </a:rPr>
-                                    </m:ctrlPr>
-                                  </m:dPr>
-                                  <m:e>
-                                    <m:f>
-                                      <m:fPr>
-                                        <m:ctrlPr>
-                                          <a:rPr lang="zh-CN" sz="1050" i="1" kern="100">
-                                            <a:effectLst/>
-                                            <a:latin typeface="Cambria Math" panose="02040503050406030204" pitchFamily="18" charset="0"/>
-                                          </a:rPr>
-                                        </m:ctrlPr>
-                                      </m:fPr>
-                                      <m:num>
-                                        <m:sSub>
-                                          <m:sSubPr>
-                                            <m:ctrlPr>
-                                              <a:rPr lang="zh-CN" sz="1050" i="1" kern="100">
-                                                <a:effectLst/>
-                                                <a:latin typeface="Cambria Math" panose="02040503050406030204" pitchFamily="18" charset="0"/>
-                                              </a:rPr>
-                                            </m:ctrlPr>
-                                          </m:sSubPr>
-                                          <m:e>
-                                            <m:r>
-                                              <a:rPr lang="en-US" sz="1050" kern="100">
-                                                <a:effectLst/>
-                                                <a:latin typeface="Cambria Math" panose="02040503050406030204" pitchFamily="18" charset="0"/>
-                                              </a:rPr>
-                                              <m:t>𝑌</m:t>
-                                            </m:r>
-                                          </m:e>
-                                          <m:sub>
-                                            <m:r>
-                                              <a:rPr lang="en-US" sz="1050" kern="100">
-                                                <a:effectLst/>
-                                                <a:latin typeface="Cambria Math" panose="02040503050406030204" pitchFamily="18" charset="0"/>
-                                              </a:rPr>
-                                              <m:t>1</m:t>
-                                            </m:r>
-                                          </m:sub>
-                                        </m:sSub>
-                                        <m:r>
-                                          <a:rPr lang="en-US" sz="1050" kern="100">
-                                            <a:effectLst/>
-                                            <a:latin typeface="Cambria Math" panose="02040503050406030204" pitchFamily="18" charset="0"/>
-                                          </a:rPr>
-                                          <m:t>+</m:t>
-                                        </m:r>
-                                        <m:sSub>
-                                          <m:sSubPr>
-                                            <m:ctrlPr>
-                                              <a:rPr lang="zh-CN" sz="1050" i="1" kern="100">
-                                                <a:effectLst/>
-                                                <a:latin typeface="Cambria Math" panose="02040503050406030204" pitchFamily="18" charset="0"/>
-                                              </a:rPr>
-                                            </m:ctrlPr>
-                                          </m:sSubPr>
-                                          <m:e>
-                                            <m:r>
-                                              <a:rPr lang="en-US" sz="1050" kern="100">
-                                                <a:effectLst/>
-                                                <a:latin typeface="Cambria Math" panose="02040503050406030204" pitchFamily="18" charset="0"/>
-                                              </a:rPr>
-                                              <m:t>𝑌</m:t>
-                                            </m:r>
-                                          </m:e>
-                                          <m:sub>
-                                            <m:r>
-                                              <a:rPr lang="en-US" sz="1050" kern="100">
-                                                <a:effectLst/>
-                                                <a:latin typeface="Cambria Math" panose="02040503050406030204" pitchFamily="18" charset="0"/>
-                                              </a:rPr>
-                                              <m:t>2</m:t>
-                                            </m:r>
-                                          </m:sub>
-                                        </m:sSub>
-                                      </m:num>
-                                      <m:den>
-                                        <m:r>
-                                          <a:rPr lang="en-US" sz="1050" kern="100">
-                                            <a:effectLst/>
-                                            <a:latin typeface="Cambria Math" panose="02040503050406030204" pitchFamily="18" charset="0"/>
-                                          </a:rPr>
-                                          <m:t>2</m:t>
-                                        </m:r>
-                                      </m:den>
-                                    </m:f>
-                                    <m:r>
-                                      <a:rPr lang="en-US" sz="1050" kern="100">
-                                        <a:effectLst/>
-                                        <a:latin typeface="Cambria Math" panose="02040503050406030204" pitchFamily="18" charset="0"/>
-                                      </a:rPr>
-                                      <m:t>,</m:t>
-                                    </m:r>
-                                    <m:f>
-                                      <m:fPr>
-                                        <m:ctrlPr>
-                                          <a:rPr lang="zh-CN" sz="1050" i="1" kern="100">
-                                            <a:effectLst/>
-                                            <a:latin typeface="Cambria Math" panose="02040503050406030204" pitchFamily="18" charset="0"/>
-                                          </a:rPr>
-                                        </m:ctrlPr>
-                                      </m:fPr>
-                                      <m:num>
-                                        <m:sSub>
-                                          <m:sSubPr>
-                                            <m:ctrlPr>
-                                              <a:rPr lang="zh-CN" sz="1050" i="1" kern="100">
-                                                <a:effectLst/>
-                                                <a:latin typeface="Cambria Math" panose="02040503050406030204" pitchFamily="18" charset="0"/>
-                                              </a:rPr>
-                                            </m:ctrlPr>
-                                          </m:sSubPr>
-                                          <m:e>
-                                            <m:r>
-                                              <a:rPr lang="en-US" sz="1050" kern="100">
-                                                <a:effectLst/>
-                                                <a:latin typeface="Cambria Math" panose="02040503050406030204" pitchFamily="18" charset="0"/>
-                                              </a:rPr>
-                                              <m:t>𝑌</m:t>
-                                            </m:r>
-                                          </m:e>
-                                          <m:sub>
-                                            <m:r>
-                                              <a:rPr lang="en-US" sz="1050" kern="100">
-                                                <a:effectLst/>
-                                                <a:latin typeface="Cambria Math" panose="02040503050406030204" pitchFamily="18" charset="0"/>
-                                              </a:rPr>
-                                              <m:t>1</m:t>
-                                            </m:r>
-                                          </m:sub>
-                                        </m:sSub>
-                                        <m:r>
-                                          <a:rPr lang="en-US" sz="1050" kern="100">
-                                            <a:effectLst/>
-                                            <a:latin typeface="Cambria Math" panose="02040503050406030204" pitchFamily="18" charset="0"/>
-                                          </a:rPr>
-                                          <m:t>+</m:t>
-                                        </m:r>
-                                        <m:sSub>
-                                          <m:sSubPr>
-                                            <m:ctrlPr>
-                                              <a:rPr lang="zh-CN" sz="1050" i="1" kern="100">
-                                                <a:effectLst/>
-                                                <a:latin typeface="Cambria Math" panose="02040503050406030204" pitchFamily="18" charset="0"/>
-                                              </a:rPr>
-                                            </m:ctrlPr>
-                                          </m:sSubPr>
-                                          <m:e>
-                                            <m:r>
-                                              <a:rPr lang="en-US" sz="1050" kern="100">
-                                                <a:effectLst/>
-                                                <a:latin typeface="Cambria Math" panose="02040503050406030204" pitchFamily="18" charset="0"/>
-                                              </a:rPr>
-                                              <m:t>𝑌</m:t>
-                                            </m:r>
-                                          </m:e>
-                                          <m:sub>
-                                            <m:r>
-                                              <a:rPr lang="en-US" sz="1050" kern="100">
-                                                <a:effectLst/>
-                                                <a:latin typeface="Cambria Math" panose="02040503050406030204" pitchFamily="18" charset="0"/>
-                                              </a:rPr>
-                                              <m:t>2</m:t>
-                                            </m:r>
-                                          </m:sub>
-                                        </m:sSub>
-                                      </m:num>
-                                      <m:den>
-                                        <m:r>
-                                          <a:rPr lang="en-US" sz="1050" kern="100">
-                                            <a:effectLst/>
-                                            <a:latin typeface="Cambria Math" panose="02040503050406030204" pitchFamily="18" charset="0"/>
-                                          </a:rPr>
-                                          <m:t>2</m:t>
-                                        </m:r>
-                                      </m:den>
-                                    </m:f>
-                                  </m:e>
-                                </m:d>
-                              </m:oMath>
-                            </m:oMathPara>
-                          </a14:m>
-                          <a:endParaRPr lang="zh-CN" sz="1050" kern="100">
-                            <a:effectLst/>
-                            <a:latin typeface="DengXian" panose="02010600030101010101" pitchFamily="2" charset="-122"/>
-                            <a:ea typeface="DengXian" panose="02010600030101010101" pitchFamily="2" charset="-122"/>
-                            <a:cs typeface="Times New Roman" panose="02020603050405020304" pitchFamily="18" charset="0"/>
-                          </a:endParaRPr>
-                        </a:p>
-                      </a:txBody>
-                      <a:tcPr marL="68580" marR="68580" marT="0" marB="0"/>
-                    </a:tc>
-                    <a:extLst>
-                      <a:ext uri="{0D108BD9-81ED-4DB2-BD59-A6C34878D82A}">
-                        <a16:rowId xmlns:a16="http://schemas.microsoft.com/office/drawing/2014/main" val="2162067582"/>
-                      </a:ext>
-                    </a:extLst>
-                  </a:tr>
-                  <a:tr h="0">
-                    <a:tc>
-                      <a:txBody>
-                        <a:bodyPr/>
-                        <a:lstStyle/>
-                        <a:p>
-                          <a:pPr algn="just"/>
-                          <a14:m>
-                            <m:oMathPara xmlns:m="http://schemas.openxmlformats.org/officeDocument/2006/math">
-                              <m:oMathParaPr>
-                                <m:jc m:val="centerGroup"/>
-                              </m:oMathParaPr>
-                              <m:oMath xmlns:m="http://schemas.openxmlformats.org/officeDocument/2006/math">
-                                <m:sSub>
-                                  <m:sSubPr>
-                                    <m:ctrlPr>
-                                      <a:rPr lang="zh-CN" sz="1050" i="1" kern="100">
-                                        <a:effectLst/>
-                                        <a:latin typeface="Cambria Math" panose="02040503050406030204" pitchFamily="18" charset="0"/>
-                                      </a:rPr>
-                                    </m:ctrlPr>
-                                  </m:sSubPr>
-                                  <m:e>
-                                    <m:r>
-                                      <a:rPr lang="zh-CN" sz="1050" kern="100">
-                                        <a:effectLst/>
-                                        <a:latin typeface="Cambria Math" panose="02040503050406030204" pitchFamily="18" charset="0"/>
-                                      </a:rPr>
-                                      <m:t>⊕</m:t>
-                                    </m:r>
-                                  </m:e>
-                                  <m:sub>
-                                    <m:r>
-                                      <a:rPr lang="en-US" sz="1050" kern="100">
-                                        <a:effectLst/>
-                                        <a:latin typeface="Cambria Math" panose="02040503050406030204" pitchFamily="18" charset="0"/>
-                                      </a:rPr>
-                                      <m:t>1</m:t>
-                                    </m:r>
-                                  </m:sub>
-                                </m:sSub>
-                                <m:r>
-                                  <a:rPr lang="en-US" sz="1050" kern="100">
-                                    <a:effectLst/>
-                                    <a:latin typeface="Cambria Math" panose="02040503050406030204" pitchFamily="18" charset="0"/>
-                                  </a:rPr>
-                                  <m:t>=</m:t>
-                                </m:r>
-                                <m:sSub>
-                                  <m:sSubPr>
-                                    <m:ctrlPr>
-                                      <a:rPr lang="zh-CN" sz="1050" i="1" kern="100">
-                                        <a:effectLst/>
-                                        <a:latin typeface="Cambria Math" panose="02040503050406030204" pitchFamily="18" charset="0"/>
-                                      </a:rPr>
-                                    </m:ctrlPr>
-                                  </m:sSubPr>
-                                  <m:e>
-                                    <m:r>
-                                      <a:rPr lang="zh-CN" sz="1050" kern="100">
-                                        <a:effectLst/>
-                                        <a:latin typeface="Cambria Math" panose="02040503050406030204" pitchFamily="18" charset="0"/>
-                                      </a:rPr>
-                                      <m:t>⊕</m:t>
-                                    </m:r>
-                                  </m:e>
-                                  <m:sub>
-                                    <m:r>
-                                      <a:rPr lang="en-US" sz="1050" kern="100">
-                                        <a:effectLst/>
-                                        <a:latin typeface="Cambria Math" panose="02040503050406030204" pitchFamily="18" charset="0"/>
-                                      </a:rPr>
-                                      <m:t>2</m:t>
-                                    </m:r>
-                                  </m:sub>
-                                </m:sSub>
-                              </m:oMath>
-                            </m:oMathPara>
-                          </a14:m>
-                          <a:endParaRPr lang="zh-CN" sz="1050" kern="100">
-                            <a:effectLst/>
-                            <a:latin typeface="DengXian" panose="02010600030101010101" pitchFamily="2" charset="-122"/>
-                            <a:ea typeface="DengXian" panose="02010600030101010101" pitchFamily="2" charset="-122"/>
-                            <a:cs typeface="Times New Roman" panose="02020603050405020304" pitchFamily="18" charset="0"/>
-                          </a:endParaRPr>
-                        </a:p>
-                      </a:txBody>
-                      <a:tcPr marL="68580" marR="68580" marT="0" marB="0"/>
-                    </a:tc>
-                    <a:tc>
-                      <a:txBody>
-                        <a:bodyPr/>
-                        <a:lstStyle/>
-                        <a:p>
-                          <a:pPr algn="just"/>
-                          <a14:m>
-                            <m:oMathPara xmlns:m="http://schemas.openxmlformats.org/officeDocument/2006/math">
-                              <m:oMathParaPr>
-                                <m:jc m:val="centerGroup"/>
-                              </m:oMathParaPr>
-                              <m:oMath xmlns:m="http://schemas.openxmlformats.org/officeDocument/2006/math">
-                                <m:d>
-                                  <m:dPr>
-                                    <m:ctrlPr>
-                                      <a:rPr lang="zh-CN" sz="1050" i="1" kern="100">
-                                        <a:effectLst/>
-                                        <a:latin typeface="Cambria Math" panose="02040503050406030204" pitchFamily="18" charset="0"/>
-                                      </a:rPr>
-                                    </m:ctrlPr>
-                                  </m:dPr>
-                                  <m:e>
-                                    <m:f>
-                                      <m:fPr>
-                                        <m:ctrlPr>
-                                          <a:rPr lang="zh-CN" sz="1050" i="1" kern="100">
-                                            <a:effectLst/>
-                                            <a:latin typeface="Cambria Math" panose="02040503050406030204" pitchFamily="18" charset="0"/>
-                                          </a:rPr>
-                                        </m:ctrlPr>
-                                      </m:fPr>
-                                      <m:num>
-                                        <m:r>
-                                          <a:rPr lang="en-US" sz="1050" kern="100">
-                                            <a:effectLst/>
-                                            <a:latin typeface="Cambria Math" panose="02040503050406030204" pitchFamily="18" charset="0"/>
-                                          </a:rPr>
-                                          <m:t>3</m:t>
-                                        </m:r>
-                                        <m:sSub>
-                                          <m:sSubPr>
-                                            <m:ctrlPr>
-                                              <a:rPr lang="zh-CN" sz="1050" i="1" kern="100">
-                                                <a:effectLst/>
-                                                <a:latin typeface="Cambria Math" panose="02040503050406030204" pitchFamily="18" charset="0"/>
-                                              </a:rPr>
-                                            </m:ctrlPr>
-                                          </m:sSubPr>
-                                          <m:e>
-                                            <m:r>
-                                              <a:rPr lang="en-US" sz="1050" kern="100">
-                                                <a:effectLst/>
-                                                <a:latin typeface="Cambria Math" panose="02040503050406030204" pitchFamily="18" charset="0"/>
-                                              </a:rPr>
-                                              <m:t>𝑌</m:t>
-                                            </m:r>
-                                          </m:e>
-                                          <m:sub>
-                                            <m:r>
-                                              <a:rPr lang="en-US" sz="1050" kern="100">
-                                                <a:effectLst/>
-                                                <a:latin typeface="Cambria Math" panose="02040503050406030204" pitchFamily="18" charset="0"/>
-                                              </a:rPr>
-                                              <m:t>1</m:t>
-                                            </m:r>
-                                          </m:sub>
-                                        </m:sSub>
-                                        <m:r>
-                                          <a:rPr lang="en-US" sz="1050" kern="100">
-                                            <a:effectLst/>
-                                            <a:latin typeface="Cambria Math" panose="02040503050406030204" pitchFamily="18" charset="0"/>
-                                          </a:rPr>
-                                          <m:t>−</m:t>
-                                        </m:r>
-                                        <m:sSub>
-                                          <m:sSubPr>
-                                            <m:ctrlPr>
-                                              <a:rPr lang="zh-CN" sz="1050" i="1" kern="100">
-                                                <a:effectLst/>
-                                                <a:latin typeface="Cambria Math" panose="02040503050406030204" pitchFamily="18" charset="0"/>
-                                              </a:rPr>
-                                            </m:ctrlPr>
-                                          </m:sSubPr>
-                                          <m:e>
-                                            <m:r>
-                                              <a:rPr lang="en-US" sz="1050" kern="100">
-                                                <a:effectLst/>
-                                                <a:latin typeface="Cambria Math" panose="02040503050406030204" pitchFamily="18" charset="0"/>
-                                              </a:rPr>
-                                              <m:t>𝑌</m:t>
-                                            </m:r>
-                                          </m:e>
-                                          <m:sub>
-                                            <m:r>
-                                              <a:rPr lang="en-US" sz="1050" kern="100">
-                                                <a:effectLst/>
-                                                <a:latin typeface="Cambria Math" panose="02040503050406030204" pitchFamily="18" charset="0"/>
-                                              </a:rPr>
-                                              <m:t>2</m:t>
-                                            </m:r>
-                                          </m:sub>
-                                        </m:sSub>
-                                      </m:num>
-                                      <m:den>
-                                        <m:r>
-                                          <a:rPr lang="en-US" sz="1050" kern="100">
-                                            <a:effectLst/>
-                                            <a:latin typeface="Cambria Math" panose="02040503050406030204" pitchFamily="18" charset="0"/>
-                                          </a:rPr>
-                                          <m:t>2</m:t>
-                                        </m:r>
-                                      </m:den>
-                                    </m:f>
-                                    <m:r>
-                                      <a:rPr lang="en-US" sz="1050" kern="100">
-                                        <a:effectLst/>
-                                        <a:latin typeface="Cambria Math" panose="02040503050406030204" pitchFamily="18" charset="0"/>
-                                      </a:rPr>
-                                      <m:t>,</m:t>
-                                    </m:r>
-                                    <m:f>
-                                      <m:fPr>
-                                        <m:ctrlPr>
-                                          <a:rPr lang="zh-CN" sz="1050" i="1" kern="100">
-                                            <a:effectLst/>
-                                            <a:latin typeface="Cambria Math" panose="02040503050406030204" pitchFamily="18" charset="0"/>
-                                          </a:rPr>
-                                        </m:ctrlPr>
-                                      </m:fPr>
-                                      <m:num>
-                                        <m:r>
-                                          <a:rPr lang="en-US" sz="1050" kern="100">
-                                            <a:effectLst/>
-                                            <a:latin typeface="Cambria Math" panose="02040503050406030204" pitchFamily="18" charset="0"/>
-                                          </a:rPr>
-                                          <m:t>3</m:t>
-                                        </m:r>
-                                        <m:sSub>
-                                          <m:sSubPr>
-                                            <m:ctrlPr>
-                                              <a:rPr lang="zh-CN" sz="1050" i="1" kern="100">
-                                                <a:effectLst/>
-                                                <a:latin typeface="Cambria Math" panose="02040503050406030204" pitchFamily="18" charset="0"/>
-                                              </a:rPr>
-                                            </m:ctrlPr>
-                                          </m:sSubPr>
-                                          <m:e>
-                                            <m:r>
-                                              <a:rPr lang="en-US" sz="1050" kern="100">
-                                                <a:effectLst/>
-                                                <a:latin typeface="Cambria Math" panose="02040503050406030204" pitchFamily="18" charset="0"/>
-                                              </a:rPr>
-                                              <m:t>𝑌</m:t>
-                                            </m:r>
-                                          </m:e>
-                                          <m:sub>
-                                            <m:r>
-                                              <a:rPr lang="en-US" sz="1050" kern="100">
-                                                <a:effectLst/>
-                                                <a:latin typeface="Cambria Math" panose="02040503050406030204" pitchFamily="18" charset="0"/>
-                                              </a:rPr>
-                                              <m:t>2</m:t>
-                                            </m:r>
-                                          </m:sub>
-                                        </m:sSub>
-                                        <m:r>
-                                          <a:rPr lang="en-US" sz="1050" kern="100">
-                                            <a:effectLst/>
-                                            <a:latin typeface="Cambria Math" panose="02040503050406030204" pitchFamily="18" charset="0"/>
-                                          </a:rPr>
-                                          <m:t>−</m:t>
-                                        </m:r>
-                                        <m:sSub>
-                                          <m:sSubPr>
-                                            <m:ctrlPr>
-                                              <a:rPr lang="zh-CN" sz="1050" i="1" kern="100">
-                                                <a:effectLst/>
-                                                <a:latin typeface="Cambria Math" panose="02040503050406030204" pitchFamily="18" charset="0"/>
-                                              </a:rPr>
-                                            </m:ctrlPr>
-                                          </m:sSubPr>
-                                          <m:e>
-                                            <m:r>
-                                              <a:rPr lang="en-US" sz="1050" kern="100">
-                                                <a:effectLst/>
-                                                <a:latin typeface="Cambria Math" panose="02040503050406030204" pitchFamily="18" charset="0"/>
-                                              </a:rPr>
-                                              <m:t>𝑌</m:t>
-                                            </m:r>
-                                          </m:e>
-                                          <m:sub>
-                                            <m:r>
-                                              <a:rPr lang="en-US" sz="1050" kern="100">
-                                                <a:effectLst/>
-                                                <a:latin typeface="Cambria Math" panose="02040503050406030204" pitchFamily="18" charset="0"/>
-                                              </a:rPr>
-                                              <m:t>1</m:t>
-                                            </m:r>
-                                          </m:sub>
-                                        </m:sSub>
-                                      </m:num>
-                                      <m:den>
-                                        <m:r>
-                                          <a:rPr lang="en-US" sz="1050" kern="100">
-                                            <a:effectLst/>
-                                            <a:latin typeface="Cambria Math" panose="02040503050406030204" pitchFamily="18" charset="0"/>
-                                          </a:rPr>
-                                          <m:t>2</m:t>
-                                        </m:r>
-                                      </m:den>
-                                    </m:f>
-                                  </m:e>
-                                </m:d>
-                              </m:oMath>
-                            </m:oMathPara>
-                          </a14:m>
-                          <a:endParaRPr lang="zh-CN" sz="1050" kern="100">
-                            <a:effectLst/>
-                            <a:latin typeface="DengXian" panose="02010600030101010101" pitchFamily="2" charset="-122"/>
-                            <a:ea typeface="DengXian" panose="02010600030101010101" pitchFamily="2" charset="-122"/>
-                            <a:cs typeface="Times New Roman" panose="02020603050405020304" pitchFamily="18" charset="0"/>
-                          </a:endParaRPr>
-                        </a:p>
-                      </a:txBody>
-                      <a:tcPr marL="68580" marR="68580" marT="0" marB="0"/>
-                    </a:tc>
-                    <a:tc>
-                      <a:txBody>
-                        <a:bodyPr/>
-                        <a:lstStyle/>
-                        <a:p>
-                          <a:pPr algn="just"/>
-                          <a14:m>
-                            <m:oMathPara xmlns:m="http://schemas.openxmlformats.org/officeDocument/2006/math">
-                              <m:oMathParaPr>
-                                <m:jc m:val="centerGroup"/>
-                              </m:oMathParaPr>
-                              <m:oMath xmlns:m="http://schemas.openxmlformats.org/officeDocument/2006/math">
-                                <m:d>
-                                  <m:dPr>
-                                    <m:ctrlPr>
-                                      <a:rPr lang="zh-CN" sz="1050" i="1" kern="100">
-                                        <a:effectLst/>
-                                        <a:latin typeface="Cambria Math" panose="02040503050406030204" pitchFamily="18" charset="0"/>
-                                      </a:rPr>
-                                    </m:ctrlPr>
-                                  </m:dPr>
-                                  <m:e>
-                                    <m:f>
-                                      <m:fPr>
-                                        <m:ctrlPr>
-                                          <a:rPr lang="zh-CN" sz="1050" i="1" kern="100">
-                                            <a:effectLst/>
-                                            <a:latin typeface="Cambria Math" panose="02040503050406030204" pitchFamily="18" charset="0"/>
-                                          </a:rPr>
-                                        </m:ctrlPr>
-                                      </m:fPr>
-                                      <m:num>
-                                        <m:r>
-                                          <a:rPr lang="en-US" sz="1050" kern="100">
-                                            <a:effectLst/>
-                                            <a:latin typeface="Cambria Math" panose="02040503050406030204" pitchFamily="18" charset="0"/>
-                                          </a:rPr>
-                                          <m:t>3</m:t>
-                                        </m:r>
-                                        <m:sSub>
-                                          <m:sSubPr>
-                                            <m:ctrlPr>
-                                              <a:rPr lang="zh-CN" sz="1050" i="1" kern="100">
-                                                <a:effectLst/>
-                                                <a:latin typeface="Cambria Math" panose="02040503050406030204" pitchFamily="18" charset="0"/>
-                                              </a:rPr>
-                                            </m:ctrlPr>
-                                          </m:sSubPr>
-                                          <m:e>
-                                            <m:r>
-                                              <a:rPr lang="en-US" sz="1050" kern="100">
-                                                <a:effectLst/>
-                                                <a:latin typeface="Cambria Math" panose="02040503050406030204" pitchFamily="18" charset="0"/>
-                                              </a:rPr>
-                                              <m:t>𝑌</m:t>
-                                            </m:r>
-                                          </m:e>
-                                          <m:sub>
-                                            <m:r>
-                                              <a:rPr lang="en-US" sz="1050" kern="100">
-                                                <a:effectLst/>
-                                                <a:latin typeface="Cambria Math" panose="02040503050406030204" pitchFamily="18" charset="0"/>
-                                              </a:rPr>
-                                              <m:t>1</m:t>
-                                            </m:r>
-                                          </m:sub>
-                                        </m:sSub>
-                                        <m:r>
-                                          <a:rPr lang="en-US" sz="1050" kern="100">
-                                            <a:effectLst/>
-                                            <a:latin typeface="Cambria Math" panose="02040503050406030204" pitchFamily="18" charset="0"/>
-                                          </a:rPr>
-                                          <m:t>−</m:t>
-                                        </m:r>
-                                        <m:sSub>
-                                          <m:sSubPr>
-                                            <m:ctrlPr>
-                                              <a:rPr lang="zh-CN" sz="1050" i="1" kern="100">
-                                                <a:effectLst/>
-                                                <a:latin typeface="Cambria Math" panose="02040503050406030204" pitchFamily="18" charset="0"/>
-                                              </a:rPr>
-                                            </m:ctrlPr>
-                                          </m:sSubPr>
-                                          <m:e>
-                                            <m:r>
-                                              <a:rPr lang="en-US" sz="1050" kern="100">
-                                                <a:effectLst/>
-                                                <a:latin typeface="Cambria Math" panose="02040503050406030204" pitchFamily="18" charset="0"/>
-                                              </a:rPr>
-                                              <m:t>𝑌</m:t>
-                                            </m:r>
-                                          </m:e>
-                                          <m:sub>
-                                            <m:r>
-                                              <a:rPr lang="en-US" sz="1050" kern="100">
-                                                <a:effectLst/>
-                                                <a:latin typeface="Cambria Math" panose="02040503050406030204" pitchFamily="18" charset="0"/>
-                                              </a:rPr>
-                                              <m:t>2</m:t>
-                                            </m:r>
-                                          </m:sub>
-                                        </m:sSub>
-                                      </m:num>
-                                      <m:den>
-                                        <m:r>
-                                          <a:rPr lang="en-US" sz="1050" kern="100">
-                                            <a:effectLst/>
-                                            <a:latin typeface="Cambria Math" panose="02040503050406030204" pitchFamily="18" charset="0"/>
-                                          </a:rPr>
-                                          <m:t>2</m:t>
-                                        </m:r>
-                                      </m:den>
-                                    </m:f>
-                                    <m:r>
-                                      <a:rPr lang="en-US" sz="1050" kern="100">
-                                        <a:effectLst/>
-                                        <a:latin typeface="Cambria Math" panose="02040503050406030204" pitchFamily="18" charset="0"/>
-                                      </a:rPr>
-                                      <m:t>,</m:t>
-                                    </m:r>
-                                    <m:f>
-                                      <m:fPr>
-                                        <m:ctrlPr>
-                                          <a:rPr lang="zh-CN" sz="1050" i="1" kern="100">
-                                            <a:effectLst/>
-                                            <a:latin typeface="Cambria Math" panose="02040503050406030204" pitchFamily="18" charset="0"/>
-                                          </a:rPr>
-                                        </m:ctrlPr>
-                                      </m:fPr>
-                                      <m:num>
-                                        <m:r>
-                                          <a:rPr lang="en-US" sz="1050" kern="100">
-                                            <a:effectLst/>
-                                            <a:latin typeface="Cambria Math" panose="02040503050406030204" pitchFamily="18" charset="0"/>
-                                          </a:rPr>
-                                          <m:t>3</m:t>
-                                        </m:r>
-                                        <m:sSub>
-                                          <m:sSubPr>
-                                            <m:ctrlPr>
-                                              <a:rPr lang="zh-CN" sz="1050" i="1" kern="100">
-                                                <a:effectLst/>
-                                                <a:latin typeface="Cambria Math" panose="02040503050406030204" pitchFamily="18" charset="0"/>
-                                              </a:rPr>
-                                            </m:ctrlPr>
-                                          </m:sSubPr>
-                                          <m:e>
-                                            <m:r>
-                                              <a:rPr lang="en-US" sz="1050" kern="100">
-                                                <a:effectLst/>
-                                                <a:latin typeface="Cambria Math" panose="02040503050406030204" pitchFamily="18" charset="0"/>
-                                              </a:rPr>
-                                              <m:t>𝑌</m:t>
-                                            </m:r>
-                                          </m:e>
-                                          <m:sub>
-                                            <m:r>
-                                              <a:rPr lang="en-US" sz="1050" kern="100">
-                                                <a:effectLst/>
-                                                <a:latin typeface="Cambria Math" panose="02040503050406030204" pitchFamily="18" charset="0"/>
-                                              </a:rPr>
-                                              <m:t>2</m:t>
-                                            </m:r>
-                                          </m:sub>
-                                        </m:sSub>
-                                        <m:r>
-                                          <a:rPr lang="en-US" sz="1050" kern="100">
-                                            <a:effectLst/>
-                                            <a:latin typeface="Cambria Math" panose="02040503050406030204" pitchFamily="18" charset="0"/>
-                                          </a:rPr>
-                                          <m:t>−</m:t>
-                                        </m:r>
-                                        <m:sSub>
-                                          <m:sSubPr>
-                                            <m:ctrlPr>
-                                              <a:rPr lang="zh-CN" sz="1050" i="1" kern="100">
-                                                <a:effectLst/>
-                                                <a:latin typeface="Cambria Math" panose="02040503050406030204" pitchFamily="18" charset="0"/>
-                                              </a:rPr>
-                                            </m:ctrlPr>
-                                          </m:sSubPr>
-                                          <m:e>
-                                            <m:r>
-                                              <a:rPr lang="en-US" sz="1050" kern="100">
-                                                <a:effectLst/>
-                                                <a:latin typeface="Cambria Math" panose="02040503050406030204" pitchFamily="18" charset="0"/>
-                                              </a:rPr>
-                                              <m:t>𝑌</m:t>
-                                            </m:r>
-                                          </m:e>
-                                          <m:sub>
-                                            <m:r>
-                                              <a:rPr lang="en-US" sz="1050" kern="100">
-                                                <a:effectLst/>
-                                                <a:latin typeface="Cambria Math" panose="02040503050406030204" pitchFamily="18" charset="0"/>
-                                              </a:rPr>
-                                              <m:t>1</m:t>
-                                            </m:r>
-                                          </m:sub>
-                                        </m:sSub>
-                                      </m:num>
-                                      <m:den>
-                                        <m:r>
-                                          <a:rPr lang="en-US" sz="1050" kern="100">
-                                            <a:effectLst/>
-                                            <a:latin typeface="Cambria Math" panose="02040503050406030204" pitchFamily="18" charset="0"/>
-                                          </a:rPr>
-                                          <m:t>2</m:t>
-                                        </m:r>
-                                      </m:den>
-                                    </m:f>
-                                  </m:e>
-                                </m:d>
-                              </m:oMath>
-                            </m:oMathPara>
-                          </a14:m>
-                          <a:endParaRPr lang="zh-CN" sz="1050" kern="100" dirty="0">
-                            <a:effectLst/>
-                            <a:latin typeface="DengXian" panose="02010600030101010101" pitchFamily="2" charset="-122"/>
-                            <a:ea typeface="DengXian" panose="02010600030101010101" pitchFamily="2" charset="-122"/>
-                            <a:cs typeface="Times New Roman" panose="02020603050405020304" pitchFamily="18" charset="0"/>
-                          </a:endParaRPr>
-                        </a:p>
-                      </a:txBody>
-                      <a:tcPr marL="68580" marR="68580" marT="0" marB="0"/>
-                    </a:tc>
-                    <a:extLst>
-                      <a:ext uri="{0D108BD9-81ED-4DB2-BD59-A6C34878D82A}">
-                        <a16:rowId xmlns:a16="http://schemas.microsoft.com/office/drawing/2014/main" val="512285120"/>
-                      </a:ext>
-                    </a:extLst>
-                  </a:tr>
-                </a:tbl>
-              </a:graphicData>
-            </a:graphic>
-          </p:graphicFrame>
-        </mc:Choice>
-        <mc:Fallback xmlns="">
-          <p:graphicFrame>
-            <p:nvGraphicFramePr>
-              <p:cNvPr id="1029" name="Table 1028">
-                <a:extLst>
-                  <a:ext uri="{FF2B5EF4-FFF2-40B4-BE49-F238E27FC236}">
-                    <a16:creationId xmlns:a16="http://schemas.microsoft.com/office/drawing/2014/main" id="{80BF865E-A479-D632-4F8C-EE88761F9BC1}"/>
-                  </a:ext>
-                </a:extLst>
-              </p:cNvPr>
-              <p:cNvGraphicFramePr>
-                <a:graphicFrameLocks noGrp="1"/>
-              </p:cNvGraphicFramePr>
-              <p:nvPr>
-                <p:extLst>
-                  <p:ext uri="{D42A27DB-BD31-4B8C-83A1-F6EECF244321}">
-                    <p14:modId xmlns:p14="http://schemas.microsoft.com/office/powerpoint/2010/main" val="1556896636"/>
-                  </p:ext>
-                </p:extLst>
-              </p:nvPr>
-            </p:nvGraphicFramePr>
-            <p:xfrm>
-              <a:off x="7771395" y="1718174"/>
-              <a:ext cx="3710609" cy="1059880"/>
-            </p:xfrm>
-            <a:graphic>
-              <a:graphicData uri="http://schemas.openxmlformats.org/drawingml/2006/table">
-                <a:tbl>
-                  <a:tblPr firstRow="1" firstCol="1" bandRow="1">
-                    <a:tableStyleId>{5C22544A-7EE6-4342-B048-85BDC9FD1C3A}</a:tableStyleId>
-                  </a:tblPr>
-                  <a:tblGrid>
-                    <a:gridCol w="708991">
-                      <a:extLst>
-                        <a:ext uri="{9D8B030D-6E8A-4147-A177-3AD203B41FA5}">
-                          <a16:colId xmlns:a16="http://schemas.microsoft.com/office/drawing/2014/main" val="46969292"/>
-                        </a:ext>
-                      </a:extLst>
-                    </a:gridCol>
-                    <a:gridCol w="1371600">
-                      <a:extLst>
-                        <a:ext uri="{9D8B030D-6E8A-4147-A177-3AD203B41FA5}">
-                          <a16:colId xmlns:a16="http://schemas.microsoft.com/office/drawing/2014/main" val="1574546063"/>
-                        </a:ext>
-                      </a:extLst>
-                    </a:gridCol>
-                    <a:gridCol w="1630018">
-                      <a:extLst>
-                        <a:ext uri="{9D8B030D-6E8A-4147-A177-3AD203B41FA5}">
-                          <a16:colId xmlns:a16="http://schemas.microsoft.com/office/drawing/2014/main" val="636675628"/>
-                        </a:ext>
-                      </a:extLst>
-                    </a:gridCol>
-                  </a:tblGrid>
-                  <a:tr h="340678">
-                    <a:tc>
-                      <a:txBody>
-                        <a:bodyPr/>
-                        <a:lstStyle/>
-                        <a:p>
-                          <a:endParaRPr lang="zh-CN"/>
-                        </a:p>
-                      </a:txBody>
-                      <a:tcPr marL="68580" marR="68580" marT="0" marB="0">
-                        <a:blipFill>
-                          <a:blip r:embed="rId16"/>
-                          <a:stretch>
-                            <a:fillRect l="-855" t="-7143" r="-424786" b="-216071"/>
-                          </a:stretch>
-                        </a:blipFill>
-                      </a:tcPr>
-                    </a:tc>
-                    <a:tc>
-                      <a:txBody>
-                        <a:bodyPr/>
-                        <a:lstStyle/>
-                        <a:p>
-                          <a:endParaRPr lang="zh-CN"/>
-                        </a:p>
-                      </a:txBody>
-                      <a:tcPr marL="68580" marR="68580" marT="0" marB="0">
-                        <a:blipFill>
-                          <a:blip r:embed="rId16"/>
-                          <a:stretch>
-                            <a:fillRect l="-52444" t="-7143" r="-120889" b="-216071"/>
-                          </a:stretch>
-                        </a:blipFill>
-                      </a:tcPr>
-                    </a:tc>
-                    <a:tc>
-                      <a:txBody>
-                        <a:bodyPr/>
-                        <a:lstStyle/>
-                        <a:p>
-                          <a:endParaRPr lang="zh-CN"/>
-                        </a:p>
-                      </a:txBody>
-                      <a:tcPr marL="68580" marR="68580" marT="0" marB="0">
-                        <a:blipFill>
-                          <a:blip r:embed="rId16"/>
-                          <a:stretch>
-                            <a:fillRect l="-127985" t="-7143" r="-1493" b="-216071"/>
-                          </a:stretch>
-                        </a:blipFill>
-                      </a:tcPr>
-                    </a:tc>
-                    <a:extLst>
-                      <a:ext uri="{0D108BD9-81ED-4DB2-BD59-A6C34878D82A}">
-                        <a16:rowId xmlns:a16="http://schemas.microsoft.com/office/drawing/2014/main" val="850543838"/>
-                      </a:ext>
-                    </a:extLst>
-                  </a:tr>
-                  <a:tr h="359601">
-                    <a:tc>
-                      <a:txBody>
-                        <a:bodyPr/>
-                        <a:lstStyle/>
-                        <a:p>
-                          <a:endParaRPr lang="zh-CN"/>
-                        </a:p>
-                      </a:txBody>
-                      <a:tcPr marL="68580" marR="68580" marT="0" marB="0">
-                        <a:blipFill>
-                          <a:blip r:embed="rId16"/>
-                          <a:stretch>
-                            <a:fillRect l="-855" t="-100000" r="-424786" b="-101667"/>
-                          </a:stretch>
-                        </a:blipFill>
-                      </a:tcPr>
-                    </a:tc>
-                    <a:tc>
-                      <a:txBody>
-                        <a:bodyPr/>
-                        <a:lstStyle/>
-                        <a:p>
-                          <a:endParaRPr lang="zh-CN"/>
-                        </a:p>
-                      </a:txBody>
-                      <a:tcPr marL="68580" marR="68580" marT="0" marB="0" anchor="ctr">
-                        <a:blipFill>
-                          <a:blip r:embed="rId16"/>
-                          <a:stretch>
-                            <a:fillRect l="-52444" t="-100000" r="-120889" b="-101667"/>
-                          </a:stretch>
-                        </a:blipFill>
-                      </a:tcPr>
-                    </a:tc>
-                    <a:tc>
-                      <a:txBody>
-                        <a:bodyPr/>
-                        <a:lstStyle/>
-                        <a:p>
-                          <a:endParaRPr lang="zh-CN"/>
-                        </a:p>
-                      </a:txBody>
-                      <a:tcPr marL="68580" marR="68580" marT="0" marB="0">
-                        <a:blipFill>
-                          <a:blip r:embed="rId16"/>
-                          <a:stretch>
-                            <a:fillRect l="-127985" t="-100000" r="-1493" b="-101667"/>
-                          </a:stretch>
-                        </a:blipFill>
-                      </a:tcPr>
-                    </a:tc>
-                    <a:extLst>
-                      <a:ext uri="{0D108BD9-81ED-4DB2-BD59-A6C34878D82A}">
-                        <a16:rowId xmlns:a16="http://schemas.microsoft.com/office/drawing/2014/main" val="2162067582"/>
-                      </a:ext>
-                    </a:extLst>
-                  </a:tr>
-                  <a:tr h="359601">
-                    <a:tc>
-                      <a:txBody>
-                        <a:bodyPr/>
-                        <a:lstStyle/>
-                        <a:p>
-                          <a:endParaRPr lang="zh-CN"/>
-                        </a:p>
-                      </a:txBody>
-                      <a:tcPr marL="68580" marR="68580" marT="0" marB="0">
-                        <a:blipFill>
-                          <a:blip r:embed="rId16"/>
-                          <a:stretch>
-                            <a:fillRect l="-855" t="-203390" r="-424786" b="-3390"/>
-                          </a:stretch>
-                        </a:blipFill>
-                      </a:tcPr>
-                    </a:tc>
-                    <a:tc>
-                      <a:txBody>
-                        <a:bodyPr/>
-                        <a:lstStyle/>
-                        <a:p>
-                          <a:endParaRPr lang="zh-CN"/>
-                        </a:p>
-                      </a:txBody>
-                      <a:tcPr marL="68580" marR="68580" marT="0" marB="0">
-                        <a:blipFill>
-                          <a:blip r:embed="rId16"/>
-                          <a:stretch>
-                            <a:fillRect l="-52444" t="-203390" r="-120889" b="-3390"/>
-                          </a:stretch>
-                        </a:blipFill>
-                      </a:tcPr>
-                    </a:tc>
-                    <a:tc>
-                      <a:txBody>
-                        <a:bodyPr/>
-                        <a:lstStyle/>
-                        <a:p>
-                          <a:endParaRPr lang="zh-CN"/>
-                        </a:p>
-                      </a:txBody>
-                      <a:tcPr marL="68580" marR="68580" marT="0" marB="0">
-                        <a:blipFill>
-                          <a:blip r:embed="rId16"/>
-                          <a:stretch>
-                            <a:fillRect l="-127985" t="-203390" r="-1493" b="-3390"/>
-                          </a:stretch>
-                        </a:blipFill>
-                      </a:tcPr>
-                    </a:tc>
-                    <a:extLst>
-                      <a:ext uri="{0D108BD9-81ED-4DB2-BD59-A6C34878D82A}">
-                        <a16:rowId xmlns:a16="http://schemas.microsoft.com/office/drawing/2014/main" val="512285120"/>
-                      </a:ext>
-                    </a:extLst>
-                  </a:tr>
-                </a:tbl>
-              </a:graphicData>
-            </a:graphic>
-          </p:graphicFrame>
-        </mc:Fallback>
-      </mc:AlternateContent>
       <p:sp>
         <p:nvSpPr>
           <p:cNvPr id="1030" name="TextBox 1029">
@@ -10730,8 +9111,8 @@
         </p:nvSpPr>
         <p:spPr>
           <a:xfrm>
-            <a:off x="8715178" y="1435824"/>
-            <a:ext cx="1823041" cy="276999"/>
+            <a:off x="7908412" y="1585283"/>
+            <a:ext cx="2435183" cy="307777"/>
           </a:xfrm>
           <a:prstGeom prst="rect">
             <a:avLst/>
@@ -10746,14 +9127,14 @@
           <a:p>
             <a:pPr algn="ctr"/>
             <a:r>
-              <a:rPr lang="en-US" altLang="zh-CN" sz="1200" dirty="0">
+              <a:rPr lang="en-US" altLang="zh-CN" sz="1400" dirty="0">
                 <a:solidFill>
                   <a:schemeClr val="accent1"/>
                 </a:solidFill>
               </a:rPr>
               <a:t>Our Mechanism Design</a:t>
             </a:r>
-            <a:endParaRPr lang="zh-CN" altLang="en-US" sz="1200" dirty="0">
+            <a:endParaRPr lang="zh-CN" altLang="en-US" sz="1400" dirty="0">
               <a:solidFill>
                 <a:schemeClr val="accent1"/>
               </a:solidFill>
@@ -11152,6 +9533,1990 @@
               <a:t>5</a:t>
             </a:fld>
             <a:endParaRPr kumimoji="1" lang="zh-CN" altLang="en-US" dirty="0"/>
+          </a:p>
+        </p:txBody>
+      </p:sp>
+      <mc:AlternateContent xmlns:mc="http://schemas.openxmlformats.org/markup-compatibility/2006">
+        <mc:Choice xmlns:a14="http://schemas.microsoft.com/office/drawing/2010/main" Requires="a14">
+          <p:graphicFrame>
+            <p:nvGraphicFramePr>
+              <p:cNvPr id="2" name="Table 1">
+                <a:extLst>
+                  <a:ext uri="{FF2B5EF4-FFF2-40B4-BE49-F238E27FC236}">
+                    <a16:creationId xmlns:a16="http://schemas.microsoft.com/office/drawing/2014/main" id="{DBB1EC5E-2827-E938-CDC5-7A3CDAC08F6C}"/>
+                  </a:ext>
+                </a:extLst>
+              </p:cNvPr>
+              <p:cNvGraphicFramePr>
+                <a:graphicFrameLocks noGrp="1"/>
+              </p:cNvGraphicFramePr>
+              <p:nvPr>
+                <p:extLst>
+                  <p:ext uri="{D42A27DB-BD31-4B8C-83A1-F6EECF244321}">
+                    <p14:modId xmlns:p14="http://schemas.microsoft.com/office/powerpoint/2010/main" val="884466373"/>
+                  </p:ext>
+                </p:extLst>
+              </p:nvPr>
+            </p:nvGraphicFramePr>
+            <p:xfrm>
+              <a:off x="6393556" y="1898346"/>
+              <a:ext cx="5464897" cy="1002793"/>
+            </p:xfrm>
+            <a:graphic>
+              <a:graphicData uri="http://schemas.openxmlformats.org/drawingml/2006/table">
+                <a:tbl>
+                  <a:tblPr firstRow="1" firstCol="1" bandRow="1">
+                    <a:tableStyleId>{5C22544A-7EE6-4342-B048-85BDC9FD1C3A}</a:tableStyleId>
+                  </a:tblPr>
+                  <a:tblGrid>
+                    <a:gridCol w="833415">
+                      <a:extLst>
+                        <a:ext uri="{9D8B030D-6E8A-4147-A177-3AD203B41FA5}">
+                          <a16:colId xmlns:a16="http://schemas.microsoft.com/office/drawing/2014/main" val="2851847648"/>
+                        </a:ext>
+                      </a:extLst>
+                    </a:gridCol>
+                    <a:gridCol w="2255837">
+                      <a:extLst>
+                        <a:ext uri="{9D8B030D-6E8A-4147-A177-3AD203B41FA5}">
+                          <a16:colId xmlns:a16="http://schemas.microsoft.com/office/drawing/2014/main" val="32416059"/>
+                        </a:ext>
+                      </a:extLst>
+                    </a:gridCol>
+                    <a:gridCol w="2375645">
+                      <a:extLst>
+                        <a:ext uri="{9D8B030D-6E8A-4147-A177-3AD203B41FA5}">
+                          <a16:colId xmlns:a16="http://schemas.microsoft.com/office/drawing/2014/main" val="1315474887"/>
+                        </a:ext>
+                      </a:extLst>
+                    </a:gridCol>
+                  </a:tblGrid>
+                  <a:tr h="0">
+                    <a:tc>
+                      <a:txBody>
+                        <a:bodyPr/>
+                        <a:lstStyle/>
+                        <a:p>
+                          <a:pPr algn="just"/>
+                          <a14:m>
+                            <m:oMath xmlns:m="http://schemas.openxmlformats.org/officeDocument/2006/math">
+                              <m:d>
+                                <m:dPr>
+                                  <m:ctrlPr>
+                                    <a:rPr lang="zh-CN" sz="1050" kern="100">
+                                      <a:effectLst/>
+                                    </a:rPr>
+                                  </m:ctrlPr>
+                                </m:dPr>
+                                <m:e>
+                                  <m:sSub>
+                                    <m:sSubPr>
+                                      <m:ctrlPr>
+                                        <a:rPr lang="zh-CN" sz="1050" kern="100">
+                                          <a:effectLst/>
+                                        </a:rPr>
+                                      </m:ctrlPr>
+                                    </m:sSubPr>
+                                    <m:e>
+                                      <m:acc>
+                                        <m:accPr>
+                                          <m:chr m:val="̂"/>
+                                          <m:ctrlPr>
+                                            <a:rPr lang="zh-CN" sz="1050" kern="100">
+                                              <a:effectLst/>
+                                            </a:rPr>
+                                          </m:ctrlPr>
+                                        </m:accPr>
+                                        <m:e>
+                                          <m:r>
+                                            <a:rPr lang="en-US" sz="1050" kern="100">
+                                              <a:effectLst/>
+                                            </a:rPr>
+                                            <m:t>𝒀</m:t>
+                                          </m:r>
+                                        </m:e>
+                                      </m:acc>
+                                    </m:e>
+                                    <m:sub>
+                                      <m:r>
+                                        <a:rPr lang="en-US" sz="1050" kern="100">
+                                          <a:effectLst/>
+                                        </a:rPr>
+                                        <m:t>𝟏</m:t>
+                                      </m:r>
+                                    </m:sub>
+                                  </m:sSub>
+                                  <m:r>
+                                    <a:rPr lang="en-US" sz="1050" kern="100">
+                                      <a:effectLst/>
+                                    </a:rPr>
+                                    <m:t>,</m:t>
+                                  </m:r>
+                                  <m:sSub>
+                                    <m:sSubPr>
+                                      <m:ctrlPr>
+                                        <a:rPr lang="zh-CN" sz="1050" kern="100">
+                                          <a:effectLst/>
+                                        </a:rPr>
+                                      </m:ctrlPr>
+                                    </m:sSubPr>
+                                    <m:e>
+                                      <m:acc>
+                                        <m:accPr>
+                                          <m:chr m:val="̂"/>
+                                          <m:ctrlPr>
+                                            <a:rPr lang="zh-CN" sz="1050" kern="100">
+                                              <a:effectLst/>
+                                            </a:rPr>
+                                          </m:ctrlPr>
+                                        </m:accPr>
+                                        <m:e>
+                                          <m:r>
+                                            <a:rPr lang="en-US" sz="1050" kern="100">
+                                              <a:effectLst/>
+                                            </a:rPr>
+                                            <m:t>𝒀</m:t>
+                                          </m:r>
+                                        </m:e>
+                                      </m:acc>
+                                    </m:e>
+                                    <m:sub>
+                                      <m:r>
+                                        <a:rPr lang="en-US" sz="1050" kern="100">
+                                          <a:effectLst/>
+                                        </a:rPr>
+                                        <m:t>𝟐</m:t>
+                                      </m:r>
+                                    </m:sub>
+                                  </m:sSub>
+                                </m:e>
+                              </m:d>
+                            </m:oMath>
+                          </a14:m>
+                          <a:r>
+                            <a:rPr lang="en-US" sz="1050" kern="100">
+                              <a:effectLst/>
+                            </a:rPr>
+                            <a:t> Table</a:t>
+                          </a:r>
+                          <a:endParaRPr lang="zh-CN" sz="1050" kern="100">
+                            <a:effectLst/>
+                            <a:latin typeface="DengXian" panose="02010600030101010101" pitchFamily="2" charset="-122"/>
+                            <a:ea typeface="DengXian" panose="02010600030101010101" pitchFamily="2" charset="-122"/>
+                            <a:cs typeface="Times New Roman" panose="02020603050405020304" pitchFamily="18" charset="0"/>
+                          </a:endParaRPr>
+                        </a:p>
+                      </a:txBody>
+                      <a:tcPr marL="68580" marR="68580" marT="9525" marB="0"/>
+                    </a:tc>
+                    <a:tc>
+                      <a:txBody>
+                        <a:bodyPr/>
+                        <a:lstStyle/>
+                        <a:p>
+                          <a:pPr algn="just"/>
+                          <a14:m>
+                            <m:oMathPara xmlns:m="http://schemas.openxmlformats.org/officeDocument/2006/math">
+                              <m:oMathParaPr>
+                                <m:jc m:val="centerGroup"/>
+                              </m:oMathParaPr>
+                              <m:oMath xmlns:m="http://schemas.openxmlformats.org/officeDocument/2006/math">
+                                <m:sSub>
+                                  <m:sSubPr>
+                                    <m:ctrlPr>
+                                      <a:rPr lang="zh-CN" sz="1050" kern="100">
+                                        <a:effectLst/>
+                                      </a:rPr>
+                                    </m:ctrlPr>
+                                  </m:sSubPr>
+                                  <m:e>
+                                    <m:r>
+                                      <a:rPr lang="en-US" sz="1050" kern="100">
+                                        <a:effectLst/>
+                                      </a:rPr>
+                                      <m:t>𝒀</m:t>
+                                    </m:r>
+                                  </m:e>
+                                  <m:sub>
+                                    <m:r>
+                                      <a:rPr lang="en-US" sz="1050" kern="100">
+                                        <a:effectLst/>
+                                      </a:rPr>
+                                      <m:t>𝟏</m:t>
+                                    </m:r>
+                                  </m:sub>
+                                </m:sSub>
+                                <m:sSub>
+                                  <m:sSubPr>
+                                    <m:ctrlPr>
+                                      <a:rPr lang="zh-CN" sz="1050" kern="100">
+                                        <a:effectLst/>
+                                      </a:rPr>
+                                    </m:ctrlPr>
+                                  </m:sSubPr>
+                                  <m:e>
+                                    <m:r>
+                                      <a:rPr lang="en-US" sz="1050" kern="100">
+                                        <a:effectLst/>
+                                      </a:rPr>
+                                      <m:t>⊕</m:t>
+                                    </m:r>
+                                  </m:e>
+                                  <m:sub>
+                                    <m:r>
+                                      <a:rPr lang="en-US" sz="1050" kern="100">
+                                        <a:effectLst/>
+                                      </a:rPr>
+                                      <m:t>𝟏</m:t>
+                                    </m:r>
+                                  </m:sub>
+                                </m:sSub>
+                                <m:sSub>
+                                  <m:sSubPr>
+                                    <m:ctrlPr>
+                                      <a:rPr lang="zh-CN" sz="1050" kern="100">
+                                        <a:effectLst/>
+                                      </a:rPr>
+                                    </m:ctrlPr>
+                                  </m:sSubPr>
+                                  <m:e>
+                                    <m:r>
+                                      <a:rPr lang="en-US" sz="1050" kern="100">
+                                        <a:effectLst/>
+                                      </a:rPr>
+                                      <m:t>𝒀</m:t>
+                                    </m:r>
+                                  </m:e>
+                                  <m:sub>
+                                    <m:r>
+                                      <a:rPr lang="en-US" sz="1050" kern="100">
+                                        <a:effectLst/>
+                                      </a:rPr>
+                                      <m:t>𝟐</m:t>
+                                    </m:r>
+                                  </m:sub>
+                                </m:sSub>
+                              </m:oMath>
+                            </m:oMathPara>
+                          </a14:m>
+                          <a:endParaRPr lang="zh-CN" sz="1050" kern="100" dirty="0">
+                            <a:effectLst/>
+                            <a:latin typeface="DengXian" panose="02010600030101010101" pitchFamily="2" charset="-122"/>
+                            <a:ea typeface="DengXian" panose="02010600030101010101" pitchFamily="2" charset="-122"/>
+                            <a:cs typeface="Times New Roman" panose="02020603050405020304" pitchFamily="18" charset="0"/>
+                          </a:endParaRPr>
+                        </a:p>
+                      </a:txBody>
+                      <a:tcPr marL="68580" marR="68580" marT="9525" marB="0"/>
+                    </a:tc>
+                    <a:tc>
+                      <a:txBody>
+                        <a:bodyPr/>
+                        <a:lstStyle/>
+                        <a:p>
+                          <a:pPr algn="just"/>
+                          <a14:m>
+                            <m:oMathPara xmlns:m="http://schemas.openxmlformats.org/officeDocument/2006/math">
+                              <m:oMathParaPr>
+                                <m:jc m:val="centerGroup"/>
+                              </m:oMathParaPr>
+                              <m:oMath xmlns:m="http://schemas.openxmlformats.org/officeDocument/2006/math">
+                                <m:r>
+                                  <a:rPr lang="en-US" sz="1050" kern="100">
+                                    <a:effectLst/>
+                                  </a:rPr>
+                                  <m:t>¬</m:t>
+                                </m:r>
+                                <m:d>
+                                  <m:dPr>
+                                    <m:ctrlPr>
+                                      <a:rPr lang="zh-CN" sz="1050" kern="100">
+                                        <a:effectLst/>
+                                      </a:rPr>
+                                    </m:ctrlPr>
+                                  </m:dPr>
+                                  <m:e>
+                                    <m:sSub>
+                                      <m:sSubPr>
+                                        <m:ctrlPr>
+                                          <a:rPr lang="zh-CN" sz="1050" kern="100">
+                                            <a:effectLst/>
+                                          </a:rPr>
+                                        </m:ctrlPr>
+                                      </m:sSubPr>
+                                      <m:e>
+                                        <m:r>
+                                          <a:rPr lang="en-US" sz="1050" kern="100">
+                                            <a:effectLst/>
+                                          </a:rPr>
+                                          <m:t>𝒀</m:t>
+                                        </m:r>
+                                      </m:e>
+                                      <m:sub>
+                                        <m:r>
+                                          <a:rPr lang="en-US" sz="1050" kern="100">
+                                            <a:effectLst/>
+                                          </a:rPr>
+                                          <m:t>𝟏</m:t>
+                                        </m:r>
+                                      </m:sub>
+                                    </m:sSub>
+                                    <m:sSub>
+                                      <m:sSubPr>
+                                        <m:ctrlPr>
+                                          <a:rPr lang="zh-CN" sz="1050" kern="100">
+                                            <a:effectLst/>
+                                          </a:rPr>
+                                        </m:ctrlPr>
+                                      </m:sSubPr>
+                                      <m:e>
+                                        <m:r>
+                                          <a:rPr lang="en-US" sz="1050" kern="100">
+                                            <a:effectLst/>
+                                          </a:rPr>
+                                          <m:t>⊕</m:t>
+                                        </m:r>
+                                      </m:e>
+                                      <m:sub>
+                                        <m:r>
+                                          <a:rPr lang="en-US" sz="1050" kern="100">
+                                            <a:effectLst/>
+                                          </a:rPr>
+                                          <m:t>𝟏</m:t>
+                                        </m:r>
+                                      </m:sub>
+                                    </m:sSub>
+                                    <m:sSub>
+                                      <m:sSubPr>
+                                        <m:ctrlPr>
+                                          <a:rPr lang="zh-CN" sz="1050" kern="100">
+                                            <a:effectLst/>
+                                          </a:rPr>
+                                        </m:ctrlPr>
+                                      </m:sSubPr>
+                                      <m:e>
+                                        <m:r>
+                                          <a:rPr lang="en-US" sz="1050" kern="100">
+                                            <a:effectLst/>
+                                          </a:rPr>
+                                          <m:t>𝒀</m:t>
+                                        </m:r>
+                                      </m:e>
+                                      <m:sub>
+                                        <m:r>
+                                          <a:rPr lang="en-US" sz="1050" kern="100">
+                                            <a:effectLst/>
+                                          </a:rPr>
+                                          <m:t>𝟐</m:t>
+                                        </m:r>
+                                      </m:sub>
+                                    </m:sSub>
+                                  </m:e>
+                                </m:d>
+                              </m:oMath>
+                            </m:oMathPara>
+                          </a14:m>
+                          <a:endParaRPr lang="zh-CN" sz="1050" kern="100" dirty="0">
+                            <a:effectLst/>
+                            <a:latin typeface="DengXian" panose="02010600030101010101" pitchFamily="2" charset="-122"/>
+                            <a:ea typeface="DengXian" panose="02010600030101010101" pitchFamily="2" charset="-122"/>
+                            <a:cs typeface="Times New Roman" panose="02020603050405020304" pitchFamily="18" charset="0"/>
+                          </a:endParaRPr>
+                        </a:p>
+                      </a:txBody>
+                      <a:tcPr marL="68580" marR="68580" marT="9525" marB="0"/>
+                    </a:tc>
+                    <a:extLst>
+                      <a:ext uri="{0D108BD9-81ED-4DB2-BD59-A6C34878D82A}">
+                        <a16:rowId xmlns:a16="http://schemas.microsoft.com/office/drawing/2014/main" val="3027002951"/>
+                      </a:ext>
+                    </a:extLst>
+                  </a:tr>
+                  <a:tr h="0">
+                    <a:tc>
+                      <a:txBody>
+                        <a:bodyPr/>
+                        <a:lstStyle/>
+                        <a:p>
+                          <a:pPr algn="just"/>
+                          <a14:m>
+                            <m:oMathPara xmlns:m="http://schemas.openxmlformats.org/officeDocument/2006/math">
+                              <m:oMathParaPr>
+                                <m:jc m:val="centerGroup"/>
+                              </m:oMathParaPr>
+                              <m:oMath xmlns:m="http://schemas.openxmlformats.org/officeDocument/2006/math">
+                                <m:sSub>
+                                  <m:sSubPr>
+                                    <m:ctrlPr>
+                                      <a:rPr lang="zh-CN" sz="1050" kern="100">
+                                        <a:effectLst/>
+                                      </a:rPr>
+                                    </m:ctrlPr>
+                                  </m:sSubPr>
+                                  <m:e>
+                                    <m:r>
+                                      <a:rPr lang="en-US" sz="1050" kern="100">
+                                        <a:effectLst/>
+                                      </a:rPr>
+                                      <m:t>⊕</m:t>
+                                    </m:r>
+                                  </m:e>
+                                  <m:sub>
+                                    <m:r>
+                                      <a:rPr lang="en-US" sz="1050" kern="100">
+                                        <a:effectLst/>
+                                      </a:rPr>
+                                      <m:t>𝟏</m:t>
+                                    </m:r>
+                                  </m:sub>
+                                </m:sSub>
+                                <m:r>
+                                  <a:rPr lang="en-US" sz="1050" kern="100">
+                                    <a:effectLst/>
+                                  </a:rPr>
+                                  <m:t>≠</m:t>
+                                </m:r>
+                                <m:sSub>
+                                  <m:sSubPr>
+                                    <m:ctrlPr>
+                                      <a:rPr lang="zh-CN" sz="1050" kern="100">
+                                        <a:effectLst/>
+                                      </a:rPr>
+                                    </m:ctrlPr>
+                                  </m:sSubPr>
+                                  <m:e>
+                                    <m:r>
+                                      <a:rPr lang="en-US" sz="1050" kern="100">
+                                        <a:effectLst/>
+                                      </a:rPr>
+                                      <m:t>⊕</m:t>
+                                    </m:r>
+                                  </m:e>
+                                  <m:sub>
+                                    <m:r>
+                                      <a:rPr lang="en-US" sz="1050" kern="100">
+                                        <a:effectLst/>
+                                      </a:rPr>
+                                      <m:t>𝟐</m:t>
+                                    </m:r>
+                                  </m:sub>
+                                </m:sSub>
+                              </m:oMath>
+                            </m:oMathPara>
+                          </a14:m>
+                          <a:endParaRPr lang="zh-CN" sz="1050" kern="100">
+                            <a:effectLst/>
+                            <a:latin typeface="DengXian" panose="02010600030101010101" pitchFamily="2" charset="-122"/>
+                            <a:ea typeface="DengXian" panose="02010600030101010101" pitchFamily="2" charset="-122"/>
+                            <a:cs typeface="Times New Roman" panose="02020603050405020304" pitchFamily="18" charset="0"/>
+                          </a:endParaRPr>
+                        </a:p>
+                      </a:txBody>
+                      <a:tcPr marL="68580" marR="68580" marT="9525" marB="0"/>
+                    </a:tc>
+                    <a:tc>
+                      <a:txBody>
+                        <a:bodyPr/>
+                        <a:lstStyle/>
+                        <a:p>
+                          <a:pPr algn="just"/>
+                          <a14:m>
+                            <m:oMathPara xmlns:m="http://schemas.openxmlformats.org/officeDocument/2006/math">
+                              <m:oMathParaPr>
+                                <m:jc m:val="centerGroup"/>
+                              </m:oMathParaPr>
+                              <m:oMath xmlns:m="http://schemas.openxmlformats.org/officeDocument/2006/math">
+                                <m:d>
+                                  <m:dPr>
+                                    <m:ctrlPr>
+                                      <a:rPr lang="zh-CN" sz="1050" kern="100">
+                                        <a:effectLst/>
+                                      </a:rPr>
+                                    </m:ctrlPr>
+                                  </m:dPr>
+                                  <m:e>
+                                    <m:sSub>
+                                      <m:sSubPr>
+                                        <m:ctrlPr>
+                                          <a:rPr lang="zh-CN" sz="1050" kern="100">
+                                            <a:effectLst/>
+                                          </a:rPr>
+                                        </m:ctrlPr>
+                                      </m:sSubPr>
+                                      <m:e>
+                                        <m:r>
+                                          <a:rPr lang="en-US" sz="1050" kern="100">
+                                            <a:effectLst/>
+                                          </a:rPr>
+                                          <m:t>𝑌</m:t>
+                                        </m:r>
+                                      </m:e>
+                                      <m:sub>
+                                        <m:r>
+                                          <a:rPr lang="en-US" sz="1050" kern="100">
+                                            <a:effectLst/>
+                                          </a:rPr>
+                                          <m:t>1</m:t>
+                                        </m:r>
+                                      </m:sub>
+                                    </m:sSub>
+                                    <m:r>
+                                      <a:rPr lang="en-US" sz="1050" kern="100">
+                                        <a:effectLst/>
+                                      </a:rPr>
+                                      <m:t>,</m:t>
+                                    </m:r>
+                                    <m:sSub>
+                                      <m:sSubPr>
+                                        <m:ctrlPr>
+                                          <a:rPr lang="zh-CN" sz="1050" kern="100">
+                                            <a:effectLst/>
+                                          </a:rPr>
+                                        </m:ctrlPr>
+                                      </m:sSubPr>
+                                      <m:e>
+                                        <m:r>
+                                          <a:rPr lang="en-US" sz="1050" kern="100">
+                                            <a:effectLst/>
+                                          </a:rPr>
+                                          <m:t>𝑌</m:t>
+                                        </m:r>
+                                      </m:e>
+                                      <m:sub>
+                                        <m:r>
+                                          <a:rPr lang="en-US" sz="1050" kern="100">
+                                            <a:effectLst/>
+                                          </a:rPr>
+                                          <m:t>2</m:t>
+                                        </m:r>
+                                      </m:sub>
+                                    </m:sSub>
+                                  </m:e>
+                                </m:d>
+                              </m:oMath>
+                            </m:oMathPara>
+                          </a14:m>
+                          <a:endParaRPr lang="zh-CN" sz="1050" kern="100">
+                            <a:effectLst/>
+                            <a:latin typeface="DengXian" panose="02010600030101010101" pitchFamily="2" charset="-122"/>
+                            <a:ea typeface="DengXian" panose="02010600030101010101" pitchFamily="2" charset="-122"/>
+                            <a:cs typeface="Times New Roman" panose="02020603050405020304" pitchFamily="18" charset="0"/>
+                          </a:endParaRPr>
+                        </a:p>
+                      </a:txBody>
+                      <a:tcPr marL="68580" marR="68580" marT="9525" marB="0" anchor="ctr"/>
+                    </a:tc>
+                    <a:tc>
+                      <a:txBody>
+                        <a:bodyPr/>
+                        <a:lstStyle/>
+                        <a:p>
+                          <a:pPr algn="just"/>
+                          <a14:m>
+                            <m:oMathPara xmlns:m="http://schemas.openxmlformats.org/officeDocument/2006/math">
+                              <m:oMathParaPr>
+                                <m:jc m:val="centerGroup"/>
+                              </m:oMathParaPr>
+                              <m:oMath xmlns:m="http://schemas.openxmlformats.org/officeDocument/2006/math">
+                                <m:d>
+                                  <m:dPr>
+                                    <m:ctrlPr>
+                                      <a:rPr lang="zh-CN" sz="1050" kern="100">
+                                        <a:effectLst/>
+                                      </a:rPr>
+                                    </m:ctrlPr>
+                                  </m:dPr>
+                                  <m:e>
+                                    <m:f>
+                                      <m:fPr>
+                                        <m:ctrlPr>
+                                          <a:rPr lang="zh-CN" sz="1050" kern="100">
+                                            <a:effectLst/>
+                                          </a:rPr>
+                                        </m:ctrlPr>
+                                      </m:fPr>
+                                      <m:num>
+                                        <m:sSub>
+                                          <m:sSubPr>
+                                            <m:ctrlPr>
+                                              <a:rPr lang="zh-CN" sz="1050" kern="100">
+                                                <a:effectLst/>
+                                              </a:rPr>
+                                            </m:ctrlPr>
+                                          </m:sSubPr>
+                                          <m:e>
+                                            <m:r>
+                                              <a:rPr lang="en-US" sz="1050" kern="100">
+                                                <a:effectLst/>
+                                              </a:rPr>
+                                              <m:t>𝑌</m:t>
+                                            </m:r>
+                                          </m:e>
+                                          <m:sub>
+                                            <m:r>
+                                              <a:rPr lang="en-US" sz="1050" kern="100">
+                                                <a:effectLst/>
+                                              </a:rPr>
+                                              <m:t>1</m:t>
+                                            </m:r>
+                                          </m:sub>
+                                        </m:sSub>
+                                        <m:r>
+                                          <a:rPr lang="en-US" sz="1050" kern="100">
+                                            <a:effectLst/>
+                                          </a:rPr>
+                                          <m:t>+</m:t>
+                                        </m:r>
+                                        <m:sSub>
+                                          <m:sSubPr>
+                                            <m:ctrlPr>
+                                              <a:rPr lang="zh-CN" sz="1050" kern="100">
+                                                <a:effectLst/>
+                                              </a:rPr>
+                                            </m:ctrlPr>
+                                          </m:sSubPr>
+                                          <m:e>
+                                            <m:r>
+                                              <a:rPr lang="en-US" sz="1050" kern="100">
+                                                <a:effectLst/>
+                                              </a:rPr>
+                                              <m:t>𝑌</m:t>
+                                            </m:r>
+                                          </m:e>
+                                          <m:sub>
+                                            <m:r>
+                                              <a:rPr lang="en-US" sz="1050" kern="100">
+                                                <a:effectLst/>
+                                              </a:rPr>
+                                              <m:t>2</m:t>
+                                            </m:r>
+                                          </m:sub>
+                                        </m:sSub>
+                                      </m:num>
+                                      <m:den>
+                                        <m:r>
+                                          <a:rPr lang="en-US" sz="1050" kern="100">
+                                            <a:effectLst/>
+                                          </a:rPr>
+                                          <m:t>2</m:t>
+                                        </m:r>
+                                      </m:den>
+                                    </m:f>
+                                    <m:r>
+                                      <a:rPr lang="en-US" sz="1050" kern="100">
+                                        <a:effectLst/>
+                                      </a:rPr>
+                                      <m:t>,</m:t>
+                                    </m:r>
+                                    <m:f>
+                                      <m:fPr>
+                                        <m:ctrlPr>
+                                          <a:rPr lang="zh-CN" sz="1050" kern="100">
+                                            <a:effectLst/>
+                                          </a:rPr>
+                                        </m:ctrlPr>
+                                      </m:fPr>
+                                      <m:num>
+                                        <m:sSub>
+                                          <m:sSubPr>
+                                            <m:ctrlPr>
+                                              <a:rPr lang="zh-CN" sz="1050" kern="100">
+                                                <a:effectLst/>
+                                              </a:rPr>
+                                            </m:ctrlPr>
+                                          </m:sSubPr>
+                                          <m:e>
+                                            <m:r>
+                                              <a:rPr lang="en-US" sz="1050" kern="100">
+                                                <a:effectLst/>
+                                              </a:rPr>
+                                              <m:t>𝑌</m:t>
+                                            </m:r>
+                                          </m:e>
+                                          <m:sub>
+                                            <m:r>
+                                              <a:rPr lang="en-US" sz="1050" kern="100">
+                                                <a:effectLst/>
+                                              </a:rPr>
+                                              <m:t>1</m:t>
+                                            </m:r>
+                                          </m:sub>
+                                        </m:sSub>
+                                        <m:r>
+                                          <a:rPr lang="en-US" sz="1050" kern="100">
+                                            <a:effectLst/>
+                                          </a:rPr>
+                                          <m:t>+</m:t>
+                                        </m:r>
+                                        <m:sSub>
+                                          <m:sSubPr>
+                                            <m:ctrlPr>
+                                              <a:rPr lang="zh-CN" sz="1050" kern="100">
+                                                <a:effectLst/>
+                                              </a:rPr>
+                                            </m:ctrlPr>
+                                          </m:sSubPr>
+                                          <m:e>
+                                            <m:r>
+                                              <a:rPr lang="en-US" sz="1050" kern="100">
+                                                <a:effectLst/>
+                                              </a:rPr>
+                                              <m:t>𝑌</m:t>
+                                            </m:r>
+                                          </m:e>
+                                          <m:sub>
+                                            <m:r>
+                                              <a:rPr lang="en-US" sz="1050" kern="100">
+                                                <a:effectLst/>
+                                              </a:rPr>
+                                              <m:t>2</m:t>
+                                            </m:r>
+                                          </m:sub>
+                                        </m:sSub>
+                                      </m:num>
+                                      <m:den>
+                                        <m:r>
+                                          <a:rPr lang="en-US" sz="1050" kern="100">
+                                            <a:effectLst/>
+                                          </a:rPr>
+                                          <m:t>2</m:t>
+                                        </m:r>
+                                      </m:den>
+                                    </m:f>
+                                  </m:e>
+                                </m:d>
+                              </m:oMath>
+                            </m:oMathPara>
+                          </a14:m>
+                          <a:endParaRPr lang="zh-CN" sz="1050" kern="100" dirty="0">
+                            <a:effectLst/>
+                            <a:latin typeface="DengXian" panose="02010600030101010101" pitchFamily="2" charset="-122"/>
+                            <a:ea typeface="DengXian" panose="02010600030101010101" pitchFamily="2" charset="-122"/>
+                            <a:cs typeface="Times New Roman" panose="02020603050405020304" pitchFamily="18" charset="0"/>
+                          </a:endParaRPr>
+                        </a:p>
+                      </a:txBody>
+                      <a:tcPr marL="68580" marR="68580" marT="9525" marB="0"/>
+                    </a:tc>
+                    <a:extLst>
+                      <a:ext uri="{0D108BD9-81ED-4DB2-BD59-A6C34878D82A}">
+                        <a16:rowId xmlns:a16="http://schemas.microsoft.com/office/drawing/2014/main" val="712940748"/>
+                      </a:ext>
+                    </a:extLst>
+                  </a:tr>
+                  <a:tr h="0">
+                    <a:tc>
+                      <a:txBody>
+                        <a:bodyPr/>
+                        <a:lstStyle/>
+                        <a:p>
+                          <a:pPr algn="just"/>
+                          <a14:m>
+                            <m:oMathPara xmlns:m="http://schemas.openxmlformats.org/officeDocument/2006/math">
+                              <m:oMathParaPr>
+                                <m:jc m:val="centerGroup"/>
+                              </m:oMathParaPr>
+                              <m:oMath xmlns:m="http://schemas.openxmlformats.org/officeDocument/2006/math">
+                                <m:sSub>
+                                  <m:sSubPr>
+                                    <m:ctrlPr>
+                                      <a:rPr lang="zh-CN" sz="1050" kern="100">
+                                        <a:effectLst/>
+                                      </a:rPr>
+                                    </m:ctrlPr>
+                                  </m:sSubPr>
+                                  <m:e>
+                                    <m:r>
+                                      <a:rPr lang="en-US" sz="1050" kern="100">
+                                        <a:effectLst/>
+                                      </a:rPr>
+                                      <m:t>⊕</m:t>
+                                    </m:r>
+                                  </m:e>
+                                  <m:sub>
+                                    <m:r>
+                                      <a:rPr lang="en-US" sz="1050" kern="100">
+                                        <a:effectLst/>
+                                      </a:rPr>
+                                      <m:t>𝟏</m:t>
+                                    </m:r>
+                                  </m:sub>
+                                </m:sSub>
+                                <m:r>
+                                  <a:rPr lang="en-US" sz="1050" kern="100">
+                                    <a:effectLst/>
+                                  </a:rPr>
+                                  <m:t>=</m:t>
+                                </m:r>
+                                <m:sSub>
+                                  <m:sSubPr>
+                                    <m:ctrlPr>
+                                      <a:rPr lang="zh-CN" sz="1050" kern="100">
+                                        <a:effectLst/>
+                                      </a:rPr>
+                                    </m:ctrlPr>
+                                  </m:sSubPr>
+                                  <m:e>
+                                    <m:r>
+                                      <a:rPr lang="en-US" sz="1050" kern="100">
+                                        <a:effectLst/>
+                                      </a:rPr>
+                                      <m:t>⊕</m:t>
+                                    </m:r>
+                                  </m:e>
+                                  <m:sub>
+                                    <m:r>
+                                      <a:rPr lang="en-US" sz="1050" kern="100">
+                                        <a:effectLst/>
+                                      </a:rPr>
+                                      <m:t>𝟐</m:t>
+                                    </m:r>
+                                  </m:sub>
+                                </m:sSub>
+                              </m:oMath>
+                            </m:oMathPara>
+                          </a14:m>
+                          <a:endParaRPr lang="zh-CN" sz="1050" kern="100">
+                            <a:effectLst/>
+                            <a:latin typeface="DengXian" panose="02010600030101010101" pitchFamily="2" charset="-122"/>
+                            <a:ea typeface="DengXian" panose="02010600030101010101" pitchFamily="2" charset="-122"/>
+                            <a:cs typeface="Times New Roman" panose="02020603050405020304" pitchFamily="18" charset="0"/>
+                          </a:endParaRPr>
+                        </a:p>
+                      </a:txBody>
+                      <a:tcPr marL="68580" marR="68580" marT="9525" marB="0"/>
+                    </a:tc>
+                    <a:tc>
+                      <a:txBody>
+                        <a:bodyPr/>
+                        <a:lstStyle/>
+                        <a:p>
+                          <a:pPr algn="just"/>
+                          <a14:m>
+                            <m:oMathPara xmlns:m="http://schemas.openxmlformats.org/officeDocument/2006/math">
+                              <m:oMathParaPr>
+                                <m:jc m:val="centerGroup"/>
+                              </m:oMathParaPr>
+                              <m:oMath xmlns:m="http://schemas.openxmlformats.org/officeDocument/2006/math">
+                                <m:d>
+                                  <m:dPr>
+                                    <m:ctrlPr>
+                                      <a:rPr lang="zh-CN" sz="800" kern="100">
+                                        <a:effectLst/>
+                                      </a:rPr>
+                                    </m:ctrlPr>
+                                  </m:dPr>
+                                  <m:e>
+                                    <m:sSub>
+                                      <m:sSubPr>
+                                        <m:ctrlPr>
+                                          <a:rPr lang="zh-CN" sz="800" kern="100">
+                                            <a:effectLst/>
+                                          </a:rPr>
+                                        </m:ctrlPr>
+                                      </m:sSubPr>
+                                      <m:e>
+                                        <m:r>
+                                          <a:rPr lang="en-US" sz="800" kern="100">
+                                            <a:effectLst/>
+                                          </a:rPr>
+                                          <m:t>𝑌</m:t>
+                                        </m:r>
+                                      </m:e>
+                                      <m:sub>
+                                        <m:r>
+                                          <a:rPr lang="en-US" sz="800" kern="100">
+                                            <a:effectLst/>
+                                          </a:rPr>
+                                          <m:t>1</m:t>
+                                        </m:r>
+                                      </m:sub>
+                                    </m:sSub>
+                                    <m:r>
+                                      <a:rPr lang="en-US" sz="800" kern="100">
+                                        <a:effectLst/>
+                                      </a:rPr>
+                                      <m:t>−</m:t>
+                                    </m:r>
+                                    <m:f>
+                                      <m:fPr>
+                                        <m:ctrlPr>
+                                          <a:rPr lang="zh-CN" sz="800" kern="100">
+                                            <a:effectLst/>
+                                          </a:rPr>
+                                        </m:ctrlPr>
+                                      </m:fPr>
+                                      <m:num>
+                                        <m:sSub>
+                                          <m:sSubPr>
+                                            <m:ctrlPr>
+                                              <a:rPr lang="zh-CN" sz="800" kern="100">
+                                                <a:effectLst/>
+                                              </a:rPr>
+                                            </m:ctrlPr>
+                                          </m:sSubPr>
+                                          <m:e>
+                                            <m:r>
+                                              <a:rPr lang="en-US" sz="800" kern="100">
+                                                <a:effectLst/>
+                                              </a:rPr>
+                                              <m:t>𝑌</m:t>
+                                            </m:r>
+                                          </m:e>
+                                          <m:sub>
+                                            <m:r>
+                                              <a:rPr lang="en-US" sz="800" kern="100">
+                                                <a:effectLst/>
+                                              </a:rPr>
+                                              <m:t>2</m:t>
+                                            </m:r>
+                                          </m:sub>
+                                        </m:sSub>
+                                        <m:r>
+                                          <a:rPr lang="en-US" sz="800" kern="100">
+                                            <a:effectLst/>
+                                          </a:rPr>
+                                          <m:t>−</m:t>
+                                        </m:r>
+                                        <m:sSub>
+                                          <m:sSubPr>
+                                            <m:ctrlPr>
+                                              <a:rPr lang="zh-CN" sz="800" kern="100">
+                                                <a:effectLst/>
+                                              </a:rPr>
+                                            </m:ctrlPr>
+                                          </m:sSubPr>
+                                          <m:e>
+                                            <m:r>
+                                              <a:rPr lang="en-US" sz="800" kern="100">
+                                                <a:effectLst/>
+                                              </a:rPr>
+                                              <m:t>𝑌</m:t>
+                                            </m:r>
+                                          </m:e>
+                                          <m:sub>
+                                            <m:r>
+                                              <a:rPr lang="en-US" sz="800" kern="100">
+                                                <a:effectLst/>
+                                              </a:rPr>
+                                              <m:t>1</m:t>
+                                            </m:r>
+                                          </m:sub>
+                                        </m:sSub>
+                                      </m:num>
+                                      <m:den>
+                                        <m:r>
+                                          <a:rPr lang="en-US" sz="800" kern="100">
+                                            <a:effectLst/>
+                                          </a:rPr>
+                                          <m:t>2</m:t>
+                                        </m:r>
+                                      </m:den>
+                                    </m:f>
+                                    <m:r>
+                                      <a:rPr lang="en-US" sz="800" kern="100">
+                                        <a:effectLst/>
+                                      </a:rPr>
+                                      <m:t>𝕀</m:t>
+                                    </m:r>
+                                    <m:d>
+                                      <m:dPr>
+                                        <m:begChr m:val="["/>
+                                        <m:endChr m:val="]"/>
+                                        <m:ctrlPr>
+                                          <a:rPr lang="zh-CN" sz="800" kern="100">
+                                            <a:effectLst/>
+                                          </a:rPr>
+                                        </m:ctrlPr>
+                                      </m:dPr>
+                                      <m:e>
+                                        <m:sSub>
+                                          <m:sSubPr>
+                                            <m:ctrlPr>
+                                              <a:rPr lang="zh-CN" sz="800" kern="100">
+                                                <a:effectLst/>
+                                              </a:rPr>
+                                            </m:ctrlPr>
+                                          </m:sSubPr>
+                                          <m:e>
+                                            <m:r>
+                                              <a:rPr lang="en-US" sz="800" kern="100">
+                                                <a:effectLst/>
+                                              </a:rPr>
+                                              <m:t>𝑌</m:t>
+                                            </m:r>
+                                          </m:e>
+                                          <m:sub>
+                                            <m:r>
+                                              <a:rPr lang="en-US" sz="800" kern="100">
+                                                <a:effectLst/>
+                                              </a:rPr>
+                                              <m:t>1</m:t>
+                                            </m:r>
+                                          </m:sub>
+                                        </m:sSub>
+                                        <m:r>
+                                          <a:rPr lang="en-US" sz="800" kern="100">
+                                            <a:effectLst/>
+                                          </a:rPr>
+                                          <m:t>&lt;</m:t>
+                                        </m:r>
+                                        <m:sSub>
+                                          <m:sSubPr>
+                                            <m:ctrlPr>
+                                              <a:rPr lang="zh-CN" sz="800" kern="100">
+                                                <a:effectLst/>
+                                              </a:rPr>
+                                            </m:ctrlPr>
+                                          </m:sSubPr>
+                                          <m:e>
+                                            <m:r>
+                                              <a:rPr lang="en-US" sz="800" kern="100">
+                                                <a:effectLst/>
+                                              </a:rPr>
+                                              <m:t>𝑌</m:t>
+                                            </m:r>
+                                          </m:e>
+                                          <m:sub>
+                                            <m:r>
+                                              <a:rPr lang="en-US" sz="800" kern="100">
+                                                <a:effectLst/>
+                                              </a:rPr>
+                                              <m:t>2</m:t>
+                                            </m:r>
+                                          </m:sub>
+                                        </m:sSub>
+                                      </m:e>
+                                    </m:d>
+                                    <m:r>
+                                      <a:rPr lang="en-US" sz="800" kern="100">
+                                        <a:effectLst/>
+                                      </a:rPr>
+                                      <m:t>,</m:t>
+                                    </m:r>
+                                    <m:sSub>
+                                      <m:sSubPr>
+                                        <m:ctrlPr>
+                                          <a:rPr lang="zh-CN" sz="800" kern="100">
+                                            <a:effectLst/>
+                                          </a:rPr>
+                                        </m:ctrlPr>
+                                      </m:sSubPr>
+                                      <m:e>
+                                        <m:r>
+                                          <a:rPr lang="en-US" sz="800" kern="100">
+                                            <a:effectLst/>
+                                          </a:rPr>
+                                          <m:t>𝑌</m:t>
+                                        </m:r>
+                                      </m:e>
+                                      <m:sub>
+                                        <m:r>
+                                          <a:rPr lang="en-US" sz="800" kern="100">
+                                            <a:effectLst/>
+                                          </a:rPr>
+                                          <m:t>2</m:t>
+                                        </m:r>
+                                      </m:sub>
+                                    </m:sSub>
+                                    <m:r>
+                                      <a:rPr lang="en-US" sz="800" kern="100">
+                                        <a:effectLst/>
+                                      </a:rPr>
+                                      <m:t>−</m:t>
+                                    </m:r>
+                                    <m:f>
+                                      <m:fPr>
+                                        <m:ctrlPr>
+                                          <a:rPr lang="zh-CN" sz="800" kern="100">
+                                            <a:effectLst/>
+                                          </a:rPr>
+                                        </m:ctrlPr>
+                                      </m:fPr>
+                                      <m:num>
+                                        <m:sSub>
+                                          <m:sSubPr>
+                                            <m:ctrlPr>
+                                              <a:rPr lang="zh-CN" sz="800" kern="100">
+                                                <a:effectLst/>
+                                              </a:rPr>
+                                            </m:ctrlPr>
+                                          </m:sSubPr>
+                                          <m:e>
+                                            <m:r>
+                                              <a:rPr lang="en-US" sz="800" kern="100">
+                                                <a:effectLst/>
+                                              </a:rPr>
+                                              <m:t>𝑌</m:t>
+                                            </m:r>
+                                          </m:e>
+                                          <m:sub>
+                                            <m:r>
+                                              <a:rPr lang="en-US" sz="800" kern="100">
+                                                <a:effectLst/>
+                                              </a:rPr>
+                                              <m:t>1</m:t>
+                                            </m:r>
+                                          </m:sub>
+                                        </m:sSub>
+                                        <m:r>
+                                          <a:rPr lang="en-US" sz="800" kern="100">
+                                            <a:effectLst/>
+                                          </a:rPr>
+                                          <m:t>−</m:t>
+                                        </m:r>
+                                        <m:sSub>
+                                          <m:sSubPr>
+                                            <m:ctrlPr>
+                                              <a:rPr lang="zh-CN" sz="800" kern="100">
+                                                <a:effectLst/>
+                                              </a:rPr>
+                                            </m:ctrlPr>
+                                          </m:sSubPr>
+                                          <m:e>
+                                            <m:r>
+                                              <a:rPr lang="en-US" sz="800" kern="100">
+                                                <a:effectLst/>
+                                              </a:rPr>
+                                              <m:t>𝑌</m:t>
+                                            </m:r>
+                                          </m:e>
+                                          <m:sub>
+                                            <m:r>
+                                              <a:rPr lang="en-US" sz="800" kern="100">
+                                                <a:effectLst/>
+                                              </a:rPr>
+                                              <m:t>2</m:t>
+                                            </m:r>
+                                          </m:sub>
+                                        </m:sSub>
+                                      </m:num>
+                                      <m:den>
+                                        <m:r>
+                                          <a:rPr lang="en-US" sz="800" kern="100">
+                                            <a:effectLst/>
+                                          </a:rPr>
+                                          <m:t>2</m:t>
+                                        </m:r>
+                                      </m:den>
+                                    </m:f>
+                                    <m:r>
+                                      <a:rPr lang="en-US" sz="800" kern="100">
+                                        <a:effectLst/>
+                                      </a:rPr>
+                                      <m:t>𝕀</m:t>
+                                    </m:r>
+                                    <m:d>
+                                      <m:dPr>
+                                        <m:begChr m:val="["/>
+                                        <m:endChr m:val="]"/>
+                                        <m:ctrlPr>
+                                          <a:rPr lang="zh-CN" sz="800" kern="100">
+                                            <a:effectLst/>
+                                          </a:rPr>
+                                        </m:ctrlPr>
+                                      </m:dPr>
+                                      <m:e>
+                                        <m:sSub>
+                                          <m:sSubPr>
+                                            <m:ctrlPr>
+                                              <a:rPr lang="zh-CN" sz="800" kern="100">
+                                                <a:effectLst/>
+                                              </a:rPr>
+                                            </m:ctrlPr>
+                                          </m:sSubPr>
+                                          <m:e>
+                                            <m:r>
+                                              <a:rPr lang="en-US" sz="800" kern="100">
+                                                <a:effectLst/>
+                                              </a:rPr>
+                                              <m:t>𝑌</m:t>
+                                            </m:r>
+                                          </m:e>
+                                          <m:sub>
+                                            <m:r>
+                                              <a:rPr lang="en-US" sz="800" kern="100">
+                                                <a:effectLst/>
+                                              </a:rPr>
+                                              <m:t>1</m:t>
+                                            </m:r>
+                                          </m:sub>
+                                        </m:sSub>
+                                        <m:r>
+                                          <a:rPr lang="en-US" sz="800" kern="100">
+                                            <a:effectLst/>
+                                          </a:rPr>
+                                          <m:t>&gt;</m:t>
+                                        </m:r>
+                                        <m:sSub>
+                                          <m:sSubPr>
+                                            <m:ctrlPr>
+                                              <a:rPr lang="zh-CN" sz="800" kern="100">
+                                                <a:effectLst/>
+                                              </a:rPr>
+                                            </m:ctrlPr>
+                                          </m:sSubPr>
+                                          <m:e>
+                                            <m:r>
+                                              <a:rPr lang="en-US" sz="800" kern="100">
+                                                <a:effectLst/>
+                                              </a:rPr>
+                                              <m:t>𝑌</m:t>
+                                            </m:r>
+                                          </m:e>
+                                          <m:sub>
+                                            <m:r>
+                                              <a:rPr lang="en-US" sz="800" kern="100">
+                                                <a:effectLst/>
+                                              </a:rPr>
+                                              <m:t>2</m:t>
+                                            </m:r>
+                                          </m:sub>
+                                        </m:sSub>
+                                      </m:e>
+                                    </m:d>
+                                    <m:r>
+                                      <a:rPr lang="en-US" sz="800" kern="100">
+                                        <a:effectLst/>
+                                      </a:rPr>
+                                      <m:t> </m:t>
+                                    </m:r>
+                                  </m:e>
+                                </m:d>
+                              </m:oMath>
+                            </m:oMathPara>
+                          </a14:m>
+                          <a:endParaRPr lang="zh-CN" sz="800" kern="100" dirty="0">
+                            <a:effectLst/>
+                            <a:latin typeface="DengXian" panose="02010600030101010101" pitchFamily="2" charset="-122"/>
+                            <a:ea typeface="DengXian" panose="02010600030101010101" pitchFamily="2" charset="-122"/>
+                            <a:cs typeface="Times New Roman" panose="02020603050405020304" pitchFamily="18" charset="0"/>
+                          </a:endParaRPr>
+                        </a:p>
+                      </a:txBody>
+                      <a:tcPr marL="68580" marR="68580" marT="9525" marB="0"/>
+                    </a:tc>
+                    <a:tc>
+                      <a:txBody>
+                        <a:bodyPr/>
+                        <a:lstStyle/>
+                        <a:p>
+                          <a:pPr algn="just"/>
+                          <a14:m>
+                            <m:oMathPara xmlns:m="http://schemas.openxmlformats.org/officeDocument/2006/math">
+                              <m:oMathParaPr>
+                                <m:jc m:val="centerGroup"/>
+                              </m:oMathParaPr>
+                              <m:oMath xmlns:m="http://schemas.openxmlformats.org/officeDocument/2006/math">
+                                <m:d>
+                                  <m:dPr>
+                                    <m:ctrlPr>
+                                      <a:rPr lang="zh-CN" sz="800" kern="100">
+                                        <a:effectLst/>
+                                      </a:rPr>
+                                    </m:ctrlPr>
+                                  </m:dPr>
+                                  <m:e>
+                                    <m:sSub>
+                                      <m:sSubPr>
+                                        <m:ctrlPr>
+                                          <a:rPr lang="zh-CN" sz="800" kern="100">
+                                            <a:effectLst/>
+                                          </a:rPr>
+                                        </m:ctrlPr>
+                                      </m:sSubPr>
+                                      <m:e>
+                                        <m:r>
+                                          <a:rPr lang="en-US" sz="800" kern="100">
+                                            <a:effectLst/>
+                                          </a:rPr>
+                                          <m:t>𝑌</m:t>
+                                        </m:r>
+                                      </m:e>
+                                      <m:sub>
+                                        <m:r>
+                                          <a:rPr lang="en-US" sz="800" kern="100">
+                                            <a:effectLst/>
+                                          </a:rPr>
+                                          <m:t>1</m:t>
+                                        </m:r>
+                                      </m:sub>
+                                    </m:sSub>
+                                    <m:r>
+                                      <a:rPr lang="en-US" sz="800" kern="100">
+                                        <a:effectLst/>
+                                      </a:rPr>
+                                      <m:t>−</m:t>
+                                    </m:r>
+                                    <m:f>
+                                      <m:fPr>
+                                        <m:ctrlPr>
+                                          <a:rPr lang="zh-CN" sz="800" kern="100">
+                                            <a:effectLst/>
+                                          </a:rPr>
+                                        </m:ctrlPr>
+                                      </m:fPr>
+                                      <m:num>
+                                        <m:sSub>
+                                          <m:sSubPr>
+                                            <m:ctrlPr>
+                                              <a:rPr lang="zh-CN" sz="800" kern="100">
+                                                <a:effectLst/>
+                                              </a:rPr>
+                                            </m:ctrlPr>
+                                          </m:sSubPr>
+                                          <m:e>
+                                            <m:r>
+                                              <a:rPr lang="en-US" sz="800" kern="100">
+                                                <a:effectLst/>
+                                              </a:rPr>
+                                              <m:t>𝑌</m:t>
+                                            </m:r>
+                                          </m:e>
+                                          <m:sub>
+                                            <m:r>
+                                              <a:rPr lang="en-US" sz="800" kern="100">
+                                                <a:effectLst/>
+                                              </a:rPr>
+                                              <m:t>2</m:t>
+                                            </m:r>
+                                          </m:sub>
+                                        </m:sSub>
+                                        <m:r>
+                                          <a:rPr lang="en-US" sz="800" kern="100">
+                                            <a:effectLst/>
+                                          </a:rPr>
+                                          <m:t>−</m:t>
+                                        </m:r>
+                                        <m:sSub>
+                                          <m:sSubPr>
+                                            <m:ctrlPr>
+                                              <a:rPr lang="zh-CN" sz="800" kern="100">
+                                                <a:effectLst/>
+                                              </a:rPr>
+                                            </m:ctrlPr>
+                                          </m:sSubPr>
+                                          <m:e>
+                                            <m:r>
+                                              <a:rPr lang="en-US" sz="800" kern="100">
+                                                <a:effectLst/>
+                                              </a:rPr>
+                                              <m:t>𝑌</m:t>
+                                            </m:r>
+                                          </m:e>
+                                          <m:sub>
+                                            <m:r>
+                                              <a:rPr lang="en-US" sz="800" kern="100">
+                                                <a:effectLst/>
+                                              </a:rPr>
+                                              <m:t>1</m:t>
+                                            </m:r>
+                                          </m:sub>
+                                        </m:sSub>
+                                      </m:num>
+                                      <m:den>
+                                        <m:r>
+                                          <a:rPr lang="en-US" sz="800" kern="100">
+                                            <a:effectLst/>
+                                          </a:rPr>
+                                          <m:t>2</m:t>
+                                        </m:r>
+                                      </m:den>
+                                    </m:f>
+                                    <m:r>
+                                      <a:rPr lang="en-US" sz="800" kern="100">
+                                        <a:effectLst/>
+                                      </a:rPr>
+                                      <m:t>𝕀</m:t>
+                                    </m:r>
+                                    <m:d>
+                                      <m:dPr>
+                                        <m:begChr m:val="["/>
+                                        <m:endChr m:val="]"/>
+                                        <m:ctrlPr>
+                                          <a:rPr lang="zh-CN" sz="800" kern="100">
+                                            <a:effectLst/>
+                                          </a:rPr>
+                                        </m:ctrlPr>
+                                      </m:dPr>
+                                      <m:e>
+                                        <m:sSub>
+                                          <m:sSubPr>
+                                            <m:ctrlPr>
+                                              <a:rPr lang="zh-CN" sz="800" kern="100">
+                                                <a:effectLst/>
+                                              </a:rPr>
+                                            </m:ctrlPr>
+                                          </m:sSubPr>
+                                          <m:e>
+                                            <m:r>
+                                              <a:rPr lang="en-US" sz="800" kern="100">
+                                                <a:effectLst/>
+                                              </a:rPr>
+                                              <m:t>𝑌</m:t>
+                                            </m:r>
+                                          </m:e>
+                                          <m:sub>
+                                            <m:r>
+                                              <a:rPr lang="en-US" sz="800" kern="100">
+                                                <a:effectLst/>
+                                              </a:rPr>
+                                              <m:t>1</m:t>
+                                            </m:r>
+                                          </m:sub>
+                                        </m:sSub>
+                                        <m:r>
+                                          <a:rPr lang="en-US" sz="800" kern="100">
+                                            <a:effectLst/>
+                                          </a:rPr>
+                                          <m:t>&lt;</m:t>
+                                        </m:r>
+                                        <m:sSub>
+                                          <m:sSubPr>
+                                            <m:ctrlPr>
+                                              <a:rPr lang="zh-CN" sz="800" kern="100">
+                                                <a:effectLst/>
+                                              </a:rPr>
+                                            </m:ctrlPr>
+                                          </m:sSubPr>
+                                          <m:e>
+                                            <m:r>
+                                              <a:rPr lang="en-US" sz="800" kern="100">
+                                                <a:effectLst/>
+                                              </a:rPr>
+                                              <m:t>𝑌</m:t>
+                                            </m:r>
+                                          </m:e>
+                                          <m:sub>
+                                            <m:r>
+                                              <a:rPr lang="en-US" sz="800" kern="100">
+                                                <a:effectLst/>
+                                              </a:rPr>
+                                              <m:t>2</m:t>
+                                            </m:r>
+                                          </m:sub>
+                                        </m:sSub>
+                                      </m:e>
+                                    </m:d>
+                                    <m:r>
+                                      <a:rPr lang="en-US" sz="800" kern="100">
+                                        <a:effectLst/>
+                                      </a:rPr>
+                                      <m:t>,</m:t>
+                                    </m:r>
+                                    <m:sSub>
+                                      <m:sSubPr>
+                                        <m:ctrlPr>
+                                          <a:rPr lang="zh-CN" sz="800" kern="100">
+                                            <a:effectLst/>
+                                          </a:rPr>
+                                        </m:ctrlPr>
+                                      </m:sSubPr>
+                                      <m:e>
+                                        <m:r>
+                                          <a:rPr lang="en-US" sz="800" kern="100">
+                                            <a:effectLst/>
+                                          </a:rPr>
+                                          <m:t>𝑌</m:t>
+                                        </m:r>
+                                      </m:e>
+                                      <m:sub>
+                                        <m:r>
+                                          <a:rPr lang="en-US" sz="800" kern="100">
+                                            <a:effectLst/>
+                                          </a:rPr>
+                                          <m:t>2</m:t>
+                                        </m:r>
+                                      </m:sub>
+                                    </m:sSub>
+                                    <m:r>
+                                      <a:rPr lang="en-US" sz="800" kern="100">
+                                        <a:effectLst/>
+                                      </a:rPr>
+                                      <m:t>−</m:t>
+                                    </m:r>
+                                    <m:f>
+                                      <m:fPr>
+                                        <m:ctrlPr>
+                                          <a:rPr lang="zh-CN" sz="800" kern="100">
+                                            <a:effectLst/>
+                                          </a:rPr>
+                                        </m:ctrlPr>
+                                      </m:fPr>
+                                      <m:num>
+                                        <m:sSub>
+                                          <m:sSubPr>
+                                            <m:ctrlPr>
+                                              <a:rPr lang="zh-CN" sz="800" kern="100">
+                                                <a:effectLst/>
+                                              </a:rPr>
+                                            </m:ctrlPr>
+                                          </m:sSubPr>
+                                          <m:e>
+                                            <m:r>
+                                              <a:rPr lang="en-US" sz="800" kern="100">
+                                                <a:effectLst/>
+                                              </a:rPr>
+                                              <m:t>𝑌</m:t>
+                                            </m:r>
+                                          </m:e>
+                                          <m:sub>
+                                            <m:r>
+                                              <a:rPr lang="en-US" sz="800" kern="100">
+                                                <a:effectLst/>
+                                              </a:rPr>
+                                              <m:t>1</m:t>
+                                            </m:r>
+                                          </m:sub>
+                                        </m:sSub>
+                                        <m:r>
+                                          <a:rPr lang="en-US" sz="800" kern="100">
+                                            <a:effectLst/>
+                                          </a:rPr>
+                                          <m:t>−</m:t>
+                                        </m:r>
+                                        <m:sSub>
+                                          <m:sSubPr>
+                                            <m:ctrlPr>
+                                              <a:rPr lang="zh-CN" sz="800" kern="100">
+                                                <a:effectLst/>
+                                              </a:rPr>
+                                            </m:ctrlPr>
+                                          </m:sSubPr>
+                                          <m:e>
+                                            <m:r>
+                                              <a:rPr lang="en-US" sz="800" kern="100">
+                                                <a:effectLst/>
+                                              </a:rPr>
+                                              <m:t>𝑌</m:t>
+                                            </m:r>
+                                          </m:e>
+                                          <m:sub>
+                                            <m:r>
+                                              <a:rPr lang="en-US" sz="800" kern="100">
+                                                <a:effectLst/>
+                                              </a:rPr>
+                                              <m:t>2</m:t>
+                                            </m:r>
+                                          </m:sub>
+                                        </m:sSub>
+                                      </m:num>
+                                      <m:den>
+                                        <m:r>
+                                          <a:rPr lang="en-US" sz="800" kern="100">
+                                            <a:effectLst/>
+                                          </a:rPr>
+                                          <m:t>2</m:t>
+                                        </m:r>
+                                      </m:den>
+                                    </m:f>
+                                    <m:r>
+                                      <a:rPr lang="en-US" sz="800" kern="100">
+                                        <a:effectLst/>
+                                      </a:rPr>
+                                      <m:t>𝕀</m:t>
+                                    </m:r>
+                                    <m:d>
+                                      <m:dPr>
+                                        <m:begChr m:val="["/>
+                                        <m:endChr m:val="]"/>
+                                        <m:ctrlPr>
+                                          <a:rPr lang="zh-CN" sz="800" kern="100">
+                                            <a:effectLst/>
+                                          </a:rPr>
+                                        </m:ctrlPr>
+                                      </m:dPr>
+                                      <m:e>
+                                        <m:sSub>
+                                          <m:sSubPr>
+                                            <m:ctrlPr>
+                                              <a:rPr lang="zh-CN" sz="800" kern="100">
+                                                <a:effectLst/>
+                                              </a:rPr>
+                                            </m:ctrlPr>
+                                          </m:sSubPr>
+                                          <m:e>
+                                            <m:r>
+                                              <a:rPr lang="en-US" sz="800" kern="100">
+                                                <a:effectLst/>
+                                              </a:rPr>
+                                              <m:t>𝑌</m:t>
+                                            </m:r>
+                                          </m:e>
+                                          <m:sub>
+                                            <m:r>
+                                              <a:rPr lang="en-US" sz="800" kern="100">
+                                                <a:effectLst/>
+                                              </a:rPr>
+                                              <m:t>1</m:t>
+                                            </m:r>
+                                          </m:sub>
+                                        </m:sSub>
+                                        <m:r>
+                                          <a:rPr lang="en-US" sz="800" kern="100">
+                                            <a:effectLst/>
+                                          </a:rPr>
+                                          <m:t>&gt;</m:t>
+                                        </m:r>
+                                        <m:sSub>
+                                          <m:sSubPr>
+                                            <m:ctrlPr>
+                                              <a:rPr lang="zh-CN" sz="800" kern="100">
+                                                <a:effectLst/>
+                                              </a:rPr>
+                                            </m:ctrlPr>
+                                          </m:sSubPr>
+                                          <m:e>
+                                            <m:r>
+                                              <a:rPr lang="en-US" sz="800" kern="100">
+                                                <a:effectLst/>
+                                              </a:rPr>
+                                              <m:t>𝑌</m:t>
+                                            </m:r>
+                                          </m:e>
+                                          <m:sub>
+                                            <m:r>
+                                              <a:rPr lang="en-US" sz="800" kern="100">
+                                                <a:effectLst/>
+                                              </a:rPr>
+                                              <m:t>2</m:t>
+                                            </m:r>
+                                          </m:sub>
+                                        </m:sSub>
+                                      </m:e>
+                                    </m:d>
+                                    <m:r>
+                                      <a:rPr lang="en-US" sz="800" kern="100">
+                                        <a:effectLst/>
+                                      </a:rPr>
+                                      <m:t> </m:t>
+                                    </m:r>
+                                  </m:e>
+                                </m:d>
+                              </m:oMath>
+                            </m:oMathPara>
+                          </a14:m>
+                          <a:endParaRPr lang="zh-CN" sz="800" kern="100" dirty="0">
+                            <a:effectLst/>
+                            <a:latin typeface="DengXian" panose="02010600030101010101" pitchFamily="2" charset="-122"/>
+                            <a:ea typeface="DengXian" panose="02010600030101010101" pitchFamily="2" charset="-122"/>
+                            <a:cs typeface="Times New Roman" panose="02020603050405020304" pitchFamily="18" charset="0"/>
+                          </a:endParaRPr>
+                        </a:p>
+                      </a:txBody>
+                      <a:tcPr marL="68580" marR="68580" marT="9525" marB="0"/>
+                    </a:tc>
+                    <a:extLst>
+                      <a:ext uri="{0D108BD9-81ED-4DB2-BD59-A6C34878D82A}">
+                        <a16:rowId xmlns:a16="http://schemas.microsoft.com/office/drawing/2014/main" val="366207691"/>
+                      </a:ext>
+                    </a:extLst>
+                  </a:tr>
+                </a:tbl>
+              </a:graphicData>
+            </a:graphic>
+          </p:graphicFrame>
+        </mc:Choice>
+        <mc:Fallback>
+          <p:graphicFrame>
+            <p:nvGraphicFramePr>
+              <p:cNvPr id="2" name="Table 1">
+                <a:extLst>
+                  <a:ext uri="{FF2B5EF4-FFF2-40B4-BE49-F238E27FC236}">
+                    <a16:creationId xmlns:a16="http://schemas.microsoft.com/office/drawing/2014/main" id="{DBB1EC5E-2827-E938-CDC5-7A3CDAC08F6C}"/>
+                  </a:ext>
+                </a:extLst>
+              </p:cNvPr>
+              <p:cNvGraphicFramePr>
+                <a:graphicFrameLocks noGrp="1"/>
+              </p:cNvGraphicFramePr>
+              <p:nvPr>
+                <p:extLst>
+                  <p:ext uri="{D42A27DB-BD31-4B8C-83A1-F6EECF244321}">
+                    <p14:modId xmlns:p14="http://schemas.microsoft.com/office/powerpoint/2010/main" val="884466373"/>
+                  </p:ext>
+                </p:extLst>
+              </p:nvPr>
+            </p:nvGraphicFramePr>
+            <p:xfrm>
+              <a:off x="6393556" y="1898346"/>
+              <a:ext cx="5464897" cy="1002793"/>
+            </p:xfrm>
+            <a:graphic>
+              <a:graphicData uri="http://schemas.openxmlformats.org/drawingml/2006/table">
+                <a:tbl>
+                  <a:tblPr firstRow="1" firstCol="1" bandRow="1">
+                    <a:tableStyleId>{5C22544A-7EE6-4342-B048-85BDC9FD1C3A}</a:tableStyleId>
+                  </a:tblPr>
+                  <a:tblGrid>
+                    <a:gridCol w="833415">
+                      <a:extLst>
+                        <a:ext uri="{9D8B030D-6E8A-4147-A177-3AD203B41FA5}">
+                          <a16:colId xmlns:a16="http://schemas.microsoft.com/office/drawing/2014/main" val="2851847648"/>
+                        </a:ext>
+                      </a:extLst>
+                    </a:gridCol>
+                    <a:gridCol w="2255837">
+                      <a:extLst>
+                        <a:ext uri="{9D8B030D-6E8A-4147-A177-3AD203B41FA5}">
+                          <a16:colId xmlns:a16="http://schemas.microsoft.com/office/drawing/2014/main" val="32416059"/>
+                        </a:ext>
+                      </a:extLst>
+                    </a:gridCol>
+                    <a:gridCol w="2375645">
+                      <a:extLst>
+                        <a:ext uri="{9D8B030D-6E8A-4147-A177-3AD203B41FA5}">
+                          <a16:colId xmlns:a16="http://schemas.microsoft.com/office/drawing/2014/main" val="1315474887"/>
+                        </a:ext>
+                      </a:extLst>
+                    </a:gridCol>
+                  </a:tblGrid>
+                  <a:tr h="350203">
+                    <a:tc>
+                      <a:txBody>
+                        <a:bodyPr/>
+                        <a:lstStyle/>
+                        <a:p>
+                          <a:endParaRPr lang="zh-CN"/>
+                        </a:p>
+                      </a:txBody>
+                      <a:tcPr marL="68580" marR="68580" marT="9525" marB="0">
+                        <a:blipFill>
+                          <a:blip r:embed="rId18"/>
+                          <a:stretch>
+                            <a:fillRect l="-730" t="-5172" r="-558394" b="-187931"/>
+                          </a:stretch>
+                        </a:blipFill>
+                      </a:tcPr>
+                    </a:tc>
+                    <a:tc>
+                      <a:txBody>
+                        <a:bodyPr/>
+                        <a:lstStyle/>
+                        <a:p>
+                          <a:endParaRPr lang="zh-CN"/>
+                        </a:p>
+                      </a:txBody>
+                      <a:tcPr marL="68580" marR="68580" marT="9525" marB="0">
+                        <a:blipFill>
+                          <a:blip r:embed="rId18"/>
+                          <a:stretch>
+                            <a:fillRect l="-37197" t="-5172" r="-106199" b="-187931"/>
+                          </a:stretch>
+                        </a:blipFill>
+                      </a:tcPr>
+                    </a:tc>
+                    <a:tc>
+                      <a:txBody>
+                        <a:bodyPr/>
+                        <a:lstStyle/>
+                        <a:p>
+                          <a:endParaRPr lang="zh-CN"/>
+                        </a:p>
+                      </a:txBody>
+                      <a:tcPr marL="68580" marR="68580" marT="9525" marB="0">
+                        <a:blipFill>
+                          <a:blip r:embed="rId18"/>
+                          <a:stretch>
+                            <a:fillRect l="-130513" t="-5172" r="-1026" b="-187931"/>
+                          </a:stretch>
+                        </a:blipFill>
+                      </a:tcPr>
+                    </a:tc>
+                    <a:extLst>
+                      <a:ext uri="{0D108BD9-81ED-4DB2-BD59-A6C34878D82A}">
+                        <a16:rowId xmlns:a16="http://schemas.microsoft.com/office/drawing/2014/main" val="3027002951"/>
+                      </a:ext>
+                    </a:extLst>
+                  </a:tr>
+                  <a:tr h="369126">
+                    <a:tc>
+                      <a:txBody>
+                        <a:bodyPr/>
+                        <a:lstStyle/>
+                        <a:p>
+                          <a:endParaRPr lang="zh-CN"/>
+                        </a:p>
+                      </a:txBody>
+                      <a:tcPr marL="68580" marR="68580" marT="9525" marB="0">
+                        <a:blipFill>
+                          <a:blip r:embed="rId18"/>
+                          <a:stretch>
+                            <a:fillRect l="-730" t="-101667" r="-558394" b="-81667"/>
+                          </a:stretch>
+                        </a:blipFill>
+                      </a:tcPr>
+                    </a:tc>
+                    <a:tc>
+                      <a:txBody>
+                        <a:bodyPr/>
+                        <a:lstStyle/>
+                        <a:p>
+                          <a:endParaRPr lang="zh-CN"/>
+                        </a:p>
+                      </a:txBody>
+                      <a:tcPr marL="68580" marR="68580" marT="9525" marB="0" anchor="ctr">
+                        <a:blipFill>
+                          <a:blip r:embed="rId18"/>
+                          <a:stretch>
+                            <a:fillRect l="-37197" t="-101667" r="-106199" b="-81667"/>
+                          </a:stretch>
+                        </a:blipFill>
+                      </a:tcPr>
+                    </a:tc>
+                    <a:tc>
+                      <a:txBody>
+                        <a:bodyPr/>
+                        <a:lstStyle/>
+                        <a:p>
+                          <a:endParaRPr lang="zh-CN"/>
+                        </a:p>
+                      </a:txBody>
+                      <a:tcPr marL="68580" marR="68580" marT="9525" marB="0">
+                        <a:blipFill>
+                          <a:blip r:embed="rId18"/>
+                          <a:stretch>
+                            <a:fillRect l="-130513" t="-101667" r="-1026" b="-81667"/>
+                          </a:stretch>
+                        </a:blipFill>
+                      </a:tcPr>
+                    </a:tc>
+                    <a:extLst>
+                      <a:ext uri="{0D108BD9-81ED-4DB2-BD59-A6C34878D82A}">
+                        <a16:rowId xmlns:a16="http://schemas.microsoft.com/office/drawing/2014/main" val="712940748"/>
+                      </a:ext>
+                    </a:extLst>
+                  </a:tr>
+                  <a:tr h="283464">
+                    <a:tc>
+                      <a:txBody>
+                        <a:bodyPr/>
+                        <a:lstStyle/>
+                        <a:p>
+                          <a:endParaRPr lang="zh-CN"/>
+                        </a:p>
+                      </a:txBody>
+                      <a:tcPr marL="68580" marR="68580" marT="9525" marB="0">
+                        <a:blipFill>
+                          <a:blip r:embed="rId18"/>
+                          <a:stretch>
+                            <a:fillRect l="-730" t="-257447" r="-558394" b="-4255"/>
+                          </a:stretch>
+                        </a:blipFill>
+                      </a:tcPr>
+                    </a:tc>
+                    <a:tc>
+                      <a:txBody>
+                        <a:bodyPr/>
+                        <a:lstStyle/>
+                        <a:p>
+                          <a:endParaRPr lang="zh-CN"/>
+                        </a:p>
+                      </a:txBody>
+                      <a:tcPr marL="68580" marR="68580" marT="9525" marB="0">
+                        <a:blipFill>
+                          <a:blip r:embed="rId18"/>
+                          <a:stretch>
+                            <a:fillRect l="-37197" t="-257447" r="-106199" b="-4255"/>
+                          </a:stretch>
+                        </a:blipFill>
+                      </a:tcPr>
+                    </a:tc>
+                    <a:tc>
+                      <a:txBody>
+                        <a:bodyPr/>
+                        <a:lstStyle/>
+                        <a:p>
+                          <a:endParaRPr lang="zh-CN"/>
+                        </a:p>
+                      </a:txBody>
+                      <a:tcPr marL="68580" marR="68580" marT="9525" marB="0">
+                        <a:blipFill>
+                          <a:blip r:embed="rId18"/>
+                          <a:stretch>
+                            <a:fillRect l="-130513" t="-257447" r="-1026" b="-4255"/>
+                          </a:stretch>
+                        </a:blipFill>
+                      </a:tcPr>
+                    </a:tc>
+                    <a:extLst>
+                      <a:ext uri="{0D108BD9-81ED-4DB2-BD59-A6C34878D82A}">
+                        <a16:rowId xmlns:a16="http://schemas.microsoft.com/office/drawing/2014/main" val="366207691"/>
+                      </a:ext>
+                    </a:extLst>
+                  </a:tr>
+                </a:tbl>
+              </a:graphicData>
+            </a:graphic>
+          </p:graphicFrame>
+        </mc:Fallback>
+      </mc:AlternateContent>
+      <p:sp>
+        <p:nvSpPr>
+          <p:cNvPr id="5" name="Rectangle 1">
+            <a:extLst>
+              <a:ext uri="{FF2B5EF4-FFF2-40B4-BE49-F238E27FC236}">
+                <a16:creationId xmlns:a16="http://schemas.microsoft.com/office/drawing/2014/main" id="{93496C05-3E7A-CE8D-73A3-793F3957EF21}"/>
+              </a:ext>
+            </a:extLst>
+          </p:cNvPr>
+          <p:cNvSpPr>
+            <a:spLocks noChangeArrowheads="1"/>
+          </p:cNvSpPr>
+          <p:nvPr/>
+        </p:nvSpPr>
+        <p:spPr bwMode="auto">
+          <a:xfrm>
+            <a:off x="2811463" y="3189288"/>
+            <a:ext cx="12192000" cy="457200"/>
+          </a:xfrm>
+          <a:prstGeom prst="rect">
+            <a:avLst/>
+          </a:prstGeom>
+          <a:noFill/>
+          <a:ln>
+            <a:noFill/>
+          </a:ln>
+          <a:effectLst/>
+          <a:extLst>
+            <a:ext uri="{909E8E84-426E-40DD-AFC4-6F175D3DCCD1}">
+              <a14:hiddenFill xmlns:a14="http://schemas.microsoft.com/office/drawing/2010/main">
+                <a:solidFill>
+                  <a:schemeClr val="accent1"/>
+                </a:solidFill>
+              </a14:hiddenFill>
+            </a:ext>
+            <a:ext uri="{91240B29-F687-4F45-9708-019B960494DF}">
+              <a14:hiddenLine xmlns:a14="http://schemas.microsoft.com/office/drawing/2010/main" w="9525">
+                <a:solidFill>
+                  <a:schemeClr val="tx1"/>
+                </a:solidFill>
+                <a:miter lim="800000"/>
+                <a:headEnd/>
+                <a:tailEnd/>
+              </a14:hiddenLine>
+            </a:ext>
+            <a:ext uri="{AF507438-7753-43E0-B8FC-AC1667EBCBE1}">
+              <a14:hiddenEffects xmlns:a14="http://schemas.microsoft.com/office/drawing/2010/main">
+                <a:effectLst>
+                  <a:outerShdw dist="35921" dir="2700000" algn="ctr" rotWithShape="0">
+                    <a:schemeClr val="bg2"/>
+                  </a:outerShdw>
+                </a:effectLst>
+              </a14:hiddenEffects>
+            </a:ext>
+          </a:extLst>
+        </p:spPr>
+        <p:txBody>
+          <a:bodyPr vert="horz" wrap="none" lIns="91440" tIns="45720" rIns="91440" bIns="45720" numCol="1" anchor="ctr" anchorCtr="0" compatLnSpc="1">
+            <a:prstTxWarp prst="textNoShape">
+              <a:avLst/>
+            </a:prstTxWarp>
+            <a:spAutoFit/>
+          </a:bodyPr>
+          <a:lstStyle/>
+          <a:p>
+            <a:endParaRPr lang="zh-CN" altLang="en-US"/>
           </a:p>
         </p:txBody>
       </p:sp>
@@ -11759,41 +12124,6 @@
                                         <p:cTn id="56" dur="500"/>
                                         <p:tgtEl>
                                           <p:spTgt spid="1030"/>
-                                        </p:tgtEl>
-                                      </p:cBhvr>
-                                    </p:animEffect>
-                                  </p:childTnLst>
-                                </p:cTn>
-                              </p:par>
-                              <p:par>
-                                <p:cTn id="57" presetID="10" presetClass="entr" presetSubtype="0" fill="hold" nodeType="withEffect">
-                                  <p:stCondLst>
-                                    <p:cond delay="0"/>
-                                  </p:stCondLst>
-                                  <p:childTnLst>
-                                    <p:set>
-                                      <p:cBhvr>
-                                        <p:cTn id="58" dur="1" fill="hold">
-                                          <p:stCondLst>
-                                            <p:cond delay="0"/>
-                                          </p:stCondLst>
-                                        </p:cTn>
-                                        <p:tgtEl>
-                                          <p:spTgt spid="1029"/>
-                                        </p:tgtEl>
-                                        <p:attrNameLst>
-                                          <p:attrName>style.visibility</p:attrName>
-                                        </p:attrNameLst>
-                                      </p:cBhvr>
-                                      <p:to>
-                                        <p:strVal val="visible"/>
-                                      </p:to>
-                                    </p:set>
-                                    <p:animEffect transition="in" filter="fade">
-                                      <p:cBhvr>
-                                        <p:cTn id="59" dur="500"/>
-                                        <p:tgtEl>
-                                          <p:spTgt spid="1029"/>
                                         </p:tgtEl>
                                       </p:cBhvr>
                                     </p:animEffect>
@@ -15536,8 +15866,8 @@
           </p:sp>
         </mc:Fallback>
       </mc:AlternateContent>
-      <mc:AlternateContent xmlns:mc="http://schemas.openxmlformats.org/markup-compatibility/2006" xmlns:a14="http://schemas.microsoft.com/office/drawing/2010/main">
-        <mc:Choice Requires="a14">
+      <mc:AlternateContent xmlns:mc="http://schemas.openxmlformats.org/markup-compatibility/2006">
+        <mc:Choice xmlns:a14="http://schemas.microsoft.com/office/drawing/2010/main" Requires="a14">
           <p:graphicFrame>
             <p:nvGraphicFramePr>
               <p:cNvPr id="8" name="Table 7">
@@ -15553,14 +15883,14 @@
               <p:nvPr>
                 <p:extLst>
                   <p:ext uri="{D42A27DB-BD31-4B8C-83A1-F6EECF244321}">
-                    <p14:modId xmlns:p14="http://schemas.microsoft.com/office/powerpoint/2010/main" val="1139644182"/>
+                    <p14:modId xmlns:p14="http://schemas.microsoft.com/office/powerpoint/2010/main" val="4036003400"/>
                   </p:ext>
                 </p:extLst>
               </p:nvPr>
             </p:nvGraphicFramePr>
             <p:xfrm>
-              <a:off x="1224342" y="4755946"/>
-              <a:ext cx="9739453" cy="899860"/>
+              <a:off x="1720272" y="4698027"/>
+              <a:ext cx="8747592" cy="728536"/>
             </p:xfrm>
             <a:graphic>
               <a:graphicData uri="http://schemas.openxmlformats.org/drawingml/2006/table">
@@ -15576,14 +15906,14 @@
                         </a:ext>
                       </a:extLst>
                     </a:gridCol>
-                    <a:gridCol w="1748721">
+                    <a:gridCol w="2938565">
                       <a:extLst>
                         <a:ext uri="{9D8B030D-6E8A-4147-A177-3AD203B41FA5}">
                           <a16:colId xmlns:a16="http://schemas.microsoft.com/office/drawing/2014/main" val="3108955298"/>
                         </a:ext>
                       </a:extLst>
                     </a:gridCol>
-                    <a:gridCol w="6991917">
+                    <a:gridCol w="4810212">
                       <a:extLst>
                         <a:ext uri="{9D8B030D-6E8A-4147-A177-3AD203B41FA5}">
                           <a16:colId xmlns:a16="http://schemas.microsoft.com/office/drawing/2014/main" val="3942359470"/>
@@ -16166,7 +16496,7 @@
                                 <m:d>
                                   <m:dPr>
                                     <m:ctrlPr>
-                                      <a:rPr lang="zh-CN" sz="1050" i="1" kern="100" smtClean="0">
+                                      <a:rPr lang="zh-CN" sz="800" i="1" kern="100" smtClean="0">
                                         <a:effectLst/>
                                         <a:latin typeface="Cambria Math" panose="02040503050406030204" pitchFamily="18" charset="0"/>
                                       </a:rPr>
@@ -16176,7 +16506,7 @@
                                     <m:f>
                                       <m:fPr>
                                         <m:ctrlPr>
-                                          <a:rPr lang="zh-CN" sz="1050" i="1" kern="100">
+                                          <a:rPr lang="zh-CN" sz="800" i="1" kern="100">
                                             <a:effectLst/>
                                             <a:latin typeface="Cambria Math" panose="02040503050406030204" pitchFamily="18" charset="0"/>
                                           </a:rPr>
@@ -16186,7 +16516,7 @@
                                         <m:sSub>
                                           <m:sSubPr>
                                             <m:ctrlPr>
-                                              <a:rPr lang="zh-CN" sz="1050" i="1" kern="100">
+                                              <a:rPr lang="zh-CN" sz="800" i="1" kern="100">
                                                 <a:effectLst/>
                                                 <a:latin typeface="Cambria Math" panose="02040503050406030204" pitchFamily="18" charset="0"/>
                                               </a:rPr>
@@ -16194,7 +16524,7 @@
                                           </m:sSubPr>
                                           <m:e>
                                             <m:r>
-                                              <a:rPr lang="en-US" sz="1050" kern="100">
+                                              <a:rPr lang="en-US" sz="800" kern="100">
                                                 <a:effectLst/>
                                                 <a:latin typeface="Cambria Math" panose="02040503050406030204" pitchFamily="18" charset="0"/>
                                               </a:rPr>
@@ -16203,7 +16533,7 @@
                                           </m:e>
                                           <m:sub>
                                             <m:r>
-                                              <a:rPr lang="en-US" sz="1050" kern="100">
+                                              <a:rPr lang="en-US" sz="800" kern="100">
                                                 <a:effectLst/>
                                                 <a:latin typeface="Cambria Math" panose="02040503050406030204" pitchFamily="18" charset="0"/>
                                               </a:rPr>
@@ -16212,7 +16542,7 @@
                                           </m:sub>
                                         </m:sSub>
                                         <m:r>
-                                          <a:rPr lang="en-US" sz="1050" kern="100">
+                                          <a:rPr lang="en-US" sz="800" kern="100">
                                             <a:effectLst/>
                                             <a:latin typeface="Cambria Math" panose="02040503050406030204" pitchFamily="18" charset="0"/>
                                           </a:rPr>
@@ -16221,7 +16551,7 @@
                                         <m:sSub>
                                           <m:sSubPr>
                                             <m:ctrlPr>
-                                              <a:rPr lang="zh-CN" sz="1050" i="1" kern="100">
+                                              <a:rPr lang="zh-CN" sz="800" i="1" kern="100">
                                                 <a:effectLst/>
                                                 <a:latin typeface="Cambria Math" panose="02040503050406030204" pitchFamily="18" charset="0"/>
                                               </a:rPr>
@@ -16229,7 +16559,7 @@
                                           </m:sSubPr>
                                           <m:e>
                                             <m:r>
-                                              <a:rPr lang="en-US" sz="1050" kern="100">
+                                              <a:rPr lang="en-US" sz="800" kern="100">
                                                 <a:effectLst/>
                                                 <a:latin typeface="Cambria Math" panose="02040503050406030204" pitchFamily="18" charset="0"/>
                                               </a:rPr>
@@ -16238,7 +16568,7 @@
                                           </m:e>
                                           <m:sub>
                                             <m:r>
-                                              <a:rPr lang="en-US" sz="1050" kern="100">
+                                              <a:rPr lang="en-US" sz="800" kern="100">
                                                 <a:effectLst/>
                                                 <a:latin typeface="Cambria Math" panose="02040503050406030204" pitchFamily="18" charset="0"/>
                                               </a:rPr>
@@ -16249,7 +16579,7 @@
                                       </m:num>
                                       <m:den>
                                         <m:r>
-                                          <a:rPr lang="en-US" sz="1050" kern="100">
+                                          <a:rPr lang="en-US" sz="800" kern="100">
                                             <a:effectLst/>
                                             <a:latin typeface="Cambria Math" panose="02040503050406030204" pitchFamily="18" charset="0"/>
                                           </a:rPr>
@@ -16258,7 +16588,7 @@
                                       </m:den>
                                     </m:f>
                                     <m:r>
-                                      <a:rPr lang="en-US" sz="1050" kern="100">
+                                      <a:rPr lang="en-US" sz="800" kern="100">
                                         <a:effectLst/>
                                         <a:latin typeface="Cambria Math" panose="02040503050406030204" pitchFamily="18" charset="0"/>
                                       </a:rPr>
@@ -16268,7 +16598,7 @@
                                       <m:rPr>
                                         <m:sty m:val="p"/>
                                       </m:rPr>
-                                      <a:rPr lang="en-US" sz="1050" kern="100">
+                                      <a:rPr lang="en-US" sz="800" kern="100">
                                         <a:effectLst/>
                                         <a:latin typeface="Cambria Math" panose="02040503050406030204" pitchFamily="18" charset="0"/>
                                       </a:rPr>
@@ -16277,7 +16607,7 @@
                                     <m:f>
                                       <m:fPr>
                                         <m:ctrlPr>
-                                          <a:rPr lang="zh-CN" sz="1050" i="1" kern="100">
+                                          <a:rPr lang="zh-CN" sz="800" i="1" kern="100">
                                             <a:effectLst/>
                                             <a:latin typeface="Cambria Math" panose="02040503050406030204" pitchFamily="18" charset="0"/>
                                           </a:rPr>
@@ -16287,7 +16617,7 @@
                                         <m:sSub>
                                           <m:sSubPr>
                                             <m:ctrlPr>
-                                              <a:rPr lang="zh-CN" sz="1050" i="1" kern="100">
+                                              <a:rPr lang="zh-CN" sz="800" i="1" kern="100">
                                                 <a:effectLst/>
                                                 <a:latin typeface="Cambria Math" panose="02040503050406030204" pitchFamily="18" charset="0"/>
                                               </a:rPr>
@@ -16295,7 +16625,7 @@
                                           </m:sSubPr>
                                           <m:e>
                                             <m:r>
-                                              <a:rPr lang="en-US" sz="1050" kern="100">
+                                              <a:rPr lang="en-US" sz="800" kern="100">
                                                 <a:effectLst/>
                                                 <a:latin typeface="Cambria Math" panose="02040503050406030204" pitchFamily="18" charset="0"/>
                                               </a:rPr>
@@ -16304,7 +16634,7 @@
                                           </m:e>
                                           <m:sub>
                                             <m:r>
-                                              <a:rPr lang="en-US" sz="1050" kern="100">
+                                              <a:rPr lang="en-US" sz="800" kern="100">
                                                 <a:effectLst/>
                                                 <a:latin typeface="Cambria Math" panose="02040503050406030204" pitchFamily="18" charset="0"/>
                                               </a:rPr>
@@ -16313,7 +16643,7 @@
                                           </m:sub>
                                         </m:sSub>
                                         <m:r>
-                                          <a:rPr lang="en-US" sz="1050" kern="100">
+                                          <a:rPr lang="en-US" sz="800" kern="100">
                                             <a:effectLst/>
                                             <a:latin typeface="Cambria Math" panose="02040503050406030204" pitchFamily="18" charset="0"/>
                                           </a:rPr>
@@ -16322,7 +16652,7 @@
                                         <m:sSub>
                                           <m:sSubPr>
                                             <m:ctrlPr>
-                                              <a:rPr lang="zh-CN" sz="1050" i="1" kern="100">
+                                              <a:rPr lang="zh-CN" sz="800" i="1" kern="100">
                                                 <a:effectLst/>
                                                 <a:latin typeface="Cambria Math" panose="02040503050406030204" pitchFamily="18" charset="0"/>
                                               </a:rPr>
@@ -16330,7 +16660,7 @@
                                           </m:sSubPr>
                                           <m:e>
                                             <m:r>
-                                              <a:rPr lang="en-US" sz="1050" kern="100">
+                                              <a:rPr lang="en-US" sz="800" kern="100">
                                                 <a:effectLst/>
                                                 <a:latin typeface="Cambria Math" panose="02040503050406030204" pitchFamily="18" charset="0"/>
                                               </a:rPr>
@@ -16339,7 +16669,7 @@
                                           </m:e>
                                           <m:sub>
                                             <m:r>
-                                              <a:rPr lang="en-US" sz="1050" kern="100">
+                                              <a:rPr lang="en-US" sz="800" kern="100">
                                                 <a:effectLst/>
                                                 <a:latin typeface="Cambria Math" panose="02040503050406030204" pitchFamily="18" charset="0"/>
                                               </a:rPr>
@@ -16350,7 +16680,7 @@
                                       </m:num>
                                       <m:den>
                                         <m:r>
-                                          <a:rPr lang="en-US" sz="1050" kern="100">
+                                          <a:rPr lang="en-US" sz="800" kern="100">
                                             <a:effectLst/>
                                             <a:latin typeface="Cambria Math" panose="02040503050406030204" pitchFamily="18" charset="0"/>
                                           </a:rPr>
@@ -16359,7 +16689,7 @@
                                       </m:den>
                                     </m:f>
                                     <m:r>
-                                      <a:rPr lang="en-US" sz="1050" kern="100">
+                                      <a:rPr lang="en-US" sz="800" kern="100">
                                         <a:effectLst/>
                                         <a:latin typeface="Cambria Math" panose="02040503050406030204" pitchFamily="18" charset="0"/>
                                       </a:rPr>
@@ -16370,7 +16700,7 @@
                                         <m:begChr m:val="["/>
                                         <m:endChr m:val="]"/>
                                         <m:ctrlPr>
-                                          <a:rPr lang="zh-CN" sz="1050" i="1" kern="100">
+                                          <a:rPr lang="zh-CN" sz="800" i="1" kern="100">
                                             <a:effectLst/>
                                             <a:latin typeface="Cambria Math" panose="02040503050406030204" pitchFamily="18" charset="0"/>
                                           </a:rPr>
@@ -16380,7 +16710,7 @@
                                         <m:sSub>
                                           <m:sSubPr>
                                             <m:ctrlPr>
-                                              <a:rPr lang="zh-CN" sz="1050" i="1" kern="100">
+                                              <a:rPr lang="zh-CN" sz="800" i="1" kern="100">
                                                 <a:effectLst/>
                                                 <a:latin typeface="Cambria Math" panose="02040503050406030204" pitchFamily="18" charset="0"/>
                                               </a:rPr>
@@ -16388,7 +16718,7 @@
                                           </m:sSubPr>
                                           <m:e>
                                             <m:r>
-                                              <a:rPr lang="zh-CN" sz="1050" kern="100">
+                                              <a:rPr lang="zh-CN" sz="800" kern="100">
                                                 <a:effectLst/>
                                                 <a:latin typeface="Cambria Math" panose="02040503050406030204" pitchFamily="18" charset="0"/>
                                               </a:rPr>
@@ -16397,7 +16727,7 @@
                                           </m:e>
                                           <m:sub>
                                             <m:r>
-                                              <a:rPr lang="en-US" sz="1050" kern="100">
+                                              <a:rPr lang="en-US" sz="800" kern="100">
                                                 <a:effectLst/>
                                                 <a:latin typeface="Cambria Math" panose="02040503050406030204" pitchFamily="18" charset="0"/>
                                               </a:rPr>
@@ -16406,7 +16736,7 @@
                                           </m:sub>
                                         </m:sSub>
                                         <m:r>
-                                          <a:rPr lang="en-US" sz="1050" kern="100">
+                                          <a:rPr lang="en-US" sz="800" kern="100">
                                             <a:effectLst/>
                                             <a:latin typeface="Cambria Math" panose="02040503050406030204" pitchFamily="18" charset="0"/>
                                           </a:rPr>
@@ -16415,7 +16745,7 @@
                                       </m:e>
                                     </m:d>
                                     <m:r>
-                                      <a:rPr lang="en-US" sz="1050" kern="100">
+                                      <a:rPr lang="en-US" sz="800" kern="100">
                                         <a:effectLst/>
                                         <a:latin typeface="Cambria Math" panose="02040503050406030204" pitchFamily="18" charset="0"/>
                                       </a:rPr>
@@ -16425,7 +16755,7 @@
                                       <m:rPr>
                                         <m:sty m:val="p"/>
                                       </m:rPr>
-                                      <a:rPr lang="en-US" sz="1050" kern="100">
+                                      <a:rPr lang="en-US" sz="800" kern="100">
                                         <a:effectLst/>
                                         <a:latin typeface="Cambria Math" panose="02040503050406030204" pitchFamily="18" charset="0"/>
                                       </a:rPr>
@@ -16434,7 +16764,7 @@
                                     <m:f>
                                       <m:fPr>
                                         <m:ctrlPr>
-                                          <a:rPr lang="zh-CN" sz="1050" i="1" kern="100">
+                                          <a:rPr lang="zh-CN" sz="800" i="1" kern="100">
                                             <a:effectLst/>
                                             <a:latin typeface="Cambria Math" panose="02040503050406030204" pitchFamily="18" charset="0"/>
                                           </a:rPr>
@@ -16444,7 +16774,7 @@
                                         <m:sSub>
                                           <m:sSubPr>
                                             <m:ctrlPr>
-                                              <a:rPr lang="zh-CN" sz="1050" i="1" kern="100">
+                                              <a:rPr lang="zh-CN" sz="800" i="1" kern="100">
                                                 <a:effectLst/>
                                                 <a:latin typeface="Cambria Math" panose="02040503050406030204" pitchFamily="18" charset="0"/>
                                               </a:rPr>
@@ -16452,7 +16782,7 @@
                                           </m:sSubPr>
                                           <m:e>
                                             <m:r>
-                                              <a:rPr lang="en-US" sz="1050" kern="100">
+                                              <a:rPr lang="en-US" sz="800" kern="100">
                                                 <a:effectLst/>
                                                 <a:latin typeface="Cambria Math" panose="02040503050406030204" pitchFamily="18" charset="0"/>
                                               </a:rPr>
@@ -16461,7 +16791,7 @@
                                           </m:e>
                                           <m:sub>
                                             <m:r>
-                                              <a:rPr lang="en-US" sz="1050" kern="100">
+                                              <a:rPr lang="en-US" sz="800" kern="100">
                                                 <a:effectLst/>
                                                 <a:latin typeface="Cambria Math" panose="02040503050406030204" pitchFamily="18" charset="0"/>
                                               </a:rPr>
@@ -16470,7 +16800,7 @@
                                           </m:sub>
                                         </m:sSub>
                                         <m:r>
-                                          <a:rPr lang="en-US" sz="1050" kern="100">
+                                          <a:rPr lang="en-US" sz="800" kern="100">
                                             <a:effectLst/>
                                             <a:latin typeface="Cambria Math" panose="02040503050406030204" pitchFamily="18" charset="0"/>
                                           </a:rPr>
@@ -16479,7 +16809,7 @@
                                         <m:sSub>
                                           <m:sSubPr>
                                             <m:ctrlPr>
-                                              <a:rPr lang="zh-CN" sz="1050" i="1" kern="100">
+                                              <a:rPr lang="zh-CN" sz="800" i="1" kern="100">
                                                 <a:effectLst/>
                                                 <a:latin typeface="Cambria Math" panose="02040503050406030204" pitchFamily="18" charset="0"/>
                                               </a:rPr>
@@ -16487,7 +16817,7 @@
                                           </m:sSubPr>
                                           <m:e>
                                             <m:r>
-                                              <a:rPr lang="en-US" sz="1050" kern="100">
+                                              <a:rPr lang="en-US" sz="800" kern="100">
                                                 <a:effectLst/>
                                                 <a:latin typeface="Cambria Math" panose="02040503050406030204" pitchFamily="18" charset="0"/>
                                               </a:rPr>
@@ -16496,7 +16826,7 @@
                                           </m:e>
                                           <m:sub>
                                             <m:r>
-                                              <a:rPr lang="en-US" sz="1050" kern="100">
+                                              <a:rPr lang="en-US" sz="800" kern="100">
                                                 <a:effectLst/>
                                                 <a:latin typeface="Cambria Math" panose="02040503050406030204" pitchFamily="18" charset="0"/>
                                               </a:rPr>
@@ -16507,7 +16837,7 @@
                                       </m:num>
                                       <m:den>
                                         <m:r>
-                                          <a:rPr lang="en-US" sz="1050" kern="100">
+                                          <a:rPr lang="en-US" sz="800" kern="100">
                                             <a:effectLst/>
                                             <a:latin typeface="Cambria Math" panose="02040503050406030204" pitchFamily="18" charset="0"/>
                                           </a:rPr>
@@ -16516,7 +16846,7 @@
                                       </m:den>
                                     </m:f>
                                     <m:r>
-                                      <a:rPr lang="en-US" sz="1050" kern="100">
+                                      <a:rPr lang="en-US" sz="800" kern="100">
                                         <a:effectLst/>
                                         <a:latin typeface="Cambria Math" panose="02040503050406030204" pitchFamily="18" charset="0"/>
                                       </a:rPr>
@@ -16527,7 +16857,7 @@
                                         <m:begChr m:val="["/>
                                         <m:endChr m:val="]"/>
                                         <m:ctrlPr>
-                                          <a:rPr lang="zh-CN" sz="1050" i="1" kern="100">
+                                          <a:rPr lang="zh-CN" sz="800" i="1" kern="100">
                                             <a:effectLst/>
                                             <a:latin typeface="Cambria Math" panose="02040503050406030204" pitchFamily="18" charset="0"/>
                                           </a:rPr>
@@ -16537,7 +16867,7 @@
                                         <m:sSub>
                                           <m:sSubPr>
                                             <m:ctrlPr>
-                                              <a:rPr lang="zh-CN" sz="1050" i="1" kern="100">
+                                              <a:rPr lang="zh-CN" sz="800" i="1" kern="100">
                                                 <a:effectLst/>
                                                 <a:latin typeface="Cambria Math" panose="02040503050406030204" pitchFamily="18" charset="0"/>
                                               </a:rPr>
@@ -16545,7 +16875,7 @@
                                           </m:sSubPr>
                                           <m:e>
                                             <m:r>
-                                              <a:rPr lang="zh-CN" sz="1050" kern="100">
+                                              <a:rPr lang="zh-CN" sz="800" kern="100">
                                                 <a:effectLst/>
                                                 <a:latin typeface="Cambria Math" panose="02040503050406030204" pitchFamily="18" charset="0"/>
                                               </a:rPr>
@@ -16554,7 +16884,7 @@
                                           </m:e>
                                           <m:sub>
                                             <m:r>
-                                              <a:rPr lang="en-US" sz="1050" kern="100">
+                                              <a:rPr lang="en-US" sz="800" kern="100">
                                                 <a:effectLst/>
                                                 <a:latin typeface="Cambria Math" panose="02040503050406030204" pitchFamily="18" charset="0"/>
                                               </a:rPr>
@@ -16563,7 +16893,7 @@
                                           </m:sub>
                                         </m:sSub>
                                         <m:r>
-                                          <a:rPr lang="en-US" sz="1050" kern="100">
+                                          <a:rPr lang="en-US" sz="800" kern="100">
                                             <a:effectLst/>
                                             <a:latin typeface="Cambria Math" panose="02040503050406030204" pitchFamily="18" charset="0"/>
                                           </a:rPr>
@@ -16572,7 +16902,7 @@
                                       </m:e>
                                     </m:d>
                                     <m:r>
-                                      <a:rPr lang="en-US" sz="1050" kern="100">
+                                      <a:rPr lang="en-US" sz="800" kern="100">
                                         <a:effectLst/>
                                         <a:latin typeface="Cambria Math" panose="02040503050406030204" pitchFamily="18" charset="0"/>
                                       </a:rPr>
@@ -16581,7 +16911,7 @@
                                     <m:f>
                                       <m:fPr>
                                         <m:ctrlPr>
-                                          <a:rPr lang="zh-CN" sz="1050" i="1" kern="100">
+                                          <a:rPr lang="zh-CN" sz="800" i="1" kern="100">
                                             <a:effectLst/>
                                             <a:latin typeface="Cambria Math" panose="02040503050406030204" pitchFamily="18" charset="0"/>
                                           </a:rPr>
@@ -16591,7 +16921,7 @@
                                         <m:sSub>
                                           <m:sSubPr>
                                             <m:ctrlPr>
-                                              <a:rPr lang="zh-CN" sz="1050" i="1" kern="100">
+                                              <a:rPr lang="zh-CN" sz="800" i="1" kern="100">
                                                 <a:effectLst/>
                                                 <a:latin typeface="Cambria Math" panose="02040503050406030204" pitchFamily="18" charset="0"/>
                                               </a:rPr>
@@ -16599,7 +16929,7 @@
                                           </m:sSubPr>
                                           <m:e>
                                             <m:r>
-                                              <a:rPr lang="en-US" sz="1050" kern="100">
+                                              <a:rPr lang="en-US" sz="800" kern="100">
                                                 <a:effectLst/>
                                                 <a:latin typeface="Cambria Math" panose="02040503050406030204" pitchFamily="18" charset="0"/>
                                               </a:rPr>
@@ -16608,7 +16938,7 @@
                                           </m:e>
                                           <m:sub>
                                             <m:r>
-                                              <a:rPr lang="en-US" sz="1050" kern="100">
+                                              <a:rPr lang="en-US" sz="800" kern="100">
                                                 <a:effectLst/>
                                                 <a:latin typeface="Cambria Math" panose="02040503050406030204" pitchFamily="18" charset="0"/>
                                               </a:rPr>
@@ -16617,7 +16947,7 @@
                                           </m:sub>
                                         </m:sSub>
                                         <m:r>
-                                          <a:rPr lang="en-US" sz="1050" kern="100">
+                                          <a:rPr lang="en-US" sz="800" kern="100">
                                             <a:effectLst/>
                                             <a:latin typeface="Cambria Math" panose="02040503050406030204" pitchFamily="18" charset="0"/>
                                           </a:rPr>
@@ -16626,7 +16956,7 @@
                                         <m:sSub>
                                           <m:sSubPr>
                                             <m:ctrlPr>
-                                              <a:rPr lang="zh-CN" sz="1050" i="1" kern="100">
+                                              <a:rPr lang="zh-CN" sz="800" i="1" kern="100">
                                                 <a:effectLst/>
                                                 <a:latin typeface="Cambria Math" panose="02040503050406030204" pitchFamily="18" charset="0"/>
                                               </a:rPr>
@@ -16634,7 +16964,7 @@
                                           </m:sSubPr>
                                           <m:e>
                                             <m:r>
-                                              <a:rPr lang="en-US" sz="1050" kern="100">
+                                              <a:rPr lang="en-US" sz="800" kern="100">
                                                 <a:effectLst/>
                                                 <a:latin typeface="Cambria Math" panose="02040503050406030204" pitchFamily="18" charset="0"/>
                                               </a:rPr>
@@ -16643,7 +16973,7 @@
                                           </m:e>
                                           <m:sub>
                                             <m:r>
-                                              <a:rPr lang="en-US" sz="1050" kern="100">
+                                              <a:rPr lang="en-US" sz="800" kern="100">
                                                 <a:effectLst/>
                                                 <a:latin typeface="Cambria Math" panose="02040503050406030204" pitchFamily="18" charset="0"/>
                                               </a:rPr>
@@ -16654,7 +16984,7 @@
                                       </m:num>
                                       <m:den>
                                         <m:r>
-                                          <a:rPr lang="en-US" sz="1050" kern="100">
+                                          <a:rPr lang="en-US" sz="800" kern="100">
                                             <a:effectLst/>
                                             <a:latin typeface="Cambria Math" panose="02040503050406030204" pitchFamily="18" charset="0"/>
                                           </a:rPr>
@@ -16663,7 +16993,7 @@
                                       </m:den>
                                     </m:f>
                                     <m:r>
-                                      <a:rPr lang="en-US" altLang="zh-CN" sz="1050" kern="100" smtClean="0">
+                                      <a:rPr lang="en-US" altLang="zh-CN" sz="800" kern="100" smtClean="0">
                                         <a:effectLst/>
                                         <a:latin typeface="Cambria Math" panose="02040503050406030204" pitchFamily="18" charset="0"/>
                                       </a:rPr>
@@ -16673,7 +17003,7 @@
                                       <m:rPr>
                                         <m:sty m:val="p"/>
                                       </m:rPr>
-                                      <a:rPr lang="en-US" altLang="zh-CN" sz="1050" kern="100" smtClean="0">
+                                      <a:rPr lang="en-US" altLang="zh-CN" sz="800" kern="100" smtClean="0">
                                         <a:effectLst/>
                                         <a:latin typeface="Cambria Math" panose="02040503050406030204" pitchFamily="18" charset="0"/>
                                       </a:rPr>
@@ -16682,7 +17012,7 @@
                                     <m:f>
                                       <m:fPr>
                                         <m:ctrlPr>
-                                          <a:rPr lang="zh-CN" altLang="en-US" sz="1050" i="1" kern="100">
+                                          <a:rPr lang="zh-CN" altLang="en-US" sz="800" i="1" kern="100">
                                             <a:effectLst/>
                                             <a:latin typeface="Cambria Math" panose="02040503050406030204" pitchFamily="18" charset="0"/>
                                           </a:rPr>
@@ -16692,7 +17022,7 @@
                                         <m:sSub>
                                           <m:sSubPr>
                                             <m:ctrlPr>
-                                              <a:rPr lang="zh-CN" altLang="en-US" sz="1050" i="1" kern="100">
+                                              <a:rPr lang="zh-CN" altLang="en-US" sz="800" i="1" kern="100">
                                                 <a:effectLst/>
                                                 <a:latin typeface="Cambria Math" panose="02040503050406030204" pitchFamily="18" charset="0"/>
                                               </a:rPr>
@@ -16700,7 +17030,7 @@
                                           </m:sSubPr>
                                           <m:e>
                                             <m:r>
-                                              <a:rPr lang="en-US" altLang="zh-CN" sz="1050" kern="100">
+                                              <a:rPr lang="en-US" altLang="zh-CN" sz="800" kern="100">
                                                 <a:effectLst/>
                                                 <a:latin typeface="Cambria Math" panose="02040503050406030204" pitchFamily="18" charset="0"/>
                                               </a:rPr>
@@ -16709,7 +17039,7 @@
                                           </m:e>
                                           <m:sub>
                                             <m:r>
-                                              <a:rPr lang="en-US" altLang="zh-CN" sz="1050" b="0" i="0" kern="100" smtClean="0">
+                                              <a:rPr lang="en-US" altLang="zh-CN" sz="800" b="0" i="0" kern="100" smtClean="0">
                                                 <a:effectLst/>
                                                 <a:latin typeface="Cambria Math" panose="02040503050406030204" pitchFamily="18" charset="0"/>
                                               </a:rPr>
@@ -16718,7 +17048,7 @@
                                           </m:sub>
                                         </m:sSub>
                                         <m:r>
-                                          <a:rPr lang="en-US" altLang="zh-CN" sz="1050" kern="100">
+                                          <a:rPr lang="en-US" altLang="zh-CN" sz="800" kern="100">
                                             <a:effectLst/>
                                             <a:latin typeface="Cambria Math" panose="02040503050406030204" pitchFamily="18" charset="0"/>
                                           </a:rPr>
@@ -16727,7 +17057,7 @@
                                         <m:sSub>
                                           <m:sSubPr>
                                             <m:ctrlPr>
-                                              <a:rPr lang="zh-CN" altLang="en-US" sz="1050" i="1" kern="100">
+                                              <a:rPr lang="zh-CN" altLang="en-US" sz="800" i="1" kern="100">
                                                 <a:effectLst/>
                                                 <a:latin typeface="Cambria Math" panose="02040503050406030204" pitchFamily="18" charset="0"/>
                                               </a:rPr>
@@ -16735,7 +17065,7 @@
                                           </m:sSubPr>
                                           <m:e>
                                             <m:r>
-                                              <a:rPr lang="en-US" altLang="zh-CN" sz="1050" kern="100">
+                                              <a:rPr lang="en-US" altLang="zh-CN" sz="800" kern="100">
                                                 <a:effectLst/>
                                                 <a:latin typeface="Cambria Math" panose="02040503050406030204" pitchFamily="18" charset="0"/>
                                               </a:rPr>
@@ -16744,7 +17074,7 @@
                                           </m:e>
                                           <m:sub>
                                             <m:r>
-                                              <a:rPr lang="en-US" altLang="zh-CN" sz="1050" b="0" i="0" kern="100" smtClean="0">
+                                              <a:rPr lang="en-US" altLang="zh-CN" sz="800" b="0" i="0" kern="100" smtClean="0">
                                                 <a:effectLst/>
                                                 <a:latin typeface="Cambria Math" panose="02040503050406030204" pitchFamily="18" charset="0"/>
                                               </a:rPr>
@@ -16755,7 +17085,7 @@
                                       </m:num>
                                       <m:den>
                                         <m:r>
-                                          <a:rPr lang="en-US" altLang="zh-CN" sz="1050" kern="100">
+                                          <a:rPr lang="en-US" altLang="zh-CN" sz="800" kern="100">
                                             <a:effectLst/>
                                             <a:latin typeface="Cambria Math" panose="02040503050406030204" pitchFamily="18" charset="0"/>
                                           </a:rPr>
@@ -16764,7 +17094,7 @@
                                       </m:den>
                                     </m:f>
                                     <m:r>
-                                      <a:rPr lang="en-US" altLang="zh-CN" sz="1050" kern="100">
+                                      <a:rPr lang="en-US" altLang="zh-CN" sz="800" kern="100">
                                         <a:effectLst/>
                                         <a:latin typeface="Cambria Math" panose="02040503050406030204" pitchFamily="18" charset="0"/>
                                       </a:rPr>
@@ -16775,7 +17105,7 @@
                                         <m:begChr m:val="["/>
                                         <m:endChr m:val="]"/>
                                         <m:ctrlPr>
-                                          <a:rPr lang="zh-CN" altLang="en-US" sz="1050" i="1" kern="100">
+                                          <a:rPr lang="zh-CN" altLang="en-US" sz="800" i="1" kern="100">
                                             <a:effectLst/>
                                             <a:latin typeface="Cambria Math" panose="02040503050406030204" pitchFamily="18" charset="0"/>
                                           </a:rPr>
@@ -16785,7 +17115,7 @@
                                         <m:sSub>
                                           <m:sSubPr>
                                             <m:ctrlPr>
-                                              <a:rPr lang="zh-CN" altLang="en-US" sz="1050" i="1" kern="100">
+                                              <a:rPr lang="zh-CN" altLang="en-US" sz="800" i="1" kern="100">
                                                 <a:effectLst/>
                                                 <a:latin typeface="Cambria Math" panose="02040503050406030204" pitchFamily="18" charset="0"/>
                                               </a:rPr>
@@ -16793,7 +17123,7 @@
                                           </m:sSubPr>
                                           <m:e>
                                             <m:r>
-                                              <a:rPr lang="zh-CN" altLang="en-US" sz="1050" kern="100">
+                                              <a:rPr lang="zh-CN" altLang="en-US" sz="800" kern="100">
                                                 <a:effectLst/>
                                                 <a:latin typeface="Cambria Math" panose="02040503050406030204" pitchFamily="18" charset="0"/>
                                               </a:rPr>
@@ -16802,7 +17132,7 @@
                                           </m:e>
                                           <m:sub>
                                             <m:r>
-                                              <a:rPr lang="en-US" altLang="zh-CN" sz="1050" b="0" i="0" kern="100" smtClean="0">
+                                              <a:rPr lang="en-US" altLang="zh-CN" sz="800" b="0" i="0" kern="100" smtClean="0">
                                                 <a:effectLst/>
                                                 <a:latin typeface="Cambria Math" panose="02040503050406030204" pitchFamily="18" charset="0"/>
                                               </a:rPr>
@@ -16811,7 +17141,7 @@
                                           </m:sub>
                                         </m:sSub>
                                         <m:r>
-                                          <a:rPr lang="en-US" altLang="zh-CN" sz="1050" kern="100">
+                                          <a:rPr lang="en-US" altLang="zh-CN" sz="800" kern="100">
                                             <a:effectLst/>
                                             <a:latin typeface="Cambria Math" panose="02040503050406030204" pitchFamily="18" charset="0"/>
                                           </a:rPr>
@@ -16820,7 +17150,7 @@
                                       </m:e>
                                     </m:d>
                                     <m:r>
-                                      <a:rPr lang="en-US" altLang="zh-CN" sz="1050" kern="100">
+                                      <a:rPr lang="en-US" altLang="zh-CN" sz="800" kern="100">
                                         <a:effectLst/>
                                         <a:latin typeface="Cambria Math" panose="02040503050406030204" pitchFamily="18" charset="0"/>
                                       </a:rPr>
@@ -16830,7 +17160,7 @@
                                       <m:rPr>
                                         <m:sty m:val="p"/>
                                       </m:rPr>
-                                      <a:rPr lang="en-US" altLang="zh-CN" sz="1050" kern="100">
+                                      <a:rPr lang="en-US" altLang="zh-CN" sz="800" kern="100">
                                         <a:effectLst/>
                                         <a:latin typeface="Cambria Math" panose="02040503050406030204" pitchFamily="18" charset="0"/>
                                       </a:rPr>
@@ -16839,7 +17169,7 @@
                                     <m:f>
                                       <m:fPr>
                                         <m:ctrlPr>
-                                          <a:rPr lang="zh-CN" altLang="en-US" sz="1050" i="1" kern="100">
+                                          <a:rPr lang="zh-CN" altLang="en-US" sz="800" i="1" kern="100">
                                             <a:effectLst/>
                                             <a:latin typeface="Cambria Math" panose="02040503050406030204" pitchFamily="18" charset="0"/>
                                           </a:rPr>
@@ -16849,7 +17179,7 @@
                                         <m:sSub>
                                           <m:sSubPr>
                                             <m:ctrlPr>
-                                              <a:rPr lang="zh-CN" altLang="en-US" sz="1050" i="1" kern="100">
+                                              <a:rPr lang="zh-CN" altLang="en-US" sz="800" i="1" kern="100">
                                                 <a:effectLst/>
                                                 <a:latin typeface="Cambria Math" panose="02040503050406030204" pitchFamily="18" charset="0"/>
                                               </a:rPr>
@@ -16857,7 +17187,7 @@
                                           </m:sSubPr>
                                           <m:e>
                                             <m:r>
-                                              <a:rPr lang="en-US" altLang="zh-CN" sz="1050" kern="100">
+                                              <a:rPr lang="en-US" altLang="zh-CN" sz="800" kern="100">
                                                 <a:effectLst/>
                                                 <a:latin typeface="Cambria Math" panose="02040503050406030204" pitchFamily="18" charset="0"/>
                                               </a:rPr>
@@ -16866,7 +17196,7 @@
                                           </m:e>
                                           <m:sub>
                                             <m:r>
-                                              <a:rPr lang="en-US" altLang="zh-CN" sz="1050" b="0" i="0" kern="100" smtClean="0">
+                                              <a:rPr lang="en-US" altLang="zh-CN" sz="800" b="0" i="0" kern="100" smtClean="0">
                                                 <a:effectLst/>
                                                 <a:latin typeface="Cambria Math" panose="02040503050406030204" pitchFamily="18" charset="0"/>
                                               </a:rPr>
@@ -16875,7 +17205,7 @@
                                           </m:sub>
                                         </m:sSub>
                                         <m:r>
-                                          <a:rPr lang="en-US" altLang="zh-CN" sz="1050" kern="100">
+                                          <a:rPr lang="en-US" altLang="zh-CN" sz="800" kern="100">
                                             <a:effectLst/>
                                             <a:latin typeface="Cambria Math" panose="02040503050406030204" pitchFamily="18" charset="0"/>
                                           </a:rPr>
@@ -16884,7 +17214,7 @@
                                         <m:sSub>
                                           <m:sSubPr>
                                             <m:ctrlPr>
-                                              <a:rPr lang="zh-CN" altLang="en-US" sz="1050" i="1" kern="100">
+                                              <a:rPr lang="zh-CN" altLang="en-US" sz="800" i="1" kern="100">
                                                 <a:effectLst/>
                                                 <a:latin typeface="Cambria Math" panose="02040503050406030204" pitchFamily="18" charset="0"/>
                                               </a:rPr>
@@ -16892,7 +17222,7 @@
                                           </m:sSubPr>
                                           <m:e>
                                             <m:r>
-                                              <a:rPr lang="en-US" altLang="zh-CN" sz="1050" kern="100">
+                                              <a:rPr lang="en-US" altLang="zh-CN" sz="800" kern="100">
                                                 <a:effectLst/>
                                                 <a:latin typeface="Cambria Math" panose="02040503050406030204" pitchFamily="18" charset="0"/>
                                               </a:rPr>
@@ -16901,7 +17231,7 @@
                                           </m:e>
                                           <m:sub>
                                             <m:r>
-                                              <a:rPr lang="en-US" altLang="zh-CN" sz="1050" b="0" i="0" kern="100" smtClean="0">
+                                              <a:rPr lang="en-US" altLang="zh-CN" sz="800" b="0" i="0" kern="100" smtClean="0">
                                                 <a:effectLst/>
                                                 <a:latin typeface="Cambria Math" panose="02040503050406030204" pitchFamily="18" charset="0"/>
                                               </a:rPr>
@@ -16912,7 +17242,7 @@
                                       </m:num>
                                       <m:den>
                                         <m:r>
-                                          <a:rPr lang="en-US" altLang="zh-CN" sz="1050" kern="100">
+                                          <a:rPr lang="en-US" altLang="zh-CN" sz="800" kern="100">
                                             <a:effectLst/>
                                             <a:latin typeface="Cambria Math" panose="02040503050406030204" pitchFamily="18" charset="0"/>
                                           </a:rPr>
@@ -16921,7 +17251,7 @@
                                       </m:den>
                                     </m:f>
                                     <m:r>
-                                      <a:rPr lang="en-US" altLang="zh-CN" sz="1050" kern="100">
+                                      <a:rPr lang="en-US" altLang="zh-CN" sz="800" kern="100">
                                         <a:effectLst/>
                                         <a:latin typeface="Cambria Math" panose="02040503050406030204" pitchFamily="18" charset="0"/>
                                       </a:rPr>
@@ -16932,7 +17262,7 @@
                                         <m:begChr m:val="["/>
                                         <m:endChr m:val="]"/>
                                         <m:ctrlPr>
-                                          <a:rPr lang="zh-CN" altLang="en-US" sz="1050" i="1" kern="100">
+                                          <a:rPr lang="zh-CN" altLang="en-US" sz="800" i="1" kern="100">
                                             <a:effectLst/>
                                             <a:latin typeface="Cambria Math" panose="02040503050406030204" pitchFamily="18" charset="0"/>
                                           </a:rPr>
@@ -16942,7 +17272,7 @@
                                         <m:sSub>
                                           <m:sSubPr>
                                             <m:ctrlPr>
-                                              <a:rPr lang="zh-CN" altLang="en-US" sz="1050" i="1" kern="100">
+                                              <a:rPr lang="zh-CN" altLang="en-US" sz="800" i="1" kern="100">
                                                 <a:effectLst/>
                                                 <a:latin typeface="Cambria Math" panose="02040503050406030204" pitchFamily="18" charset="0"/>
                                               </a:rPr>
@@ -16950,7 +17280,7 @@
                                           </m:sSubPr>
                                           <m:e>
                                             <m:r>
-                                              <a:rPr lang="zh-CN" altLang="en-US" sz="1050" kern="100">
+                                              <a:rPr lang="zh-CN" altLang="en-US" sz="800" kern="100">
                                                 <a:effectLst/>
                                                 <a:latin typeface="Cambria Math" panose="02040503050406030204" pitchFamily="18" charset="0"/>
                                               </a:rPr>
@@ -16959,7 +17289,7 @@
                                           </m:e>
                                           <m:sub>
                                             <m:r>
-                                              <a:rPr lang="en-US" altLang="zh-CN" sz="1050" b="0" i="0" kern="100" smtClean="0">
+                                              <a:rPr lang="en-US" altLang="zh-CN" sz="800" b="0" i="0" kern="100" smtClean="0">
                                                 <a:effectLst/>
                                                 <a:latin typeface="Cambria Math" panose="02040503050406030204" pitchFamily="18" charset="0"/>
                                               </a:rPr>
@@ -16968,7 +17298,7 @@
                                           </m:sub>
                                         </m:sSub>
                                         <m:r>
-                                          <a:rPr lang="en-US" altLang="zh-CN" sz="1050" kern="100">
+                                          <a:rPr lang="en-US" altLang="zh-CN" sz="800" kern="100">
                                             <a:effectLst/>
                                             <a:latin typeface="Cambria Math" panose="02040503050406030204" pitchFamily="18" charset="0"/>
                                           </a:rPr>
@@ -16981,7 +17311,7 @@
                               </m:oMath>
                             </m:oMathPara>
                           </a14:m>
-                          <a:endParaRPr lang="zh-CN" sz="1050" kern="100" dirty="0">
+                          <a:endParaRPr lang="zh-CN" sz="800" kern="100" dirty="0">
                             <a:effectLst/>
                             <a:latin typeface="DengXian" panose="02010600030101010101" pitchFamily="2" charset="-122"/>
                             <a:ea typeface="DengXian" panose="02010600030101010101" pitchFamily="2" charset="-122"/>
@@ -17101,88 +17431,594 @@
                                 <m:d>
                                   <m:dPr>
                                     <m:ctrlPr>
-                                      <a:rPr lang="zh-CN" sz="1050" i="1" kern="100">
+                                      <a:rPr lang="zh-CN" altLang="zh-CN" sz="800" i="1" kern="1200" smtClean="0">
+                                        <a:solidFill>
+                                          <a:schemeClr val="dk1"/>
+                                        </a:solidFill>
                                         <a:effectLst/>
-                                        <a:latin typeface="Cambria Math" panose="02040503050406030204" pitchFamily="18" charset="0"/>
+                                        <a:latin typeface="+mn-lt"/>
+                                        <a:ea typeface="+mn-ea"/>
+                                        <a:cs typeface="+mn-cs"/>
                                       </a:rPr>
                                     </m:ctrlPr>
                                   </m:dPr>
                                   <m:e>
+                                    <m:sSub>
+                                      <m:sSubPr>
+                                        <m:ctrlPr>
+                                          <a:rPr lang="zh-CN" altLang="zh-CN" sz="800" i="1" kern="1200">
+                                            <a:solidFill>
+                                              <a:schemeClr val="dk1"/>
+                                            </a:solidFill>
+                                            <a:effectLst/>
+                                            <a:latin typeface="+mn-lt"/>
+                                            <a:ea typeface="+mn-ea"/>
+                                            <a:cs typeface="+mn-cs"/>
+                                          </a:rPr>
+                                        </m:ctrlPr>
+                                      </m:sSubPr>
+                                      <m:e>
+                                        <m:r>
+                                          <a:rPr lang="en-US" altLang="zh-CN" sz="800" i="1" kern="1200">
+                                            <a:solidFill>
+                                              <a:schemeClr val="dk1"/>
+                                            </a:solidFill>
+                                            <a:effectLst/>
+                                            <a:latin typeface="+mn-lt"/>
+                                            <a:ea typeface="+mn-ea"/>
+                                            <a:cs typeface="+mn-cs"/>
+                                          </a:rPr>
+                                          <m:t>𝑌</m:t>
+                                        </m:r>
+                                      </m:e>
+                                      <m:sub>
+                                        <m:r>
+                                          <a:rPr lang="en-US" altLang="zh-CN" sz="800" i="1" kern="1200">
+                                            <a:solidFill>
+                                              <a:schemeClr val="dk1"/>
+                                            </a:solidFill>
+                                            <a:effectLst/>
+                                            <a:latin typeface="+mn-lt"/>
+                                            <a:ea typeface="+mn-ea"/>
+                                            <a:cs typeface="+mn-cs"/>
+                                          </a:rPr>
+                                          <m:t>1</m:t>
+                                        </m:r>
+                                      </m:sub>
+                                    </m:sSub>
+                                    <m:r>
+                                      <a:rPr lang="en-US" altLang="zh-CN" sz="800" i="1" kern="1200">
+                                        <a:solidFill>
+                                          <a:schemeClr val="dk1"/>
+                                        </a:solidFill>
+                                        <a:effectLst/>
+                                        <a:latin typeface="+mn-lt"/>
+                                        <a:ea typeface="+mn-ea"/>
+                                        <a:cs typeface="+mn-cs"/>
+                                      </a:rPr>
+                                      <m:t>−</m:t>
+                                    </m:r>
+                                    <m:d>
+                                      <m:dPr>
+                                        <m:ctrlPr>
+                                          <a:rPr lang="zh-CN" altLang="zh-CN" sz="800" i="1" kern="1200">
+                                            <a:solidFill>
+                                              <a:schemeClr val="dk1"/>
+                                            </a:solidFill>
+                                            <a:effectLst/>
+                                            <a:latin typeface="+mn-lt"/>
+                                            <a:ea typeface="+mn-ea"/>
+                                            <a:cs typeface="+mn-cs"/>
+                                          </a:rPr>
+                                        </m:ctrlPr>
+                                      </m:dPr>
+                                      <m:e>
+                                        <m:r>
+                                          <a:rPr lang="en-US" altLang="zh-CN" sz="800" i="1" kern="1200">
+                                            <a:solidFill>
+                                              <a:schemeClr val="dk1"/>
+                                            </a:solidFill>
+                                            <a:effectLst/>
+                                            <a:latin typeface="+mn-lt"/>
+                                            <a:ea typeface="+mn-ea"/>
+                                            <a:cs typeface="+mn-cs"/>
+                                          </a:rPr>
+                                          <m:t>1+</m:t>
+                                        </m:r>
+                                        <m:r>
+                                          <m:rPr>
+                                            <m:sty m:val="p"/>
+                                          </m:rPr>
+                                          <a:rPr lang="en-US" altLang="zh-CN" sz="800" kern="1200">
+                                            <a:solidFill>
+                                              <a:schemeClr val="dk1"/>
+                                            </a:solidFill>
+                                            <a:effectLst/>
+                                            <a:latin typeface="+mn-lt"/>
+                                            <a:ea typeface="+mn-ea"/>
+                                            <a:cs typeface="+mn-cs"/>
+                                          </a:rPr>
+                                          <m:t>ϵ</m:t>
+                                        </m:r>
+                                      </m:e>
+                                    </m:d>
                                     <m:f>
                                       <m:fPr>
                                         <m:ctrlPr>
-                                          <a:rPr lang="zh-CN" sz="1050" i="1" kern="100">
+                                          <a:rPr lang="zh-CN" altLang="zh-CN" sz="800" i="1" kern="1200">
+                                            <a:solidFill>
+                                              <a:schemeClr val="dk1"/>
+                                            </a:solidFill>
                                             <a:effectLst/>
-                                            <a:latin typeface="Cambria Math" panose="02040503050406030204" pitchFamily="18" charset="0"/>
+                                            <a:latin typeface="+mn-lt"/>
+                                            <a:ea typeface="+mn-ea"/>
+                                            <a:cs typeface="+mn-cs"/>
                                           </a:rPr>
                                         </m:ctrlPr>
                                       </m:fPr>
                                       <m:num>
-                                        <m:r>
-                                          <a:rPr lang="en-US" sz="1050" kern="100">
-                                            <a:effectLst/>
-                                            <a:latin typeface="Cambria Math" panose="02040503050406030204" pitchFamily="18" charset="0"/>
-                                          </a:rPr>
-                                          <m:t>3</m:t>
-                                        </m:r>
                                         <m:sSub>
                                           <m:sSubPr>
                                             <m:ctrlPr>
-                                              <a:rPr lang="zh-CN" sz="1050" i="1" kern="100">
+                                              <a:rPr lang="zh-CN" altLang="zh-CN" sz="800" i="1" kern="1200">
+                                                <a:solidFill>
+                                                  <a:schemeClr val="dk1"/>
+                                                </a:solidFill>
                                                 <a:effectLst/>
-                                                <a:latin typeface="Cambria Math" panose="02040503050406030204" pitchFamily="18" charset="0"/>
+                                                <a:latin typeface="+mn-lt"/>
+                                                <a:ea typeface="+mn-ea"/>
+                                                <a:cs typeface="+mn-cs"/>
                                               </a:rPr>
                                             </m:ctrlPr>
                                           </m:sSubPr>
                                           <m:e>
                                             <m:r>
-                                              <a:rPr lang="en-US" sz="1050" kern="100">
+                                              <a:rPr lang="en-US" altLang="zh-CN" sz="800" i="1" kern="1200">
+                                                <a:solidFill>
+                                                  <a:schemeClr val="dk1"/>
+                                                </a:solidFill>
                                                 <a:effectLst/>
-                                                <a:latin typeface="Cambria Math" panose="02040503050406030204" pitchFamily="18" charset="0"/>
+                                                <a:latin typeface="+mn-lt"/>
+                                                <a:ea typeface="+mn-ea"/>
+                                                <a:cs typeface="+mn-cs"/>
                                               </a:rPr>
                                               <m:t>𝑌</m:t>
                                             </m:r>
                                           </m:e>
                                           <m:sub>
                                             <m:r>
-                                              <a:rPr lang="en-US" sz="1050" kern="100">
+                                              <a:rPr lang="en-US" altLang="zh-CN" sz="800" i="1" kern="1200">
+                                                <a:solidFill>
+                                                  <a:schemeClr val="dk1"/>
+                                                </a:solidFill>
                                                 <a:effectLst/>
-                                                <a:latin typeface="Cambria Math" panose="02040503050406030204" pitchFamily="18" charset="0"/>
+                                                <a:latin typeface="+mn-lt"/>
+                                                <a:ea typeface="+mn-ea"/>
+                                                <a:cs typeface="+mn-cs"/>
+                                              </a:rPr>
+                                              <m:t>2</m:t>
+                                            </m:r>
+                                          </m:sub>
+                                        </m:sSub>
+                                        <m:r>
+                                          <a:rPr lang="en-US" altLang="zh-CN" sz="800" i="1" kern="1200">
+                                            <a:solidFill>
+                                              <a:schemeClr val="dk1"/>
+                                            </a:solidFill>
+                                            <a:effectLst/>
+                                            <a:latin typeface="+mn-lt"/>
+                                            <a:ea typeface="+mn-ea"/>
+                                            <a:cs typeface="+mn-cs"/>
+                                          </a:rPr>
+                                          <m:t>−</m:t>
+                                        </m:r>
+                                        <m:sSub>
+                                          <m:sSubPr>
+                                            <m:ctrlPr>
+                                              <a:rPr lang="zh-CN" altLang="zh-CN" sz="800" i="1" kern="1200">
+                                                <a:solidFill>
+                                                  <a:schemeClr val="dk1"/>
+                                                </a:solidFill>
+                                                <a:effectLst/>
+                                                <a:latin typeface="+mn-lt"/>
+                                                <a:ea typeface="+mn-ea"/>
+                                                <a:cs typeface="+mn-cs"/>
+                                              </a:rPr>
+                                            </m:ctrlPr>
+                                          </m:sSubPr>
+                                          <m:e>
+                                            <m:r>
+                                              <a:rPr lang="en-US" altLang="zh-CN" sz="800" i="1" kern="1200">
+                                                <a:solidFill>
+                                                  <a:schemeClr val="dk1"/>
+                                                </a:solidFill>
+                                                <a:effectLst/>
+                                                <a:latin typeface="+mn-lt"/>
+                                                <a:ea typeface="+mn-ea"/>
+                                                <a:cs typeface="+mn-cs"/>
+                                              </a:rPr>
+                                              <m:t>𝑌</m:t>
+                                            </m:r>
+                                          </m:e>
+                                          <m:sub>
+                                            <m:r>
+                                              <a:rPr lang="en-US" altLang="zh-CN" sz="800" i="1" kern="1200">
+                                                <a:solidFill>
+                                                  <a:schemeClr val="dk1"/>
+                                                </a:solidFill>
+                                                <a:effectLst/>
+                                                <a:latin typeface="+mn-lt"/>
+                                                <a:ea typeface="+mn-ea"/>
+                                                <a:cs typeface="+mn-cs"/>
+                                              </a:rPr>
+                                              <m:t>1</m:t>
+                                            </m:r>
+                                          </m:sub>
+                                        </m:sSub>
+                                      </m:num>
+                                      <m:den>
+                                        <m:r>
+                                          <a:rPr lang="en-US" altLang="zh-CN" sz="800" i="1" kern="1200">
+                                            <a:solidFill>
+                                              <a:schemeClr val="dk1"/>
+                                            </a:solidFill>
+                                            <a:effectLst/>
+                                            <a:latin typeface="+mn-lt"/>
+                                            <a:ea typeface="+mn-ea"/>
+                                            <a:cs typeface="+mn-cs"/>
+                                          </a:rPr>
+                                          <m:t>2</m:t>
+                                        </m:r>
+                                      </m:den>
+                                    </m:f>
+                                    <m:r>
+                                      <a:rPr lang="en-US" altLang="zh-CN" sz="800" i="1" kern="1200">
+                                        <a:solidFill>
+                                          <a:schemeClr val="dk1"/>
+                                        </a:solidFill>
+                                        <a:effectLst/>
+                                        <a:latin typeface="+mn-lt"/>
+                                        <a:ea typeface="+mn-ea"/>
+                                        <a:cs typeface="+mn-cs"/>
+                                      </a:rPr>
+                                      <m:t>𝕀</m:t>
+                                    </m:r>
+                                    <m:d>
+                                      <m:dPr>
+                                        <m:begChr m:val="["/>
+                                        <m:endChr m:val="]"/>
+                                        <m:ctrlPr>
+                                          <a:rPr lang="zh-CN" altLang="zh-CN" sz="800" i="1" kern="1200">
+                                            <a:solidFill>
+                                              <a:schemeClr val="dk1"/>
+                                            </a:solidFill>
+                                            <a:effectLst/>
+                                            <a:latin typeface="+mn-lt"/>
+                                            <a:ea typeface="+mn-ea"/>
+                                            <a:cs typeface="+mn-cs"/>
+                                          </a:rPr>
+                                        </m:ctrlPr>
+                                      </m:dPr>
+                                      <m:e>
+                                        <m:sSub>
+                                          <m:sSubPr>
+                                            <m:ctrlPr>
+                                              <a:rPr lang="zh-CN" altLang="zh-CN" sz="800" i="1" kern="1200">
+                                                <a:solidFill>
+                                                  <a:schemeClr val="dk1"/>
+                                                </a:solidFill>
+                                                <a:effectLst/>
+                                                <a:latin typeface="+mn-lt"/>
+                                                <a:ea typeface="+mn-ea"/>
+                                                <a:cs typeface="+mn-cs"/>
+                                              </a:rPr>
+                                            </m:ctrlPr>
+                                          </m:sSubPr>
+                                          <m:e>
+                                            <m:r>
+                                              <a:rPr lang="en-US" altLang="zh-CN" sz="800" i="1" kern="1200">
+                                                <a:solidFill>
+                                                  <a:schemeClr val="dk1"/>
+                                                </a:solidFill>
+                                                <a:effectLst/>
+                                                <a:latin typeface="+mn-lt"/>
+                                                <a:ea typeface="+mn-ea"/>
+                                                <a:cs typeface="+mn-cs"/>
+                                              </a:rPr>
+                                              <m:t>𝑌</m:t>
+                                            </m:r>
+                                          </m:e>
+                                          <m:sub>
+                                            <m:r>
+                                              <a:rPr lang="en-US" altLang="zh-CN" sz="800" i="1" kern="1200">
+                                                <a:solidFill>
+                                                  <a:schemeClr val="dk1"/>
+                                                </a:solidFill>
+                                                <a:effectLst/>
+                                                <a:latin typeface="+mn-lt"/>
+                                                <a:ea typeface="+mn-ea"/>
+                                                <a:cs typeface="+mn-cs"/>
                                               </a:rPr>
                                               <m:t>1</m:t>
                                             </m:r>
                                           </m:sub>
                                         </m:sSub>
                                         <m:r>
-                                          <a:rPr lang="en-US" sz="1050" kern="100">
+                                          <a:rPr lang="en-US" altLang="zh-CN" sz="800" i="1" kern="1200">
+                                            <a:solidFill>
+                                              <a:schemeClr val="dk1"/>
+                                            </a:solidFill>
                                             <a:effectLst/>
-                                            <a:latin typeface="Cambria Math" panose="02040503050406030204" pitchFamily="18" charset="0"/>
+                                            <a:latin typeface="+mn-lt"/>
+                                            <a:ea typeface="+mn-ea"/>
+                                            <a:cs typeface="+mn-cs"/>
+                                          </a:rPr>
+                                          <m:t>&lt;</m:t>
+                                        </m:r>
+                                        <m:sSub>
+                                          <m:sSubPr>
+                                            <m:ctrlPr>
+                                              <a:rPr lang="zh-CN" altLang="zh-CN" sz="800" i="1" kern="1200">
+                                                <a:solidFill>
+                                                  <a:schemeClr val="dk1"/>
+                                                </a:solidFill>
+                                                <a:effectLst/>
+                                                <a:latin typeface="+mn-lt"/>
+                                                <a:ea typeface="+mn-ea"/>
+                                                <a:cs typeface="+mn-cs"/>
+                                              </a:rPr>
+                                            </m:ctrlPr>
+                                          </m:sSubPr>
+                                          <m:e>
+                                            <m:r>
+                                              <a:rPr lang="en-US" altLang="zh-CN" sz="800" i="1" kern="1200">
+                                                <a:solidFill>
+                                                  <a:schemeClr val="dk1"/>
+                                                </a:solidFill>
+                                                <a:effectLst/>
+                                                <a:latin typeface="+mn-lt"/>
+                                                <a:ea typeface="+mn-ea"/>
+                                                <a:cs typeface="+mn-cs"/>
+                                              </a:rPr>
+                                              <m:t>𝑌</m:t>
+                                            </m:r>
+                                          </m:e>
+                                          <m:sub>
+                                            <m:r>
+                                              <a:rPr lang="en-US" altLang="zh-CN" sz="800" i="1" kern="1200">
+                                                <a:solidFill>
+                                                  <a:schemeClr val="dk1"/>
+                                                </a:solidFill>
+                                                <a:effectLst/>
+                                                <a:latin typeface="+mn-lt"/>
+                                                <a:ea typeface="+mn-ea"/>
+                                                <a:cs typeface="+mn-cs"/>
+                                              </a:rPr>
+                                              <m:t>2</m:t>
+                                            </m:r>
+                                          </m:sub>
+                                        </m:sSub>
+                                      </m:e>
+                                    </m:d>
+                                    <m:r>
+                                      <a:rPr lang="en-US" altLang="zh-CN" sz="800" i="1" kern="1200">
+                                        <a:solidFill>
+                                          <a:schemeClr val="dk1"/>
+                                        </a:solidFill>
+                                        <a:effectLst/>
+                                        <a:latin typeface="+mn-lt"/>
+                                        <a:ea typeface="+mn-ea"/>
+                                        <a:cs typeface="+mn-cs"/>
+                                      </a:rPr>
+                                      <m:t>,</m:t>
+                                    </m:r>
+                                    <m:sSub>
+                                      <m:sSubPr>
+                                        <m:ctrlPr>
+                                          <a:rPr lang="zh-CN" altLang="zh-CN" sz="800" i="1" kern="1200">
+                                            <a:solidFill>
+                                              <a:schemeClr val="dk1"/>
+                                            </a:solidFill>
+                                            <a:effectLst/>
+                                            <a:latin typeface="+mn-lt"/>
+                                            <a:ea typeface="+mn-ea"/>
+                                            <a:cs typeface="+mn-cs"/>
+                                          </a:rPr>
+                                        </m:ctrlPr>
+                                      </m:sSubPr>
+                                      <m:e>
+                                        <m:r>
+                                          <a:rPr lang="en-US" altLang="zh-CN" sz="800" i="1" kern="1200">
+                                            <a:solidFill>
+                                              <a:schemeClr val="dk1"/>
+                                            </a:solidFill>
+                                            <a:effectLst/>
+                                            <a:latin typeface="+mn-lt"/>
+                                            <a:ea typeface="+mn-ea"/>
+                                            <a:cs typeface="+mn-cs"/>
+                                          </a:rPr>
+                                          <m:t>𝑌</m:t>
+                                        </m:r>
+                                      </m:e>
+                                      <m:sub>
+                                        <m:r>
+                                          <a:rPr lang="en-US" altLang="zh-CN" sz="800" i="1" kern="1200">
+                                            <a:solidFill>
+                                              <a:schemeClr val="dk1"/>
+                                            </a:solidFill>
+                                            <a:effectLst/>
+                                            <a:latin typeface="+mn-lt"/>
+                                            <a:ea typeface="+mn-ea"/>
+                                            <a:cs typeface="+mn-cs"/>
+                                          </a:rPr>
+                                          <m:t>2</m:t>
+                                        </m:r>
+                                      </m:sub>
+                                    </m:sSub>
+                                    <m:r>
+                                      <a:rPr lang="en-US" altLang="zh-CN" sz="800" i="1" kern="1200">
+                                        <a:solidFill>
+                                          <a:schemeClr val="dk1"/>
+                                        </a:solidFill>
+                                        <a:effectLst/>
+                                        <a:latin typeface="+mn-lt"/>
+                                        <a:ea typeface="+mn-ea"/>
+                                        <a:cs typeface="+mn-cs"/>
+                                      </a:rPr>
+                                      <m:t>−</m:t>
+                                    </m:r>
+                                    <m:d>
+                                      <m:dPr>
+                                        <m:ctrlPr>
+                                          <a:rPr lang="zh-CN" altLang="zh-CN" sz="800" i="1" kern="1200">
+                                            <a:solidFill>
+                                              <a:schemeClr val="dk1"/>
+                                            </a:solidFill>
+                                            <a:effectLst/>
+                                            <a:latin typeface="+mn-lt"/>
+                                            <a:ea typeface="+mn-ea"/>
+                                            <a:cs typeface="+mn-cs"/>
+                                          </a:rPr>
+                                        </m:ctrlPr>
+                                      </m:dPr>
+                                      <m:e>
+                                        <m:r>
+                                          <a:rPr lang="en-US" altLang="zh-CN" sz="800" i="1" kern="1200">
+                                            <a:solidFill>
+                                              <a:schemeClr val="dk1"/>
+                                            </a:solidFill>
+                                            <a:effectLst/>
+                                            <a:latin typeface="+mn-lt"/>
+                                            <a:ea typeface="+mn-ea"/>
+                                            <a:cs typeface="+mn-cs"/>
+                                          </a:rPr>
+                                          <m:t>1+</m:t>
+                                        </m:r>
+                                        <m:r>
+                                          <m:rPr>
+                                            <m:sty m:val="p"/>
+                                          </m:rPr>
+                                          <a:rPr lang="en-US" altLang="zh-CN" sz="800" kern="1200">
+                                            <a:solidFill>
+                                              <a:schemeClr val="dk1"/>
+                                            </a:solidFill>
+                                            <a:effectLst/>
+                                            <a:latin typeface="+mn-lt"/>
+                                            <a:ea typeface="+mn-ea"/>
+                                            <a:cs typeface="+mn-cs"/>
+                                          </a:rPr>
+                                          <m:t>ϵ</m:t>
+                                        </m:r>
+                                      </m:e>
+                                    </m:d>
+                                    <m:f>
+                                      <m:fPr>
+                                        <m:ctrlPr>
+                                          <a:rPr lang="zh-CN" altLang="zh-CN" sz="800" i="1" kern="1200">
+                                            <a:solidFill>
+                                              <a:schemeClr val="dk1"/>
+                                            </a:solidFill>
+                                            <a:effectLst/>
+                                            <a:latin typeface="+mn-lt"/>
+                                            <a:ea typeface="+mn-ea"/>
+                                            <a:cs typeface="+mn-cs"/>
+                                          </a:rPr>
+                                        </m:ctrlPr>
+                                      </m:fPr>
+                                      <m:num>
+                                        <m:sSub>
+                                          <m:sSubPr>
+                                            <m:ctrlPr>
+                                              <a:rPr lang="zh-CN" altLang="zh-CN" sz="800" i="1" kern="1200">
+                                                <a:solidFill>
+                                                  <a:schemeClr val="dk1"/>
+                                                </a:solidFill>
+                                                <a:effectLst/>
+                                                <a:latin typeface="+mn-lt"/>
+                                                <a:ea typeface="+mn-ea"/>
+                                                <a:cs typeface="+mn-cs"/>
+                                              </a:rPr>
+                                            </m:ctrlPr>
+                                          </m:sSubPr>
+                                          <m:e>
+                                            <m:r>
+                                              <a:rPr lang="en-US" altLang="zh-CN" sz="800" i="1" kern="1200">
+                                                <a:solidFill>
+                                                  <a:schemeClr val="dk1"/>
+                                                </a:solidFill>
+                                                <a:effectLst/>
+                                                <a:latin typeface="+mn-lt"/>
+                                                <a:ea typeface="+mn-ea"/>
+                                                <a:cs typeface="+mn-cs"/>
+                                              </a:rPr>
+                                              <m:t>𝑌</m:t>
+                                            </m:r>
+                                          </m:e>
+                                          <m:sub>
+                                            <m:r>
+                                              <a:rPr lang="en-US" altLang="zh-CN" sz="800" i="1" kern="1200">
+                                                <a:solidFill>
+                                                  <a:schemeClr val="dk1"/>
+                                                </a:solidFill>
+                                                <a:effectLst/>
+                                                <a:latin typeface="+mn-lt"/>
+                                                <a:ea typeface="+mn-ea"/>
+                                                <a:cs typeface="+mn-cs"/>
+                                              </a:rPr>
+                                              <m:t>1</m:t>
+                                            </m:r>
+                                          </m:sub>
+                                        </m:sSub>
+                                        <m:r>
+                                          <a:rPr lang="en-US" altLang="zh-CN" sz="800" i="1" kern="1200">
+                                            <a:solidFill>
+                                              <a:schemeClr val="dk1"/>
+                                            </a:solidFill>
+                                            <a:effectLst/>
+                                            <a:latin typeface="+mn-lt"/>
+                                            <a:ea typeface="+mn-ea"/>
+                                            <a:cs typeface="+mn-cs"/>
                                           </a:rPr>
                                           <m:t>−</m:t>
                                         </m:r>
                                         <m:sSub>
                                           <m:sSubPr>
                                             <m:ctrlPr>
-                                              <a:rPr lang="zh-CN" sz="1050" i="1" kern="100">
+                                              <a:rPr lang="zh-CN" altLang="zh-CN" sz="800" i="1" kern="1200">
+                                                <a:solidFill>
+                                                  <a:schemeClr val="dk1"/>
+                                                </a:solidFill>
                                                 <a:effectLst/>
-                                                <a:latin typeface="Cambria Math" panose="02040503050406030204" pitchFamily="18" charset="0"/>
+                                                <a:latin typeface="+mn-lt"/>
+                                                <a:ea typeface="+mn-ea"/>
+                                                <a:cs typeface="+mn-cs"/>
                                               </a:rPr>
                                             </m:ctrlPr>
                                           </m:sSubPr>
                                           <m:e>
                                             <m:r>
-                                              <a:rPr lang="en-US" sz="1050" kern="100">
+                                              <a:rPr lang="en-US" altLang="zh-CN" sz="800" i="1" kern="1200">
+                                                <a:solidFill>
+                                                  <a:schemeClr val="dk1"/>
+                                                </a:solidFill>
                                                 <a:effectLst/>
-                                                <a:latin typeface="Cambria Math" panose="02040503050406030204" pitchFamily="18" charset="0"/>
+                                                <a:latin typeface="+mn-lt"/>
+                                                <a:ea typeface="+mn-ea"/>
+                                                <a:cs typeface="+mn-cs"/>
                                               </a:rPr>
                                               <m:t>𝑌</m:t>
                                             </m:r>
                                           </m:e>
                                           <m:sub>
                                             <m:r>
-                                              <a:rPr lang="en-US" sz="1050" kern="100">
+                                              <a:rPr lang="en-US" altLang="zh-CN" sz="800" i="1" kern="1200">
+                                                <a:solidFill>
+                                                  <a:schemeClr val="dk1"/>
+                                                </a:solidFill>
                                                 <a:effectLst/>
-                                                <a:latin typeface="Cambria Math" panose="02040503050406030204" pitchFamily="18" charset="0"/>
+                                                <a:latin typeface="+mn-lt"/>
+                                                <a:ea typeface="+mn-ea"/>
+                                                <a:cs typeface="+mn-cs"/>
                                               </a:rPr>
                                               <m:t>2</m:t>
                                             </m:r>
@@ -17191,118 +18027,154 @@
                                       </m:num>
                                       <m:den>
                                         <m:r>
-                                          <a:rPr lang="en-US" sz="1050" kern="100">
+                                          <a:rPr lang="en-US" altLang="zh-CN" sz="800" i="1" kern="1200">
+                                            <a:solidFill>
+                                              <a:schemeClr val="dk1"/>
+                                            </a:solidFill>
                                             <a:effectLst/>
-                                            <a:latin typeface="Cambria Math" panose="02040503050406030204" pitchFamily="18" charset="0"/>
+                                            <a:latin typeface="+mn-lt"/>
+                                            <a:ea typeface="+mn-ea"/>
+                                            <a:cs typeface="+mn-cs"/>
                                           </a:rPr>
                                           <m:t>2</m:t>
                                         </m:r>
                                       </m:den>
                                     </m:f>
                                     <m:r>
-                                      <a:rPr lang="en-US" sz="1050" kern="100">
+                                      <a:rPr lang="en-US" altLang="zh-CN" sz="800" i="1" kern="1200">
+                                        <a:solidFill>
+                                          <a:schemeClr val="dk1"/>
+                                        </a:solidFill>
                                         <a:effectLst/>
-                                        <a:latin typeface="Cambria Math" panose="02040503050406030204" pitchFamily="18" charset="0"/>
+                                        <a:latin typeface="+mn-lt"/>
+                                        <a:ea typeface="+mn-ea"/>
+                                        <a:cs typeface="+mn-cs"/>
                                       </a:rPr>
-                                      <m:t>,</m:t>
+                                      <m:t>𝕀</m:t>
                                     </m:r>
-                                    <m:f>
-                                      <m:fPr>
+                                    <m:d>
+                                      <m:dPr>
+                                        <m:begChr m:val="["/>
+                                        <m:endChr m:val="]"/>
                                         <m:ctrlPr>
-                                          <a:rPr lang="zh-CN" sz="1050" i="1" kern="100">
+                                          <a:rPr lang="zh-CN" altLang="zh-CN" sz="800" i="1" kern="1200">
+                                            <a:solidFill>
+                                              <a:schemeClr val="dk1"/>
+                                            </a:solidFill>
                                             <a:effectLst/>
-                                            <a:latin typeface="Cambria Math" panose="02040503050406030204" pitchFamily="18" charset="0"/>
+                                            <a:latin typeface="+mn-lt"/>
+                                            <a:ea typeface="+mn-ea"/>
+                                            <a:cs typeface="+mn-cs"/>
                                           </a:rPr>
                                         </m:ctrlPr>
-                                      </m:fPr>
-                                      <m:num>
-                                        <m:r>
-                                          <a:rPr lang="en-US" sz="1050" kern="100">
-                                            <a:effectLst/>
-                                            <a:latin typeface="Cambria Math" panose="02040503050406030204" pitchFamily="18" charset="0"/>
-                                          </a:rPr>
-                                          <m:t>3</m:t>
-                                        </m:r>
+                                      </m:dPr>
+                                      <m:e>
                                         <m:sSub>
                                           <m:sSubPr>
                                             <m:ctrlPr>
-                                              <a:rPr lang="zh-CN" sz="1050" i="1" kern="100">
+                                              <a:rPr lang="zh-CN" altLang="zh-CN" sz="800" i="1" kern="1200">
+                                                <a:solidFill>
+                                                  <a:schemeClr val="dk1"/>
+                                                </a:solidFill>
                                                 <a:effectLst/>
-                                                <a:latin typeface="Cambria Math" panose="02040503050406030204" pitchFamily="18" charset="0"/>
+                                                <a:latin typeface="+mn-lt"/>
+                                                <a:ea typeface="+mn-ea"/>
+                                                <a:cs typeface="+mn-cs"/>
                                               </a:rPr>
                                             </m:ctrlPr>
                                           </m:sSubPr>
                                           <m:e>
                                             <m:r>
-                                              <a:rPr lang="en-US" sz="1050" kern="100">
+                                              <a:rPr lang="en-US" altLang="zh-CN" sz="800" i="1" kern="1200">
+                                                <a:solidFill>
+                                                  <a:schemeClr val="dk1"/>
+                                                </a:solidFill>
                                                 <a:effectLst/>
-                                                <a:latin typeface="Cambria Math" panose="02040503050406030204" pitchFamily="18" charset="0"/>
+                                                <a:latin typeface="+mn-lt"/>
+                                                <a:ea typeface="+mn-ea"/>
+                                                <a:cs typeface="+mn-cs"/>
                                               </a:rPr>
                                               <m:t>𝑌</m:t>
                                             </m:r>
                                           </m:e>
                                           <m:sub>
                                             <m:r>
-                                              <a:rPr lang="en-US" sz="1050" kern="100">
+                                              <a:rPr lang="en-US" altLang="zh-CN" sz="800" i="1" kern="1200">
+                                                <a:solidFill>
+                                                  <a:schemeClr val="dk1"/>
+                                                </a:solidFill>
                                                 <a:effectLst/>
-                                                <a:latin typeface="Cambria Math" panose="02040503050406030204" pitchFamily="18" charset="0"/>
+                                                <a:latin typeface="+mn-lt"/>
+                                                <a:ea typeface="+mn-ea"/>
+                                                <a:cs typeface="+mn-cs"/>
                                               </a:rPr>
-                                              <m:t>2</m:t>
+                                              <m:t>1</m:t>
                                             </m:r>
                                           </m:sub>
                                         </m:sSub>
                                         <m:r>
-                                          <a:rPr lang="en-US" sz="1050" kern="100">
+                                          <a:rPr lang="en-US" altLang="zh-CN" sz="800" i="1" kern="1200">
+                                            <a:solidFill>
+                                              <a:schemeClr val="dk1"/>
+                                            </a:solidFill>
                                             <a:effectLst/>
-                                            <a:latin typeface="Cambria Math" panose="02040503050406030204" pitchFamily="18" charset="0"/>
+                                            <a:latin typeface="+mn-lt"/>
+                                            <a:ea typeface="+mn-ea"/>
+                                            <a:cs typeface="+mn-cs"/>
                                           </a:rPr>
-                                          <m:t>−</m:t>
+                                          <m:t>&gt;</m:t>
                                         </m:r>
                                         <m:sSub>
                                           <m:sSubPr>
                                             <m:ctrlPr>
-                                              <a:rPr lang="zh-CN" sz="1050" i="1" kern="100">
+                                              <a:rPr lang="zh-CN" altLang="zh-CN" sz="800" i="1" kern="1200">
+                                                <a:solidFill>
+                                                  <a:schemeClr val="dk1"/>
+                                                </a:solidFill>
                                                 <a:effectLst/>
-                                                <a:latin typeface="Cambria Math" panose="02040503050406030204" pitchFamily="18" charset="0"/>
+                                                <a:latin typeface="+mn-lt"/>
+                                                <a:ea typeface="+mn-ea"/>
+                                                <a:cs typeface="+mn-cs"/>
                                               </a:rPr>
                                             </m:ctrlPr>
                                           </m:sSubPr>
                                           <m:e>
                                             <m:r>
-                                              <a:rPr lang="en-US" sz="1050" kern="100">
+                                              <a:rPr lang="en-US" altLang="zh-CN" sz="800" i="1" kern="1200">
+                                                <a:solidFill>
+                                                  <a:schemeClr val="dk1"/>
+                                                </a:solidFill>
                                                 <a:effectLst/>
-                                                <a:latin typeface="Cambria Math" panose="02040503050406030204" pitchFamily="18" charset="0"/>
+                                                <a:latin typeface="+mn-lt"/>
+                                                <a:ea typeface="+mn-ea"/>
+                                                <a:cs typeface="+mn-cs"/>
                                               </a:rPr>
                                               <m:t>𝑌</m:t>
                                             </m:r>
                                           </m:e>
                                           <m:sub>
                                             <m:r>
-                                              <a:rPr lang="en-US" sz="1050" kern="100">
+                                              <a:rPr lang="en-US" altLang="zh-CN" sz="800" i="1" kern="1200">
+                                                <a:solidFill>
+                                                  <a:schemeClr val="dk1"/>
+                                                </a:solidFill>
                                                 <a:effectLst/>
-                                                <a:latin typeface="Cambria Math" panose="02040503050406030204" pitchFamily="18" charset="0"/>
+                                                <a:latin typeface="+mn-lt"/>
+                                                <a:ea typeface="+mn-ea"/>
+                                                <a:cs typeface="+mn-cs"/>
                                               </a:rPr>
-                                              <m:t>1</m:t>
+                                              <m:t>2</m:t>
                                             </m:r>
                                           </m:sub>
                                         </m:sSub>
-                                      </m:num>
-                                      <m:den>
-                                        <m:r>
-                                          <a:rPr lang="en-US" sz="1050" kern="100">
-                                            <a:effectLst/>
-                                            <a:latin typeface="Cambria Math" panose="02040503050406030204" pitchFamily="18" charset="0"/>
-                                          </a:rPr>
-                                          <m:t>2</m:t>
-                                        </m:r>
-                                      </m:den>
-                                    </m:f>
+                                      </m:e>
+                                    </m:d>
                                   </m:e>
                                 </m:d>
                               </m:oMath>
                             </m:oMathPara>
                           </a14:m>
-                          <a:endParaRPr lang="zh-CN" sz="1050" kern="100">
+                          <a:endParaRPr lang="zh-CN" sz="800" kern="100" dirty="0">
                             <a:effectLst/>
                             <a:latin typeface="DengXian" panose="02010600030101010101" pitchFamily="2" charset="-122"/>
                             <a:ea typeface="DengXian" panose="02010600030101010101" pitchFamily="2" charset="-122"/>
@@ -17327,88 +18199,594 @@
                                 <m:d>
                                   <m:dPr>
                                     <m:ctrlPr>
-                                      <a:rPr lang="zh-CN" sz="1050" i="1" kern="100">
+                                      <a:rPr lang="zh-CN" altLang="zh-CN" sz="800" i="1" kern="1200" smtClean="0">
+                                        <a:solidFill>
+                                          <a:schemeClr val="dk1"/>
+                                        </a:solidFill>
                                         <a:effectLst/>
-                                        <a:latin typeface="Cambria Math" panose="02040503050406030204" pitchFamily="18" charset="0"/>
+                                        <a:latin typeface="+mn-lt"/>
+                                        <a:ea typeface="+mn-ea"/>
+                                        <a:cs typeface="+mn-cs"/>
                                       </a:rPr>
                                     </m:ctrlPr>
                                   </m:dPr>
                                   <m:e>
+                                    <m:sSub>
+                                      <m:sSubPr>
+                                        <m:ctrlPr>
+                                          <a:rPr lang="zh-CN" altLang="zh-CN" sz="800" i="1" kern="1200">
+                                            <a:solidFill>
+                                              <a:schemeClr val="dk1"/>
+                                            </a:solidFill>
+                                            <a:effectLst/>
+                                            <a:latin typeface="+mn-lt"/>
+                                            <a:ea typeface="+mn-ea"/>
+                                            <a:cs typeface="+mn-cs"/>
+                                          </a:rPr>
+                                        </m:ctrlPr>
+                                      </m:sSubPr>
+                                      <m:e>
+                                        <m:r>
+                                          <a:rPr lang="en-US" altLang="zh-CN" sz="800" i="1" kern="1200">
+                                            <a:solidFill>
+                                              <a:schemeClr val="dk1"/>
+                                            </a:solidFill>
+                                            <a:effectLst/>
+                                            <a:latin typeface="+mn-lt"/>
+                                            <a:ea typeface="+mn-ea"/>
+                                            <a:cs typeface="+mn-cs"/>
+                                          </a:rPr>
+                                          <m:t>𝑌</m:t>
+                                        </m:r>
+                                      </m:e>
+                                      <m:sub>
+                                        <m:r>
+                                          <a:rPr lang="en-US" altLang="zh-CN" sz="800" i="1" kern="1200">
+                                            <a:solidFill>
+                                              <a:schemeClr val="dk1"/>
+                                            </a:solidFill>
+                                            <a:effectLst/>
+                                            <a:latin typeface="+mn-lt"/>
+                                            <a:ea typeface="+mn-ea"/>
+                                            <a:cs typeface="+mn-cs"/>
+                                          </a:rPr>
+                                          <m:t>1</m:t>
+                                        </m:r>
+                                      </m:sub>
+                                    </m:sSub>
+                                    <m:r>
+                                      <a:rPr lang="en-US" altLang="zh-CN" sz="800" i="1" kern="1200">
+                                        <a:solidFill>
+                                          <a:schemeClr val="dk1"/>
+                                        </a:solidFill>
+                                        <a:effectLst/>
+                                        <a:latin typeface="+mn-lt"/>
+                                        <a:ea typeface="+mn-ea"/>
+                                        <a:cs typeface="+mn-cs"/>
+                                      </a:rPr>
+                                      <m:t>−</m:t>
+                                    </m:r>
+                                    <m:d>
+                                      <m:dPr>
+                                        <m:ctrlPr>
+                                          <a:rPr lang="zh-CN" altLang="zh-CN" sz="800" i="1" kern="1200">
+                                            <a:solidFill>
+                                              <a:schemeClr val="dk1"/>
+                                            </a:solidFill>
+                                            <a:effectLst/>
+                                            <a:latin typeface="+mn-lt"/>
+                                            <a:ea typeface="+mn-ea"/>
+                                            <a:cs typeface="+mn-cs"/>
+                                          </a:rPr>
+                                        </m:ctrlPr>
+                                      </m:dPr>
+                                      <m:e>
+                                        <m:r>
+                                          <a:rPr lang="en-US" altLang="zh-CN" sz="800" i="1" kern="1200">
+                                            <a:solidFill>
+                                              <a:schemeClr val="dk1"/>
+                                            </a:solidFill>
+                                            <a:effectLst/>
+                                            <a:latin typeface="+mn-lt"/>
+                                            <a:ea typeface="+mn-ea"/>
+                                            <a:cs typeface="+mn-cs"/>
+                                          </a:rPr>
+                                          <m:t>1+</m:t>
+                                        </m:r>
+                                        <m:r>
+                                          <m:rPr>
+                                            <m:sty m:val="p"/>
+                                          </m:rPr>
+                                          <a:rPr lang="en-US" altLang="zh-CN" sz="800" kern="1200">
+                                            <a:solidFill>
+                                              <a:schemeClr val="dk1"/>
+                                            </a:solidFill>
+                                            <a:effectLst/>
+                                            <a:latin typeface="+mn-lt"/>
+                                            <a:ea typeface="+mn-ea"/>
+                                            <a:cs typeface="+mn-cs"/>
+                                          </a:rPr>
+                                          <m:t>ϵ</m:t>
+                                        </m:r>
+                                      </m:e>
+                                    </m:d>
                                     <m:f>
                                       <m:fPr>
                                         <m:ctrlPr>
-                                          <a:rPr lang="zh-CN" sz="1050" i="1" kern="100">
+                                          <a:rPr lang="zh-CN" altLang="zh-CN" sz="800" i="1" kern="1200">
+                                            <a:solidFill>
+                                              <a:schemeClr val="dk1"/>
+                                            </a:solidFill>
                                             <a:effectLst/>
-                                            <a:latin typeface="Cambria Math" panose="02040503050406030204" pitchFamily="18" charset="0"/>
+                                            <a:latin typeface="+mn-lt"/>
+                                            <a:ea typeface="+mn-ea"/>
+                                            <a:cs typeface="+mn-cs"/>
                                           </a:rPr>
                                         </m:ctrlPr>
                                       </m:fPr>
                                       <m:num>
-                                        <m:r>
-                                          <a:rPr lang="en-US" sz="1050" kern="100">
-                                            <a:effectLst/>
-                                            <a:latin typeface="Cambria Math" panose="02040503050406030204" pitchFamily="18" charset="0"/>
-                                          </a:rPr>
-                                          <m:t>3</m:t>
-                                        </m:r>
                                         <m:sSub>
                                           <m:sSubPr>
                                             <m:ctrlPr>
-                                              <a:rPr lang="zh-CN" sz="1050" i="1" kern="100">
+                                              <a:rPr lang="zh-CN" altLang="zh-CN" sz="800" i="1" kern="1200">
+                                                <a:solidFill>
+                                                  <a:schemeClr val="dk1"/>
+                                                </a:solidFill>
                                                 <a:effectLst/>
-                                                <a:latin typeface="Cambria Math" panose="02040503050406030204" pitchFamily="18" charset="0"/>
+                                                <a:latin typeface="+mn-lt"/>
+                                                <a:ea typeface="+mn-ea"/>
+                                                <a:cs typeface="+mn-cs"/>
                                               </a:rPr>
                                             </m:ctrlPr>
                                           </m:sSubPr>
                                           <m:e>
                                             <m:r>
-                                              <a:rPr lang="en-US" sz="1050" kern="100">
+                                              <a:rPr lang="en-US" altLang="zh-CN" sz="800" i="1" kern="1200">
+                                                <a:solidFill>
+                                                  <a:schemeClr val="dk1"/>
+                                                </a:solidFill>
                                                 <a:effectLst/>
-                                                <a:latin typeface="Cambria Math" panose="02040503050406030204" pitchFamily="18" charset="0"/>
+                                                <a:latin typeface="+mn-lt"/>
+                                                <a:ea typeface="+mn-ea"/>
+                                                <a:cs typeface="+mn-cs"/>
                                               </a:rPr>
                                               <m:t>𝑌</m:t>
                                             </m:r>
                                           </m:e>
                                           <m:sub>
                                             <m:r>
-                                              <a:rPr lang="en-US" sz="1050" kern="100">
+                                              <a:rPr lang="en-US" altLang="zh-CN" sz="800" i="1" kern="1200">
+                                                <a:solidFill>
+                                                  <a:schemeClr val="dk1"/>
+                                                </a:solidFill>
                                                 <a:effectLst/>
-                                                <a:latin typeface="Cambria Math" panose="02040503050406030204" pitchFamily="18" charset="0"/>
+                                                <a:latin typeface="+mn-lt"/>
+                                                <a:ea typeface="+mn-ea"/>
+                                                <a:cs typeface="+mn-cs"/>
+                                              </a:rPr>
+                                              <m:t>2</m:t>
+                                            </m:r>
+                                          </m:sub>
+                                        </m:sSub>
+                                        <m:r>
+                                          <a:rPr lang="en-US" altLang="zh-CN" sz="800" i="1" kern="1200">
+                                            <a:solidFill>
+                                              <a:schemeClr val="dk1"/>
+                                            </a:solidFill>
+                                            <a:effectLst/>
+                                            <a:latin typeface="+mn-lt"/>
+                                            <a:ea typeface="+mn-ea"/>
+                                            <a:cs typeface="+mn-cs"/>
+                                          </a:rPr>
+                                          <m:t>−</m:t>
+                                        </m:r>
+                                        <m:sSub>
+                                          <m:sSubPr>
+                                            <m:ctrlPr>
+                                              <a:rPr lang="zh-CN" altLang="zh-CN" sz="800" i="1" kern="1200">
+                                                <a:solidFill>
+                                                  <a:schemeClr val="dk1"/>
+                                                </a:solidFill>
+                                                <a:effectLst/>
+                                                <a:latin typeface="+mn-lt"/>
+                                                <a:ea typeface="+mn-ea"/>
+                                                <a:cs typeface="+mn-cs"/>
+                                              </a:rPr>
+                                            </m:ctrlPr>
+                                          </m:sSubPr>
+                                          <m:e>
+                                            <m:r>
+                                              <a:rPr lang="en-US" altLang="zh-CN" sz="800" i="1" kern="1200">
+                                                <a:solidFill>
+                                                  <a:schemeClr val="dk1"/>
+                                                </a:solidFill>
+                                                <a:effectLst/>
+                                                <a:latin typeface="+mn-lt"/>
+                                                <a:ea typeface="+mn-ea"/>
+                                                <a:cs typeface="+mn-cs"/>
+                                              </a:rPr>
+                                              <m:t>𝑌</m:t>
+                                            </m:r>
+                                          </m:e>
+                                          <m:sub>
+                                            <m:r>
+                                              <a:rPr lang="en-US" altLang="zh-CN" sz="800" i="1" kern="1200">
+                                                <a:solidFill>
+                                                  <a:schemeClr val="dk1"/>
+                                                </a:solidFill>
+                                                <a:effectLst/>
+                                                <a:latin typeface="+mn-lt"/>
+                                                <a:ea typeface="+mn-ea"/>
+                                                <a:cs typeface="+mn-cs"/>
+                                              </a:rPr>
+                                              <m:t>1</m:t>
+                                            </m:r>
+                                          </m:sub>
+                                        </m:sSub>
+                                      </m:num>
+                                      <m:den>
+                                        <m:r>
+                                          <a:rPr lang="en-US" altLang="zh-CN" sz="800" i="1" kern="1200">
+                                            <a:solidFill>
+                                              <a:schemeClr val="dk1"/>
+                                            </a:solidFill>
+                                            <a:effectLst/>
+                                            <a:latin typeface="+mn-lt"/>
+                                            <a:ea typeface="+mn-ea"/>
+                                            <a:cs typeface="+mn-cs"/>
+                                          </a:rPr>
+                                          <m:t>2</m:t>
+                                        </m:r>
+                                      </m:den>
+                                    </m:f>
+                                    <m:r>
+                                      <a:rPr lang="en-US" altLang="zh-CN" sz="800" i="1" kern="1200">
+                                        <a:solidFill>
+                                          <a:schemeClr val="dk1"/>
+                                        </a:solidFill>
+                                        <a:effectLst/>
+                                        <a:latin typeface="+mn-lt"/>
+                                        <a:ea typeface="+mn-ea"/>
+                                        <a:cs typeface="+mn-cs"/>
+                                      </a:rPr>
+                                      <m:t>𝕀</m:t>
+                                    </m:r>
+                                    <m:d>
+                                      <m:dPr>
+                                        <m:begChr m:val="["/>
+                                        <m:endChr m:val="]"/>
+                                        <m:ctrlPr>
+                                          <a:rPr lang="zh-CN" altLang="zh-CN" sz="800" i="1" kern="1200">
+                                            <a:solidFill>
+                                              <a:schemeClr val="dk1"/>
+                                            </a:solidFill>
+                                            <a:effectLst/>
+                                            <a:latin typeface="+mn-lt"/>
+                                            <a:ea typeface="+mn-ea"/>
+                                            <a:cs typeface="+mn-cs"/>
+                                          </a:rPr>
+                                        </m:ctrlPr>
+                                      </m:dPr>
+                                      <m:e>
+                                        <m:sSub>
+                                          <m:sSubPr>
+                                            <m:ctrlPr>
+                                              <a:rPr lang="zh-CN" altLang="zh-CN" sz="800" i="1" kern="1200">
+                                                <a:solidFill>
+                                                  <a:schemeClr val="dk1"/>
+                                                </a:solidFill>
+                                                <a:effectLst/>
+                                                <a:latin typeface="+mn-lt"/>
+                                                <a:ea typeface="+mn-ea"/>
+                                                <a:cs typeface="+mn-cs"/>
+                                              </a:rPr>
+                                            </m:ctrlPr>
+                                          </m:sSubPr>
+                                          <m:e>
+                                            <m:r>
+                                              <a:rPr lang="en-US" altLang="zh-CN" sz="800" i="1" kern="1200">
+                                                <a:solidFill>
+                                                  <a:schemeClr val="dk1"/>
+                                                </a:solidFill>
+                                                <a:effectLst/>
+                                                <a:latin typeface="+mn-lt"/>
+                                                <a:ea typeface="+mn-ea"/>
+                                                <a:cs typeface="+mn-cs"/>
+                                              </a:rPr>
+                                              <m:t>𝑌</m:t>
+                                            </m:r>
+                                          </m:e>
+                                          <m:sub>
+                                            <m:r>
+                                              <a:rPr lang="en-US" altLang="zh-CN" sz="800" i="1" kern="1200">
+                                                <a:solidFill>
+                                                  <a:schemeClr val="dk1"/>
+                                                </a:solidFill>
+                                                <a:effectLst/>
+                                                <a:latin typeface="+mn-lt"/>
+                                                <a:ea typeface="+mn-ea"/>
+                                                <a:cs typeface="+mn-cs"/>
                                               </a:rPr>
                                               <m:t>1</m:t>
                                             </m:r>
                                           </m:sub>
                                         </m:sSub>
                                         <m:r>
-                                          <a:rPr lang="en-US" sz="1050" kern="100">
+                                          <a:rPr lang="en-US" altLang="zh-CN" sz="800" i="1" kern="1200">
+                                            <a:solidFill>
+                                              <a:schemeClr val="dk1"/>
+                                            </a:solidFill>
                                             <a:effectLst/>
-                                            <a:latin typeface="Cambria Math" panose="02040503050406030204" pitchFamily="18" charset="0"/>
+                                            <a:latin typeface="+mn-lt"/>
+                                            <a:ea typeface="+mn-ea"/>
+                                            <a:cs typeface="+mn-cs"/>
+                                          </a:rPr>
+                                          <m:t>&lt;</m:t>
+                                        </m:r>
+                                        <m:sSub>
+                                          <m:sSubPr>
+                                            <m:ctrlPr>
+                                              <a:rPr lang="zh-CN" altLang="zh-CN" sz="800" i="1" kern="1200">
+                                                <a:solidFill>
+                                                  <a:schemeClr val="dk1"/>
+                                                </a:solidFill>
+                                                <a:effectLst/>
+                                                <a:latin typeface="+mn-lt"/>
+                                                <a:ea typeface="+mn-ea"/>
+                                                <a:cs typeface="+mn-cs"/>
+                                              </a:rPr>
+                                            </m:ctrlPr>
+                                          </m:sSubPr>
+                                          <m:e>
+                                            <m:r>
+                                              <a:rPr lang="en-US" altLang="zh-CN" sz="800" i="1" kern="1200">
+                                                <a:solidFill>
+                                                  <a:schemeClr val="dk1"/>
+                                                </a:solidFill>
+                                                <a:effectLst/>
+                                                <a:latin typeface="+mn-lt"/>
+                                                <a:ea typeface="+mn-ea"/>
+                                                <a:cs typeface="+mn-cs"/>
+                                              </a:rPr>
+                                              <m:t>𝑌</m:t>
+                                            </m:r>
+                                          </m:e>
+                                          <m:sub>
+                                            <m:r>
+                                              <a:rPr lang="en-US" altLang="zh-CN" sz="800" i="1" kern="1200">
+                                                <a:solidFill>
+                                                  <a:schemeClr val="dk1"/>
+                                                </a:solidFill>
+                                                <a:effectLst/>
+                                                <a:latin typeface="+mn-lt"/>
+                                                <a:ea typeface="+mn-ea"/>
+                                                <a:cs typeface="+mn-cs"/>
+                                              </a:rPr>
+                                              <m:t>2</m:t>
+                                            </m:r>
+                                          </m:sub>
+                                        </m:sSub>
+                                      </m:e>
+                                    </m:d>
+                                    <m:r>
+                                      <a:rPr lang="en-US" altLang="zh-CN" sz="800" i="1" kern="1200">
+                                        <a:solidFill>
+                                          <a:schemeClr val="dk1"/>
+                                        </a:solidFill>
+                                        <a:effectLst/>
+                                        <a:latin typeface="+mn-lt"/>
+                                        <a:ea typeface="+mn-ea"/>
+                                        <a:cs typeface="+mn-cs"/>
+                                      </a:rPr>
+                                      <m:t>,</m:t>
+                                    </m:r>
+                                    <m:sSub>
+                                      <m:sSubPr>
+                                        <m:ctrlPr>
+                                          <a:rPr lang="zh-CN" altLang="zh-CN" sz="800" i="1" kern="1200">
+                                            <a:solidFill>
+                                              <a:schemeClr val="dk1"/>
+                                            </a:solidFill>
+                                            <a:effectLst/>
+                                            <a:latin typeface="+mn-lt"/>
+                                            <a:ea typeface="+mn-ea"/>
+                                            <a:cs typeface="+mn-cs"/>
+                                          </a:rPr>
+                                        </m:ctrlPr>
+                                      </m:sSubPr>
+                                      <m:e>
+                                        <m:r>
+                                          <a:rPr lang="en-US" altLang="zh-CN" sz="800" i="1" kern="1200">
+                                            <a:solidFill>
+                                              <a:schemeClr val="dk1"/>
+                                            </a:solidFill>
+                                            <a:effectLst/>
+                                            <a:latin typeface="+mn-lt"/>
+                                            <a:ea typeface="+mn-ea"/>
+                                            <a:cs typeface="+mn-cs"/>
+                                          </a:rPr>
+                                          <m:t>𝑌</m:t>
+                                        </m:r>
+                                      </m:e>
+                                      <m:sub>
+                                        <m:r>
+                                          <a:rPr lang="en-US" altLang="zh-CN" sz="800" i="1" kern="1200">
+                                            <a:solidFill>
+                                              <a:schemeClr val="dk1"/>
+                                            </a:solidFill>
+                                            <a:effectLst/>
+                                            <a:latin typeface="+mn-lt"/>
+                                            <a:ea typeface="+mn-ea"/>
+                                            <a:cs typeface="+mn-cs"/>
+                                          </a:rPr>
+                                          <m:t>2</m:t>
+                                        </m:r>
+                                      </m:sub>
+                                    </m:sSub>
+                                    <m:r>
+                                      <a:rPr lang="en-US" altLang="zh-CN" sz="800" i="1" kern="1200">
+                                        <a:solidFill>
+                                          <a:schemeClr val="dk1"/>
+                                        </a:solidFill>
+                                        <a:effectLst/>
+                                        <a:latin typeface="+mn-lt"/>
+                                        <a:ea typeface="+mn-ea"/>
+                                        <a:cs typeface="+mn-cs"/>
+                                      </a:rPr>
+                                      <m:t>−</m:t>
+                                    </m:r>
+                                    <m:d>
+                                      <m:dPr>
+                                        <m:ctrlPr>
+                                          <a:rPr lang="zh-CN" altLang="zh-CN" sz="800" i="1" kern="1200">
+                                            <a:solidFill>
+                                              <a:schemeClr val="dk1"/>
+                                            </a:solidFill>
+                                            <a:effectLst/>
+                                            <a:latin typeface="+mn-lt"/>
+                                            <a:ea typeface="+mn-ea"/>
+                                            <a:cs typeface="+mn-cs"/>
+                                          </a:rPr>
+                                        </m:ctrlPr>
+                                      </m:dPr>
+                                      <m:e>
+                                        <m:r>
+                                          <a:rPr lang="en-US" altLang="zh-CN" sz="800" i="1" kern="1200">
+                                            <a:solidFill>
+                                              <a:schemeClr val="dk1"/>
+                                            </a:solidFill>
+                                            <a:effectLst/>
+                                            <a:latin typeface="+mn-lt"/>
+                                            <a:ea typeface="+mn-ea"/>
+                                            <a:cs typeface="+mn-cs"/>
+                                          </a:rPr>
+                                          <m:t>1+</m:t>
+                                        </m:r>
+                                        <m:r>
+                                          <m:rPr>
+                                            <m:sty m:val="p"/>
+                                          </m:rPr>
+                                          <a:rPr lang="en-US" altLang="zh-CN" sz="800" kern="1200">
+                                            <a:solidFill>
+                                              <a:schemeClr val="dk1"/>
+                                            </a:solidFill>
+                                            <a:effectLst/>
+                                            <a:latin typeface="+mn-lt"/>
+                                            <a:ea typeface="+mn-ea"/>
+                                            <a:cs typeface="+mn-cs"/>
+                                          </a:rPr>
+                                          <m:t>ϵ</m:t>
+                                        </m:r>
+                                      </m:e>
+                                    </m:d>
+                                    <m:f>
+                                      <m:fPr>
+                                        <m:ctrlPr>
+                                          <a:rPr lang="zh-CN" altLang="zh-CN" sz="800" i="1" kern="1200">
+                                            <a:solidFill>
+                                              <a:schemeClr val="dk1"/>
+                                            </a:solidFill>
+                                            <a:effectLst/>
+                                            <a:latin typeface="+mn-lt"/>
+                                            <a:ea typeface="+mn-ea"/>
+                                            <a:cs typeface="+mn-cs"/>
+                                          </a:rPr>
+                                        </m:ctrlPr>
+                                      </m:fPr>
+                                      <m:num>
+                                        <m:sSub>
+                                          <m:sSubPr>
+                                            <m:ctrlPr>
+                                              <a:rPr lang="zh-CN" altLang="zh-CN" sz="800" i="1" kern="1200">
+                                                <a:solidFill>
+                                                  <a:schemeClr val="dk1"/>
+                                                </a:solidFill>
+                                                <a:effectLst/>
+                                                <a:latin typeface="+mn-lt"/>
+                                                <a:ea typeface="+mn-ea"/>
+                                                <a:cs typeface="+mn-cs"/>
+                                              </a:rPr>
+                                            </m:ctrlPr>
+                                          </m:sSubPr>
+                                          <m:e>
+                                            <m:r>
+                                              <a:rPr lang="en-US" altLang="zh-CN" sz="800" i="1" kern="1200">
+                                                <a:solidFill>
+                                                  <a:schemeClr val="dk1"/>
+                                                </a:solidFill>
+                                                <a:effectLst/>
+                                                <a:latin typeface="+mn-lt"/>
+                                                <a:ea typeface="+mn-ea"/>
+                                                <a:cs typeface="+mn-cs"/>
+                                              </a:rPr>
+                                              <m:t>𝑌</m:t>
+                                            </m:r>
+                                          </m:e>
+                                          <m:sub>
+                                            <m:r>
+                                              <a:rPr lang="en-US" altLang="zh-CN" sz="800" i="1" kern="1200">
+                                                <a:solidFill>
+                                                  <a:schemeClr val="dk1"/>
+                                                </a:solidFill>
+                                                <a:effectLst/>
+                                                <a:latin typeface="+mn-lt"/>
+                                                <a:ea typeface="+mn-ea"/>
+                                                <a:cs typeface="+mn-cs"/>
+                                              </a:rPr>
+                                              <m:t>1</m:t>
+                                            </m:r>
+                                          </m:sub>
+                                        </m:sSub>
+                                        <m:r>
+                                          <a:rPr lang="en-US" altLang="zh-CN" sz="800" i="1" kern="1200">
+                                            <a:solidFill>
+                                              <a:schemeClr val="dk1"/>
+                                            </a:solidFill>
+                                            <a:effectLst/>
+                                            <a:latin typeface="+mn-lt"/>
+                                            <a:ea typeface="+mn-ea"/>
+                                            <a:cs typeface="+mn-cs"/>
                                           </a:rPr>
                                           <m:t>−</m:t>
                                         </m:r>
                                         <m:sSub>
                                           <m:sSubPr>
                                             <m:ctrlPr>
-                                              <a:rPr lang="zh-CN" sz="1050" i="1" kern="100">
+                                              <a:rPr lang="zh-CN" altLang="zh-CN" sz="800" i="1" kern="1200">
+                                                <a:solidFill>
+                                                  <a:schemeClr val="dk1"/>
+                                                </a:solidFill>
                                                 <a:effectLst/>
-                                                <a:latin typeface="Cambria Math" panose="02040503050406030204" pitchFamily="18" charset="0"/>
+                                                <a:latin typeface="+mn-lt"/>
+                                                <a:ea typeface="+mn-ea"/>
+                                                <a:cs typeface="+mn-cs"/>
                                               </a:rPr>
                                             </m:ctrlPr>
                                           </m:sSubPr>
                                           <m:e>
                                             <m:r>
-                                              <a:rPr lang="en-US" sz="1050" kern="100">
+                                              <a:rPr lang="en-US" altLang="zh-CN" sz="800" i="1" kern="1200">
+                                                <a:solidFill>
+                                                  <a:schemeClr val="dk1"/>
+                                                </a:solidFill>
                                                 <a:effectLst/>
-                                                <a:latin typeface="Cambria Math" panose="02040503050406030204" pitchFamily="18" charset="0"/>
+                                                <a:latin typeface="+mn-lt"/>
+                                                <a:ea typeface="+mn-ea"/>
+                                                <a:cs typeface="+mn-cs"/>
                                               </a:rPr>
                                               <m:t>𝑌</m:t>
                                             </m:r>
                                           </m:e>
                                           <m:sub>
                                             <m:r>
-                                              <a:rPr lang="en-US" sz="1050" kern="100">
+                                              <a:rPr lang="en-US" altLang="zh-CN" sz="800" i="1" kern="1200">
+                                                <a:solidFill>
+                                                  <a:schemeClr val="dk1"/>
+                                                </a:solidFill>
                                                 <a:effectLst/>
-                                                <a:latin typeface="Cambria Math" panose="02040503050406030204" pitchFamily="18" charset="0"/>
+                                                <a:latin typeface="+mn-lt"/>
+                                                <a:ea typeface="+mn-ea"/>
+                                                <a:cs typeface="+mn-cs"/>
                                               </a:rPr>
                                               <m:t>2</m:t>
                                             </m:r>
@@ -17417,118 +18795,154 @@
                                       </m:num>
                                       <m:den>
                                         <m:r>
-                                          <a:rPr lang="en-US" sz="1050" kern="100">
+                                          <a:rPr lang="en-US" altLang="zh-CN" sz="800" i="1" kern="1200">
+                                            <a:solidFill>
+                                              <a:schemeClr val="dk1"/>
+                                            </a:solidFill>
                                             <a:effectLst/>
-                                            <a:latin typeface="Cambria Math" panose="02040503050406030204" pitchFamily="18" charset="0"/>
+                                            <a:latin typeface="+mn-lt"/>
+                                            <a:ea typeface="+mn-ea"/>
+                                            <a:cs typeface="+mn-cs"/>
                                           </a:rPr>
                                           <m:t>2</m:t>
                                         </m:r>
                                       </m:den>
                                     </m:f>
                                     <m:r>
-                                      <a:rPr lang="en-US" sz="1050" kern="100">
+                                      <a:rPr lang="en-US" altLang="zh-CN" sz="800" i="1" kern="1200">
+                                        <a:solidFill>
+                                          <a:schemeClr val="dk1"/>
+                                        </a:solidFill>
                                         <a:effectLst/>
-                                        <a:latin typeface="Cambria Math" panose="02040503050406030204" pitchFamily="18" charset="0"/>
+                                        <a:latin typeface="+mn-lt"/>
+                                        <a:ea typeface="+mn-ea"/>
+                                        <a:cs typeface="+mn-cs"/>
                                       </a:rPr>
-                                      <m:t>,</m:t>
+                                      <m:t>𝕀</m:t>
                                     </m:r>
-                                    <m:f>
-                                      <m:fPr>
+                                    <m:d>
+                                      <m:dPr>
+                                        <m:begChr m:val="["/>
+                                        <m:endChr m:val="]"/>
                                         <m:ctrlPr>
-                                          <a:rPr lang="zh-CN" sz="1050" i="1" kern="100">
+                                          <a:rPr lang="zh-CN" altLang="zh-CN" sz="800" i="1" kern="1200">
+                                            <a:solidFill>
+                                              <a:schemeClr val="dk1"/>
+                                            </a:solidFill>
                                             <a:effectLst/>
-                                            <a:latin typeface="Cambria Math" panose="02040503050406030204" pitchFamily="18" charset="0"/>
+                                            <a:latin typeface="+mn-lt"/>
+                                            <a:ea typeface="+mn-ea"/>
+                                            <a:cs typeface="+mn-cs"/>
                                           </a:rPr>
                                         </m:ctrlPr>
-                                      </m:fPr>
-                                      <m:num>
-                                        <m:r>
-                                          <a:rPr lang="en-US" sz="1050" kern="100">
-                                            <a:effectLst/>
-                                            <a:latin typeface="Cambria Math" panose="02040503050406030204" pitchFamily="18" charset="0"/>
-                                          </a:rPr>
-                                          <m:t>3</m:t>
-                                        </m:r>
+                                      </m:dPr>
+                                      <m:e>
                                         <m:sSub>
                                           <m:sSubPr>
                                             <m:ctrlPr>
-                                              <a:rPr lang="zh-CN" sz="1050" i="1" kern="100">
+                                              <a:rPr lang="zh-CN" altLang="zh-CN" sz="800" i="1" kern="1200">
+                                                <a:solidFill>
+                                                  <a:schemeClr val="dk1"/>
+                                                </a:solidFill>
                                                 <a:effectLst/>
-                                                <a:latin typeface="Cambria Math" panose="02040503050406030204" pitchFamily="18" charset="0"/>
+                                                <a:latin typeface="+mn-lt"/>
+                                                <a:ea typeface="+mn-ea"/>
+                                                <a:cs typeface="+mn-cs"/>
                                               </a:rPr>
                                             </m:ctrlPr>
                                           </m:sSubPr>
                                           <m:e>
                                             <m:r>
-                                              <a:rPr lang="en-US" sz="1050" kern="100">
+                                              <a:rPr lang="en-US" altLang="zh-CN" sz="800" i="1" kern="1200">
+                                                <a:solidFill>
+                                                  <a:schemeClr val="dk1"/>
+                                                </a:solidFill>
                                                 <a:effectLst/>
-                                                <a:latin typeface="Cambria Math" panose="02040503050406030204" pitchFamily="18" charset="0"/>
+                                                <a:latin typeface="+mn-lt"/>
+                                                <a:ea typeface="+mn-ea"/>
+                                                <a:cs typeface="+mn-cs"/>
                                               </a:rPr>
                                               <m:t>𝑌</m:t>
                                             </m:r>
                                           </m:e>
                                           <m:sub>
                                             <m:r>
-                                              <a:rPr lang="en-US" sz="1050" kern="100">
+                                              <a:rPr lang="en-US" altLang="zh-CN" sz="800" i="1" kern="1200">
+                                                <a:solidFill>
+                                                  <a:schemeClr val="dk1"/>
+                                                </a:solidFill>
                                                 <a:effectLst/>
-                                                <a:latin typeface="Cambria Math" panose="02040503050406030204" pitchFamily="18" charset="0"/>
+                                                <a:latin typeface="+mn-lt"/>
+                                                <a:ea typeface="+mn-ea"/>
+                                                <a:cs typeface="+mn-cs"/>
                                               </a:rPr>
-                                              <m:t>2</m:t>
+                                              <m:t>1</m:t>
                                             </m:r>
                                           </m:sub>
                                         </m:sSub>
                                         <m:r>
-                                          <a:rPr lang="en-US" sz="1050" kern="100">
+                                          <a:rPr lang="en-US" altLang="zh-CN" sz="800" i="1" kern="1200">
+                                            <a:solidFill>
+                                              <a:schemeClr val="dk1"/>
+                                            </a:solidFill>
                                             <a:effectLst/>
-                                            <a:latin typeface="Cambria Math" panose="02040503050406030204" pitchFamily="18" charset="0"/>
+                                            <a:latin typeface="+mn-lt"/>
+                                            <a:ea typeface="+mn-ea"/>
+                                            <a:cs typeface="+mn-cs"/>
                                           </a:rPr>
-                                          <m:t>−</m:t>
+                                          <m:t>&gt;</m:t>
                                         </m:r>
                                         <m:sSub>
                                           <m:sSubPr>
                                             <m:ctrlPr>
-                                              <a:rPr lang="zh-CN" sz="1050" i="1" kern="100">
+                                              <a:rPr lang="zh-CN" altLang="zh-CN" sz="800" i="1" kern="1200">
+                                                <a:solidFill>
+                                                  <a:schemeClr val="dk1"/>
+                                                </a:solidFill>
                                                 <a:effectLst/>
-                                                <a:latin typeface="Cambria Math" panose="02040503050406030204" pitchFamily="18" charset="0"/>
+                                                <a:latin typeface="+mn-lt"/>
+                                                <a:ea typeface="+mn-ea"/>
+                                                <a:cs typeface="+mn-cs"/>
                                               </a:rPr>
                                             </m:ctrlPr>
                                           </m:sSubPr>
                                           <m:e>
                                             <m:r>
-                                              <a:rPr lang="en-US" sz="1050" kern="100">
+                                              <a:rPr lang="en-US" altLang="zh-CN" sz="800" i="1" kern="1200">
+                                                <a:solidFill>
+                                                  <a:schemeClr val="dk1"/>
+                                                </a:solidFill>
                                                 <a:effectLst/>
-                                                <a:latin typeface="Cambria Math" panose="02040503050406030204" pitchFamily="18" charset="0"/>
+                                                <a:latin typeface="+mn-lt"/>
+                                                <a:ea typeface="+mn-ea"/>
+                                                <a:cs typeface="+mn-cs"/>
                                               </a:rPr>
                                               <m:t>𝑌</m:t>
                                             </m:r>
                                           </m:e>
                                           <m:sub>
                                             <m:r>
-                                              <a:rPr lang="en-US" sz="1050" kern="100">
+                                              <a:rPr lang="en-US" altLang="zh-CN" sz="800" i="1" kern="1200">
+                                                <a:solidFill>
+                                                  <a:schemeClr val="dk1"/>
+                                                </a:solidFill>
                                                 <a:effectLst/>
-                                                <a:latin typeface="Cambria Math" panose="02040503050406030204" pitchFamily="18" charset="0"/>
+                                                <a:latin typeface="+mn-lt"/>
+                                                <a:ea typeface="+mn-ea"/>
+                                                <a:cs typeface="+mn-cs"/>
                                               </a:rPr>
-                                              <m:t>1</m:t>
+                                              <m:t>2</m:t>
                                             </m:r>
                                           </m:sub>
                                         </m:sSub>
-                                      </m:num>
-                                      <m:den>
-                                        <m:r>
-                                          <a:rPr lang="en-US" sz="1050" kern="100">
-                                            <a:effectLst/>
-                                            <a:latin typeface="Cambria Math" panose="02040503050406030204" pitchFamily="18" charset="0"/>
-                                          </a:rPr>
-                                          <m:t>2</m:t>
-                                        </m:r>
-                                      </m:den>
-                                    </m:f>
+                                      </m:e>
+                                    </m:d>
                                   </m:e>
                                 </m:d>
                               </m:oMath>
                             </m:oMathPara>
                           </a14:m>
-                          <a:endParaRPr lang="zh-CN" sz="1050" kern="100" dirty="0">
+                          <a:endParaRPr lang="zh-CN" sz="800" kern="100" dirty="0">
                             <a:effectLst/>
                             <a:latin typeface="DengXian" panose="02010600030101010101" pitchFamily="2" charset="-122"/>
                             <a:ea typeface="DengXian" panose="02010600030101010101" pitchFamily="2" charset="-122"/>
@@ -17549,7 +18963,7 @@
             </a:graphic>
           </p:graphicFrame>
         </mc:Choice>
-        <mc:Fallback xmlns="">
+        <mc:Fallback>
           <p:graphicFrame>
             <p:nvGraphicFramePr>
               <p:cNvPr id="8" name="Table 7">
@@ -17565,14 +18979,14 @@
               <p:nvPr>
                 <p:extLst>
                   <p:ext uri="{D42A27DB-BD31-4B8C-83A1-F6EECF244321}">
-                    <p14:modId xmlns:p14="http://schemas.microsoft.com/office/powerpoint/2010/main" val="1139644182"/>
+                    <p14:modId xmlns:p14="http://schemas.microsoft.com/office/powerpoint/2010/main" val="4036003400"/>
                   </p:ext>
                 </p:extLst>
               </p:nvPr>
             </p:nvGraphicFramePr>
             <p:xfrm>
-              <a:off x="1224342" y="4755946"/>
-              <a:ext cx="9739453" cy="899860"/>
+              <a:off x="1720272" y="4698027"/>
+              <a:ext cx="8747592" cy="728536"/>
             </p:xfrm>
             <a:graphic>
               <a:graphicData uri="http://schemas.openxmlformats.org/drawingml/2006/table">
@@ -17588,14 +19002,14 @@
                         </a:ext>
                       </a:extLst>
                     </a:gridCol>
-                    <a:gridCol w="1748721">
+                    <a:gridCol w="2938565">
                       <a:extLst>
                         <a:ext uri="{9D8B030D-6E8A-4147-A177-3AD203B41FA5}">
                           <a16:colId xmlns:a16="http://schemas.microsoft.com/office/drawing/2014/main" val="3108955298"/>
                         </a:ext>
                       </a:extLst>
                     </a:gridCol>
-                    <a:gridCol w="6991917">
+                    <a:gridCol w="4810212">
                       <a:extLst>
                         <a:ext uri="{9D8B030D-6E8A-4147-A177-3AD203B41FA5}">
                           <a16:colId xmlns:a16="http://schemas.microsoft.com/office/drawing/2014/main" val="3942359470"/>
@@ -17616,7 +19030,7 @@
                         <a:blipFill>
                           <a:blip r:embed="rId4"/>
                           <a:stretch>
-                            <a:fillRect l="-610" t="-16667" r="-877439" b="-400000"/>
+                            <a:fillRect l="-610" t="-13333" r="-778049" b="-310000"/>
                           </a:stretch>
                         </a:blipFill>
                       </a:tcPr>
@@ -17633,7 +19047,7 @@
                         <a:blipFill>
                           <a:blip r:embed="rId4"/>
                           <a:stretch>
-                            <a:fillRect l="-57491" t="-16667" r="-401394" b="-400000"/>
+                            <a:fillRect l="-34232" t="-13333" r="-164730" b="-310000"/>
                           </a:stretch>
                         </a:blipFill>
                       </a:tcPr>
@@ -17650,7 +19064,7 @@
                         <a:blipFill>
                           <a:blip r:embed="rId4"/>
                           <a:stretch>
-                            <a:fillRect l="-39373" t="-16667" r="-348" b="-400000"/>
+                            <a:fillRect l="-81899" t="-13333" r="-506" b="-310000"/>
                           </a:stretch>
                         </a:blipFill>
                       </a:tcPr>
@@ -17661,7 +19075,7 @@
                       </a:ext>
                     </a:extLst>
                   </a:tr>
-                  <a:tr h="359601">
+                  <a:tr h="273939">
                     <a:tc>
                       <a:txBody>
                         <a:bodyPr/>
@@ -17674,7 +19088,7 @@
                         <a:blipFill>
                           <a:blip r:embed="rId4"/>
                           <a:stretch>
-                            <a:fillRect l="-610" t="-59322" r="-877439" b="-103390"/>
+                            <a:fillRect l="-610" t="-73913" r="-778049" b="-102174"/>
                           </a:stretch>
                         </a:blipFill>
                       </a:tcPr>
@@ -17691,7 +19105,7 @@
                         <a:blipFill>
                           <a:blip r:embed="rId4"/>
                           <a:stretch>
-                            <a:fillRect l="-57491" t="-59322" r="-401394" b="-103390"/>
+                            <a:fillRect l="-34232" t="-73913" r="-164730" b="-102174"/>
                           </a:stretch>
                         </a:blipFill>
                       </a:tcPr>
@@ -17708,7 +19122,7 @@
                         <a:blipFill>
                           <a:blip r:embed="rId4"/>
                           <a:stretch>
-                            <a:fillRect l="-39373" t="-59322" r="-348" b="-103390"/>
+                            <a:fillRect l="-81899" t="-73913" r="-506" b="-102174"/>
                           </a:stretch>
                         </a:blipFill>
                       </a:tcPr>
@@ -17719,7 +19133,7 @@
                       </a:ext>
                     </a:extLst>
                   </a:tr>
-                  <a:tr h="359601">
+                  <a:tr h="273939">
                     <a:tc>
                       <a:txBody>
                         <a:bodyPr/>
@@ -17732,7 +19146,7 @@
                         <a:blipFill>
                           <a:blip r:embed="rId4"/>
                           <a:stretch>
-                            <a:fillRect l="-610" t="-159322" r="-877439" b="-3390"/>
+                            <a:fillRect l="-610" t="-177778" r="-778049" b="-4444"/>
                           </a:stretch>
                         </a:blipFill>
                       </a:tcPr>
@@ -17749,7 +19163,7 @@
                         <a:blipFill>
                           <a:blip r:embed="rId4"/>
                           <a:stretch>
-                            <a:fillRect l="-57491" t="-159322" r="-401394" b="-3390"/>
+                            <a:fillRect l="-34232" t="-177778" r="-164730" b="-4444"/>
                           </a:stretch>
                         </a:blipFill>
                       </a:tcPr>
@@ -17766,7 +19180,7 @@
                         <a:blipFill>
                           <a:blip r:embed="rId4"/>
                           <a:stretch>
-                            <a:fillRect l="-39373" t="-159322" r="-348" b="-3390"/>
+                            <a:fillRect l="-81899" t="-177778" r="-506" b="-4444"/>
                           </a:stretch>
                         </a:blipFill>
                       </a:tcPr>

--- a/files/owner_assist.pptx
+++ b/files/owner_assist.pptx
@@ -1,6 +1,6 @@
 
 <file path=ppt/presentation.xml><?xml version="1.0" encoding="utf-8"?>
-<p:presentation xmlns:a="http://schemas.openxmlformats.org/drawingml/2006/main" xmlns:r="http://schemas.openxmlformats.org/officeDocument/2006/relationships" xmlns:p="http://schemas.openxmlformats.org/presentationml/2006/main" saveSubsetFonts="1" autoCompressPictures="0">
+<p:presentation xmlns:a="http://schemas.openxmlformats.org/drawingml/2006/main" xmlns:r="http://schemas.openxmlformats.org/officeDocument/2006/relationships" xmlns:p="http://schemas.openxmlformats.org/presentationml/2006/main" removePersonalInfoOnSave="1" saveSubsetFonts="1" autoCompressPictures="0">
   <p:sldMasterIdLst>
     <p:sldMasterId id="2147483858" r:id="rId1"/>
   </p:sldMasterIdLst>
@@ -207,7 +207,7 @@
           <a:p>
             <a:fld id="{BDA51940-DB52-3B48-AABB-9C7938529E4E}" type="datetimeFigureOut">
               <a:rPr kumimoji="1" lang="zh-CN" altLang="en-US" smtClean="0"/>
-              <a:t>2022/12/25</a:t>
+              <a:t>2023/1/23</a:t>
             </a:fld>
             <a:endParaRPr kumimoji="1" lang="zh-CN" altLang="en-US"/>
           </a:p>
@@ -766,7 +766,7 @@
           <a:p>
             <a:fld id="{34E6C107-BECA-49A0-88A3-CBFCF5885D2D}" type="datetime1">
               <a:rPr kumimoji="1" lang="zh-CN" altLang="en-US" smtClean="0"/>
-              <a:t>2022/12/25</a:t>
+              <a:t>2023/1/23</a:t>
             </a:fld>
             <a:endParaRPr kumimoji="1" lang="zh-CN" altLang="en-US"/>
           </a:p>
@@ -1091,7 +1091,7 @@
           <a:p>
             <a:fld id="{6CCC8DF2-E8D8-4101-BAF8-A4A920E574BA}" type="datetime1">
               <a:rPr kumimoji="1" lang="zh-CN" altLang="en-US" smtClean="0"/>
-              <a:t>2022/12/25</a:t>
+              <a:t>2023/1/23</a:t>
             </a:fld>
             <a:endParaRPr kumimoji="1" lang="zh-CN" altLang="en-US"/>
           </a:p>
@@ -1258,7 +1258,7 @@
           <a:p>
             <a:fld id="{2B951B20-7CD5-4BD2-85DA-BB4B9E96A07B}" type="datetime1">
               <a:rPr kumimoji="1" lang="zh-CN" altLang="en-US" smtClean="0"/>
-              <a:t>2022/12/25</a:t>
+              <a:t>2023/1/23</a:t>
             </a:fld>
             <a:endParaRPr kumimoji="1" lang="zh-CN" altLang="en-US"/>
           </a:p>
@@ -1536,7 +1536,7 @@
           <a:p>
             <a:fld id="{83D7EECA-A2C6-4B2A-8A1D-891A7C1B473F}" type="datetime1">
               <a:rPr kumimoji="1" lang="zh-CN" altLang="en-US" smtClean="0"/>
-              <a:t>2022/12/25</a:t>
+              <a:t>2023/1/23</a:t>
             </a:fld>
             <a:endParaRPr kumimoji="1" lang="zh-CN" altLang="en-US"/>
           </a:p>
@@ -1738,7 +1738,7 @@
           <a:p>
             <a:fld id="{B6435C1D-6A3A-4BC8-A5FA-63DDDDF6CED5}" type="datetime1">
               <a:rPr kumimoji="1" lang="zh-CN" altLang="en-US" smtClean="0"/>
-              <a:t>2022/12/25</a:t>
+              <a:t>2023/1/23</a:t>
             </a:fld>
             <a:endParaRPr kumimoji="1" lang="zh-CN" altLang="en-US"/>
           </a:p>
@@ -1941,7 +1941,7 @@
           <a:p>
             <a:fld id="{09BF96EC-4D07-411A-B8F0-539A521A6E3D}" type="datetime1">
               <a:rPr kumimoji="1" lang="zh-CN" altLang="en-US" smtClean="0"/>
-              <a:t>2022/12/25</a:t>
+              <a:t>2023/1/23</a:t>
             </a:fld>
             <a:endParaRPr kumimoji="1" lang="zh-CN" altLang="en-US"/>
           </a:p>
@@ -2337,7 +2337,7 @@
           <a:p>
             <a:fld id="{FCC3DF88-F808-4C39-8F95-9C14E59DDEE1}" type="datetime1">
               <a:rPr kumimoji="1" lang="zh-CN" altLang="en-US" smtClean="0"/>
-              <a:t>2022/12/25</a:t>
+              <a:t>2023/1/23</a:t>
             </a:fld>
             <a:endParaRPr kumimoji="1" lang="zh-CN" altLang="en-US"/>
           </a:p>
@@ -2740,7 +2740,7 @@
           <a:p>
             <a:fld id="{163DBC63-BB84-4AE7-9581-49AB0E8D01CD}" type="datetime1">
               <a:rPr kumimoji="1" lang="zh-CN" altLang="en-US" smtClean="0"/>
-              <a:t>2022/12/25</a:t>
+              <a:t>2023/1/23</a:t>
             </a:fld>
             <a:endParaRPr kumimoji="1" lang="zh-CN" altLang="en-US"/>
           </a:p>
@@ -3127,7 +3127,7 @@
           <a:p>
             <a:fld id="{D550E475-A1AD-46B2-959F-0BC49E161317}" type="datetime1">
               <a:rPr kumimoji="1" lang="zh-CN" altLang="en-US" smtClean="0"/>
-              <a:t>2022/12/25</a:t>
+              <a:t>2023/1/23</a:t>
             </a:fld>
             <a:endParaRPr kumimoji="1" lang="zh-CN" altLang="en-US"/>
           </a:p>
@@ -3254,7 +3254,7 @@
           <a:p>
             <a:fld id="{79B65CF1-9FF6-44B2-965A-84F13C9AB36C}" type="datetime1">
               <a:rPr kumimoji="1" lang="zh-CN" altLang="en-US" smtClean="0"/>
-              <a:t>2022/12/25</a:t>
+              <a:t>2023/1/23</a:t>
             </a:fld>
             <a:endParaRPr kumimoji="1" lang="zh-CN" altLang="en-US"/>
           </a:p>
@@ -3381,7 +3381,7 @@
           <a:p>
             <a:fld id="{589EED1C-FD81-4459-9A25-DAF302DAE66A}" type="datetime1">
               <a:rPr kumimoji="1" lang="zh-CN" altLang="en-US" smtClean="0"/>
-              <a:t>2022/12/25</a:t>
+              <a:t>2023/1/23</a:t>
             </a:fld>
             <a:endParaRPr kumimoji="1" lang="zh-CN" altLang="en-US"/>
           </a:p>
@@ -3771,7 +3771,7 @@
           <a:p>
             <a:fld id="{566A81CA-1CDB-4041-829C-18091F008B7C}" type="datetime1">
               <a:rPr kumimoji="1" lang="zh-CN" altLang="en-US" smtClean="0"/>
-              <a:t>2022/12/25</a:t>
+              <a:t>2023/1/23</a:t>
             </a:fld>
             <a:endParaRPr kumimoji="1" lang="zh-CN" altLang="en-US"/>
           </a:p>
@@ -4062,7 +4062,7 @@
           <a:p>
             <a:fld id="{1842A012-D673-47C8-A975-BF6A11D148BB}" type="datetime1">
               <a:rPr kumimoji="1" lang="zh-CN" altLang="en-US" smtClean="0"/>
-              <a:t>2022/12/25</a:t>
+              <a:t>2023/1/23</a:t>
             </a:fld>
             <a:endParaRPr kumimoji="1" lang="zh-CN" altLang="en-US"/>
           </a:p>
@@ -5921,7 +5921,7 @@
               </a:ext>
             </a:extLst>
           </a:blip>
-          <a:srcRect b="10835"/>
+          <a:srcRect/>
           <a:stretch/>
         </p:blipFill>
         <p:spPr bwMode="auto">
@@ -5966,7 +5966,7 @@
               </a:ext>
             </a:extLst>
           </a:blip>
-          <a:srcRect r="1768"/>
+          <a:srcRect/>
           <a:stretch/>
         </p:blipFill>
         <p:spPr bwMode="auto">
@@ -9536,8 +9536,8 @@
           </a:p>
         </p:txBody>
       </p:sp>
-      <mc:AlternateContent xmlns:mc="http://schemas.openxmlformats.org/markup-compatibility/2006">
-        <mc:Choice xmlns:a14="http://schemas.microsoft.com/office/drawing/2010/main" Requires="a14">
+      <mc:AlternateContent xmlns:mc="http://schemas.openxmlformats.org/markup-compatibility/2006" xmlns:a14="http://schemas.microsoft.com/office/drawing/2010/main">
+        <mc:Choice Requires="a14">
           <p:graphicFrame>
             <p:nvGraphicFramePr>
               <p:cNvPr id="2" name="Table 1">
@@ -9603,8 +9603,9 @@
                               <m:d>
                                 <m:dPr>
                                   <m:ctrlPr>
-                                    <a:rPr lang="zh-CN" sz="1050" kern="100">
+                                    <a:rPr lang="zh-CN" sz="1050" i="1" kern="100">
                                       <a:effectLst/>
+                                      <a:latin typeface="Cambria Math" panose="02040503050406030204" pitchFamily="18" charset="0"/>
                                     </a:rPr>
                                   </m:ctrlPr>
                                 </m:dPr>
@@ -9612,8 +9613,9 @@
                                   <m:sSub>
                                     <m:sSubPr>
                                       <m:ctrlPr>
-                                        <a:rPr lang="zh-CN" sz="1050" kern="100">
+                                        <a:rPr lang="zh-CN" sz="1050" i="1" kern="100">
                                           <a:effectLst/>
+                                          <a:latin typeface="Cambria Math" panose="02040503050406030204" pitchFamily="18" charset="0"/>
                                         </a:rPr>
                                       </m:ctrlPr>
                                     </m:sSubPr>
@@ -9622,8 +9624,9 @@
                                         <m:accPr>
                                           <m:chr m:val="̂"/>
                                           <m:ctrlPr>
-                                            <a:rPr lang="zh-CN" sz="1050" kern="100">
+                                            <a:rPr lang="zh-CN" sz="1050" i="1" kern="100">
                                               <a:effectLst/>
+                                              <a:latin typeface="Cambria Math" panose="02040503050406030204" pitchFamily="18" charset="0"/>
                                             </a:rPr>
                                           </m:ctrlPr>
                                         </m:accPr>
@@ -9631,6 +9634,7 @@
                                           <m:r>
                                             <a:rPr lang="en-US" sz="1050" kern="100">
                                               <a:effectLst/>
+                                              <a:latin typeface="Cambria Math" panose="02040503050406030204" pitchFamily="18" charset="0"/>
                                             </a:rPr>
                                             <m:t>𝒀</m:t>
                                           </m:r>
@@ -9641,6 +9645,7 @@
                                       <m:r>
                                         <a:rPr lang="en-US" sz="1050" kern="100">
                                           <a:effectLst/>
+                                          <a:latin typeface="Cambria Math" panose="02040503050406030204" pitchFamily="18" charset="0"/>
                                         </a:rPr>
                                         <m:t>𝟏</m:t>
                                       </m:r>
@@ -9649,14 +9654,16 @@
                                   <m:r>
                                     <a:rPr lang="en-US" sz="1050" kern="100">
                                       <a:effectLst/>
+                                      <a:latin typeface="Cambria Math" panose="02040503050406030204" pitchFamily="18" charset="0"/>
                                     </a:rPr>
                                     <m:t>,</m:t>
                                   </m:r>
                                   <m:sSub>
                                     <m:sSubPr>
                                       <m:ctrlPr>
-                                        <a:rPr lang="zh-CN" sz="1050" kern="100">
+                                        <a:rPr lang="zh-CN" sz="1050" i="1" kern="100">
                                           <a:effectLst/>
+                                          <a:latin typeface="Cambria Math" panose="02040503050406030204" pitchFamily="18" charset="0"/>
                                         </a:rPr>
                                       </m:ctrlPr>
                                     </m:sSubPr>
@@ -9665,8 +9672,9 @@
                                         <m:accPr>
                                           <m:chr m:val="̂"/>
                                           <m:ctrlPr>
-                                            <a:rPr lang="zh-CN" sz="1050" kern="100">
+                                            <a:rPr lang="zh-CN" sz="1050" i="1" kern="100">
                                               <a:effectLst/>
+                                              <a:latin typeface="Cambria Math" panose="02040503050406030204" pitchFamily="18" charset="0"/>
                                             </a:rPr>
                                           </m:ctrlPr>
                                         </m:accPr>
@@ -9674,6 +9682,7 @@
                                           <m:r>
                                             <a:rPr lang="en-US" sz="1050" kern="100">
                                               <a:effectLst/>
+                                              <a:latin typeface="Cambria Math" panose="02040503050406030204" pitchFamily="18" charset="0"/>
                                             </a:rPr>
                                             <m:t>𝒀</m:t>
                                           </m:r>
@@ -9684,6 +9693,7 @@
                                       <m:r>
                                         <a:rPr lang="en-US" sz="1050" kern="100">
                                           <a:effectLst/>
+                                          <a:latin typeface="Cambria Math" panose="02040503050406030204" pitchFamily="18" charset="0"/>
                                         </a:rPr>
                                         <m:t>𝟐</m:t>
                                       </m:r>
@@ -9724,8 +9734,9 @@
                                 <m:sSub>
                                   <m:sSubPr>
                                     <m:ctrlPr>
-                                      <a:rPr lang="zh-CN" sz="1050" kern="100">
+                                      <a:rPr lang="zh-CN" sz="1050" i="1" kern="100">
                                         <a:effectLst/>
+                                        <a:latin typeface="Cambria Math" panose="02040503050406030204" pitchFamily="18" charset="0"/>
                                       </a:rPr>
                                     </m:ctrlPr>
                                   </m:sSubPr>
@@ -9733,6 +9744,7 @@
                                     <m:r>
                                       <a:rPr lang="en-US" sz="1050" kern="100">
                                         <a:effectLst/>
+                                        <a:latin typeface="Cambria Math" panose="02040503050406030204" pitchFamily="18" charset="0"/>
                                       </a:rPr>
                                       <m:t>𝒀</m:t>
                                     </m:r>
@@ -9741,6 +9753,7 @@
                                     <m:r>
                                       <a:rPr lang="en-US" sz="1050" kern="100">
                                         <a:effectLst/>
+                                        <a:latin typeface="Cambria Math" panose="02040503050406030204" pitchFamily="18" charset="0"/>
                                       </a:rPr>
                                       <m:t>𝟏</m:t>
                                     </m:r>
@@ -9749,8 +9762,9 @@
                                 <m:sSub>
                                   <m:sSubPr>
                                     <m:ctrlPr>
-                                      <a:rPr lang="zh-CN" sz="1050" kern="100">
+                                      <a:rPr lang="zh-CN" sz="1050" i="1" kern="100">
                                         <a:effectLst/>
+                                        <a:latin typeface="Cambria Math" panose="02040503050406030204" pitchFamily="18" charset="0"/>
                                       </a:rPr>
                                     </m:ctrlPr>
                                   </m:sSubPr>
@@ -9758,6 +9772,7 @@
                                     <m:r>
                                       <a:rPr lang="en-US" sz="1050" kern="100">
                                         <a:effectLst/>
+                                        <a:latin typeface="Cambria Math" panose="02040503050406030204" pitchFamily="18" charset="0"/>
                                       </a:rPr>
                                       <m:t>⊕</m:t>
                                     </m:r>
@@ -9766,6 +9781,7 @@
                                     <m:r>
                                       <a:rPr lang="en-US" sz="1050" kern="100">
                                         <a:effectLst/>
+                                        <a:latin typeface="Cambria Math" panose="02040503050406030204" pitchFamily="18" charset="0"/>
                                       </a:rPr>
                                       <m:t>𝟏</m:t>
                                     </m:r>
@@ -9774,8 +9790,9 @@
                                 <m:sSub>
                                   <m:sSubPr>
                                     <m:ctrlPr>
-                                      <a:rPr lang="zh-CN" sz="1050" kern="100">
+                                      <a:rPr lang="zh-CN" sz="1050" i="1" kern="100">
                                         <a:effectLst/>
+                                        <a:latin typeface="Cambria Math" panose="02040503050406030204" pitchFamily="18" charset="0"/>
                                       </a:rPr>
                                     </m:ctrlPr>
                                   </m:sSubPr>
@@ -9783,6 +9800,7 @@
                                     <m:r>
                                       <a:rPr lang="en-US" sz="1050" kern="100">
                                         <a:effectLst/>
+                                        <a:latin typeface="Cambria Math" panose="02040503050406030204" pitchFamily="18" charset="0"/>
                                       </a:rPr>
                                       <m:t>𝒀</m:t>
                                     </m:r>
@@ -9791,6 +9809,7 @@
                                     <m:r>
                                       <a:rPr lang="en-US" sz="1050" kern="100">
                                         <a:effectLst/>
+                                        <a:latin typeface="Cambria Math" panose="02040503050406030204" pitchFamily="18" charset="0"/>
                                       </a:rPr>
                                       <m:t>𝟐</m:t>
                                     </m:r>
@@ -9824,14 +9843,16 @@
                                 <m:r>
                                   <a:rPr lang="en-US" sz="1050" kern="100">
                                     <a:effectLst/>
+                                    <a:latin typeface="Cambria Math" panose="02040503050406030204" pitchFamily="18" charset="0"/>
                                   </a:rPr>
                                   <m:t>¬</m:t>
                                 </m:r>
                                 <m:d>
                                   <m:dPr>
                                     <m:ctrlPr>
-                                      <a:rPr lang="zh-CN" sz="1050" kern="100">
+                                      <a:rPr lang="zh-CN" sz="1050" i="1" kern="100">
                                         <a:effectLst/>
+                                        <a:latin typeface="Cambria Math" panose="02040503050406030204" pitchFamily="18" charset="0"/>
                                       </a:rPr>
                                     </m:ctrlPr>
                                   </m:dPr>
@@ -9839,8 +9860,9 @@
                                     <m:sSub>
                                       <m:sSubPr>
                                         <m:ctrlPr>
-                                          <a:rPr lang="zh-CN" sz="1050" kern="100">
+                                          <a:rPr lang="zh-CN" sz="1050" i="1" kern="100">
                                             <a:effectLst/>
+                                            <a:latin typeface="Cambria Math" panose="02040503050406030204" pitchFamily="18" charset="0"/>
                                           </a:rPr>
                                         </m:ctrlPr>
                                       </m:sSubPr>
@@ -9848,6 +9870,7 @@
                                         <m:r>
                                           <a:rPr lang="en-US" sz="1050" kern="100">
                                             <a:effectLst/>
+                                            <a:latin typeface="Cambria Math" panose="02040503050406030204" pitchFamily="18" charset="0"/>
                                           </a:rPr>
                                           <m:t>𝒀</m:t>
                                         </m:r>
@@ -9856,6 +9879,7 @@
                                         <m:r>
                                           <a:rPr lang="en-US" sz="1050" kern="100">
                                             <a:effectLst/>
+                                            <a:latin typeface="Cambria Math" panose="02040503050406030204" pitchFamily="18" charset="0"/>
                                           </a:rPr>
                                           <m:t>𝟏</m:t>
                                         </m:r>
@@ -9864,8 +9888,9 @@
                                     <m:sSub>
                                       <m:sSubPr>
                                         <m:ctrlPr>
-                                          <a:rPr lang="zh-CN" sz="1050" kern="100">
+                                          <a:rPr lang="zh-CN" sz="1050" i="1" kern="100">
                                             <a:effectLst/>
+                                            <a:latin typeface="Cambria Math" panose="02040503050406030204" pitchFamily="18" charset="0"/>
                                           </a:rPr>
                                         </m:ctrlPr>
                                       </m:sSubPr>
@@ -9873,6 +9898,7 @@
                                         <m:r>
                                           <a:rPr lang="en-US" sz="1050" kern="100">
                                             <a:effectLst/>
+                                            <a:latin typeface="Cambria Math" panose="02040503050406030204" pitchFamily="18" charset="0"/>
                                           </a:rPr>
                                           <m:t>⊕</m:t>
                                         </m:r>
@@ -9881,6 +9907,7 @@
                                         <m:r>
                                           <a:rPr lang="en-US" sz="1050" kern="100">
                                             <a:effectLst/>
+                                            <a:latin typeface="Cambria Math" panose="02040503050406030204" pitchFamily="18" charset="0"/>
                                           </a:rPr>
                                           <m:t>𝟏</m:t>
                                         </m:r>
@@ -9889,8 +9916,9 @@
                                     <m:sSub>
                                       <m:sSubPr>
                                         <m:ctrlPr>
-                                          <a:rPr lang="zh-CN" sz="1050" kern="100">
+                                          <a:rPr lang="zh-CN" sz="1050" i="1" kern="100">
                                             <a:effectLst/>
+                                            <a:latin typeface="Cambria Math" panose="02040503050406030204" pitchFamily="18" charset="0"/>
                                           </a:rPr>
                                         </m:ctrlPr>
                                       </m:sSubPr>
@@ -9898,6 +9926,7 @@
                                         <m:r>
                                           <a:rPr lang="en-US" sz="1050" kern="100">
                                             <a:effectLst/>
+                                            <a:latin typeface="Cambria Math" panose="02040503050406030204" pitchFamily="18" charset="0"/>
                                           </a:rPr>
                                           <m:t>𝒀</m:t>
                                         </m:r>
@@ -9906,6 +9935,7 @@
                                         <m:r>
                                           <a:rPr lang="en-US" sz="1050" kern="100">
                                             <a:effectLst/>
+                                            <a:latin typeface="Cambria Math" panose="02040503050406030204" pitchFamily="18" charset="0"/>
                                           </a:rPr>
                                           <m:t>𝟐</m:t>
                                         </m:r>
@@ -9948,8 +9978,9 @@
                                 <m:sSub>
                                   <m:sSubPr>
                                     <m:ctrlPr>
-                                      <a:rPr lang="zh-CN" sz="1050" kern="100">
+                                      <a:rPr lang="zh-CN" sz="1050" i="1" kern="100">
                                         <a:effectLst/>
+                                        <a:latin typeface="Cambria Math" panose="02040503050406030204" pitchFamily="18" charset="0"/>
                                       </a:rPr>
                                     </m:ctrlPr>
                                   </m:sSubPr>
@@ -9957,6 +9988,7 @@
                                     <m:r>
                                       <a:rPr lang="en-US" sz="1050" kern="100">
                                         <a:effectLst/>
+                                        <a:latin typeface="Cambria Math" panose="02040503050406030204" pitchFamily="18" charset="0"/>
                                       </a:rPr>
                                       <m:t>⊕</m:t>
                                     </m:r>
@@ -9965,6 +9997,7 @@
                                     <m:r>
                                       <a:rPr lang="en-US" sz="1050" kern="100">
                                         <a:effectLst/>
+                                        <a:latin typeface="Cambria Math" panose="02040503050406030204" pitchFamily="18" charset="0"/>
                                       </a:rPr>
                                       <m:t>𝟏</m:t>
                                     </m:r>
@@ -9973,14 +10006,16 @@
                                 <m:r>
                                   <a:rPr lang="en-US" sz="1050" kern="100">
                                     <a:effectLst/>
+                                    <a:latin typeface="Cambria Math" panose="02040503050406030204" pitchFamily="18" charset="0"/>
                                   </a:rPr>
                                   <m:t>≠</m:t>
                                 </m:r>
                                 <m:sSub>
                                   <m:sSubPr>
                                     <m:ctrlPr>
-                                      <a:rPr lang="zh-CN" sz="1050" kern="100">
+                                      <a:rPr lang="zh-CN" sz="1050" i="1" kern="100">
                                         <a:effectLst/>
+                                        <a:latin typeface="Cambria Math" panose="02040503050406030204" pitchFamily="18" charset="0"/>
                                       </a:rPr>
                                     </m:ctrlPr>
                                   </m:sSubPr>
@@ -9988,6 +10023,7 @@
                                     <m:r>
                                       <a:rPr lang="en-US" sz="1050" kern="100">
                                         <a:effectLst/>
+                                        <a:latin typeface="Cambria Math" panose="02040503050406030204" pitchFamily="18" charset="0"/>
                                       </a:rPr>
                                       <m:t>⊕</m:t>
                                     </m:r>
@@ -9996,6 +10032,7 @@
                                     <m:r>
                                       <a:rPr lang="en-US" sz="1050" kern="100">
                                         <a:effectLst/>
+                                        <a:latin typeface="Cambria Math" panose="02040503050406030204" pitchFamily="18" charset="0"/>
                                       </a:rPr>
                                       <m:t>𝟐</m:t>
                                     </m:r>
@@ -10029,8 +10066,9 @@
                                 <m:d>
                                   <m:dPr>
                                     <m:ctrlPr>
-                                      <a:rPr lang="zh-CN" sz="1050" kern="100">
+                                      <a:rPr lang="zh-CN" sz="1050" i="1" kern="100">
                                         <a:effectLst/>
+                                        <a:latin typeface="Cambria Math" panose="02040503050406030204" pitchFamily="18" charset="0"/>
                                       </a:rPr>
                                     </m:ctrlPr>
                                   </m:dPr>
@@ -10038,8 +10076,9 @@
                                     <m:sSub>
                                       <m:sSubPr>
                                         <m:ctrlPr>
-                                          <a:rPr lang="zh-CN" sz="1050" kern="100">
+                                          <a:rPr lang="zh-CN" sz="1050" i="1" kern="100">
                                             <a:effectLst/>
+                                            <a:latin typeface="Cambria Math" panose="02040503050406030204" pitchFamily="18" charset="0"/>
                                           </a:rPr>
                                         </m:ctrlPr>
                                       </m:sSubPr>
@@ -10047,6 +10086,7 @@
                                         <m:r>
                                           <a:rPr lang="en-US" sz="1050" kern="100">
                                             <a:effectLst/>
+                                            <a:latin typeface="Cambria Math" panose="02040503050406030204" pitchFamily="18" charset="0"/>
                                           </a:rPr>
                                           <m:t>𝑌</m:t>
                                         </m:r>
@@ -10055,6 +10095,7 @@
                                         <m:r>
                                           <a:rPr lang="en-US" sz="1050" kern="100">
                                             <a:effectLst/>
+                                            <a:latin typeface="Cambria Math" panose="02040503050406030204" pitchFamily="18" charset="0"/>
                                           </a:rPr>
                                           <m:t>1</m:t>
                                         </m:r>
@@ -10063,14 +10104,16 @@
                                     <m:r>
                                       <a:rPr lang="en-US" sz="1050" kern="100">
                                         <a:effectLst/>
+                                        <a:latin typeface="Cambria Math" panose="02040503050406030204" pitchFamily="18" charset="0"/>
                                       </a:rPr>
                                       <m:t>,</m:t>
                                     </m:r>
                                     <m:sSub>
                                       <m:sSubPr>
                                         <m:ctrlPr>
-                                          <a:rPr lang="zh-CN" sz="1050" kern="100">
+                                          <a:rPr lang="zh-CN" sz="1050" i="1" kern="100">
                                             <a:effectLst/>
+                                            <a:latin typeface="Cambria Math" panose="02040503050406030204" pitchFamily="18" charset="0"/>
                                           </a:rPr>
                                         </m:ctrlPr>
                                       </m:sSubPr>
@@ -10078,6 +10121,7 @@
                                         <m:r>
                                           <a:rPr lang="en-US" sz="1050" kern="100">
                                             <a:effectLst/>
+                                            <a:latin typeface="Cambria Math" panose="02040503050406030204" pitchFamily="18" charset="0"/>
                                           </a:rPr>
                                           <m:t>𝑌</m:t>
                                         </m:r>
@@ -10086,6 +10130,7 @@
                                         <m:r>
                                           <a:rPr lang="en-US" sz="1050" kern="100">
                                             <a:effectLst/>
+                                            <a:latin typeface="Cambria Math" panose="02040503050406030204" pitchFamily="18" charset="0"/>
                                           </a:rPr>
                                           <m:t>2</m:t>
                                         </m:r>
@@ -10121,8 +10166,9 @@
                                 <m:d>
                                   <m:dPr>
                                     <m:ctrlPr>
-                                      <a:rPr lang="zh-CN" sz="1050" kern="100">
+                                      <a:rPr lang="zh-CN" sz="1050" i="1" kern="100">
                                         <a:effectLst/>
+                                        <a:latin typeface="Cambria Math" panose="02040503050406030204" pitchFamily="18" charset="0"/>
                                       </a:rPr>
                                     </m:ctrlPr>
                                   </m:dPr>
@@ -10130,8 +10176,9 @@
                                     <m:f>
                                       <m:fPr>
                                         <m:ctrlPr>
-                                          <a:rPr lang="zh-CN" sz="1050" kern="100">
+                                          <a:rPr lang="zh-CN" sz="1050" i="1" kern="100">
                                             <a:effectLst/>
+                                            <a:latin typeface="Cambria Math" panose="02040503050406030204" pitchFamily="18" charset="0"/>
                                           </a:rPr>
                                         </m:ctrlPr>
                                       </m:fPr>
@@ -10139,8 +10186,9 @@
                                         <m:sSub>
                                           <m:sSubPr>
                                             <m:ctrlPr>
-                                              <a:rPr lang="zh-CN" sz="1050" kern="100">
+                                              <a:rPr lang="zh-CN" sz="1050" i="1" kern="100">
                                                 <a:effectLst/>
+                                                <a:latin typeface="Cambria Math" panose="02040503050406030204" pitchFamily="18" charset="0"/>
                                               </a:rPr>
                                             </m:ctrlPr>
                                           </m:sSubPr>
@@ -10148,6 +10196,7 @@
                                             <m:r>
                                               <a:rPr lang="en-US" sz="1050" kern="100">
                                                 <a:effectLst/>
+                                                <a:latin typeface="Cambria Math" panose="02040503050406030204" pitchFamily="18" charset="0"/>
                                               </a:rPr>
                                               <m:t>𝑌</m:t>
                                             </m:r>
@@ -10156,6 +10205,7 @@
                                             <m:r>
                                               <a:rPr lang="en-US" sz="1050" kern="100">
                                                 <a:effectLst/>
+                                                <a:latin typeface="Cambria Math" panose="02040503050406030204" pitchFamily="18" charset="0"/>
                                               </a:rPr>
                                               <m:t>1</m:t>
                                             </m:r>
@@ -10164,14 +10214,16 @@
                                         <m:r>
                                           <a:rPr lang="en-US" sz="1050" kern="100">
                                             <a:effectLst/>
+                                            <a:latin typeface="Cambria Math" panose="02040503050406030204" pitchFamily="18" charset="0"/>
                                           </a:rPr>
                                           <m:t>+</m:t>
                                         </m:r>
                                         <m:sSub>
                                           <m:sSubPr>
                                             <m:ctrlPr>
-                                              <a:rPr lang="zh-CN" sz="1050" kern="100">
+                                              <a:rPr lang="zh-CN" sz="1050" i="1" kern="100">
                                                 <a:effectLst/>
+                                                <a:latin typeface="Cambria Math" panose="02040503050406030204" pitchFamily="18" charset="0"/>
                                               </a:rPr>
                                             </m:ctrlPr>
                                           </m:sSubPr>
@@ -10179,6 +10231,7 @@
                                             <m:r>
                                               <a:rPr lang="en-US" sz="1050" kern="100">
                                                 <a:effectLst/>
+                                                <a:latin typeface="Cambria Math" panose="02040503050406030204" pitchFamily="18" charset="0"/>
                                               </a:rPr>
                                               <m:t>𝑌</m:t>
                                             </m:r>
@@ -10187,6 +10240,7 @@
                                             <m:r>
                                               <a:rPr lang="en-US" sz="1050" kern="100">
                                                 <a:effectLst/>
+                                                <a:latin typeface="Cambria Math" panose="02040503050406030204" pitchFamily="18" charset="0"/>
                                               </a:rPr>
                                               <m:t>2</m:t>
                                             </m:r>
@@ -10197,6 +10251,7 @@
                                         <m:r>
                                           <a:rPr lang="en-US" sz="1050" kern="100">
                                             <a:effectLst/>
+                                            <a:latin typeface="Cambria Math" panose="02040503050406030204" pitchFamily="18" charset="0"/>
                                           </a:rPr>
                                           <m:t>2</m:t>
                                         </m:r>
@@ -10205,14 +10260,16 @@
                                     <m:r>
                                       <a:rPr lang="en-US" sz="1050" kern="100">
                                         <a:effectLst/>
+                                        <a:latin typeface="Cambria Math" panose="02040503050406030204" pitchFamily="18" charset="0"/>
                                       </a:rPr>
                                       <m:t>,</m:t>
                                     </m:r>
                                     <m:f>
                                       <m:fPr>
                                         <m:ctrlPr>
-                                          <a:rPr lang="zh-CN" sz="1050" kern="100">
+                                          <a:rPr lang="zh-CN" sz="1050" i="1" kern="100">
                                             <a:effectLst/>
+                                            <a:latin typeface="Cambria Math" panose="02040503050406030204" pitchFamily="18" charset="0"/>
                                           </a:rPr>
                                         </m:ctrlPr>
                                       </m:fPr>
@@ -10220,8 +10277,9 @@
                                         <m:sSub>
                                           <m:sSubPr>
                                             <m:ctrlPr>
-                                              <a:rPr lang="zh-CN" sz="1050" kern="100">
+                                              <a:rPr lang="zh-CN" sz="1050" i="1" kern="100">
                                                 <a:effectLst/>
+                                                <a:latin typeface="Cambria Math" panose="02040503050406030204" pitchFamily="18" charset="0"/>
                                               </a:rPr>
                                             </m:ctrlPr>
                                           </m:sSubPr>
@@ -10229,6 +10287,7 @@
                                             <m:r>
                                               <a:rPr lang="en-US" sz="1050" kern="100">
                                                 <a:effectLst/>
+                                                <a:latin typeface="Cambria Math" panose="02040503050406030204" pitchFamily="18" charset="0"/>
                                               </a:rPr>
                                               <m:t>𝑌</m:t>
                                             </m:r>
@@ -10237,6 +10296,7 @@
                                             <m:r>
                                               <a:rPr lang="en-US" sz="1050" kern="100">
                                                 <a:effectLst/>
+                                                <a:latin typeface="Cambria Math" panose="02040503050406030204" pitchFamily="18" charset="0"/>
                                               </a:rPr>
                                               <m:t>1</m:t>
                                             </m:r>
@@ -10245,14 +10305,16 @@
                                         <m:r>
                                           <a:rPr lang="en-US" sz="1050" kern="100">
                                             <a:effectLst/>
+                                            <a:latin typeface="Cambria Math" panose="02040503050406030204" pitchFamily="18" charset="0"/>
                                           </a:rPr>
                                           <m:t>+</m:t>
                                         </m:r>
                                         <m:sSub>
                                           <m:sSubPr>
                                             <m:ctrlPr>
-                                              <a:rPr lang="zh-CN" sz="1050" kern="100">
+                                              <a:rPr lang="zh-CN" sz="1050" i="1" kern="100">
                                                 <a:effectLst/>
+                                                <a:latin typeface="Cambria Math" panose="02040503050406030204" pitchFamily="18" charset="0"/>
                                               </a:rPr>
                                             </m:ctrlPr>
                                           </m:sSubPr>
@@ -10260,6 +10322,7 @@
                                             <m:r>
                                               <a:rPr lang="en-US" sz="1050" kern="100">
                                                 <a:effectLst/>
+                                                <a:latin typeface="Cambria Math" panose="02040503050406030204" pitchFamily="18" charset="0"/>
                                               </a:rPr>
                                               <m:t>𝑌</m:t>
                                             </m:r>
@@ -10268,6 +10331,7 @@
                                             <m:r>
                                               <a:rPr lang="en-US" sz="1050" kern="100">
                                                 <a:effectLst/>
+                                                <a:latin typeface="Cambria Math" panose="02040503050406030204" pitchFamily="18" charset="0"/>
                                               </a:rPr>
                                               <m:t>2</m:t>
                                             </m:r>
@@ -10278,6 +10342,7 @@
                                         <m:r>
                                           <a:rPr lang="en-US" sz="1050" kern="100">
                                             <a:effectLst/>
+                                            <a:latin typeface="Cambria Math" panose="02040503050406030204" pitchFamily="18" charset="0"/>
                                           </a:rPr>
                                           <m:t>2</m:t>
                                         </m:r>
@@ -10320,8 +10385,9 @@
                                 <m:sSub>
                                   <m:sSubPr>
                                     <m:ctrlPr>
-                                      <a:rPr lang="zh-CN" sz="1050" kern="100">
+                                      <a:rPr lang="zh-CN" sz="1050" i="1" kern="100">
                                         <a:effectLst/>
+                                        <a:latin typeface="Cambria Math" panose="02040503050406030204" pitchFamily="18" charset="0"/>
                                       </a:rPr>
                                     </m:ctrlPr>
                                   </m:sSubPr>
@@ -10329,6 +10395,7 @@
                                     <m:r>
                                       <a:rPr lang="en-US" sz="1050" kern="100">
                                         <a:effectLst/>
+                                        <a:latin typeface="Cambria Math" panose="02040503050406030204" pitchFamily="18" charset="0"/>
                                       </a:rPr>
                                       <m:t>⊕</m:t>
                                     </m:r>
@@ -10337,6 +10404,7 @@
                                     <m:r>
                                       <a:rPr lang="en-US" sz="1050" kern="100">
                                         <a:effectLst/>
+                                        <a:latin typeface="Cambria Math" panose="02040503050406030204" pitchFamily="18" charset="0"/>
                                       </a:rPr>
                                       <m:t>𝟏</m:t>
                                     </m:r>
@@ -10345,14 +10413,16 @@
                                 <m:r>
                                   <a:rPr lang="en-US" sz="1050" kern="100">
                                     <a:effectLst/>
+                                    <a:latin typeface="Cambria Math" panose="02040503050406030204" pitchFamily="18" charset="0"/>
                                   </a:rPr>
                                   <m:t>=</m:t>
                                 </m:r>
                                 <m:sSub>
                                   <m:sSubPr>
                                     <m:ctrlPr>
-                                      <a:rPr lang="zh-CN" sz="1050" kern="100">
+                                      <a:rPr lang="zh-CN" sz="1050" i="1" kern="100">
                                         <a:effectLst/>
+                                        <a:latin typeface="Cambria Math" panose="02040503050406030204" pitchFamily="18" charset="0"/>
                                       </a:rPr>
                                     </m:ctrlPr>
                                   </m:sSubPr>
@@ -10360,6 +10430,7 @@
                                     <m:r>
                                       <a:rPr lang="en-US" sz="1050" kern="100">
                                         <a:effectLst/>
+                                        <a:latin typeface="Cambria Math" panose="02040503050406030204" pitchFamily="18" charset="0"/>
                                       </a:rPr>
                                       <m:t>⊕</m:t>
                                     </m:r>
@@ -10368,6 +10439,7 @@
                                     <m:r>
                                       <a:rPr lang="en-US" sz="1050" kern="100">
                                         <a:effectLst/>
+                                        <a:latin typeface="Cambria Math" panose="02040503050406030204" pitchFamily="18" charset="0"/>
                                       </a:rPr>
                                       <m:t>𝟐</m:t>
                                     </m:r>
@@ -10401,8 +10473,9 @@
                                 <m:d>
                                   <m:dPr>
                                     <m:ctrlPr>
-                                      <a:rPr lang="zh-CN" sz="800" kern="100">
+                                      <a:rPr lang="zh-CN" sz="800" i="1" kern="100">
                                         <a:effectLst/>
+                                        <a:latin typeface="Cambria Math" panose="02040503050406030204" pitchFamily="18" charset="0"/>
                                       </a:rPr>
                                     </m:ctrlPr>
                                   </m:dPr>
@@ -10410,8 +10483,9 @@
                                     <m:sSub>
                                       <m:sSubPr>
                                         <m:ctrlPr>
-                                          <a:rPr lang="zh-CN" sz="800" kern="100">
+                                          <a:rPr lang="zh-CN" sz="800" i="1" kern="100">
                                             <a:effectLst/>
+                                            <a:latin typeface="Cambria Math" panose="02040503050406030204" pitchFamily="18" charset="0"/>
                                           </a:rPr>
                                         </m:ctrlPr>
                                       </m:sSubPr>
@@ -10419,6 +10493,7 @@
                                         <m:r>
                                           <a:rPr lang="en-US" sz="800" kern="100">
                                             <a:effectLst/>
+                                            <a:latin typeface="Cambria Math" panose="02040503050406030204" pitchFamily="18" charset="0"/>
                                           </a:rPr>
                                           <m:t>𝑌</m:t>
                                         </m:r>
@@ -10427,6 +10502,7 @@
                                         <m:r>
                                           <a:rPr lang="en-US" sz="800" kern="100">
                                             <a:effectLst/>
+                                            <a:latin typeface="Cambria Math" panose="02040503050406030204" pitchFamily="18" charset="0"/>
                                           </a:rPr>
                                           <m:t>1</m:t>
                                         </m:r>
@@ -10435,14 +10511,16 @@
                                     <m:r>
                                       <a:rPr lang="en-US" sz="800" kern="100">
                                         <a:effectLst/>
+                                        <a:latin typeface="Cambria Math" panose="02040503050406030204" pitchFamily="18" charset="0"/>
                                       </a:rPr>
                                       <m:t>−</m:t>
                                     </m:r>
                                     <m:f>
                                       <m:fPr>
                                         <m:ctrlPr>
-                                          <a:rPr lang="zh-CN" sz="800" kern="100">
+                                          <a:rPr lang="zh-CN" sz="800" i="1" kern="100">
                                             <a:effectLst/>
+                                            <a:latin typeface="Cambria Math" panose="02040503050406030204" pitchFamily="18" charset="0"/>
                                           </a:rPr>
                                         </m:ctrlPr>
                                       </m:fPr>
@@ -10450,8 +10528,9 @@
                                         <m:sSub>
                                           <m:sSubPr>
                                             <m:ctrlPr>
-                                              <a:rPr lang="zh-CN" sz="800" kern="100">
+                                              <a:rPr lang="zh-CN" sz="800" i="1" kern="100">
                                                 <a:effectLst/>
+                                                <a:latin typeface="Cambria Math" panose="02040503050406030204" pitchFamily="18" charset="0"/>
                                               </a:rPr>
                                             </m:ctrlPr>
                                           </m:sSubPr>
@@ -10459,6 +10538,7 @@
                                             <m:r>
                                               <a:rPr lang="en-US" sz="800" kern="100">
                                                 <a:effectLst/>
+                                                <a:latin typeface="Cambria Math" panose="02040503050406030204" pitchFamily="18" charset="0"/>
                                               </a:rPr>
                                               <m:t>𝑌</m:t>
                                             </m:r>
@@ -10467,6 +10547,7 @@
                                             <m:r>
                                               <a:rPr lang="en-US" sz="800" kern="100">
                                                 <a:effectLst/>
+                                                <a:latin typeface="Cambria Math" panose="02040503050406030204" pitchFamily="18" charset="0"/>
                                               </a:rPr>
                                               <m:t>2</m:t>
                                             </m:r>
@@ -10475,14 +10556,16 @@
                                         <m:r>
                                           <a:rPr lang="en-US" sz="800" kern="100">
                                             <a:effectLst/>
+                                            <a:latin typeface="Cambria Math" panose="02040503050406030204" pitchFamily="18" charset="0"/>
                                           </a:rPr>
                                           <m:t>−</m:t>
                                         </m:r>
                                         <m:sSub>
                                           <m:sSubPr>
                                             <m:ctrlPr>
-                                              <a:rPr lang="zh-CN" sz="800" kern="100">
+                                              <a:rPr lang="zh-CN" sz="800" i="1" kern="100">
                                                 <a:effectLst/>
+                                                <a:latin typeface="Cambria Math" panose="02040503050406030204" pitchFamily="18" charset="0"/>
                                               </a:rPr>
                                             </m:ctrlPr>
                                           </m:sSubPr>
@@ -10490,6 +10573,7 @@
                                             <m:r>
                                               <a:rPr lang="en-US" sz="800" kern="100">
                                                 <a:effectLst/>
+                                                <a:latin typeface="Cambria Math" panose="02040503050406030204" pitchFamily="18" charset="0"/>
                                               </a:rPr>
                                               <m:t>𝑌</m:t>
                                             </m:r>
@@ -10498,6 +10582,7 @@
                                             <m:r>
                                               <a:rPr lang="en-US" sz="800" kern="100">
                                                 <a:effectLst/>
+                                                <a:latin typeface="Cambria Math" panose="02040503050406030204" pitchFamily="18" charset="0"/>
                                               </a:rPr>
                                               <m:t>1</m:t>
                                             </m:r>
@@ -10508,6 +10593,7 @@
                                         <m:r>
                                           <a:rPr lang="en-US" sz="800" kern="100">
                                             <a:effectLst/>
+                                            <a:latin typeface="Cambria Math" panose="02040503050406030204" pitchFamily="18" charset="0"/>
                                           </a:rPr>
                                           <m:t>2</m:t>
                                         </m:r>
@@ -10516,6 +10602,7 @@
                                     <m:r>
                                       <a:rPr lang="en-US" sz="800" kern="100">
                                         <a:effectLst/>
+                                        <a:latin typeface="Cambria Math" panose="02040503050406030204" pitchFamily="18" charset="0"/>
                                       </a:rPr>
                                       <m:t>𝕀</m:t>
                                     </m:r>
@@ -10524,8 +10611,9 @@
                                         <m:begChr m:val="["/>
                                         <m:endChr m:val="]"/>
                                         <m:ctrlPr>
-                                          <a:rPr lang="zh-CN" sz="800" kern="100">
+                                          <a:rPr lang="zh-CN" sz="800" i="1" kern="100">
                                             <a:effectLst/>
+                                            <a:latin typeface="Cambria Math" panose="02040503050406030204" pitchFamily="18" charset="0"/>
                                           </a:rPr>
                                         </m:ctrlPr>
                                       </m:dPr>
@@ -10533,8 +10621,9 @@
                                         <m:sSub>
                                           <m:sSubPr>
                                             <m:ctrlPr>
-                                              <a:rPr lang="zh-CN" sz="800" kern="100">
+                                              <a:rPr lang="zh-CN" sz="800" i="1" kern="100">
                                                 <a:effectLst/>
+                                                <a:latin typeface="Cambria Math" panose="02040503050406030204" pitchFamily="18" charset="0"/>
                                               </a:rPr>
                                             </m:ctrlPr>
                                           </m:sSubPr>
@@ -10542,6 +10631,7 @@
                                             <m:r>
                                               <a:rPr lang="en-US" sz="800" kern="100">
                                                 <a:effectLst/>
+                                                <a:latin typeface="Cambria Math" panose="02040503050406030204" pitchFamily="18" charset="0"/>
                                               </a:rPr>
                                               <m:t>𝑌</m:t>
                                             </m:r>
@@ -10550,6 +10640,7 @@
                                             <m:r>
                                               <a:rPr lang="en-US" sz="800" kern="100">
                                                 <a:effectLst/>
+                                                <a:latin typeface="Cambria Math" panose="02040503050406030204" pitchFamily="18" charset="0"/>
                                               </a:rPr>
                                               <m:t>1</m:t>
                                             </m:r>
@@ -10558,14 +10649,16 @@
                                         <m:r>
                                           <a:rPr lang="en-US" sz="800" kern="100">
                                             <a:effectLst/>
+                                            <a:latin typeface="Cambria Math" panose="02040503050406030204" pitchFamily="18" charset="0"/>
                                           </a:rPr>
                                           <m:t>&lt;</m:t>
                                         </m:r>
                                         <m:sSub>
                                           <m:sSubPr>
                                             <m:ctrlPr>
-                                              <a:rPr lang="zh-CN" sz="800" kern="100">
+                                              <a:rPr lang="zh-CN" sz="800" i="1" kern="100">
                                                 <a:effectLst/>
+                                                <a:latin typeface="Cambria Math" panose="02040503050406030204" pitchFamily="18" charset="0"/>
                                               </a:rPr>
                                             </m:ctrlPr>
                                           </m:sSubPr>
@@ -10573,6 +10666,7 @@
                                             <m:r>
                                               <a:rPr lang="en-US" sz="800" kern="100">
                                                 <a:effectLst/>
+                                                <a:latin typeface="Cambria Math" panose="02040503050406030204" pitchFamily="18" charset="0"/>
                                               </a:rPr>
                                               <m:t>𝑌</m:t>
                                             </m:r>
@@ -10581,6 +10675,7 @@
                                             <m:r>
                                               <a:rPr lang="en-US" sz="800" kern="100">
                                                 <a:effectLst/>
+                                                <a:latin typeface="Cambria Math" panose="02040503050406030204" pitchFamily="18" charset="0"/>
                                               </a:rPr>
                                               <m:t>2</m:t>
                                             </m:r>
@@ -10591,14 +10686,16 @@
                                     <m:r>
                                       <a:rPr lang="en-US" sz="800" kern="100">
                                         <a:effectLst/>
+                                        <a:latin typeface="Cambria Math" panose="02040503050406030204" pitchFamily="18" charset="0"/>
                                       </a:rPr>
                                       <m:t>,</m:t>
                                     </m:r>
                                     <m:sSub>
                                       <m:sSubPr>
                                         <m:ctrlPr>
-                                          <a:rPr lang="zh-CN" sz="800" kern="100">
+                                          <a:rPr lang="zh-CN" sz="800" i="1" kern="100">
                                             <a:effectLst/>
+                                            <a:latin typeface="Cambria Math" panose="02040503050406030204" pitchFamily="18" charset="0"/>
                                           </a:rPr>
                                         </m:ctrlPr>
                                       </m:sSubPr>
@@ -10606,6 +10703,7 @@
                                         <m:r>
                                           <a:rPr lang="en-US" sz="800" kern="100">
                                             <a:effectLst/>
+                                            <a:latin typeface="Cambria Math" panose="02040503050406030204" pitchFamily="18" charset="0"/>
                                           </a:rPr>
                                           <m:t>𝑌</m:t>
                                         </m:r>
@@ -10614,6 +10712,7 @@
                                         <m:r>
                                           <a:rPr lang="en-US" sz="800" kern="100">
                                             <a:effectLst/>
+                                            <a:latin typeface="Cambria Math" panose="02040503050406030204" pitchFamily="18" charset="0"/>
                                           </a:rPr>
                                           <m:t>2</m:t>
                                         </m:r>
@@ -10622,14 +10721,16 @@
                                     <m:r>
                                       <a:rPr lang="en-US" sz="800" kern="100">
                                         <a:effectLst/>
+                                        <a:latin typeface="Cambria Math" panose="02040503050406030204" pitchFamily="18" charset="0"/>
                                       </a:rPr>
                                       <m:t>−</m:t>
                                     </m:r>
                                     <m:f>
                                       <m:fPr>
                                         <m:ctrlPr>
-                                          <a:rPr lang="zh-CN" sz="800" kern="100">
+                                          <a:rPr lang="zh-CN" sz="800" i="1" kern="100">
                                             <a:effectLst/>
+                                            <a:latin typeface="Cambria Math" panose="02040503050406030204" pitchFamily="18" charset="0"/>
                                           </a:rPr>
                                         </m:ctrlPr>
                                       </m:fPr>
@@ -10637,8 +10738,9 @@
                                         <m:sSub>
                                           <m:sSubPr>
                                             <m:ctrlPr>
-                                              <a:rPr lang="zh-CN" sz="800" kern="100">
+                                              <a:rPr lang="zh-CN" sz="800" i="1" kern="100">
                                                 <a:effectLst/>
+                                                <a:latin typeface="Cambria Math" panose="02040503050406030204" pitchFamily="18" charset="0"/>
                                               </a:rPr>
                                             </m:ctrlPr>
                                           </m:sSubPr>
@@ -10646,6 +10748,7 @@
                                             <m:r>
                                               <a:rPr lang="en-US" sz="800" kern="100">
                                                 <a:effectLst/>
+                                                <a:latin typeface="Cambria Math" panose="02040503050406030204" pitchFamily="18" charset="0"/>
                                               </a:rPr>
                                               <m:t>𝑌</m:t>
                                             </m:r>
@@ -10654,6 +10757,7 @@
                                             <m:r>
                                               <a:rPr lang="en-US" sz="800" kern="100">
                                                 <a:effectLst/>
+                                                <a:latin typeface="Cambria Math" panose="02040503050406030204" pitchFamily="18" charset="0"/>
                                               </a:rPr>
                                               <m:t>1</m:t>
                                             </m:r>
@@ -10662,14 +10766,16 @@
                                         <m:r>
                                           <a:rPr lang="en-US" sz="800" kern="100">
                                             <a:effectLst/>
+                                            <a:latin typeface="Cambria Math" panose="02040503050406030204" pitchFamily="18" charset="0"/>
                                           </a:rPr>
                                           <m:t>−</m:t>
                                         </m:r>
                                         <m:sSub>
                                           <m:sSubPr>
                                             <m:ctrlPr>
-                                              <a:rPr lang="zh-CN" sz="800" kern="100">
+                                              <a:rPr lang="zh-CN" sz="800" i="1" kern="100">
                                                 <a:effectLst/>
+                                                <a:latin typeface="Cambria Math" panose="02040503050406030204" pitchFamily="18" charset="0"/>
                                               </a:rPr>
                                             </m:ctrlPr>
                                           </m:sSubPr>
@@ -10677,6 +10783,7 @@
                                             <m:r>
                                               <a:rPr lang="en-US" sz="800" kern="100">
                                                 <a:effectLst/>
+                                                <a:latin typeface="Cambria Math" panose="02040503050406030204" pitchFamily="18" charset="0"/>
                                               </a:rPr>
                                               <m:t>𝑌</m:t>
                                             </m:r>
@@ -10685,6 +10792,7 @@
                                             <m:r>
                                               <a:rPr lang="en-US" sz="800" kern="100">
                                                 <a:effectLst/>
+                                                <a:latin typeface="Cambria Math" panose="02040503050406030204" pitchFamily="18" charset="0"/>
                                               </a:rPr>
                                               <m:t>2</m:t>
                                             </m:r>
@@ -10695,6 +10803,7 @@
                                         <m:r>
                                           <a:rPr lang="en-US" sz="800" kern="100">
                                             <a:effectLst/>
+                                            <a:latin typeface="Cambria Math" panose="02040503050406030204" pitchFamily="18" charset="0"/>
                                           </a:rPr>
                                           <m:t>2</m:t>
                                         </m:r>
@@ -10703,6 +10812,7 @@
                                     <m:r>
                                       <a:rPr lang="en-US" sz="800" kern="100">
                                         <a:effectLst/>
+                                        <a:latin typeface="Cambria Math" panose="02040503050406030204" pitchFamily="18" charset="0"/>
                                       </a:rPr>
                                       <m:t>𝕀</m:t>
                                     </m:r>
@@ -10711,8 +10821,9 @@
                                         <m:begChr m:val="["/>
                                         <m:endChr m:val="]"/>
                                         <m:ctrlPr>
-                                          <a:rPr lang="zh-CN" sz="800" kern="100">
+                                          <a:rPr lang="zh-CN" sz="800" i="1" kern="100">
                                             <a:effectLst/>
+                                            <a:latin typeface="Cambria Math" panose="02040503050406030204" pitchFamily="18" charset="0"/>
                                           </a:rPr>
                                         </m:ctrlPr>
                                       </m:dPr>
@@ -10720,8 +10831,9 @@
                                         <m:sSub>
                                           <m:sSubPr>
                                             <m:ctrlPr>
-                                              <a:rPr lang="zh-CN" sz="800" kern="100">
+                                              <a:rPr lang="zh-CN" sz="800" i="1" kern="100">
                                                 <a:effectLst/>
+                                                <a:latin typeface="Cambria Math" panose="02040503050406030204" pitchFamily="18" charset="0"/>
                                               </a:rPr>
                                             </m:ctrlPr>
                                           </m:sSubPr>
@@ -10729,6 +10841,7 @@
                                             <m:r>
                                               <a:rPr lang="en-US" sz="800" kern="100">
                                                 <a:effectLst/>
+                                                <a:latin typeface="Cambria Math" panose="02040503050406030204" pitchFamily="18" charset="0"/>
                                               </a:rPr>
                                               <m:t>𝑌</m:t>
                                             </m:r>
@@ -10737,6 +10850,7 @@
                                             <m:r>
                                               <a:rPr lang="en-US" sz="800" kern="100">
                                                 <a:effectLst/>
+                                                <a:latin typeface="Cambria Math" panose="02040503050406030204" pitchFamily="18" charset="0"/>
                                               </a:rPr>
                                               <m:t>1</m:t>
                                             </m:r>
@@ -10745,14 +10859,16 @@
                                         <m:r>
                                           <a:rPr lang="en-US" sz="800" kern="100">
                                             <a:effectLst/>
+                                            <a:latin typeface="Cambria Math" panose="02040503050406030204" pitchFamily="18" charset="0"/>
                                           </a:rPr>
                                           <m:t>&gt;</m:t>
                                         </m:r>
                                         <m:sSub>
                                           <m:sSubPr>
                                             <m:ctrlPr>
-                                              <a:rPr lang="zh-CN" sz="800" kern="100">
+                                              <a:rPr lang="zh-CN" sz="800" i="1" kern="100">
                                                 <a:effectLst/>
+                                                <a:latin typeface="Cambria Math" panose="02040503050406030204" pitchFamily="18" charset="0"/>
                                               </a:rPr>
                                             </m:ctrlPr>
                                           </m:sSubPr>
@@ -10760,6 +10876,7 @@
                                             <m:r>
                                               <a:rPr lang="en-US" sz="800" kern="100">
                                                 <a:effectLst/>
+                                                <a:latin typeface="Cambria Math" panose="02040503050406030204" pitchFamily="18" charset="0"/>
                                               </a:rPr>
                                               <m:t>𝑌</m:t>
                                             </m:r>
@@ -10768,6 +10885,7 @@
                                             <m:r>
                                               <a:rPr lang="en-US" sz="800" kern="100">
                                                 <a:effectLst/>
+                                                <a:latin typeface="Cambria Math" panose="02040503050406030204" pitchFamily="18" charset="0"/>
                                               </a:rPr>
                                               <m:t>2</m:t>
                                             </m:r>
@@ -10778,6 +10896,7 @@
                                     <m:r>
                                       <a:rPr lang="en-US" sz="800" kern="100">
                                         <a:effectLst/>
+                                        <a:latin typeface="Cambria Math" panose="02040503050406030204" pitchFamily="18" charset="0"/>
                                       </a:rPr>
                                       <m:t> </m:t>
                                     </m:r>
@@ -10811,8 +10930,9 @@
                                 <m:d>
                                   <m:dPr>
                                     <m:ctrlPr>
-                                      <a:rPr lang="zh-CN" sz="800" kern="100">
+                                      <a:rPr lang="zh-CN" sz="800" i="1" kern="100">
                                         <a:effectLst/>
+                                        <a:latin typeface="Cambria Math" panose="02040503050406030204" pitchFamily="18" charset="0"/>
                                       </a:rPr>
                                     </m:ctrlPr>
                                   </m:dPr>
@@ -10820,8 +10940,9 @@
                                     <m:sSub>
                                       <m:sSubPr>
                                         <m:ctrlPr>
-                                          <a:rPr lang="zh-CN" sz="800" kern="100">
+                                          <a:rPr lang="zh-CN" sz="800" i="1" kern="100">
                                             <a:effectLst/>
+                                            <a:latin typeface="Cambria Math" panose="02040503050406030204" pitchFamily="18" charset="0"/>
                                           </a:rPr>
                                         </m:ctrlPr>
                                       </m:sSubPr>
@@ -10829,6 +10950,7 @@
                                         <m:r>
                                           <a:rPr lang="en-US" sz="800" kern="100">
                                             <a:effectLst/>
+                                            <a:latin typeface="Cambria Math" panose="02040503050406030204" pitchFamily="18" charset="0"/>
                                           </a:rPr>
                                           <m:t>𝑌</m:t>
                                         </m:r>
@@ -10837,6 +10959,7 @@
                                         <m:r>
                                           <a:rPr lang="en-US" sz="800" kern="100">
                                             <a:effectLst/>
+                                            <a:latin typeface="Cambria Math" panose="02040503050406030204" pitchFamily="18" charset="0"/>
                                           </a:rPr>
                                           <m:t>1</m:t>
                                         </m:r>
@@ -10845,14 +10968,16 @@
                                     <m:r>
                                       <a:rPr lang="en-US" sz="800" kern="100">
                                         <a:effectLst/>
+                                        <a:latin typeface="Cambria Math" panose="02040503050406030204" pitchFamily="18" charset="0"/>
                                       </a:rPr>
                                       <m:t>−</m:t>
                                     </m:r>
                                     <m:f>
                                       <m:fPr>
                                         <m:ctrlPr>
-                                          <a:rPr lang="zh-CN" sz="800" kern="100">
+                                          <a:rPr lang="zh-CN" sz="800" i="1" kern="100">
                                             <a:effectLst/>
+                                            <a:latin typeface="Cambria Math" panose="02040503050406030204" pitchFamily="18" charset="0"/>
                                           </a:rPr>
                                         </m:ctrlPr>
                                       </m:fPr>
@@ -10860,8 +10985,9 @@
                                         <m:sSub>
                                           <m:sSubPr>
                                             <m:ctrlPr>
-                                              <a:rPr lang="zh-CN" sz="800" kern="100">
+                                              <a:rPr lang="zh-CN" sz="800" i="1" kern="100">
                                                 <a:effectLst/>
+                                                <a:latin typeface="Cambria Math" panose="02040503050406030204" pitchFamily="18" charset="0"/>
                                               </a:rPr>
                                             </m:ctrlPr>
                                           </m:sSubPr>
@@ -10869,6 +10995,7 @@
                                             <m:r>
                                               <a:rPr lang="en-US" sz="800" kern="100">
                                                 <a:effectLst/>
+                                                <a:latin typeface="Cambria Math" panose="02040503050406030204" pitchFamily="18" charset="0"/>
                                               </a:rPr>
                                               <m:t>𝑌</m:t>
                                             </m:r>
@@ -10877,6 +11004,7 @@
                                             <m:r>
                                               <a:rPr lang="en-US" sz="800" kern="100">
                                                 <a:effectLst/>
+                                                <a:latin typeface="Cambria Math" panose="02040503050406030204" pitchFamily="18" charset="0"/>
                                               </a:rPr>
                                               <m:t>2</m:t>
                                             </m:r>
@@ -10885,14 +11013,16 @@
                                         <m:r>
                                           <a:rPr lang="en-US" sz="800" kern="100">
                                             <a:effectLst/>
+                                            <a:latin typeface="Cambria Math" panose="02040503050406030204" pitchFamily="18" charset="0"/>
                                           </a:rPr>
                                           <m:t>−</m:t>
                                         </m:r>
                                         <m:sSub>
                                           <m:sSubPr>
                                             <m:ctrlPr>
-                                              <a:rPr lang="zh-CN" sz="800" kern="100">
+                                              <a:rPr lang="zh-CN" sz="800" i="1" kern="100">
                                                 <a:effectLst/>
+                                                <a:latin typeface="Cambria Math" panose="02040503050406030204" pitchFamily="18" charset="0"/>
                                               </a:rPr>
                                             </m:ctrlPr>
                                           </m:sSubPr>
@@ -10900,6 +11030,7 @@
                                             <m:r>
                                               <a:rPr lang="en-US" sz="800" kern="100">
                                                 <a:effectLst/>
+                                                <a:latin typeface="Cambria Math" panose="02040503050406030204" pitchFamily="18" charset="0"/>
                                               </a:rPr>
                                               <m:t>𝑌</m:t>
                                             </m:r>
@@ -10908,6 +11039,7 @@
                                             <m:r>
                                               <a:rPr lang="en-US" sz="800" kern="100">
                                                 <a:effectLst/>
+                                                <a:latin typeface="Cambria Math" panose="02040503050406030204" pitchFamily="18" charset="0"/>
                                               </a:rPr>
                                               <m:t>1</m:t>
                                             </m:r>
@@ -10918,6 +11050,7 @@
                                         <m:r>
                                           <a:rPr lang="en-US" sz="800" kern="100">
                                             <a:effectLst/>
+                                            <a:latin typeface="Cambria Math" panose="02040503050406030204" pitchFamily="18" charset="0"/>
                                           </a:rPr>
                                           <m:t>2</m:t>
                                         </m:r>
@@ -10926,6 +11059,7 @@
                                     <m:r>
                                       <a:rPr lang="en-US" sz="800" kern="100">
                                         <a:effectLst/>
+                                        <a:latin typeface="Cambria Math" panose="02040503050406030204" pitchFamily="18" charset="0"/>
                                       </a:rPr>
                                       <m:t>𝕀</m:t>
                                     </m:r>
@@ -10934,8 +11068,9 @@
                                         <m:begChr m:val="["/>
                                         <m:endChr m:val="]"/>
                                         <m:ctrlPr>
-                                          <a:rPr lang="zh-CN" sz="800" kern="100">
+                                          <a:rPr lang="zh-CN" sz="800" i="1" kern="100">
                                             <a:effectLst/>
+                                            <a:latin typeface="Cambria Math" panose="02040503050406030204" pitchFamily="18" charset="0"/>
                                           </a:rPr>
                                         </m:ctrlPr>
                                       </m:dPr>
@@ -10943,8 +11078,9 @@
                                         <m:sSub>
                                           <m:sSubPr>
                                             <m:ctrlPr>
-                                              <a:rPr lang="zh-CN" sz="800" kern="100">
+                                              <a:rPr lang="zh-CN" sz="800" i="1" kern="100">
                                                 <a:effectLst/>
+                                                <a:latin typeface="Cambria Math" panose="02040503050406030204" pitchFamily="18" charset="0"/>
                                               </a:rPr>
                                             </m:ctrlPr>
                                           </m:sSubPr>
@@ -10952,6 +11088,7 @@
                                             <m:r>
                                               <a:rPr lang="en-US" sz="800" kern="100">
                                                 <a:effectLst/>
+                                                <a:latin typeface="Cambria Math" panose="02040503050406030204" pitchFamily="18" charset="0"/>
                                               </a:rPr>
                                               <m:t>𝑌</m:t>
                                             </m:r>
@@ -10960,6 +11097,7 @@
                                             <m:r>
                                               <a:rPr lang="en-US" sz="800" kern="100">
                                                 <a:effectLst/>
+                                                <a:latin typeface="Cambria Math" panose="02040503050406030204" pitchFamily="18" charset="0"/>
                                               </a:rPr>
                                               <m:t>1</m:t>
                                             </m:r>
@@ -10968,14 +11106,16 @@
                                         <m:r>
                                           <a:rPr lang="en-US" sz="800" kern="100">
                                             <a:effectLst/>
+                                            <a:latin typeface="Cambria Math" panose="02040503050406030204" pitchFamily="18" charset="0"/>
                                           </a:rPr>
                                           <m:t>&lt;</m:t>
                                         </m:r>
                                         <m:sSub>
                                           <m:sSubPr>
                                             <m:ctrlPr>
-                                              <a:rPr lang="zh-CN" sz="800" kern="100">
+                                              <a:rPr lang="zh-CN" sz="800" i="1" kern="100">
                                                 <a:effectLst/>
+                                                <a:latin typeface="Cambria Math" panose="02040503050406030204" pitchFamily="18" charset="0"/>
                                               </a:rPr>
                                             </m:ctrlPr>
                                           </m:sSubPr>
@@ -10983,6 +11123,7 @@
                                             <m:r>
                                               <a:rPr lang="en-US" sz="800" kern="100">
                                                 <a:effectLst/>
+                                                <a:latin typeface="Cambria Math" panose="02040503050406030204" pitchFamily="18" charset="0"/>
                                               </a:rPr>
                                               <m:t>𝑌</m:t>
                                             </m:r>
@@ -10991,6 +11132,7 @@
                                             <m:r>
                                               <a:rPr lang="en-US" sz="800" kern="100">
                                                 <a:effectLst/>
+                                                <a:latin typeface="Cambria Math" panose="02040503050406030204" pitchFamily="18" charset="0"/>
                                               </a:rPr>
                                               <m:t>2</m:t>
                                             </m:r>
@@ -11001,14 +11143,16 @@
                                     <m:r>
                                       <a:rPr lang="en-US" sz="800" kern="100">
                                         <a:effectLst/>
+                                        <a:latin typeface="Cambria Math" panose="02040503050406030204" pitchFamily="18" charset="0"/>
                                       </a:rPr>
                                       <m:t>,</m:t>
                                     </m:r>
                                     <m:sSub>
                                       <m:sSubPr>
                                         <m:ctrlPr>
-                                          <a:rPr lang="zh-CN" sz="800" kern="100">
+                                          <a:rPr lang="zh-CN" sz="800" i="1" kern="100">
                                             <a:effectLst/>
+                                            <a:latin typeface="Cambria Math" panose="02040503050406030204" pitchFamily="18" charset="0"/>
                                           </a:rPr>
                                         </m:ctrlPr>
                                       </m:sSubPr>
@@ -11016,6 +11160,7 @@
                                         <m:r>
                                           <a:rPr lang="en-US" sz="800" kern="100">
                                             <a:effectLst/>
+                                            <a:latin typeface="Cambria Math" panose="02040503050406030204" pitchFamily="18" charset="0"/>
                                           </a:rPr>
                                           <m:t>𝑌</m:t>
                                         </m:r>
@@ -11024,6 +11169,7 @@
                                         <m:r>
                                           <a:rPr lang="en-US" sz="800" kern="100">
                                             <a:effectLst/>
+                                            <a:latin typeface="Cambria Math" panose="02040503050406030204" pitchFamily="18" charset="0"/>
                                           </a:rPr>
                                           <m:t>2</m:t>
                                         </m:r>
@@ -11032,14 +11178,16 @@
                                     <m:r>
                                       <a:rPr lang="en-US" sz="800" kern="100">
                                         <a:effectLst/>
+                                        <a:latin typeface="Cambria Math" panose="02040503050406030204" pitchFamily="18" charset="0"/>
                                       </a:rPr>
                                       <m:t>−</m:t>
                                     </m:r>
                                     <m:f>
                                       <m:fPr>
                                         <m:ctrlPr>
-                                          <a:rPr lang="zh-CN" sz="800" kern="100">
+                                          <a:rPr lang="zh-CN" sz="800" i="1" kern="100">
                                             <a:effectLst/>
+                                            <a:latin typeface="Cambria Math" panose="02040503050406030204" pitchFamily="18" charset="0"/>
                                           </a:rPr>
                                         </m:ctrlPr>
                                       </m:fPr>
@@ -11047,8 +11195,9 @@
                                         <m:sSub>
                                           <m:sSubPr>
                                             <m:ctrlPr>
-                                              <a:rPr lang="zh-CN" sz="800" kern="100">
+                                              <a:rPr lang="zh-CN" sz="800" i="1" kern="100">
                                                 <a:effectLst/>
+                                                <a:latin typeface="Cambria Math" panose="02040503050406030204" pitchFamily="18" charset="0"/>
                                               </a:rPr>
                                             </m:ctrlPr>
                                           </m:sSubPr>
@@ -11056,6 +11205,7 @@
                                             <m:r>
                                               <a:rPr lang="en-US" sz="800" kern="100">
                                                 <a:effectLst/>
+                                                <a:latin typeface="Cambria Math" panose="02040503050406030204" pitchFamily="18" charset="0"/>
                                               </a:rPr>
                                               <m:t>𝑌</m:t>
                                             </m:r>
@@ -11064,6 +11214,7 @@
                                             <m:r>
                                               <a:rPr lang="en-US" sz="800" kern="100">
                                                 <a:effectLst/>
+                                                <a:latin typeface="Cambria Math" panose="02040503050406030204" pitchFamily="18" charset="0"/>
                                               </a:rPr>
                                               <m:t>1</m:t>
                                             </m:r>
@@ -11072,14 +11223,16 @@
                                         <m:r>
                                           <a:rPr lang="en-US" sz="800" kern="100">
                                             <a:effectLst/>
+                                            <a:latin typeface="Cambria Math" panose="02040503050406030204" pitchFamily="18" charset="0"/>
                                           </a:rPr>
                                           <m:t>−</m:t>
                                         </m:r>
                                         <m:sSub>
                                           <m:sSubPr>
                                             <m:ctrlPr>
-                                              <a:rPr lang="zh-CN" sz="800" kern="100">
+                                              <a:rPr lang="zh-CN" sz="800" i="1" kern="100">
                                                 <a:effectLst/>
+                                                <a:latin typeface="Cambria Math" panose="02040503050406030204" pitchFamily="18" charset="0"/>
                                               </a:rPr>
                                             </m:ctrlPr>
                                           </m:sSubPr>
@@ -11087,6 +11240,7 @@
                                             <m:r>
                                               <a:rPr lang="en-US" sz="800" kern="100">
                                                 <a:effectLst/>
+                                                <a:latin typeface="Cambria Math" panose="02040503050406030204" pitchFamily="18" charset="0"/>
                                               </a:rPr>
                                               <m:t>𝑌</m:t>
                                             </m:r>
@@ -11095,6 +11249,7 @@
                                             <m:r>
                                               <a:rPr lang="en-US" sz="800" kern="100">
                                                 <a:effectLst/>
+                                                <a:latin typeface="Cambria Math" panose="02040503050406030204" pitchFamily="18" charset="0"/>
                                               </a:rPr>
                                               <m:t>2</m:t>
                                             </m:r>
@@ -11105,6 +11260,7 @@
                                         <m:r>
                                           <a:rPr lang="en-US" sz="800" kern="100">
                                             <a:effectLst/>
+                                            <a:latin typeface="Cambria Math" panose="02040503050406030204" pitchFamily="18" charset="0"/>
                                           </a:rPr>
                                           <m:t>2</m:t>
                                         </m:r>
@@ -11113,6 +11269,7 @@
                                     <m:r>
                                       <a:rPr lang="en-US" sz="800" kern="100">
                                         <a:effectLst/>
+                                        <a:latin typeface="Cambria Math" panose="02040503050406030204" pitchFamily="18" charset="0"/>
                                       </a:rPr>
                                       <m:t>𝕀</m:t>
                                     </m:r>
@@ -11121,8 +11278,9 @@
                                         <m:begChr m:val="["/>
                                         <m:endChr m:val="]"/>
                                         <m:ctrlPr>
-                                          <a:rPr lang="zh-CN" sz="800" kern="100">
+                                          <a:rPr lang="zh-CN" sz="800" i="1" kern="100">
                                             <a:effectLst/>
+                                            <a:latin typeface="Cambria Math" panose="02040503050406030204" pitchFamily="18" charset="0"/>
                                           </a:rPr>
                                         </m:ctrlPr>
                                       </m:dPr>
@@ -11130,8 +11288,9 @@
                                         <m:sSub>
                                           <m:sSubPr>
                                             <m:ctrlPr>
-                                              <a:rPr lang="zh-CN" sz="800" kern="100">
+                                              <a:rPr lang="zh-CN" sz="800" i="1" kern="100">
                                                 <a:effectLst/>
+                                                <a:latin typeface="Cambria Math" panose="02040503050406030204" pitchFamily="18" charset="0"/>
                                               </a:rPr>
                                             </m:ctrlPr>
                                           </m:sSubPr>
@@ -11139,6 +11298,7 @@
                                             <m:r>
                                               <a:rPr lang="en-US" sz="800" kern="100">
                                                 <a:effectLst/>
+                                                <a:latin typeface="Cambria Math" panose="02040503050406030204" pitchFamily="18" charset="0"/>
                                               </a:rPr>
                                               <m:t>𝑌</m:t>
                                             </m:r>
@@ -11147,6 +11307,7 @@
                                             <m:r>
                                               <a:rPr lang="en-US" sz="800" kern="100">
                                                 <a:effectLst/>
+                                                <a:latin typeface="Cambria Math" panose="02040503050406030204" pitchFamily="18" charset="0"/>
                                               </a:rPr>
                                               <m:t>1</m:t>
                                             </m:r>
@@ -11155,14 +11316,16 @@
                                         <m:r>
                                           <a:rPr lang="en-US" sz="800" kern="100">
                                             <a:effectLst/>
+                                            <a:latin typeface="Cambria Math" panose="02040503050406030204" pitchFamily="18" charset="0"/>
                                           </a:rPr>
                                           <m:t>&gt;</m:t>
                                         </m:r>
                                         <m:sSub>
                                           <m:sSubPr>
                                             <m:ctrlPr>
-                                              <a:rPr lang="zh-CN" sz="800" kern="100">
+                                              <a:rPr lang="zh-CN" sz="800" i="1" kern="100">
                                                 <a:effectLst/>
+                                                <a:latin typeface="Cambria Math" panose="02040503050406030204" pitchFamily="18" charset="0"/>
                                               </a:rPr>
                                             </m:ctrlPr>
                                           </m:sSubPr>
@@ -11170,6 +11333,7 @@
                                             <m:r>
                                               <a:rPr lang="en-US" sz="800" kern="100">
                                                 <a:effectLst/>
+                                                <a:latin typeface="Cambria Math" panose="02040503050406030204" pitchFamily="18" charset="0"/>
                                               </a:rPr>
                                               <m:t>𝑌</m:t>
                                             </m:r>
@@ -11178,6 +11342,7 @@
                                             <m:r>
                                               <a:rPr lang="en-US" sz="800" kern="100">
                                                 <a:effectLst/>
+                                                <a:latin typeface="Cambria Math" panose="02040503050406030204" pitchFamily="18" charset="0"/>
                                               </a:rPr>
                                               <m:t>2</m:t>
                                             </m:r>
@@ -11188,6 +11353,7 @@
                                     <m:r>
                                       <a:rPr lang="en-US" sz="800" kern="100">
                                         <a:effectLst/>
+                                        <a:latin typeface="Cambria Math" panose="02040503050406030204" pitchFamily="18" charset="0"/>
                                       </a:rPr>
                                       <m:t> </m:t>
                                     </m:r>
@@ -11217,7 +11383,7 @@
             </a:graphic>
           </p:graphicFrame>
         </mc:Choice>
-        <mc:Fallback>
+        <mc:Fallback xmlns="">
           <p:graphicFrame>
             <p:nvGraphicFramePr>
               <p:cNvPr id="2" name="Table 1">
@@ -15866,8 +16032,8 @@
           </p:sp>
         </mc:Fallback>
       </mc:AlternateContent>
-      <mc:AlternateContent xmlns:mc="http://schemas.openxmlformats.org/markup-compatibility/2006">
-        <mc:Choice xmlns:a14="http://schemas.microsoft.com/office/drawing/2010/main" Requires="a14">
+      <mc:AlternateContent xmlns:mc="http://schemas.openxmlformats.org/markup-compatibility/2006" xmlns:a14="http://schemas.microsoft.com/office/drawing/2010/main">
+        <mc:Choice Requires="a14">
           <p:graphicFrame>
             <p:nvGraphicFramePr>
               <p:cNvPr id="8" name="Table 7">
@@ -17436,7 +17602,7 @@
                                           <a:schemeClr val="dk1"/>
                                         </a:solidFill>
                                         <a:effectLst/>
-                                        <a:latin typeface="+mn-lt"/>
+                                        <a:latin typeface="Cambria Math" panose="02040503050406030204" pitchFamily="18" charset="0"/>
                                         <a:ea typeface="+mn-ea"/>
                                         <a:cs typeface="+mn-cs"/>
                                       </a:rPr>
@@ -17451,7 +17617,7 @@
                                               <a:schemeClr val="dk1"/>
                                             </a:solidFill>
                                             <a:effectLst/>
-                                            <a:latin typeface="+mn-lt"/>
+                                            <a:latin typeface="Cambria Math" panose="02040503050406030204" pitchFamily="18" charset="0"/>
                                             <a:ea typeface="+mn-ea"/>
                                             <a:cs typeface="+mn-cs"/>
                                           </a:rPr>
@@ -17464,7 +17630,7 @@
                                               <a:schemeClr val="dk1"/>
                                             </a:solidFill>
                                             <a:effectLst/>
-                                            <a:latin typeface="+mn-lt"/>
+                                            <a:latin typeface="Cambria Math" panose="02040503050406030204" pitchFamily="18" charset="0"/>
                                             <a:ea typeface="+mn-ea"/>
                                             <a:cs typeface="+mn-cs"/>
                                           </a:rPr>
@@ -17478,7 +17644,7 @@
                                               <a:schemeClr val="dk1"/>
                                             </a:solidFill>
                                             <a:effectLst/>
-                                            <a:latin typeface="+mn-lt"/>
+                                            <a:latin typeface="Cambria Math" panose="02040503050406030204" pitchFamily="18" charset="0"/>
                                             <a:ea typeface="+mn-ea"/>
                                             <a:cs typeface="+mn-cs"/>
                                           </a:rPr>
@@ -17492,7 +17658,7 @@
                                           <a:schemeClr val="dk1"/>
                                         </a:solidFill>
                                         <a:effectLst/>
-                                        <a:latin typeface="+mn-lt"/>
+                                        <a:latin typeface="Cambria Math" panose="02040503050406030204" pitchFamily="18" charset="0"/>
                                         <a:ea typeface="+mn-ea"/>
                                         <a:cs typeface="+mn-cs"/>
                                       </a:rPr>
@@ -17506,7 +17672,7 @@
                                               <a:schemeClr val="dk1"/>
                                             </a:solidFill>
                                             <a:effectLst/>
-                                            <a:latin typeface="+mn-lt"/>
+                                            <a:latin typeface="Cambria Math" panose="02040503050406030204" pitchFamily="18" charset="0"/>
                                             <a:ea typeface="+mn-ea"/>
                                             <a:cs typeface="+mn-cs"/>
                                           </a:rPr>
@@ -17519,7 +17685,7 @@
                                               <a:schemeClr val="dk1"/>
                                             </a:solidFill>
                                             <a:effectLst/>
-                                            <a:latin typeface="+mn-lt"/>
+                                            <a:latin typeface="Cambria Math" panose="02040503050406030204" pitchFamily="18" charset="0"/>
                                             <a:ea typeface="+mn-ea"/>
                                             <a:cs typeface="+mn-cs"/>
                                           </a:rPr>
@@ -17534,7 +17700,7 @@
                                               <a:schemeClr val="dk1"/>
                                             </a:solidFill>
                                             <a:effectLst/>
-                                            <a:latin typeface="+mn-lt"/>
+                                            <a:latin typeface="Cambria Math" panose="02040503050406030204" pitchFamily="18" charset="0"/>
                                             <a:ea typeface="+mn-ea"/>
                                             <a:cs typeface="+mn-cs"/>
                                           </a:rPr>
@@ -17550,7 +17716,7 @@
                                               <a:schemeClr val="dk1"/>
                                             </a:solidFill>
                                             <a:effectLst/>
-                                            <a:latin typeface="+mn-lt"/>
+                                            <a:latin typeface="Cambria Math" panose="02040503050406030204" pitchFamily="18" charset="0"/>
                                             <a:ea typeface="+mn-ea"/>
                                             <a:cs typeface="+mn-cs"/>
                                           </a:rPr>
@@ -17565,7 +17731,7 @@
                                                   <a:schemeClr val="dk1"/>
                                                 </a:solidFill>
                                                 <a:effectLst/>
-                                                <a:latin typeface="+mn-lt"/>
+                                                <a:latin typeface="Cambria Math" panose="02040503050406030204" pitchFamily="18" charset="0"/>
                                                 <a:ea typeface="+mn-ea"/>
                                                 <a:cs typeface="+mn-cs"/>
                                               </a:rPr>
@@ -17578,7 +17744,7 @@
                                                   <a:schemeClr val="dk1"/>
                                                 </a:solidFill>
                                                 <a:effectLst/>
-                                                <a:latin typeface="+mn-lt"/>
+                                                <a:latin typeface="Cambria Math" panose="02040503050406030204" pitchFamily="18" charset="0"/>
                                                 <a:ea typeface="+mn-ea"/>
                                                 <a:cs typeface="+mn-cs"/>
                                               </a:rPr>
@@ -17592,7 +17758,7 @@
                                                   <a:schemeClr val="dk1"/>
                                                 </a:solidFill>
                                                 <a:effectLst/>
-                                                <a:latin typeface="+mn-lt"/>
+                                                <a:latin typeface="Cambria Math" panose="02040503050406030204" pitchFamily="18" charset="0"/>
                                                 <a:ea typeface="+mn-ea"/>
                                                 <a:cs typeface="+mn-cs"/>
                                               </a:rPr>
@@ -17606,7 +17772,7 @@
                                               <a:schemeClr val="dk1"/>
                                             </a:solidFill>
                                             <a:effectLst/>
-                                            <a:latin typeface="+mn-lt"/>
+                                            <a:latin typeface="Cambria Math" panose="02040503050406030204" pitchFamily="18" charset="0"/>
                                             <a:ea typeface="+mn-ea"/>
                                             <a:cs typeface="+mn-cs"/>
                                           </a:rPr>
@@ -17620,7 +17786,7 @@
                                                   <a:schemeClr val="dk1"/>
                                                 </a:solidFill>
                                                 <a:effectLst/>
-                                                <a:latin typeface="+mn-lt"/>
+                                                <a:latin typeface="Cambria Math" panose="02040503050406030204" pitchFamily="18" charset="0"/>
                                                 <a:ea typeface="+mn-ea"/>
                                                 <a:cs typeface="+mn-cs"/>
                                               </a:rPr>
@@ -17633,7 +17799,7 @@
                                                   <a:schemeClr val="dk1"/>
                                                 </a:solidFill>
                                                 <a:effectLst/>
-                                                <a:latin typeface="+mn-lt"/>
+                                                <a:latin typeface="Cambria Math" panose="02040503050406030204" pitchFamily="18" charset="0"/>
                                                 <a:ea typeface="+mn-ea"/>
                                                 <a:cs typeface="+mn-cs"/>
                                               </a:rPr>
@@ -17647,7 +17813,7 @@
                                                   <a:schemeClr val="dk1"/>
                                                 </a:solidFill>
                                                 <a:effectLst/>
-                                                <a:latin typeface="+mn-lt"/>
+                                                <a:latin typeface="Cambria Math" panose="02040503050406030204" pitchFamily="18" charset="0"/>
                                                 <a:ea typeface="+mn-ea"/>
                                                 <a:cs typeface="+mn-cs"/>
                                               </a:rPr>
@@ -17663,7 +17829,7 @@
                                               <a:schemeClr val="dk1"/>
                                             </a:solidFill>
                                             <a:effectLst/>
-                                            <a:latin typeface="+mn-lt"/>
+                                            <a:latin typeface="Cambria Math" panose="02040503050406030204" pitchFamily="18" charset="0"/>
                                             <a:ea typeface="+mn-ea"/>
                                             <a:cs typeface="+mn-cs"/>
                                           </a:rPr>
@@ -17677,7 +17843,7 @@
                                           <a:schemeClr val="dk1"/>
                                         </a:solidFill>
                                         <a:effectLst/>
-                                        <a:latin typeface="+mn-lt"/>
+                                        <a:latin typeface="Cambria Math" panose="02040503050406030204" pitchFamily="18" charset="0"/>
                                         <a:ea typeface="+mn-ea"/>
                                         <a:cs typeface="+mn-cs"/>
                                       </a:rPr>
@@ -17693,7 +17859,7 @@
                                               <a:schemeClr val="dk1"/>
                                             </a:solidFill>
                                             <a:effectLst/>
-                                            <a:latin typeface="+mn-lt"/>
+                                            <a:latin typeface="Cambria Math" panose="02040503050406030204" pitchFamily="18" charset="0"/>
                                             <a:ea typeface="+mn-ea"/>
                                             <a:cs typeface="+mn-cs"/>
                                           </a:rPr>
@@ -17708,7 +17874,7 @@
                                                   <a:schemeClr val="dk1"/>
                                                 </a:solidFill>
                                                 <a:effectLst/>
-                                                <a:latin typeface="+mn-lt"/>
+                                                <a:latin typeface="Cambria Math" panose="02040503050406030204" pitchFamily="18" charset="0"/>
                                                 <a:ea typeface="+mn-ea"/>
                                                 <a:cs typeface="+mn-cs"/>
                                               </a:rPr>
@@ -17721,7 +17887,7 @@
                                                   <a:schemeClr val="dk1"/>
                                                 </a:solidFill>
                                                 <a:effectLst/>
-                                                <a:latin typeface="+mn-lt"/>
+                                                <a:latin typeface="Cambria Math" panose="02040503050406030204" pitchFamily="18" charset="0"/>
                                                 <a:ea typeface="+mn-ea"/>
                                                 <a:cs typeface="+mn-cs"/>
                                               </a:rPr>
@@ -17735,7 +17901,7 @@
                                                   <a:schemeClr val="dk1"/>
                                                 </a:solidFill>
                                                 <a:effectLst/>
-                                                <a:latin typeface="+mn-lt"/>
+                                                <a:latin typeface="Cambria Math" panose="02040503050406030204" pitchFamily="18" charset="0"/>
                                                 <a:ea typeface="+mn-ea"/>
                                                 <a:cs typeface="+mn-cs"/>
                                               </a:rPr>
@@ -17749,7 +17915,7 @@
                                               <a:schemeClr val="dk1"/>
                                             </a:solidFill>
                                             <a:effectLst/>
-                                            <a:latin typeface="+mn-lt"/>
+                                            <a:latin typeface="Cambria Math" panose="02040503050406030204" pitchFamily="18" charset="0"/>
                                             <a:ea typeface="+mn-ea"/>
                                             <a:cs typeface="+mn-cs"/>
                                           </a:rPr>
@@ -17763,7 +17929,7 @@
                                                   <a:schemeClr val="dk1"/>
                                                 </a:solidFill>
                                                 <a:effectLst/>
-                                                <a:latin typeface="+mn-lt"/>
+                                                <a:latin typeface="Cambria Math" panose="02040503050406030204" pitchFamily="18" charset="0"/>
                                                 <a:ea typeface="+mn-ea"/>
                                                 <a:cs typeface="+mn-cs"/>
                                               </a:rPr>
@@ -17776,7 +17942,7 @@
                                                   <a:schemeClr val="dk1"/>
                                                 </a:solidFill>
                                                 <a:effectLst/>
-                                                <a:latin typeface="+mn-lt"/>
+                                                <a:latin typeface="Cambria Math" panose="02040503050406030204" pitchFamily="18" charset="0"/>
                                                 <a:ea typeface="+mn-ea"/>
                                                 <a:cs typeface="+mn-cs"/>
                                               </a:rPr>
@@ -17790,7 +17956,7 @@
                                                   <a:schemeClr val="dk1"/>
                                                 </a:solidFill>
                                                 <a:effectLst/>
-                                                <a:latin typeface="+mn-lt"/>
+                                                <a:latin typeface="Cambria Math" panose="02040503050406030204" pitchFamily="18" charset="0"/>
                                                 <a:ea typeface="+mn-ea"/>
                                                 <a:cs typeface="+mn-cs"/>
                                               </a:rPr>
@@ -17806,7 +17972,7 @@
                                           <a:schemeClr val="dk1"/>
                                         </a:solidFill>
                                         <a:effectLst/>
-                                        <a:latin typeface="+mn-lt"/>
+                                        <a:latin typeface="Cambria Math" panose="02040503050406030204" pitchFamily="18" charset="0"/>
                                         <a:ea typeface="+mn-ea"/>
                                         <a:cs typeface="+mn-cs"/>
                                       </a:rPr>
@@ -17820,7 +17986,7 @@
                                               <a:schemeClr val="dk1"/>
                                             </a:solidFill>
                                             <a:effectLst/>
-                                            <a:latin typeface="+mn-lt"/>
+                                            <a:latin typeface="Cambria Math" panose="02040503050406030204" pitchFamily="18" charset="0"/>
                                             <a:ea typeface="+mn-ea"/>
                                             <a:cs typeface="+mn-cs"/>
                                           </a:rPr>
@@ -17833,7 +17999,7 @@
                                               <a:schemeClr val="dk1"/>
                                             </a:solidFill>
                                             <a:effectLst/>
-                                            <a:latin typeface="+mn-lt"/>
+                                            <a:latin typeface="Cambria Math" panose="02040503050406030204" pitchFamily="18" charset="0"/>
                                             <a:ea typeface="+mn-ea"/>
                                             <a:cs typeface="+mn-cs"/>
                                           </a:rPr>
@@ -17847,7 +18013,7 @@
                                               <a:schemeClr val="dk1"/>
                                             </a:solidFill>
                                             <a:effectLst/>
-                                            <a:latin typeface="+mn-lt"/>
+                                            <a:latin typeface="Cambria Math" panose="02040503050406030204" pitchFamily="18" charset="0"/>
                                             <a:ea typeface="+mn-ea"/>
                                             <a:cs typeface="+mn-cs"/>
                                           </a:rPr>
@@ -17861,7 +18027,7 @@
                                           <a:schemeClr val="dk1"/>
                                         </a:solidFill>
                                         <a:effectLst/>
-                                        <a:latin typeface="+mn-lt"/>
+                                        <a:latin typeface="Cambria Math" panose="02040503050406030204" pitchFamily="18" charset="0"/>
                                         <a:ea typeface="+mn-ea"/>
                                         <a:cs typeface="+mn-cs"/>
                                       </a:rPr>
@@ -17875,7 +18041,7 @@
                                               <a:schemeClr val="dk1"/>
                                             </a:solidFill>
                                             <a:effectLst/>
-                                            <a:latin typeface="+mn-lt"/>
+                                            <a:latin typeface="Cambria Math" panose="02040503050406030204" pitchFamily="18" charset="0"/>
                                             <a:ea typeface="+mn-ea"/>
                                             <a:cs typeface="+mn-cs"/>
                                           </a:rPr>
@@ -17888,7 +18054,7 @@
                                               <a:schemeClr val="dk1"/>
                                             </a:solidFill>
                                             <a:effectLst/>
-                                            <a:latin typeface="+mn-lt"/>
+                                            <a:latin typeface="Cambria Math" panose="02040503050406030204" pitchFamily="18" charset="0"/>
                                             <a:ea typeface="+mn-ea"/>
                                             <a:cs typeface="+mn-cs"/>
                                           </a:rPr>
@@ -17903,7 +18069,7 @@
                                               <a:schemeClr val="dk1"/>
                                             </a:solidFill>
                                             <a:effectLst/>
-                                            <a:latin typeface="+mn-lt"/>
+                                            <a:latin typeface="Cambria Math" panose="02040503050406030204" pitchFamily="18" charset="0"/>
                                             <a:ea typeface="+mn-ea"/>
                                             <a:cs typeface="+mn-cs"/>
                                           </a:rPr>
@@ -17919,7 +18085,7 @@
                                               <a:schemeClr val="dk1"/>
                                             </a:solidFill>
                                             <a:effectLst/>
-                                            <a:latin typeface="+mn-lt"/>
+                                            <a:latin typeface="Cambria Math" panose="02040503050406030204" pitchFamily="18" charset="0"/>
                                             <a:ea typeface="+mn-ea"/>
                                             <a:cs typeface="+mn-cs"/>
                                           </a:rPr>
@@ -17934,7 +18100,7 @@
                                                   <a:schemeClr val="dk1"/>
                                                 </a:solidFill>
                                                 <a:effectLst/>
-                                                <a:latin typeface="+mn-lt"/>
+                                                <a:latin typeface="Cambria Math" panose="02040503050406030204" pitchFamily="18" charset="0"/>
                                                 <a:ea typeface="+mn-ea"/>
                                                 <a:cs typeface="+mn-cs"/>
                                               </a:rPr>
@@ -17947,7 +18113,7 @@
                                                   <a:schemeClr val="dk1"/>
                                                 </a:solidFill>
                                                 <a:effectLst/>
-                                                <a:latin typeface="+mn-lt"/>
+                                                <a:latin typeface="Cambria Math" panose="02040503050406030204" pitchFamily="18" charset="0"/>
                                                 <a:ea typeface="+mn-ea"/>
                                                 <a:cs typeface="+mn-cs"/>
                                               </a:rPr>
@@ -17961,7 +18127,7 @@
                                                   <a:schemeClr val="dk1"/>
                                                 </a:solidFill>
                                                 <a:effectLst/>
-                                                <a:latin typeface="+mn-lt"/>
+                                                <a:latin typeface="Cambria Math" panose="02040503050406030204" pitchFamily="18" charset="0"/>
                                                 <a:ea typeface="+mn-ea"/>
                                                 <a:cs typeface="+mn-cs"/>
                                               </a:rPr>
@@ -17975,7 +18141,7 @@
                                               <a:schemeClr val="dk1"/>
                                             </a:solidFill>
                                             <a:effectLst/>
-                                            <a:latin typeface="+mn-lt"/>
+                                            <a:latin typeface="Cambria Math" panose="02040503050406030204" pitchFamily="18" charset="0"/>
                                             <a:ea typeface="+mn-ea"/>
                                             <a:cs typeface="+mn-cs"/>
                                           </a:rPr>
@@ -17989,7 +18155,7 @@
                                                   <a:schemeClr val="dk1"/>
                                                 </a:solidFill>
                                                 <a:effectLst/>
-                                                <a:latin typeface="+mn-lt"/>
+                                                <a:latin typeface="Cambria Math" panose="02040503050406030204" pitchFamily="18" charset="0"/>
                                                 <a:ea typeface="+mn-ea"/>
                                                 <a:cs typeface="+mn-cs"/>
                                               </a:rPr>
@@ -18002,7 +18168,7 @@
                                                   <a:schemeClr val="dk1"/>
                                                 </a:solidFill>
                                                 <a:effectLst/>
-                                                <a:latin typeface="+mn-lt"/>
+                                                <a:latin typeface="Cambria Math" panose="02040503050406030204" pitchFamily="18" charset="0"/>
                                                 <a:ea typeface="+mn-ea"/>
                                                 <a:cs typeface="+mn-cs"/>
                                               </a:rPr>
@@ -18016,7 +18182,7 @@
                                                   <a:schemeClr val="dk1"/>
                                                 </a:solidFill>
                                                 <a:effectLst/>
-                                                <a:latin typeface="+mn-lt"/>
+                                                <a:latin typeface="Cambria Math" panose="02040503050406030204" pitchFamily="18" charset="0"/>
                                                 <a:ea typeface="+mn-ea"/>
                                                 <a:cs typeface="+mn-cs"/>
                                               </a:rPr>
@@ -18032,7 +18198,7 @@
                                               <a:schemeClr val="dk1"/>
                                             </a:solidFill>
                                             <a:effectLst/>
-                                            <a:latin typeface="+mn-lt"/>
+                                            <a:latin typeface="Cambria Math" panose="02040503050406030204" pitchFamily="18" charset="0"/>
                                             <a:ea typeface="+mn-ea"/>
                                             <a:cs typeface="+mn-cs"/>
                                           </a:rPr>
@@ -18046,7 +18212,7 @@
                                           <a:schemeClr val="dk1"/>
                                         </a:solidFill>
                                         <a:effectLst/>
-                                        <a:latin typeface="+mn-lt"/>
+                                        <a:latin typeface="Cambria Math" panose="02040503050406030204" pitchFamily="18" charset="0"/>
                                         <a:ea typeface="+mn-ea"/>
                                         <a:cs typeface="+mn-cs"/>
                                       </a:rPr>
@@ -18062,7 +18228,7 @@
                                               <a:schemeClr val="dk1"/>
                                             </a:solidFill>
                                             <a:effectLst/>
-                                            <a:latin typeface="+mn-lt"/>
+                                            <a:latin typeface="Cambria Math" panose="02040503050406030204" pitchFamily="18" charset="0"/>
                                             <a:ea typeface="+mn-ea"/>
                                             <a:cs typeface="+mn-cs"/>
                                           </a:rPr>
@@ -18077,7 +18243,7 @@
                                                   <a:schemeClr val="dk1"/>
                                                 </a:solidFill>
                                                 <a:effectLst/>
-                                                <a:latin typeface="+mn-lt"/>
+                                                <a:latin typeface="Cambria Math" panose="02040503050406030204" pitchFamily="18" charset="0"/>
                                                 <a:ea typeface="+mn-ea"/>
                                                 <a:cs typeface="+mn-cs"/>
                                               </a:rPr>
@@ -18090,7 +18256,7 @@
                                                   <a:schemeClr val="dk1"/>
                                                 </a:solidFill>
                                                 <a:effectLst/>
-                                                <a:latin typeface="+mn-lt"/>
+                                                <a:latin typeface="Cambria Math" panose="02040503050406030204" pitchFamily="18" charset="0"/>
                                                 <a:ea typeface="+mn-ea"/>
                                                 <a:cs typeface="+mn-cs"/>
                                               </a:rPr>
@@ -18104,7 +18270,7 @@
                                                   <a:schemeClr val="dk1"/>
                                                 </a:solidFill>
                                                 <a:effectLst/>
-                                                <a:latin typeface="+mn-lt"/>
+                                                <a:latin typeface="Cambria Math" panose="02040503050406030204" pitchFamily="18" charset="0"/>
                                                 <a:ea typeface="+mn-ea"/>
                                                 <a:cs typeface="+mn-cs"/>
                                               </a:rPr>
@@ -18118,7 +18284,7 @@
                                               <a:schemeClr val="dk1"/>
                                             </a:solidFill>
                                             <a:effectLst/>
-                                            <a:latin typeface="+mn-lt"/>
+                                            <a:latin typeface="Cambria Math" panose="02040503050406030204" pitchFamily="18" charset="0"/>
                                             <a:ea typeface="+mn-ea"/>
                                             <a:cs typeface="+mn-cs"/>
                                           </a:rPr>
@@ -18132,7 +18298,7 @@
                                                   <a:schemeClr val="dk1"/>
                                                 </a:solidFill>
                                                 <a:effectLst/>
-                                                <a:latin typeface="+mn-lt"/>
+                                                <a:latin typeface="Cambria Math" panose="02040503050406030204" pitchFamily="18" charset="0"/>
                                                 <a:ea typeface="+mn-ea"/>
                                                 <a:cs typeface="+mn-cs"/>
                                               </a:rPr>
@@ -18145,7 +18311,7 @@
                                                   <a:schemeClr val="dk1"/>
                                                 </a:solidFill>
                                                 <a:effectLst/>
-                                                <a:latin typeface="+mn-lt"/>
+                                                <a:latin typeface="Cambria Math" panose="02040503050406030204" pitchFamily="18" charset="0"/>
                                                 <a:ea typeface="+mn-ea"/>
                                                 <a:cs typeface="+mn-cs"/>
                                               </a:rPr>
@@ -18159,7 +18325,7 @@
                                                   <a:schemeClr val="dk1"/>
                                                 </a:solidFill>
                                                 <a:effectLst/>
-                                                <a:latin typeface="+mn-lt"/>
+                                                <a:latin typeface="Cambria Math" panose="02040503050406030204" pitchFamily="18" charset="0"/>
                                                 <a:ea typeface="+mn-ea"/>
                                                 <a:cs typeface="+mn-cs"/>
                                               </a:rPr>
@@ -18204,7 +18370,7 @@
                                           <a:schemeClr val="dk1"/>
                                         </a:solidFill>
                                         <a:effectLst/>
-                                        <a:latin typeface="+mn-lt"/>
+                                        <a:latin typeface="Cambria Math" panose="02040503050406030204" pitchFamily="18" charset="0"/>
                                         <a:ea typeface="+mn-ea"/>
                                         <a:cs typeface="+mn-cs"/>
                                       </a:rPr>
@@ -18219,7 +18385,7 @@
                                               <a:schemeClr val="dk1"/>
                                             </a:solidFill>
                                             <a:effectLst/>
-                                            <a:latin typeface="+mn-lt"/>
+                                            <a:latin typeface="Cambria Math" panose="02040503050406030204" pitchFamily="18" charset="0"/>
                                             <a:ea typeface="+mn-ea"/>
                                             <a:cs typeface="+mn-cs"/>
                                           </a:rPr>
@@ -18232,7 +18398,7 @@
                                               <a:schemeClr val="dk1"/>
                                             </a:solidFill>
                                             <a:effectLst/>
-                                            <a:latin typeface="+mn-lt"/>
+                                            <a:latin typeface="Cambria Math" panose="02040503050406030204" pitchFamily="18" charset="0"/>
                                             <a:ea typeface="+mn-ea"/>
                                             <a:cs typeface="+mn-cs"/>
                                           </a:rPr>
@@ -18246,7 +18412,7 @@
                                               <a:schemeClr val="dk1"/>
                                             </a:solidFill>
                                             <a:effectLst/>
-                                            <a:latin typeface="+mn-lt"/>
+                                            <a:latin typeface="Cambria Math" panose="02040503050406030204" pitchFamily="18" charset="0"/>
                                             <a:ea typeface="+mn-ea"/>
                                             <a:cs typeface="+mn-cs"/>
                                           </a:rPr>
@@ -18260,7 +18426,7 @@
                                           <a:schemeClr val="dk1"/>
                                         </a:solidFill>
                                         <a:effectLst/>
-                                        <a:latin typeface="+mn-lt"/>
+                                        <a:latin typeface="Cambria Math" panose="02040503050406030204" pitchFamily="18" charset="0"/>
                                         <a:ea typeface="+mn-ea"/>
                                         <a:cs typeface="+mn-cs"/>
                                       </a:rPr>
@@ -18274,7 +18440,7 @@
                                               <a:schemeClr val="dk1"/>
                                             </a:solidFill>
                                             <a:effectLst/>
-                                            <a:latin typeface="+mn-lt"/>
+                                            <a:latin typeface="Cambria Math" panose="02040503050406030204" pitchFamily="18" charset="0"/>
                                             <a:ea typeface="+mn-ea"/>
                                             <a:cs typeface="+mn-cs"/>
                                           </a:rPr>
@@ -18287,7 +18453,7 @@
                                               <a:schemeClr val="dk1"/>
                                             </a:solidFill>
                                             <a:effectLst/>
-                                            <a:latin typeface="+mn-lt"/>
+                                            <a:latin typeface="Cambria Math" panose="02040503050406030204" pitchFamily="18" charset="0"/>
                                             <a:ea typeface="+mn-ea"/>
                                             <a:cs typeface="+mn-cs"/>
                                           </a:rPr>
@@ -18302,7 +18468,7 @@
                                               <a:schemeClr val="dk1"/>
                                             </a:solidFill>
                                             <a:effectLst/>
-                                            <a:latin typeface="+mn-lt"/>
+                                            <a:latin typeface="Cambria Math" panose="02040503050406030204" pitchFamily="18" charset="0"/>
                                             <a:ea typeface="+mn-ea"/>
                                             <a:cs typeface="+mn-cs"/>
                                           </a:rPr>
@@ -18318,7 +18484,7 @@
                                               <a:schemeClr val="dk1"/>
                                             </a:solidFill>
                                             <a:effectLst/>
-                                            <a:latin typeface="+mn-lt"/>
+                                            <a:latin typeface="Cambria Math" panose="02040503050406030204" pitchFamily="18" charset="0"/>
                                             <a:ea typeface="+mn-ea"/>
                                             <a:cs typeface="+mn-cs"/>
                                           </a:rPr>
@@ -18333,7 +18499,7 @@
                                                   <a:schemeClr val="dk1"/>
                                                 </a:solidFill>
                                                 <a:effectLst/>
-                                                <a:latin typeface="+mn-lt"/>
+                                                <a:latin typeface="Cambria Math" panose="02040503050406030204" pitchFamily="18" charset="0"/>
                                                 <a:ea typeface="+mn-ea"/>
                                                 <a:cs typeface="+mn-cs"/>
                                               </a:rPr>
@@ -18346,7 +18512,7 @@
                                                   <a:schemeClr val="dk1"/>
                                                 </a:solidFill>
                                                 <a:effectLst/>
-                                                <a:latin typeface="+mn-lt"/>
+                                                <a:latin typeface="Cambria Math" panose="02040503050406030204" pitchFamily="18" charset="0"/>
                                                 <a:ea typeface="+mn-ea"/>
                                                 <a:cs typeface="+mn-cs"/>
                                               </a:rPr>
@@ -18360,7 +18526,7 @@
                                                   <a:schemeClr val="dk1"/>
                                                 </a:solidFill>
                                                 <a:effectLst/>
-                                                <a:latin typeface="+mn-lt"/>
+                                                <a:latin typeface="Cambria Math" panose="02040503050406030204" pitchFamily="18" charset="0"/>
                                                 <a:ea typeface="+mn-ea"/>
                                                 <a:cs typeface="+mn-cs"/>
                                               </a:rPr>
@@ -18374,7 +18540,7 @@
                                               <a:schemeClr val="dk1"/>
                                             </a:solidFill>
                                             <a:effectLst/>
-                                            <a:latin typeface="+mn-lt"/>
+                                            <a:latin typeface="Cambria Math" panose="02040503050406030204" pitchFamily="18" charset="0"/>
                                             <a:ea typeface="+mn-ea"/>
                                             <a:cs typeface="+mn-cs"/>
                                           </a:rPr>
@@ -18388,7 +18554,7 @@
                                                   <a:schemeClr val="dk1"/>
                                                 </a:solidFill>
                                                 <a:effectLst/>
-                                                <a:latin typeface="+mn-lt"/>
+                                                <a:latin typeface="Cambria Math" panose="02040503050406030204" pitchFamily="18" charset="0"/>
                                                 <a:ea typeface="+mn-ea"/>
                                                 <a:cs typeface="+mn-cs"/>
                                               </a:rPr>
@@ -18401,7 +18567,7 @@
                                                   <a:schemeClr val="dk1"/>
                                                 </a:solidFill>
                                                 <a:effectLst/>
-                                                <a:latin typeface="+mn-lt"/>
+                                                <a:latin typeface="Cambria Math" panose="02040503050406030204" pitchFamily="18" charset="0"/>
                                                 <a:ea typeface="+mn-ea"/>
                                                 <a:cs typeface="+mn-cs"/>
                                               </a:rPr>
@@ -18415,7 +18581,7 @@
                                                   <a:schemeClr val="dk1"/>
                                                 </a:solidFill>
                                                 <a:effectLst/>
-                                                <a:latin typeface="+mn-lt"/>
+                                                <a:latin typeface="Cambria Math" panose="02040503050406030204" pitchFamily="18" charset="0"/>
                                                 <a:ea typeface="+mn-ea"/>
                                                 <a:cs typeface="+mn-cs"/>
                                               </a:rPr>
@@ -18431,7 +18597,7 @@
                                               <a:schemeClr val="dk1"/>
                                             </a:solidFill>
                                             <a:effectLst/>
-                                            <a:latin typeface="+mn-lt"/>
+                                            <a:latin typeface="Cambria Math" panose="02040503050406030204" pitchFamily="18" charset="0"/>
                                             <a:ea typeface="+mn-ea"/>
                                             <a:cs typeface="+mn-cs"/>
                                           </a:rPr>
@@ -18445,7 +18611,7 @@
                                           <a:schemeClr val="dk1"/>
                                         </a:solidFill>
                                         <a:effectLst/>
-                                        <a:latin typeface="+mn-lt"/>
+                                        <a:latin typeface="Cambria Math" panose="02040503050406030204" pitchFamily="18" charset="0"/>
                                         <a:ea typeface="+mn-ea"/>
                                         <a:cs typeface="+mn-cs"/>
                                       </a:rPr>
@@ -18461,7 +18627,7 @@
                                               <a:schemeClr val="dk1"/>
                                             </a:solidFill>
                                             <a:effectLst/>
-                                            <a:latin typeface="+mn-lt"/>
+                                            <a:latin typeface="Cambria Math" panose="02040503050406030204" pitchFamily="18" charset="0"/>
                                             <a:ea typeface="+mn-ea"/>
                                             <a:cs typeface="+mn-cs"/>
                                           </a:rPr>
@@ -18476,7 +18642,7 @@
                                                   <a:schemeClr val="dk1"/>
                                                 </a:solidFill>
                                                 <a:effectLst/>
-                                                <a:latin typeface="+mn-lt"/>
+                                                <a:latin typeface="Cambria Math" panose="02040503050406030204" pitchFamily="18" charset="0"/>
                                                 <a:ea typeface="+mn-ea"/>
                                                 <a:cs typeface="+mn-cs"/>
                                               </a:rPr>
@@ -18489,7 +18655,7 @@
                                                   <a:schemeClr val="dk1"/>
                                                 </a:solidFill>
                                                 <a:effectLst/>
-                                                <a:latin typeface="+mn-lt"/>
+                                                <a:latin typeface="Cambria Math" panose="02040503050406030204" pitchFamily="18" charset="0"/>
                                                 <a:ea typeface="+mn-ea"/>
                                                 <a:cs typeface="+mn-cs"/>
                                               </a:rPr>
@@ -18503,7 +18669,7 @@
                                                   <a:schemeClr val="dk1"/>
                                                 </a:solidFill>
                                                 <a:effectLst/>
-                                                <a:latin typeface="+mn-lt"/>
+                                                <a:latin typeface="Cambria Math" panose="02040503050406030204" pitchFamily="18" charset="0"/>
                                                 <a:ea typeface="+mn-ea"/>
                                                 <a:cs typeface="+mn-cs"/>
                                               </a:rPr>
@@ -18517,7 +18683,7 @@
                                               <a:schemeClr val="dk1"/>
                                             </a:solidFill>
                                             <a:effectLst/>
-                                            <a:latin typeface="+mn-lt"/>
+                                            <a:latin typeface="Cambria Math" panose="02040503050406030204" pitchFamily="18" charset="0"/>
                                             <a:ea typeface="+mn-ea"/>
                                             <a:cs typeface="+mn-cs"/>
                                           </a:rPr>
@@ -18531,7 +18697,7 @@
                                                   <a:schemeClr val="dk1"/>
                                                 </a:solidFill>
                                                 <a:effectLst/>
-                                                <a:latin typeface="+mn-lt"/>
+                                                <a:latin typeface="Cambria Math" panose="02040503050406030204" pitchFamily="18" charset="0"/>
                                                 <a:ea typeface="+mn-ea"/>
                                                 <a:cs typeface="+mn-cs"/>
                                               </a:rPr>
@@ -18544,7 +18710,7 @@
                                                   <a:schemeClr val="dk1"/>
                                                 </a:solidFill>
                                                 <a:effectLst/>
-                                                <a:latin typeface="+mn-lt"/>
+                                                <a:latin typeface="Cambria Math" panose="02040503050406030204" pitchFamily="18" charset="0"/>
                                                 <a:ea typeface="+mn-ea"/>
                                                 <a:cs typeface="+mn-cs"/>
                                               </a:rPr>
@@ -18558,7 +18724,7 @@
                                                   <a:schemeClr val="dk1"/>
                                                 </a:solidFill>
                                                 <a:effectLst/>
-                                                <a:latin typeface="+mn-lt"/>
+                                                <a:latin typeface="Cambria Math" panose="02040503050406030204" pitchFamily="18" charset="0"/>
                                                 <a:ea typeface="+mn-ea"/>
                                                 <a:cs typeface="+mn-cs"/>
                                               </a:rPr>
@@ -18574,7 +18740,7 @@
                                           <a:schemeClr val="dk1"/>
                                         </a:solidFill>
                                         <a:effectLst/>
-                                        <a:latin typeface="+mn-lt"/>
+                                        <a:latin typeface="Cambria Math" panose="02040503050406030204" pitchFamily="18" charset="0"/>
                                         <a:ea typeface="+mn-ea"/>
                                         <a:cs typeface="+mn-cs"/>
                                       </a:rPr>
@@ -18588,7 +18754,7 @@
                                               <a:schemeClr val="dk1"/>
                                             </a:solidFill>
                                             <a:effectLst/>
-                                            <a:latin typeface="+mn-lt"/>
+                                            <a:latin typeface="Cambria Math" panose="02040503050406030204" pitchFamily="18" charset="0"/>
                                             <a:ea typeface="+mn-ea"/>
                                             <a:cs typeface="+mn-cs"/>
                                           </a:rPr>
@@ -18601,7 +18767,7 @@
                                               <a:schemeClr val="dk1"/>
                                             </a:solidFill>
                                             <a:effectLst/>
-                                            <a:latin typeface="+mn-lt"/>
+                                            <a:latin typeface="Cambria Math" panose="02040503050406030204" pitchFamily="18" charset="0"/>
                                             <a:ea typeface="+mn-ea"/>
                                             <a:cs typeface="+mn-cs"/>
                                           </a:rPr>
@@ -18615,7 +18781,7 @@
                                               <a:schemeClr val="dk1"/>
                                             </a:solidFill>
                                             <a:effectLst/>
-                                            <a:latin typeface="+mn-lt"/>
+                                            <a:latin typeface="Cambria Math" panose="02040503050406030204" pitchFamily="18" charset="0"/>
                                             <a:ea typeface="+mn-ea"/>
                                             <a:cs typeface="+mn-cs"/>
                                           </a:rPr>
@@ -18629,7 +18795,7 @@
                                           <a:schemeClr val="dk1"/>
                                         </a:solidFill>
                                         <a:effectLst/>
-                                        <a:latin typeface="+mn-lt"/>
+                                        <a:latin typeface="Cambria Math" panose="02040503050406030204" pitchFamily="18" charset="0"/>
                                         <a:ea typeface="+mn-ea"/>
                                         <a:cs typeface="+mn-cs"/>
                                       </a:rPr>
@@ -18643,7 +18809,7 @@
                                               <a:schemeClr val="dk1"/>
                                             </a:solidFill>
                                             <a:effectLst/>
-                                            <a:latin typeface="+mn-lt"/>
+                                            <a:latin typeface="Cambria Math" panose="02040503050406030204" pitchFamily="18" charset="0"/>
                                             <a:ea typeface="+mn-ea"/>
                                             <a:cs typeface="+mn-cs"/>
                                           </a:rPr>
@@ -18656,7 +18822,7 @@
                                               <a:schemeClr val="dk1"/>
                                             </a:solidFill>
                                             <a:effectLst/>
-                                            <a:latin typeface="+mn-lt"/>
+                                            <a:latin typeface="Cambria Math" panose="02040503050406030204" pitchFamily="18" charset="0"/>
                                             <a:ea typeface="+mn-ea"/>
                                             <a:cs typeface="+mn-cs"/>
                                           </a:rPr>
@@ -18671,7 +18837,7 @@
                                               <a:schemeClr val="dk1"/>
                                             </a:solidFill>
                                             <a:effectLst/>
-                                            <a:latin typeface="+mn-lt"/>
+                                            <a:latin typeface="Cambria Math" panose="02040503050406030204" pitchFamily="18" charset="0"/>
                                             <a:ea typeface="+mn-ea"/>
                                             <a:cs typeface="+mn-cs"/>
                                           </a:rPr>
@@ -18687,7 +18853,7 @@
                                               <a:schemeClr val="dk1"/>
                                             </a:solidFill>
                                             <a:effectLst/>
-                                            <a:latin typeface="+mn-lt"/>
+                                            <a:latin typeface="Cambria Math" panose="02040503050406030204" pitchFamily="18" charset="0"/>
                                             <a:ea typeface="+mn-ea"/>
                                             <a:cs typeface="+mn-cs"/>
                                           </a:rPr>
@@ -18702,7 +18868,7 @@
                                                   <a:schemeClr val="dk1"/>
                                                 </a:solidFill>
                                                 <a:effectLst/>
-                                                <a:latin typeface="+mn-lt"/>
+                                                <a:latin typeface="Cambria Math" panose="02040503050406030204" pitchFamily="18" charset="0"/>
                                                 <a:ea typeface="+mn-ea"/>
                                                 <a:cs typeface="+mn-cs"/>
                                               </a:rPr>
@@ -18715,7 +18881,7 @@
                                                   <a:schemeClr val="dk1"/>
                                                 </a:solidFill>
                                                 <a:effectLst/>
-                                                <a:latin typeface="+mn-lt"/>
+                                                <a:latin typeface="Cambria Math" panose="02040503050406030204" pitchFamily="18" charset="0"/>
                                                 <a:ea typeface="+mn-ea"/>
                                                 <a:cs typeface="+mn-cs"/>
                                               </a:rPr>
@@ -18729,7 +18895,7 @@
                                                   <a:schemeClr val="dk1"/>
                                                 </a:solidFill>
                                                 <a:effectLst/>
-                                                <a:latin typeface="+mn-lt"/>
+                                                <a:latin typeface="Cambria Math" panose="02040503050406030204" pitchFamily="18" charset="0"/>
                                                 <a:ea typeface="+mn-ea"/>
                                                 <a:cs typeface="+mn-cs"/>
                                               </a:rPr>
@@ -18743,7 +18909,7 @@
                                               <a:schemeClr val="dk1"/>
                                             </a:solidFill>
                                             <a:effectLst/>
-                                            <a:latin typeface="+mn-lt"/>
+                                            <a:latin typeface="Cambria Math" panose="02040503050406030204" pitchFamily="18" charset="0"/>
                                             <a:ea typeface="+mn-ea"/>
                                             <a:cs typeface="+mn-cs"/>
                                           </a:rPr>
@@ -18757,7 +18923,7 @@
                                                   <a:schemeClr val="dk1"/>
                                                 </a:solidFill>
                                                 <a:effectLst/>
-                                                <a:latin typeface="+mn-lt"/>
+                                                <a:latin typeface="Cambria Math" panose="02040503050406030204" pitchFamily="18" charset="0"/>
                                                 <a:ea typeface="+mn-ea"/>
                                                 <a:cs typeface="+mn-cs"/>
                                               </a:rPr>
@@ -18770,7 +18936,7 @@
                                                   <a:schemeClr val="dk1"/>
                                                 </a:solidFill>
                                                 <a:effectLst/>
-                                                <a:latin typeface="+mn-lt"/>
+                                                <a:latin typeface="Cambria Math" panose="02040503050406030204" pitchFamily="18" charset="0"/>
                                                 <a:ea typeface="+mn-ea"/>
                                                 <a:cs typeface="+mn-cs"/>
                                               </a:rPr>
@@ -18784,7 +18950,7 @@
                                                   <a:schemeClr val="dk1"/>
                                                 </a:solidFill>
                                                 <a:effectLst/>
-                                                <a:latin typeface="+mn-lt"/>
+                                                <a:latin typeface="Cambria Math" panose="02040503050406030204" pitchFamily="18" charset="0"/>
                                                 <a:ea typeface="+mn-ea"/>
                                                 <a:cs typeface="+mn-cs"/>
                                               </a:rPr>
@@ -18800,7 +18966,7 @@
                                               <a:schemeClr val="dk1"/>
                                             </a:solidFill>
                                             <a:effectLst/>
-                                            <a:latin typeface="+mn-lt"/>
+                                            <a:latin typeface="Cambria Math" panose="02040503050406030204" pitchFamily="18" charset="0"/>
                                             <a:ea typeface="+mn-ea"/>
                                             <a:cs typeface="+mn-cs"/>
                                           </a:rPr>
@@ -18814,7 +18980,7 @@
                                           <a:schemeClr val="dk1"/>
                                         </a:solidFill>
                                         <a:effectLst/>
-                                        <a:latin typeface="+mn-lt"/>
+                                        <a:latin typeface="Cambria Math" panose="02040503050406030204" pitchFamily="18" charset="0"/>
                                         <a:ea typeface="+mn-ea"/>
                                         <a:cs typeface="+mn-cs"/>
                                       </a:rPr>
@@ -18830,7 +18996,7 @@
                                               <a:schemeClr val="dk1"/>
                                             </a:solidFill>
                                             <a:effectLst/>
-                                            <a:latin typeface="+mn-lt"/>
+                                            <a:latin typeface="Cambria Math" panose="02040503050406030204" pitchFamily="18" charset="0"/>
                                             <a:ea typeface="+mn-ea"/>
                                             <a:cs typeface="+mn-cs"/>
                                           </a:rPr>
@@ -18845,7 +19011,7 @@
                                                   <a:schemeClr val="dk1"/>
                                                 </a:solidFill>
                                                 <a:effectLst/>
-                                                <a:latin typeface="+mn-lt"/>
+                                                <a:latin typeface="Cambria Math" panose="02040503050406030204" pitchFamily="18" charset="0"/>
                                                 <a:ea typeface="+mn-ea"/>
                                                 <a:cs typeface="+mn-cs"/>
                                               </a:rPr>
@@ -18858,7 +19024,7 @@
                                                   <a:schemeClr val="dk1"/>
                                                 </a:solidFill>
                                                 <a:effectLst/>
-                                                <a:latin typeface="+mn-lt"/>
+                                                <a:latin typeface="Cambria Math" panose="02040503050406030204" pitchFamily="18" charset="0"/>
                                                 <a:ea typeface="+mn-ea"/>
                                                 <a:cs typeface="+mn-cs"/>
                                               </a:rPr>
@@ -18872,7 +19038,7 @@
                                                   <a:schemeClr val="dk1"/>
                                                 </a:solidFill>
                                                 <a:effectLst/>
-                                                <a:latin typeface="+mn-lt"/>
+                                                <a:latin typeface="Cambria Math" panose="02040503050406030204" pitchFamily="18" charset="0"/>
                                                 <a:ea typeface="+mn-ea"/>
                                                 <a:cs typeface="+mn-cs"/>
                                               </a:rPr>
@@ -18886,7 +19052,7 @@
                                               <a:schemeClr val="dk1"/>
                                             </a:solidFill>
                                             <a:effectLst/>
-                                            <a:latin typeface="+mn-lt"/>
+                                            <a:latin typeface="Cambria Math" panose="02040503050406030204" pitchFamily="18" charset="0"/>
                                             <a:ea typeface="+mn-ea"/>
                                             <a:cs typeface="+mn-cs"/>
                                           </a:rPr>
@@ -18900,7 +19066,7 @@
                                                   <a:schemeClr val="dk1"/>
                                                 </a:solidFill>
                                                 <a:effectLst/>
-                                                <a:latin typeface="+mn-lt"/>
+                                                <a:latin typeface="Cambria Math" panose="02040503050406030204" pitchFamily="18" charset="0"/>
                                                 <a:ea typeface="+mn-ea"/>
                                                 <a:cs typeface="+mn-cs"/>
                                               </a:rPr>
@@ -18913,7 +19079,7 @@
                                                   <a:schemeClr val="dk1"/>
                                                 </a:solidFill>
                                                 <a:effectLst/>
-                                                <a:latin typeface="+mn-lt"/>
+                                                <a:latin typeface="Cambria Math" panose="02040503050406030204" pitchFamily="18" charset="0"/>
                                                 <a:ea typeface="+mn-ea"/>
                                                 <a:cs typeface="+mn-cs"/>
                                               </a:rPr>
@@ -18927,7 +19093,7 @@
                                                   <a:schemeClr val="dk1"/>
                                                 </a:solidFill>
                                                 <a:effectLst/>
-                                                <a:latin typeface="+mn-lt"/>
+                                                <a:latin typeface="Cambria Math" panose="02040503050406030204" pitchFamily="18" charset="0"/>
                                                 <a:ea typeface="+mn-ea"/>
                                                 <a:cs typeface="+mn-cs"/>
                                               </a:rPr>
@@ -18963,7 +19129,7 @@
             </a:graphic>
           </p:graphicFrame>
         </mc:Choice>
-        <mc:Fallback>
+        <mc:Fallback xmlns="">
           <p:graphicFrame>
             <p:nvGraphicFramePr>
               <p:cNvPr id="8" name="Table 7">
